--- a/slides/Day2_Claude_Code_Fundamentals.pptx
+++ b/slides/Day2_Claude_Code_Fundamentals.pptx
@@ -17687,6 +17687,263 @@
           </a:p>
         </p:txBody>
       </p:sp>
+      <p:sp>
+        <p:nvSpPr>
+          <p:cNvPr id="4" name="TextBox 3"/>
+          <p:cNvSpPr txBox="1"/>
+          <p:nvPr/>
+        </p:nvSpPr>
+        <p:spPr>
+          <a:xfrm>
+            <a:off x="457200" y="1463040"/>
+            <a:ext cx="11277295" cy="4572000"/>
+          </a:xfrm>
+          <a:prstGeom prst="rect">
+            <a:avLst/>
+          </a:prstGeom>
+          <a:noFill/>
+        </p:spPr>
+        <p:txBody>
+          <a:bodyPr wrap="square">
+            <a:spAutoFit/>
+          </a:bodyPr>
+          <a:lstStyle/>
+          <a:p>
+            <a:pPr>
+              <a:spcBef>
+                <a:spcPts val="800"/>
+              </a:spcBef>
+              <a:spcAft>
+                <a:spcPts val="800"/>
+              </a:spcAft>
+              <a:defRPr sz="2200">
+                <a:solidFill>
+                  <a:srgbClr val="FFFFFF"/>
+                </a:solidFill>
+              </a:defRPr>
+            </a:pPr>
+            <a:r>
+              <a:t>  Required</a:t>
+            </a:r>
+          </a:p>
+          <a:p>
+            <a:pPr>
+              <a:spcBef>
+                <a:spcPts val="800"/>
+              </a:spcBef>
+              <a:spcAft>
+                <a:spcPts val="800"/>
+              </a:spcAft>
+              <a:defRPr sz="2200">
+                <a:solidFill>
+                  <a:srgbClr val="FFFFFF"/>
+                </a:solidFill>
+              </a:defRPr>
+            </a:pPr>
+            <a:r>
+              <a:t>      Node.js 18.0 or higher (check: node --version)</a:t>
+            </a:r>
+          </a:p>
+          <a:p>
+            <a:pPr>
+              <a:spcBef>
+                <a:spcPts val="800"/>
+              </a:spcBef>
+              <a:spcAft>
+                <a:spcPts val="800"/>
+              </a:spcAft>
+              <a:defRPr sz="2200">
+                <a:solidFill>
+                  <a:srgbClr val="FFFFFF"/>
+                </a:solidFill>
+              </a:defRPr>
+            </a:pPr>
+            <a:r>
+              <a:t>      Git 2.20 or higher (check: git --version)</a:t>
+            </a:r>
+          </a:p>
+          <a:p>
+            <a:pPr>
+              <a:spcBef>
+                <a:spcPts val="800"/>
+              </a:spcBef>
+              <a:spcAft>
+                <a:spcPts val="800"/>
+              </a:spcAft>
+              <a:defRPr sz="2200">
+                <a:solidFill>
+                  <a:srgbClr val="FFFFFF"/>
+                </a:solidFill>
+              </a:defRPr>
+            </a:pPr>
+            <a:r>
+              <a:t>      Active internet connection for API calls</a:t>
+            </a:r>
+          </a:p>
+          <a:p>
+            <a:pPr>
+              <a:spcBef>
+                <a:spcPts val="800"/>
+              </a:spcBef>
+              <a:spcAft>
+                <a:spcPts val="800"/>
+              </a:spcAft>
+              <a:defRPr sz="2200">
+                <a:solidFill>
+                  <a:srgbClr val="FFFFFF"/>
+                </a:solidFill>
+              </a:defRPr>
+            </a:pPr>
+            <a:r>
+              <a:t>      Terminal/command line access</a:t>
+            </a:r>
+          </a:p>
+          <a:p>
+            <a:pPr>
+              <a:spcBef>
+                <a:spcPts val="800"/>
+              </a:spcBef>
+              <a:spcAft>
+                <a:spcPts val="800"/>
+              </a:spcAft>
+              <a:defRPr sz="2200">
+                <a:solidFill>
+                  <a:srgbClr val="FFFFFF"/>
+                </a:solidFill>
+              </a:defRPr>
+            </a:pPr>
+            <a:r>
+              <a:t>  Supported Platforms</a:t>
+            </a:r>
+          </a:p>
+          <a:p>
+            <a:pPr>
+              <a:spcBef>
+                <a:spcPts val="800"/>
+              </a:spcBef>
+              <a:spcAft>
+                <a:spcPts val="800"/>
+              </a:spcAft>
+              <a:defRPr sz="2200">
+                <a:solidFill>
+                  <a:srgbClr val="FFFFFF"/>
+                </a:solidFill>
+              </a:defRPr>
+            </a:pPr>
+            <a:r>
+              <a:t>      macOS 10.15+ (native)</a:t>
+            </a:r>
+          </a:p>
+          <a:p>
+            <a:pPr>
+              <a:spcBef>
+                <a:spcPts val="800"/>
+              </a:spcBef>
+              <a:spcAft>
+                <a:spcPts val="800"/>
+              </a:spcAft>
+              <a:defRPr sz="2200">
+                <a:solidFill>
+                  <a:srgbClr val="FFFFFF"/>
+                </a:solidFill>
+              </a:defRPr>
+            </a:pPr>
+            <a:r>
+              <a:t>      Linux (Ubuntu 20.04+, Debian, Fedora)</a:t>
+            </a:r>
+          </a:p>
+          <a:p>
+            <a:pPr>
+              <a:spcBef>
+                <a:spcPts val="800"/>
+              </a:spcBef>
+              <a:spcAft>
+                <a:spcPts val="800"/>
+              </a:spcAft>
+              <a:defRPr sz="2200">
+                <a:solidFill>
+                  <a:srgbClr val="FFFFFF"/>
+                </a:solidFill>
+              </a:defRPr>
+            </a:pPr>
+            <a:r>
+              <a:t>      Windows 10/11 via WSL2 (Windows Subsystem for Linux)</a:t>
+            </a:r>
+          </a:p>
+          <a:p>
+            <a:pPr>
+              <a:spcBef>
+                <a:spcPts val="800"/>
+              </a:spcBef>
+              <a:spcAft>
+                <a:spcPts val="800"/>
+              </a:spcAft>
+              <a:defRPr sz="2200">
+                <a:solidFill>
+                  <a:srgbClr val="FFFFFF"/>
+                </a:solidFill>
+              </a:defRPr>
+            </a:pPr>
+            <a:r>
+              <a:t>  Recommended</a:t>
+            </a:r>
+          </a:p>
+          <a:p>
+            <a:pPr>
+              <a:spcBef>
+                <a:spcPts val="800"/>
+              </a:spcBef>
+              <a:spcAft>
+                <a:spcPts val="800"/>
+              </a:spcAft>
+              <a:defRPr sz="2200">
+                <a:solidFill>
+                  <a:srgbClr val="FFFFFF"/>
+                </a:solidFill>
+              </a:defRPr>
+            </a:pPr>
+            <a:r>
+              <a:t>      VS Code or similar editor with terminal integration</a:t>
+            </a:r>
+          </a:p>
+          <a:p>
+            <a:pPr>
+              <a:spcBef>
+                <a:spcPts val="800"/>
+              </a:spcBef>
+              <a:spcAft>
+                <a:spcPts val="800"/>
+              </a:spcAft>
+              <a:defRPr sz="2200">
+                <a:solidFill>
+                  <a:srgbClr val="FFFFFF"/>
+                </a:solidFill>
+              </a:defRPr>
+            </a:pPr>
+            <a:r>
+              <a:t>      At least 4GB available RAM</a:t>
+            </a:r>
+          </a:p>
+          <a:p>
+            <a:pPr>
+              <a:spcBef>
+                <a:spcPts val="800"/>
+              </a:spcBef>
+              <a:spcAft>
+                <a:spcPts val="800"/>
+              </a:spcAft>
+              <a:defRPr sz="2200">
+                <a:solidFill>
+                  <a:srgbClr val="FFFFFF"/>
+                </a:solidFill>
+              </a:defRPr>
+            </a:pPr>
+            <a:r>
+              <a:t>      Familiarity with command line basics</a:t>
+            </a:r>
+          </a:p>
+        </p:txBody>
+      </p:sp>
     </p:spTree>
   </p:cSld>
   <p:clrMapOvr>
@@ -17966,6 +18223,263 @@
           </a:p>
         </p:txBody>
       </p:sp>
+      <p:sp>
+        <p:nvSpPr>
+          <p:cNvPr id="4" name="TextBox 3"/>
+          <p:cNvSpPr txBox="1"/>
+          <p:nvPr/>
+        </p:nvSpPr>
+        <p:spPr>
+          <a:xfrm>
+            <a:off x="457200" y="1463040"/>
+            <a:ext cx="11277295" cy="4572000"/>
+          </a:xfrm>
+          <a:prstGeom prst="rect">
+            <a:avLst/>
+          </a:prstGeom>
+          <a:noFill/>
+        </p:spPr>
+        <p:txBody>
+          <a:bodyPr wrap="square">
+            <a:spAutoFit/>
+          </a:bodyPr>
+          <a:lstStyle/>
+          <a:p>
+            <a:pPr>
+              <a:spcBef>
+                <a:spcPts val="800"/>
+              </a:spcBef>
+              <a:spcAft>
+                <a:spcPts val="800"/>
+              </a:spcAft>
+              <a:defRPr sz="2200">
+                <a:solidFill>
+                  <a:srgbClr val="FFFFFF"/>
+                </a:solidFill>
+              </a:defRPr>
+            </a:pPr>
+            <a:r>
+              <a:t>  Transformation Tasks</a:t>
+            </a:r>
+          </a:p>
+          <a:p>
+            <a:pPr>
+              <a:spcBef>
+                <a:spcPts val="800"/>
+              </a:spcBef>
+              <a:spcAft>
+                <a:spcPts val="800"/>
+              </a:spcAft>
+              <a:defRPr sz="2200">
+                <a:solidFill>
+                  <a:srgbClr val="FFFFFF"/>
+                </a:solidFill>
+              </a:defRPr>
+            </a:pPr>
+            <a:r>
+              <a:t>      **Data Migration Scripts**: Moving data between schemas or databases</a:t>
+            </a:r>
+          </a:p>
+          <a:p>
+            <a:pPr>
+              <a:spcBef>
+                <a:spcPts val="800"/>
+              </a:spcBef>
+              <a:spcAft>
+                <a:spcPts val="800"/>
+              </a:spcAft>
+              <a:defRPr sz="2200">
+                <a:solidFill>
+                  <a:srgbClr val="FFFFFF"/>
+                </a:solidFill>
+              </a:defRPr>
+            </a:pPr>
+            <a:r>
+              <a:t>      **Format Conversions**: CSV to SQL, JSON to relational, XML to tables</a:t>
+            </a:r>
+          </a:p>
+          <a:p>
+            <a:pPr>
+              <a:spcBef>
+                <a:spcPts val="800"/>
+              </a:spcBef>
+              <a:spcAft>
+                <a:spcPts val="800"/>
+              </a:spcAft>
+              <a:defRPr sz="2200">
+                <a:solidFill>
+                  <a:srgbClr val="FFFFFF"/>
+                </a:solidFill>
+              </a:defRPr>
+            </a:pPr>
+            <a:r>
+              <a:t>      **Cleanup &amp; Deduplication**: Removing duplicates, fixing inconsistent data</a:t>
+            </a:r>
+          </a:p>
+          <a:p>
+            <a:pPr>
+              <a:spcBef>
+                <a:spcPts val="800"/>
+              </a:spcBef>
+              <a:spcAft>
+                <a:spcPts val="800"/>
+              </a:spcAft>
+              <a:defRPr sz="2200">
+                <a:solidFill>
+                  <a:srgbClr val="FFFFFF"/>
+                </a:solidFill>
+              </a:defRPr>
+            </a:pPr>
+            <a:r>
+              <a:t>      **Multi-Step Transformations**: Complex pipelines with intermediate staging tables</a:t>
+            </a:r>
+          </a:p>
+          <a:p>
+            <a:pPr>
+              <a:spcBef>
+                <a:spcPts val="800"/>
+              </a:spcBef>
+              <a:spcAft>
+                <a:spcPts val="800"/>
+              </a:spcAft>
+              <a:defRPr sz="2200">
+                <a:solidFill>
+                  <a:srgbClr val="FFFFFF"/>
+                </a:solidFill>
+              </a:defRPr>
+            </a:pPr>
+            <a:r>
+              <a:t>      **Type Conversions**: String dates to TIMESTAMP, comma-separated to arrays</a:t>
+            </a:r>
+          </a:p>
+          <a:p>
+            <a:pPr>
+              <a:spcBef>
+                <a:spcPts val="800"/>
+              </a:spcBef>
+              <a:spcAft>
+                <a:spcPts val="800"/>
+              </a:spcAft>
+              <a:defRPr sz="2200">
+                <a:solidFill>
+                  <a:srgbClr val="FFFFFF"/>
+                </a:solidFill>
+              </a:defRPr>
+            </a:pPr>
+            <a:r>
+              <a:t>      **Validation During Transform**: Ensuring data quality during migration</a:t>
+            </a:r>
+          </a:p>
+          <a:p>
+            <a:pPr>
+              <a:spcBef>
+                <a:spcPts val="800"/>
+              </a:spcBef>
+              <a:spcAft>
+                <a:spcPts val="800"/>
+              </a:spcAft>
+              <a:defRPr sz="2200">
+                <a:solidFill>
+                  <a:srgbClr val="FFFFFF"/>
+                </a:solidFill>
+              </a:defRPr>
+            </a:pPr>
+            <a:r>
+              <a:t>  Claude Code Generates</a:t>
+            </a:r>
+          </a:p>
+          <a:p>
+            <a:pPr>
+              <a:spcBef>
+                <a:spcPts val="800"/>
+              </a:spcBef>
+              <a:spcAft>
+                <a:spcPts val="800"/>
+              </a:spcAft>
+              <a:defRPr sz="2200">
+                <a:solidFill>
+                  <a:srgbClr val="FFFFFF"/>
+                </a:solidFill>
+              </a:defRPr>
+            </a:pPr>
+            <a:r>
+              <a:t>      Complete migration scripts with rollback capability</a:t>
+            </a:r>
+          </a:p>
+          <a:p>
+            <a:pPr>
+              <a:spcBef>
+                <a:spcPts val="800"/>
+              </a:spcBef>
+              <a:spcAft>
+                <a:spcPts val="800"/>
+              </a:spcAft>
+              <a:defRPr sz="2200">
+                <a:solidFill>
+                  <a:srgbClr val="FFFFFF"/>
+                </a:solidFill>
+              </a:defRPr>
+            </a:pPr>
+            <a:r>
+              <a:t>      Idempotent transformations (safe to run multiple times)</a:t>
+            </a:r>
+          </a:p>
+          <a:p>
+            <a:pPr>
+              <a:spcBef>
+                <a:spcPts val="800"/>
+              </a:spcBef>
+              <a:spcAft>
+                <a:spcPts val="800"/>
+              </a:spcAft>
+              <a:defRPr sz="2200">
+                <a:solidFill>
+                  <a:srgbClr val="FFFFFF"/>
+                </a:solidFill>
+              </a:defRPr>
+            </a:pPr>
+            <a:r>
+              <a:t>      Validation queries to verify data integrity</a:t>
+            </a:r>
+          </a:p>
+          <a:p>
+            <a:pPr>
+              <a:spcBef>
+                <a:spcPts val="800"/>
+              </a:spcBef>
+              <a:spcAft>
+                <a:spcPts val="800"/>
+              </a:spcAft>
+              <a:defRPr sz="2200">
+                <a:solidFill>
+                  <a:srgbClr val="FFFFFF"/>
+                </a:solidFill>
+              </a:defRPr>
+            </a:pPr>
+            <a:r>
+              <a:t>      Performance-optimized bulk operations</a:t>
+            </a:r>
+          </a:p>
+          <a:p>
+            <a:pPr>
+              <a:spcBef>
+                <a:spcPts val="800"/>
+              </a:spcBef>
+              <a:spcAft>
+                <a:spcPts val="800"/>
+              </a:spcAft>
+              <a:defRPr sz="2200">
+                <a:solidFill>
+                  <a:srgbClr val="FFFFFF"/>
+                </a:solidFill>
+              </a:defRPr>
+            </a:pPr>
+            <a:r>
+              <a:t>      Clear comments explaining each transformation step</a:t>
+            </a:r>
+          </a:p>
+        </p:txBody>
+      </p:sp>
     </p:spTree>
   </p:cSld>
   <p:clrMapOvr>
@@ -18596,6 +19110,227 @@
           </a:p>
         </p:txBody>
       </p:sp>
+      <p:sp>
+        <p:nvSpPr>
+          <p:cNvPr id="4" name="TextBox 3"/>
+          <p:cNvSpPr txBox="1"/>
+          <p:nvPr/>
+        </p:nvSpPr>
+        <p:spPr>
+          <a:xfrm>
+            <a:off x="457200" y="1463040"/>
+            <a:ext cx="11277295" cy="4572000"/>
+          </a:xfrm>
+          <a:prstGeom prst="rect">
+            <a:avLst/>
+          </a:prstGeom>
+          <a:noFill/>
+        </p:spPr>
+        <p:txBody>
+          <a:bodyPr wrap="square">
+            <a:spAutoFit/>
+          </a:bodyPr>
+          <a:lstStyle/>
+          <a:p>
+            <a:pPr>
+              <a:spcBef>
+                <a:spcPts val="800"/>
+              </a:spcBef>
+              <a:spcAft>
+                <a:spcPts val="800"/>
+              </a:spcAft>
+              <a:defRPr sz="2200">
+                <a:solidFill>
+                  <a:srgbClr val="FFFFFF"/>
+                </a:solidFill>
+              </a:defRPr>
+            </a:pPr>
+            <a:r>
+              <a:t>  Validation Types</a:t>
+            </a:r>
+          </a:p>
+          <a:p>
+            <a:pPr>
+              <a:spcBef>
+                <a:spcPts val="800"/>
+              </a:spcBef>
+              <a:spcAft>
+                <a:spcPts val="800"/>
+              </a:spcAft>
+              <a:defRPr sz="2200">
+                <a:solidFill>
+                  <a:srgbClr val="FFFFFF"/>
+                </a:solidFill>
+              </a:defRPr>
+            </a:pPr>
+            <a:r>
+              <a:t>      **Constraint Generation**: Claude Code writes CHECK, NOT NULL, UNIQUE constraints based on business rules</a:t>
+            </a:r>
+          </a:p>
+          <a:p>
+            <a:pPr>
+              <a:spcBef>
+                <a:spcPts val="800"/>
+              </a:spcBef>
+              <a:spcAft>
+                <a:spcPts val="800"/>
+              </a:spcAft>
+              <a:defRPr sz="2200">
+                <a:solidFill>
+                  <a:srgbClr val="FFFFFF"/>
+                </a:solidFill>
+              </a:defRPr>
+            </a:pPr>
+            <a:r>
+              <a:t>      **Data Profiling Queries**: Statistical summaries (counts, min/max, nulls, distinct values)</a:t>
+            </a:r>
+          </a:p>
+          <a:p>
+            <a:pPr>
+              <a:spcBef>
+                <a:spcPts val="800"/>
+              </a:spcBef>
+              <a:spcAft>
+                <a:spcPts val="800"/>
+              </a:spcAft>
+              <a:defRPr sz="2200">
+                <a:solidFill>
+                  <a:srgbClr val="FFFFFF"/>
+                </a:solidFill>
+              </a:defRPr>
+            </a:pPr>
+            <a:r>
+              <a:t>      **Anomaly Detection SQL**: Finding outliers, unexpected patterns, inconsistencies</a:t>
+            </a:r>
+          </a:p>
+          <a:p>
+            <a:pPr>
+              <a:spcBef>
+                <a:spcPts val="800"/>
+              </a:spcBef>
+              <a:spcAft>
+                <a:spcPts val="800"/>
+              </a:spcAft>
+              <a:defRPr sz="2200">
+                <a:solidFill>
+                  <a:srgbClr val="FFFFFF"/>
+                </a:solidFill>
+              </a:defRPr>
+            </a:pPr>
+            <a:r>
+              <a:t>      **Referential Integrity Checks**: Finding orphaned records, missing foreign key references</a:t>
+            </a:r>
+          </a:p>
+          <a:p>
+            <a:pPr>
+              <a:spcBef>
+                <a:spcPts val="800"/>
+              </a:spcBef>
+              <a:spcAft>
+                <a:spcPts val="800"/>
+              </a:spcAft>
+              <a:defRPr sz="2200">
+                <a:solidFill>
+                  <a:srgbClr val="FFFFFF"/>
+                </a:solidFill>
+              </a:defRPr>
+            </a:pPr>
+            <a:r>
+              <a:t>      **Duplicate Detection**: Identifying exact and fuzzy duplicates</a:t>
+            </a:r>
+          </a:p>
+          <a:p>
+            <a:pPr>
+              <a:spcBef>
+                <a:spcPts val="800"/>
+              </a:spcBef>
+              <a:spcAft>
+                <a:spcPts val="800"/>
+              </a:spcAft>
+              <a:defRPr sz="2200">
+                <a:solidFill>
+                  <a:srgbClr val="FFFFFF"/>
+                </a:solidFill>
+              </a:defRPr>
+            </a:pPr>
+            <a:r>
+              <a:t>      **Format Validation**: Email addresses, phone numbers, dates in correct format</a:t>
+            </a:r>
+          </a:p>
+          <a:p>
+            <a:pPr>
+              <a:spcBef>
+                <a:spcPts val="800"/>
+              </a:spcBef>
+              <a:spcAft>
+                <a:spcPts val="800"/>
+              </a:spcAft>
+              <a:defRPr sz="2200">
+                <a:solidFill>
+                  <a:srgbClr val="FFFFFF"/>
+                </a:solidFill>
+              </a:defRPr>
+            </a:pPr>
+            <a:r>
+              <a:t>  Quality Assurance</a:t>
+            </a:r>
+          </a:p>
+          <a:p>
+            <a:pPr>
+              <a:spcBef>
+                <a:spcPts val="800"/>
+              </a:spcBef>
+              <a:spcAft>
+                <a:spcPts val="800"/>
+              </a:spcAft>
+              <a:defRPr sz="2200">
+                <a:solidFill>
+                  <a:srgbClr val="FFFFFF"/>
+                </a:solidFill>
+              </a:defRPr>
+            </a:pPr>
+            <a:r>
+              <a:t>      Pre-deployment validation queries to catch issues before production</a:t>
+            </a:r>
+          </a:p>
+          <a:p>
+            <a:pPr>
+              <a:spcBef>
+                <a:spcPts val="800"/>
+              </a:spcBef>
+              <a:spcAft>
+                <a:spcPts val="800"/>
+              </a:spcAft>
+              <a:defRPr sz="2200">
+                <a:solidFill>
+                  <a:srgbClr val="FFFFFF"/>
+                </a:solidFill>
+              </a:defRPr>
+            </a:pPr>
+            <a:r>
+              <a:t>      Ongoing monitoring queries to detect data corruption</a:t>
+            </a:r>
+          </a:p>
+          <a:p>
+            <a:pPr>
+              <a:spcBef>
+                <a:spcPts val="800"/>
+              </a:spcBef>
+              <a:spcAft>
+                <a:spcPts val="800"/>
+              </a:spcAft>
+              <a:defRPr sz="2200">
+                <a:solidFill>
+                  <a:srgbClr val="FFFFFF"/>
+                </a:solidFill>
+              </a:defRPr>
+            </a:pPr>
+            <a:r>
+              <a:t>      Post-migration validation to ensure data was transferred correctly</a:t>
+            </a:r>
+          </a:p>
+        </p:txBody>
+      </p:sp>
     </p:spTree>
   </p:cSld>
   <p:clrMapOvr>
@@ -19266,6 +20001,119 @@
           </a:p>
         </p:txBody>
       </p:sp>
+      <p:sp>
+        <p:nvSpPr>
+          <p:cNvPr id="4" name="TextBox 3"/>
+          <p:cNvSpPr txBox="1"/>
+          <p:nvPr/>
+        </p:nvSpPr>
+        <p:spPr>
+          <a:xfrm>
+            <a:off x="457200" y="1463040"/>
+            <a:ext cx="11277295" cy="4572000"/>
+          </a:xfrm>
+          <a:prstGeom prst="rect">
+            <a:avLst/>
+          </a:prstGeom>
+          <a:noFill/>
+        </p:spPr>
+        <p:txBody>
+          <a:bodyPr wrap="square">
+            <a:spAutoFit/>
+          </a:bodyPr>
+          <a:lstStyle/>
+          <a:p>
+            <a:pPr>
+              <a:spcBef>
+                <a:spcPts val="800"/>
+              </a:spcBef>
+              <a:spcAft>
+                <a:spcPts val="800"/>
+              </a:spcAft>
+              <a:defRPr sz="2200">
+                <a:solidFill>
+                  <a:srgbClr val="FFFFFF"/>
+                </a:solidFill>
+              </a:defRPr>
+            </a:pPr>
+            <a:r>
+              <a:t>  Mistake 1: Context window overflow.</a:t>
+            </a:r>
+          </a:p>
+          <a:p>
+            <a:pPr>
+              <a:spcBef>
+                <a:spcPts val="800"/>
+              </a:spcBef>
+              <a:spcAft>
+                <a:spcPts val="800"/>
+              </a:spcAft>
+              <a:defRPr sz="2200">
+                <a:solidFill>
+                  <a:srgbClr val="FFFFFF"/>
+                </a:solidFill>
+              </a:defRPr>
+            </a:pPr>
+            <a:r>
+              <a:t>  Mistake 2: Correction spirals.</a:t>
+            </a:r>
+          </a:p>
+          <a:p>
+            <a:pPr>
+              <a:spcBef>
+                <a:spcPts val="800"/>
+              </a:spcBef>
+              <a:spcAft>
+                <a:spcPts val="800"/>
+              </a:spcAft>
+              <a:defRPr sz="2200">
+                <a:solidFill>
+                  <a:srgbClr val="FFFFFF"/>
+                </a:solidFill>
+              </a:defRPr>
+            </a:pPr>
+            <a:r>
+              <a:t>  Mistake 3: Forgotten guidelines.</a:t>
+            </a:r>
+          </a:p>
+          <a:p>
+            <a:pPr>
+              <a:spcBef>
+                <a:spcPts val="800"/>
+              </a:spcBef>
+              <a:spcAft>
+                <a:spcPts val="800"/>
+              </a:spcAft>
+              <a:defRPr sz="2200">
+                <a:solidFill>
+                  <a:srgbClr val="FFFFFF"/>
+                </a:solidFill>
+              </a:defRPr>
+            </a:pPr>
+            <a:r>
+              <a:t>  Mistake 4: Scope creep.</a:t>
+            </a:r>
+          </a:p>
+          <a:p>
+            <a:pPr>
+              <a:spcBef>
+                <a:spcPts val="800"/>
+              </a:spcBef>
+              <a:spcAft>
+                <a:spcPts val="800"/>
+              </a:spcAft>
+              <a:defRPr sz="2200">
+                <a:solidFill>
+                  <a:srgbClr val="FFFFFF"/>
+                </a:solidFill>
+              </a:defRPr>
+            </a:pPr>
+            <a:r>
+              <a:t>  Mistake 5: Vibe coding.</a:t>
+            </a:r>
+          </a:p>
+        </p:txBody>
+      </p:sp>
     </p:spTree>
   </p:cSld>
   <p:clrMapOvr>
@@ -20688,6 +21536,227 @@
           </a:p>
         </p:txBody>
       </p:sp>
+      <p:sp>
+        <p:nvSpPr>
+          <p:cNvPr id="4" name="TextBox 3"/>
+          <p:cNvSpPr txBox="1"/>
+          <p:nvPr/>
+        </p:nvSpPr>
+        <p:spPr>
+          <a:xfrm>
+            <a:off x="457200" y="1463040"/>
+            <a:ext cx="11277295" cy="4572000"/>
+          </a:xfrm>
+          <a:prstGeom prst="rect">
+            <a:avLst/>
+          </a:prstGeom>
+          <a:noFill/>
+        </p:spPr>
+        <p:txBody>
+          <a:bodyPr wrap="square">
+            <a:spAutoFit/>
+          </a:bodyPr>
+          <a:lstStyle/>
+          <a:p>
+            <a:pPr>
+              <a:spcBef>
+                <a:spcPts val="800"/>
+              </a:spcBef>
+              <a:spcAft>
+                <a:spcPts val="800"/>
+              </a:spcAft>
+              <a:defRPr sz="2200">
+                <a:solidFill>
+                  <a:srgbClr val="FFFFFF"/>
+                </a:solidFill>
+              </a:defRPr>
+            </a:pPr>
+            <a:r>
+              <a:t>  What Claude Code Reads</a:t>
+            </a:r>
+          </a:p>
+          <a:p>
+            <a:pPr>
+              <a:spcBef>
+                <a:spcPts val="800"/>
+              </a:spcBef>
+              <a:spcAft>
+                <a:spcPts val="800"/>
+              </a:spcAft>
+              <a:defRPr sz="2200">
+                <a:solidFill>
+                  <a:srgbClr val="FFFFFF"/>
+                </a:solidFill>
+              </a:defRPr>
+            </a:pPr>
+            <a:r>
+              <a:t>      File tree structure of your workspace</a:t>
+            </a:r>
+          </a:p>
+          <a:p>
+            <a:pPr>
+              <a:spcBef>
+                <a:spcPts val="800"/>
+              </a:spcBef>
+              <a:spcAft>
+                <a:spcPts val="800"/>
+              </a:spcAft>
+              <a:defRPr sz="2200">
+                <a:solidFill>
+                  <a:srgbClr val="FFFFFF"/>
+                </a:solidFill>
+              </a:defRPr>
+            </a:pPr>
+            <a:r>
+              <a:t>      Contents of relevant files (intelligently selected)</a:t>
+            </a:r>
+          </a:p>
+          <a:p>
+            <a:pPr>
+              <a:spcBef>
+                <a:spcPts val="800"/>
+              </a:spcBef>
+              <a:spcAft>
+                <a:spcPts val="800"/>
+              </a:spcAft>
+              <a:defRPr sz="2200">
+                <a:solidFill>
+                  <a:srgbClr val="FFFFFF"/>
+                </a:solidFill>
+              </a:defRPr>
+            </a:pPr>
+            <a:r>
+              <a:t>      Git history and current branch state</a:t>
+            </a:r>
+          </a:p>
+          <a:p>
+            <a:pPr>
+              <a:spcBef>
+                <a:spcPts val="800"/>
+              </a:spcBef>
+              <a:spcAft>
+                <a:spcPts val="800"/>
+              </a:spcAft>
+              <a:defRPr sz="2200">
+                <a:solidFill>
+                  <a:srgbClr val="FFFFFF"/>
+                </a:solidFill>
+              </a:defRPr>
+            </a:pPr>
+            <a:r>
+              <a:t>      CLAUDE.md configuration if present</a:t>
+            </a:r>
+          </a:p>
+          <a:p>
+            <a:pPr>
+              <a:spcBef>
+                <a:spcPts val="800"/>
+              </a:spcBef>
+              <a:spcAft>
+                <a:spcPts val="800"/>
+              </a:spcAft>
+              <a:defRPr sz="2200">
+                <a:solidFill>
+                  <a:srgbClr val="FFFFFF"/>
+                </a:solidFill>
+              </a:defRPr>
+            </a:pPr>
+            <a:r>
+              <a:t>      Your instruction and any @-mentioned files</a:t>
+            </a:r>
+          </a:p>
+          <a:p>
+            <a:pPr>
+              <a:spcBef>
+                <a:spcPts val="800"/>
+              </a:spcBef>
+              <a:spcAft>
+                <a:spcPts val="800"/>
+              </a:spcAft>
+              <a:defRPr sz="2200">
+                <a:solidFill>
+                  <a:srgbClr val="FFFFFF"/>
+                </a:solidFill>
+              </a:defRPr>
+            </a:pPr>
+            <a:r>
+              <a:t>  Context Window</a:t>
+            </a:r>
+          </a:p>
+          <a:p>
+            <a:pPr>
+              <a:spcBef>
+                <a:spcPts val="800"/>
+              </a:spcBef>
+              <a:spcAft>
+                <a:spcPts val="800"/>
+              </a:spcAft>
+              <a:defRPr sz="2200">
+                <a:solidFill>
+                  <a:srgbClr val="FFFFFF"/>
+                </a:solidFill>
+              </a:defRPr>
+            </a:pPr>
+            <a:r>
+              <a:t>      200,000 token context window (roughly 150,000 words)</a:t>
+            </a:r>
+          </a:p>
+          <a:p>
+            <a:pPr>
+              <a:spcBef>
+                <a:spcPts val="800"/>
+              </a:spcBef>
+              <a:spcAft>
+                <a:spcPts val="800"/>
+              </a:spcAft>
+              <a:defRPr sz="2200">
+                <a:solidFill>
+                  <a:srgbClr val="FFFFFF"/>
+                </a:solidFill>
+              </a:defRPr>
+            </a:pPr>
+            <a:r>
+              <a:t>      Can hold dozens of files simultaneously</a:t>
+            </a:r>
+          </a:p>
+          <a:p>
+            <a:pPr>
+              <a:spcBef>
+                <a:spcPts val="800"/>
+              </a:spcBef>
+              <a:spcAft>
+                <a:spcPts val="800"/>
+              </a:spcAft>
+              <a:defRPr sz="2200">
+                <a:solidFill>
+                  <a:srgbClr val="FFFFFF"/>
+                </a:solidFill>
+              </a:defRPr>
+            </a:pPr>
+            <a:r>
+              <a:t>      Prioritizes files based on relevance to your request</a:t>
+            </a:r>
+          </a:p>
+          <a:p>
+            <a:pPr>
+              <a:spcBef>
+                <a:spcPts val="800"/>
+              </a:spcBef>
+              <a:spcAft>
+                <a:spcPts val="800"/>
+              </a:spcAft>
+              <a:defRPr sz="2200">
+                <a:solidFill>
+                  <a:srgbClr val="FFFFFF"/>
+                </a:solidFill>
+              </a:defRPr>
+            </a:pPr>
+            <a:r>
+              <a:t>      Automatically excludes .claudeignore patterns</a:t>
+            </a:r>
+          </a:p>
+        </p:txBody>
+      </p:sp>
     </p:spTree>
   </p:cSld>
   <p:clrMapOvr>
@@ -23006,6 +24075,227 @@
           </a:p>
         </p:txBody>
       </p:sp>
+      <p:sp>
+        <p:nvSpPr>
+          <p:cNvPr id="4" name="TextBox 3"/>
+          <p:cNvSpPr txBox="1"/>
+          <p:nvPr/>
+        </p:nvSpPr>
+        <p:spPr>
+          <a:xfrm>
+            <a:off x="457200" y="1463040"/>
+            <a:ext cx="11277295" cy="4572000"/>
+          </a:xfrm>
+          <a:prstGeom prst="rect">
+            <a:avLst/>
+          </a:prstGeom>
+          <a:noFill/>
+        </p:spPr>
+        <p:txBody>
+          <a:bodyPr wrap="square">
+            <a:spAutoFit/>
+          </a:bodyPr>
+          <a:lstStyle/>
+          <a:p>
+            <a:pPr>
+              <a:spcBef>
+                <a:spcPts val="800"/>
+              </a:spcBef>
+              <a:spcAft>
+                <a:spcPts val="800"/>
+              </a:spcAft>
+              <a:defRPr sz="2200">
+                <a:solidFill>
+                  <a:srgbClr val="FFFFFF"/>
+                </a:solidFill>
+              </a:defRPr>
+            </a:pPr>
+            <a:r>
+              <a:t>  What Gets Analyzed</a:t>
+            </a:r>
+          </a:p>
+          <a:p>
+            <a:pPr>
+              <a:spcBef>
+                <a:spcPts val="800"/>
+              </a:spcBef>
+              <a:spcAft>
+                <a:spcPts val="800"/>
+              </a:spcAft>
+              <a:defRPr sz="2200">
+                <a:solidFill>
+                  <a:srgbClr val="FFFFFF"/>
+                </a:solidFill>
+              </a:defRPr>
+            </a:pPr>
+            <a:r>
+              <a:t>      Code patterns and conventions (naming, structure, style)</a:t>
+            </a:r>
+          </a:p>
+          <a:p>
+            <a:pPr>
+              <a:spcBef>
+                <a:spcPts val="800"/>
+              </a:spcBef>
+              <a:spcAft>
+                <a:spcPts val="800"/>
+              </a:spcAft>
+              <a:defRPr sz="2200">
+                <a:solidFill>
+                  <a:srgbClr val="FFFFFF"/>
+                </a:solidFill>
+              </a:defRPr>
+            </a:pPr>
+            <a:r>
+              <a:t>      Dependencies between files and modules</a:t>
+            </a:r>
+          </a:p>
+          <a:p>
+            <a:pPr>
+              <a:spcBef>
+                <a:spcPts val="800"/>
+              </a:spcBef>
+              <a:spcAft>
+                <a:spcPts val="800"/>
+              </a:spcAft>
+              <a:defRPr sz="2200">
+                <a:solidFill>
+                  <a:srgbClr val="FFFFFF"/>
+                </a:solidFill>
+              </a:defRPr>
+            </a:pPr>
+            <a:r>
+              <a:t>      Existing test coverage and patterns</a:t>
+            </a:r>
+          </a:p>
+          <a:p>
+            <a:pPr>
+              <a:spcBef>
+                <a:spcPts val="800"/>
+              </a:spcBef>
+              <a:spcAft>
+                <a:spcPts val="800"/>
+              </a:spcAft>
+              <a:defRPr sz="2200">
+                <a:solidFill>
+                  <a:srgbClr val="FFFFFF"/>
+                </a:solidFill>
+              </a:defRPr>
+            </a:pPr>
+            <a:r>
+              <a:t>      Potential impact areas of requested changes</a:t>
+            </a:r>
+          </a:p>
+          <a:p>
+            <a:pPr>
+              <a:spcBef>
+                <a:spcPts val="800"/>
+              </a:spcBef>
+              <a:spcAft>
+                <a:spcPts val="800"/>
+              </a:spcAft>
+              <a:defRPr sz="2200">
+                <a:solidFill>
+                  <a:srgbClr val="FFFFFF"/>
+                </a:solidFill>
+              </a:defRPr>
+            </a:pPr>
+            <a:r>
+              <a:t>      Risk factors (breaking changes, edge cases)</a:t>
+            </a:r>
+          </a:p>
+          <a:p>
+            <a:pPr>
+              <a:spcBef>
+                <a:spcPts val="800"/>
+              </a:spcBef>
+              <a:spcAft>
+                <a:spcPts val="800"/>
+              </a:spcAft>
+              <a:defRPr sz="2200">
+                <a:solidFill>
+                  <a:srgbClr val="FFFFFF"/>
+                </a:solidFill>
+              </a:defRPr>
+            </a:pPr>
+            <a:r>
+              <a:t>  Mental Model Formation</a:t>
+            </a:r>
+          </a:p>
+          <a:p>
+            <a:pPr>
+              <a:spcBef>
+                <a:spcPts val="800"/>
+              </a:spcBef>
+              <a:spcAft>
+                <a:spcPts val="800"/>
+              </a:spcAft>
+              <a:defRPr sz="2200">
+                <a:solidFill>
+                  <a:srgbClr val="FFFFFF"/>
+                </a:solidFill>
+              </a:defRPr>
+            </a:pPr>
+            <a:r>
+              <a:t>      Understanding project architecture</a:t>
+            </a:r>
+          </a:p>
+          <a:p>
+            <a:pPr>
+              <a:spcBef>
+                <a:spcPts val="800"/>
+              </a:spcBef>
+              <a:spcAft>
+                <a:spcPts val="800"/>
+              </a:spcAft>
+              <a:defRPr sz="2200">
+                <a:solidFill>
+                  <a:srgbClr val="FFFFFF"/>
+                </a:solidFill>
+              </a:defRPr>
+            </a:pPr>
+            <a:r>
+              <a:t>      Identifying established patterns to follow</a:t>
+            </a:r>
+          </a:p>
+          <a:p>
+            <a:pPr>
+              <a:spcBef>
+                <a:spcPts val="800"/>
+              </a:spcBef>
+              <a:spcAft>
+                <a:spcPts val="800"/>
+              </a:spcAft>
+              <a:defRPr sz="2200">
+                <a:solidFill>
+                  <a:srgbClr val="FFFFFF"/>
+                </a:solidFill>
+              </a:defRPr>
+            </a:pPr>
+            <a:r>
+              <a:t>      Spotting inconsistencies or anti-patterns</a:t>
+            </a:r>
+          </a:p>
+          <a:p>
+            <a:pPr>
+              <a:spcBef>
+                <a:spcPts val="800"/>
+              </a:spcBef>
+              <a:spcAft>
+                <a:spcPts val="800"/>
+              </a:spcAft>
+              <a:defRPr sz="2200">
+                <a:solidFill>
+                  <a:srgbClr val="FFFFFF"/>
+                </a:solidFill>
+              </a:defRPr>
+            </a:pPr>
+            <a:r>
+              <a:t>      Evaluating multiple approaches to the task</a:t>
+            </a:r>
+          </a:p>
+        </p:txBody>
+      </p:sp>
     </p:spTree>
   </p:cSld>
   <p:clrMapOvr>
@@ -23110,6 +24400,227 @@
           </a:p>
         </p:txBody>
       </p:sp>
+      <p:sp>
+        <p:nvSpPr>
+          <p:cNvPr id="4" name="TextBox 3"/>
+          <p:cNvSpPr txBox="1"/>
+          <p:nvPr/>
+        </p:nvSpPr>
+        <p:spPr>
+          <a:xfrm>
+            <a:off x="457200" y="1463040"/>
+            <a:ext cx="11277295" cy="4572000"/>
+          </a:xfrm>
+          <a:prstGeom prst="rect">
+            <a:avLst/>
+          </a:prstGeom>
+          <a:noFill/>
+        </p:spPr>
+        <p:txBody>
+          <a:bodyPr wrap="square">
+            <a:spAutoFit/>
+          </a:bodyPr>
+          <a:lstStyle/>
+          <a:p>
+            <a:pPr>
+              <a:spcBef>
+                <a:spcPts val="800"/>
+              </a:spcBef>
+              <a:spcAft>
+                <a:spcPts val="800"/>
+              </a:spcAft>
+              <a:defRPr sz="2200">
+                <a:solidFill>
+                  <a:srgbClr val="FFFFFF"/>
+                </a:solidFill>
+              </a:defRPr>
+            </a:pPr>
+            <a:r>
+              <a:t>  Planning Strategy</a:t>
+            </a:r>
+          </a:p>
+          <a:p>
+            <a:pPr>
+              <a:spcBef>
+                <a:spcPts val="800"/>
+              </a:spcBef>
+              <a:spcAft>
+                <a:spcPts val="800"/>
+              </a:spcAft>
+              <a:defRPr sz="2200">
+                <a:solidFill>
+                  <a:srgbClr val="FFFFFF"/>
+                </a:solidFill>
+              </a:defRPr>
+            </a:pPr>
+            <a:r>
+              <a:t>      Sequence of actions to achieve the goal</a:t>
+            </a:r>
+          </a:p>
+          <a:p>
+            <a:pPr>
+              <a:spcBef>
+                <a:spcPts val="800"/>
+              </a:spcBef>
+              <a:spcAft>
+                <a:spcPts val="800"/>
+              </a:spcAft>
+              <a:defRPr sz="2200">
+                <a:solidFill>
+                  <a:srgbClr val="FFFFFF"/>
+                </a:solidFill>
+              </a:defRPr>
+            </a:pPr>
+            <a:r>
+              <a:t>      Which files to modify and in what order</a:t>
+            </a:r>
+          </a:p>
+          <a:p>
+            <a:pPr>
+              <a:spcBef>
+                <a:spcPts val="800"/>
+              </a:spcBef>
+              <a:spcAft>
+                <a:spcPts val="800"/>
+              </a:spcAft>
+              <a:defRPr sz="2200">
+                <a:solidFill>
+                  <a:srgbClr val="FFFFFF"/>
+                </a:solidFill>
+              </a:defRPr>
+            </a:pPr>
+            <a:r>
+              <a:t>      Which tools to use (read, write, edit, run_command)</a:t>
+            </a:r>
+          </a:p>
+          <a:p>
+            <a:pPr>
+              <a:spcBef>
+                <a:spcPts val="800"/>
+              </a:spcBef>
+              <a:spcAft>
+                <a:spcPts val="800"/>
+              </a:spcAft>
+              <a:defRPr sz="2200">
+                <a:solidFill>
+                  <a:srgbClr val="FFFFFF"/>
+                </a:solidFill>
+              </a:defRPr>
+            </a:pPr>
+            <a:r>
+              <a:t>      Rollback strategy if something fails</a:t>
+            </a:r>
+          </a:p>
+          <a:p>
+            <a:pPr>
+              <a:spcBef>
+                <a:spcPts val="800"/>
+              </a:spcBef>
+              <a:spcAft>
+                <a:spcPts val="800"/>
+              </a:spcAft>
+              <a:defRPr sz="2200">
+                <a:solidFill>
+                  <a:srgbClr val="FFFFFF"/>
+                </a:solidFill>
+              </a:defRPr>
+            </a:pPr>
+            <a:r>
+              <a:t>      Testing and verification steps</a:t>
+            </a:r>
+          </a:p>
+          <a:p>
+            <a:pPr>
+              <a:spcBef>
+                <a:spcPts val="800"/>
+              </a:spcBef>
+              <a:spcAft>
+                <a:spcPts val="800"/>
+              </a:spcAft>
+              <a:defRPr sz="2200">
+                <a:solidFill>
+                  <a:srgbClr val="FFFFFF"/>
+                </a:solidFill>
+              </a:defRPr>
+            </a:pPr>
+            <a:r>
+              <a:t>  Risk Minimization</a:t>
+            </a:r>
+          </a:p>
+          <a:p>
+            <a:pPr>
+              <a:spcBef>
+                <a:spcPts val="800"/>
+              </a:spcBef>
+              <a:spcAft>
+                <a:spcPts val="800"/>
+              </a:spcAft>
+              <a:defRPr sz="2200">
+                <a:solidFill>
+                  <a:srgbClr val="FFFFFF"/>
+                </a:solidFill>
+              </a:defRPr>
+            </a:pPr>
+            <a:r>
+              <a:t>      Start with safest changes first (tests, docs)</a:t>
+            </a:r>
+          </a:p>
+          <a:p>
+            <a:pPr>
+              <a:spcBef>
+                <a:spcPts val="800"/>
+              </a:spcBef>
+              <a:spcAft>
+                <a:spcPts val="800"/>
+              </a:spcAft>
+              <a:defRPr sz="2200">
+                <a:solidFill>
+                  <a:srgbClr val="FFFFFF"/>
+                </a:solidFill>
+              </a:defRPr>
+            </a:pPr>
+            <a:r>
+              <a:t>      Make atomic changes that can be easily reverted</a:t>
+            </a:r>
+          </a:p>
+          <a:p>
+            <a:pPr>
+              <a:spcBef>
+                <a:spcPts val="800"/>
+              </a:spcBef>
+              <a:spcAft>
+                <a:spcPts val="800"/>
+              </a:spcAft>
+              <a:defRPr sz="2200">
+                <a:solidFill>
+                  <a:srgbClr val="FFFFFF"/>
+                </a:solidFill>
+              </a:defRPr>
+            </a:pPr>
+            <a:r>
+              <a:t>      Verify each step before proceeding to next</a:t>
+            </a:r>
+          </a:p>
+          <a:p>
+            <a:pPr>
+              <a:spcBef>
+                <a:spcPts val="800"/>
+              </a:spcBef>
+              <a:spcAft>
+                <a:spcPts val="800"/>
+              </a:spcAft>
+              <a:defRPr sz="2200">
+                <a:solidFill>
+                  <a:srgbClr val="FFFFFF"/>
+                </a:solidFill>
+              </a:defRPr>
+            </a:pPr>
+            <a:r>
+              <a:t>      Preserve existing functionality while adding new features</a:t>
+            </a:r>
+          </a:p>
+        </p:txBody>
+      </p:sp>
     </p:spTree>
   </p:cSld>
   <p:clrMapOvr>
@@ -23214,6 +24725,227 @@
           </a:p>
         </p:txBody>
       </p:sp>
+      <p:sp>
+        <p:nvSpPr>
+          <p:cNvPr id="4" name="TextBox 3"/>
+          <p:cNvSpPr txBox="1"/>
+          <p:nvPr/>
+        </p:nvSpPr>
+        <p:spPr>
+          <a:xfrm>
+            <a:off x="457200" y="1463040"/>
+            <a:ext cx="11277295" cy="4572000"/>
+          </a:xfrm>
+          <a:prstGeom prst="rect">
+            <a:avLst/>
+          </a:prstGeom>
+          <a:noFill/>
+        </p:spPr>
+        <p:txBody>
+          <a:bodyPr wrap="square">
+            <a:spAutoFit/>
+          </a:bodyPr>
+          <a:lstStyle/>
+          <a:p>
+            <a:pPr>
+              <a:spcBef>
+                <a:spcPts val="800"/>
+              </a:spcBef>
+              <a:spcAft>
+                <a:spcPts val="800"/>
+              </a:spcAft>
+              <a:defRPr sz="2200">
+                <a:solidFill>
+                  <a:srgbClr val="FFFFFF"/>
+                </a:solidFill>
+              </a:defRPr>
+            </a:pPr>
+            <a:r>
+              <a:t>  Available Tools</a:t>
+            </a:r>
+          </a:p>
+          <a:p>
+            <a:pPr>
+              <a:spcBef>
+                <a:spcPts val="800"/>
+              </a:spcBef>
+              <a:spcAft>
+                <a:spcPts val="800"/>
+              </a:spcAft>
+              <a:defRPr sz="2200">
+                <a:solidFill>
+                  <a:srgbClr val="FFFFFF"/>
+                </a:solidFill>
+              </a:defRPr>
+            </a:pPr>
+            <a:r>
+              <a:t>      **read_file**: Read contents of specific files</a:t>
+            </a:r>
+          </a:p>
+          <a:p>
+            <a:pPr>
+              <a:spcBef>
+                <a:spcPts val="800"/>
+              </a:spcBef>
+              <a:spcAft>
+                <a:spcPts val="800"/>
+              </a:spcAft>
+              <a:defRPr sz="2200">
+                <a:solidFill>
+                  <a:srgbClr val="FFFFFF"/>
+                </a:solidFill>
+              </a:defRPr>
+            </a:pPr>
+            <a:r>
+              <a:t>      **write_file**: Create new files with content</a:t>
+            </a:r>
+          </a:p>
+          <a:p>
+            <a:pPr>
+              <a:spcBef>
+                <a:spcPts val="800"/>
+              </a:spcBef>
+              <a:spcAft>
+                <a:spcPts val="800"/>
+              </a:spcAft>
+              <a:defRPr sz="2200">
+                <a:solidFill>
+                  <a:srgbClr val="FFFFFF"/>
+                </a:solidFill>
+              </a:defRPr>
+            </a:pPr>
+            <a:r>
+              <a:t>      **edit_file**: Make precise edits to existing files</a:t>
+            </a:r>
+          </a:p>
+          <a:p>
+            <a:pPr>
+              <a:spcBef>
+                <a:spcPts val="800"/>
+              </a:spcBef>
+              <a:spcAft>
+                <a:spcPts val="800"/>
+              </a:spcAft>
+              <a:defRPr sz="2200">
+                <a:solidFill>
+                  <a:srgbClr val="FFFFFF"/>
+                </a:solidFill>
+              </a:defRPr>
+            </a:pPr>
+            <a:r>
+              <a:t>      **run_command**: Execute shell commands (tests, linters, git)</a:t>
+            </a:r>
+          </a:p>
+          <a:p>
+            <a:pPr>
+              <a:spcBef>
+                <a:spcPts val="800"/>
+              </a:spcBef>
+              <a:spcAft>
+                <a:spcPts val="800"/>
+              </a:spcAft>
+              <a:defRPr sz="2200">
+                <a:solidFill>
+                  <a:srgbClr val="FFFFFF"/>
+                </a:solidFill>
+              </a:defRPr>
+            </a:pPr>
+            <a:r>
+              <a:t>      **list_dir**: Explore directory structure</a:t>
+            </a:r>
+          </a:p>
+          <a:p>
+            <a:pPr>
+              <a:spcBef>
+                <a:spcPts val="800"/>
+              </a:spcBef>
+              <a:spcAft>
+                <a:spcPts val="800"/>
+              </a:spcAft>
+              <a:defRPr sz="2200">
+                <a:solidFill>
+                  <a:srgbClr val="FFFFFF"/>
+                </a:solidFill>
+              </a:defRPr>
+            </a:pPr>
+            <a:r>
+              <a:t>  Execution Characteristics</a:t>
+            </a:r>
+          </a:p>
+          <a:p>
+            <a:pPr>
+              <a:spcBef>
+                <a:spcPts val="800"/>
+              </a:spcBef>
+              <a:spcAft>
+                <a:spcPts val="800"/>
+              </a:spcAft>
+              <a:defRPr sz="2200">
+                <a:solidFill>
+                  <a:srgbClr val="FFFFFF"/>
+                </a:solidFill>
+              </a:defRPr>
+            </a:pPr>
+            <a:r>
+              <a:t>      Precise edits using line numbers or search/replace</a:t>
+            </a:r>
+          </a:p>
+          <a:p>
+            <a:pPr>
+              <a:spcBef>
+                <a:spcPts val="800"/>
+              </a:spcBef>
+              <a:spcAft>
+                <a:spcPts val="800"/>
+              </a:spcAft>
+              <a:defRPr sz="2200">
+                <a:solidFill>
+                  <a:srgbClr val="FFFFFF"/>
+                </a:solidFill>
+              </a:defRPr>
+            </a:pPr>
+            <a:r>
+              <a:t>      Atomic file operations (all-or-nothing writes)</a:t>
+            </a:r>
+          </a:p>
+          <a:p>
+            <a:pPr>
+              <a:spcBef>
+                <a:spcPts val="800"/>
+              </a:spcBef>
+              <a:spcAft>
+                <a:spcPts val="800"/>
+              </a:spcAft>
+              <a:defRPr sz="2200">
+                <a:solidFill>
+                  <a:srgbClr val="FFFFFF"/>
+                </a:solidFill>
+              </a:defRPr>
+            </a:pPr>
+            <a:r>
+              <a:t>      Commands run in your project's context</a:t>
+            </a:r>
+          </a:p>
+          <a:p>
+            <a:pPr>
+              <a:spcBef>
+                <a:spcPts val="800"/>
+              </a:spcBef>
+              <a:spcAft>
+                <a:spcPts val="800"/>
+              </a:spcAft>
+              <a:defRPr sz="2200">
+                <a:solidFill>
+                  <a:srgbClr val="FFFFFF"/>
+                </a:solidFill>
+              </a:defRPr>
+            </a:pPr>
+            <a:r>
+              <a:t>      Real-time feedback from command outputs</a:t>
+            </a:r>
+          </a:p>
+        </p:txBody>
+      </p:sp>
     </p:spTree>
   </p:cSld>
   <p:clrMapOvr>
@@ -23318,6 +25050,245 @@
           </a:p>
         </p:txBody>
       </p:sp>
+      <p:sp>
+        <p:nvSpPr>
+          <p:cNvPr id="4" name="TextBox 3"/>
+          <p:cNvSpPr txBox="1"/>
+          <p:nvPr/>
+        </p:nvSpPr>
+        <p:spPr>
+          <a:xfrm>
+            <a:off x="457200" y="1463040"/>
+            <a:ext cx="11277295" cy="4572000"/>
+          </a:xfrm>
+          <a:prstGeom prst="rect">
+            <a:avLst/>
+          </a:prstGeom>
+          <a:noFill/>
+        </p:spPr>
+        <p:txBody>
+          <a:bodyPr wrap="square">
+            <a:spAutoFit/>
+          </a:bodyPr>
+          <a:lstStyle/>
+          <a:p>
+            <a:pPr>
+              <a:spcBef>
+                <a:spcPts val="800"/>
+              </a:spcBef>
+              <a:spcAft>
+                <a:spcPts val="800"/>
+              </a:spcAft>
+              <a:defRPr sz="2200">
+                <a:solidFill>
+                  <a:srgbClr val="FFFFFF"/>
+                </a:solidFill>
+              </a:defRPr>
+            </a:pPr>
+            <a:r>
+              <a:t>  Verification Methods</a:t>
+            </a:r>
+          </a:p>
+          <a:p>
+            <a:pPr>
+              <a:spcBef>
+                <a:spcPts val="800"/>
+              </a:spcBef>
+              <a:spcAft>
+                <a:spcPts val="800"/>
+              </a:spcAft>
+              <a:defRPr sz="2200">
+                <a:solidFill>
+                  <a:srgbClr val="FFFFFF"/>
+                </a:solidFill>
+              </a:defRPr>
+            </a:pPr>
+            <a:r>
+              <a:t>      Running linters and formatters (eslint, black, prettier)</a:t>
+            </a:r>
+          </a:p>
+          <a:p>
+            <a:pPr>
+              <a:spcBef>
+                <a:spcPts val="800"/>
+              </a:spcBef>
+              <a:spcAft>
+                <a:spcPts val="800"/>
+              </a:spcAft>
+              <a:defRPr sz="2200">
+                <a:solidFill>
+                  <a:srgbClr val="FFFFFF"/>
+                </a:solidFill>
+              </a:defRPr>
+            </a:pPr>
+            <a:r>
+              <a:t>      Executing test suites (pytest, jest, go test)</a:t>
+            </a:r>
+          </a:p>
+          <a:p>
+            <a:pPr>
+              <a:spcBef>
+                <a:spcPts val="800"/>
+              </a:spcBef>
+              <a:spcAft>
+                <a:spcPts val="800"/>
+              </a:spcAft>
+              <a:defRPr sz="2200">
+                <a:solidFill>
+                  <a:srgbClr val="FFFFFF"/>
+                </a:solidFill>
+              </a:defRPr>
+            </a:pPr>
+            <a:r>
+              <a:t>      Checking command outputs for errors</a:t>
+            </a:r>
+          </a:p>
+          <a:p>
+            <a:pPr>
+              <a:spcBef>
+                <a:spcPts val="800"/>
+              </a:spcBef>
+              <a:spcAft>
+                <a:spcPts val="800"/>
+              </a:spcAft>
+              <a:defRPr sz="2200">
+                <a:solidFill>
+                  <a:srgbClr val="FFFFFF"/>
+                </a:solidFill>
+              </a:defRPr>
+            </a:pPr>
+            <a:r>
+              <a:t>      Validating file syntax (parsing Python, JavaScript, etc.)</a:t>
+            </a:r>
+          </a:p>
+          <a:p>
+            <a:pPr>
+              <a:spcBef>
+                <a:spcPts val="800"/>
+              </a:spcBef>
+              <a:spcAft>
+                <a:spcPts val="800"/>
+              </a:spcAft>
+              <a:defRPr sz="2200">
+                <a:solidFill>
+                  <a:srgbClr val="FFFFFF"/>
+                </a:solidFill>
+              </a:defRPr>
+            </a:pPr>
+            <a:r>
+              <a:t>      Confirming expected side effects occurred</a:t>
+            </a:r>
+          </a:p>
+          <a:p>
+            <a:pPr>
+              <a:spcBef>
+                <a:spcPts val="800"/>
+              </a:spcBef>
+              <a:spcAft>
+                <a:spcPts val="800"/>
+              </a:spcAft>
+              <a:defRPr sz="2200">
+                <a:solidFill>
+                  <a:srgbClr val="FFFFFF"/>
+                </a:solidFill>
+              </a:defRPr>
+            </a:pPr>
+            <a:r>
+              <a:t>  When Verification Fails</a:t>
+            </a:r>
+          </a:p>
+          <a:p>
+            <a:pPr>
+              <a:spcBef>
+                <a:spcPts val="800"/>
+              </a:spcBef>
+              <a:spcAft>
+                <a:spcPts val="800"/>
+              </a:spcAft>
+              <a:defRPr sz="2200">
+                <a:solidFill>
+                  <a:srgbClr val="FFFFFF"/>
+                </a:solidFill>
+              </a:defRPr>
+            </a:pPr>
+            <a:r>
+              <a:t>      Loop back to Read stage with error output</a:t>
+            </a:r>
+          </a:p>
+          <a:p>
+            <a:pPr>
+              <a:spcBef>
+                <a:spcPts val="800"/>
+              </a:spcBef>
+              <a:spcAft>
+                <a:spcPts val="800"/>
+              </a:spcAft>
+              <a:defRPr sz="2200">
+                <a:solidFill>
+                  <a:srgbClr val="FFFFFF"/>
+                </a:solidFill>
+              </a:defRPr>
+            </a:pPr>
+            <a:r>
+              <a:t>      Re-analyze what went wrong</a:t>
+            </a:r>
+          </a:p>
+          <a:p>
+            <a:pPr>
+              <a:spcBef>
+                <a:spcPts val="800"/>
+              </a:spcBef>
+              <a:spcAft>
+                <a:spcPts val="800"/>
+              </a:spcAft>
+              <a:defRPr sz="2200">
+                <a:solidFill>
+                  <a:srgbClr val="FFFFFF"/>
+                </a:solidFill>
+              </a:defRPr>
+            </a:pPr>
+            <a:r>
+              <a:t>      Plan a fix or alternative approach</a:t>
+            </a:r>
+          </a:p>
+          <a:p>
+            <a:pPr>
+              <a:spcBef>
+                <a:spcPts val="800"/>
+              </a:spcBef>
+              <a:spcAft>
+                <a:spcPts val="800"/>
+              </a:spcAft>
+              <a:defRPr sz="2200">
+                <a:solidFill>
+                  <a:srgbClr val="FFFFFF"/>
+                </a:solidFill>
+              </a:defRPr>
+            </a:pPr>
+            <a:r>
+              <a:t>      Execute the fix</a:t>
+            </a:r>
+          </a:p>
+          <a:p>
+            <a:pPr>
+              <a:spcBef>
+                <a:spcPts val="800"/>
+              </a:spcBef>
+              <a:spcAft>
+                <a:spcPts val="800"/>
+              </a:spcAft>
+              <a:defRPr sz="2200">
+                <a:solidFill>
+                  <a:srgbClr val="FFFFFF"/>
+                </a:solidFill>
+              </a:defRPr>
+            </a:pPr>
+            <a:r>
+              <a:t>      Verify again (loop continues until success)</a:t>
+            </a:r>
+          </a:p>
+        </p:txBody>
+      </p:sp>
     </p:spTree>
   </p:cSld>
   <p:clrMapOvr>
@@ -23422,6 +25393,209 @@
           </a:p>
         </p:txBody>
       </p:sp>
+      <p:sp>
+        <p:nvSpPr>
+          <p:cNvPr id="4" name="TextBox 3"/>
+          <p:cNvSpPr txBox="1"/>
+          <p:nvPr/>
+        </p:nvSpPr>
+        <p:spPr>
+          <a:xfrm>
+            <a:off x="457200" y="1463040"/>
+            <a:ext cx="11277295" cy="4572000"/>
+          </a:xfrm>
+          <a:prstGeom prst="rect">
+            <a:avLst/>
+          </a:prstGeom>
+          <a:noFill/>
+        </p:spPr>
+        <p:txBody>
+          <a:bodyPr wrap="square">
+            <a:spAutoFit/>
+          </a:bodyPr>
+          <a:lstStyle/>
+          <a:p>
+            <a:pPr>
+              <a:spcBef>
+                <a:spcPts val="800"/>
+              </a:spcBef>
+              <a:spcAft>
+                <a:spcPts val="800"/>
+              </a:spcAft>
+              <a:defRPr sz="2200">
+                <a:solidFill>
+                  <a:srgbClr val="FFFFFF"/>
+                </a:solidFill>
+              </a:defRPr>
+            </a:pPr>
+            <a:r>
+              <a:t>  The Problem with Big Prompts</a:t>
+            </a:r>
+          </a:p>
+          <a:p>
+            <a:pPr>
+              <a:spcBef>
+                <a:spcPts val="800"/>
+              </a:spcBef>
+              <a:spcAft>
+                <a:spcPts val="800"/>
+              </a:spcAft>
+              <a:defRPr sz="2200">
+                <a:solidFill>
+                  <a:srgbClr val="FFFFFF"/>
+                </a:solidFill>
+              </a:defRPr>
+            </a:pPr>
+            <a:r>
+              <a:t>      One mega-prompt tries to do everything at once</a:t>
+            </a:r>
+          </a:p>
+          <a:p>
+            <a:pPr>
+              <a:spcBef>
+                <a:spcPts val="800"/>
+              </a:spcBef>
+              <a:spcAft>
+                <a:spcPts val="800"/>
+              </a:spcAft>
+              <a:defRPr sz="2200">
+                <a:solidFill>
+                  <a:srgbClr val="FFFFFF"/>
+                </a:solidFill>
+              </a:defRPr>
+            </a:pPr>
+            <a:r>
+              <a:t>      Fails catastrophically in the middle</a:t>
+            </a:r>
+          </a:p>
+          <a:p>
+            <a:pPr>
+              <a:spcBef>
+                <a:spcPts val="800"/>
+              </a:spcBef>
+              <a:spcAft>
+                <a:spcPts val="800"/>
+              </a:spcAft>
+              <a:defRPr sz="2200">
+                <a:solidFill>
+                  <a:srgbClr val="FFFFFF"/>
+                </a:solidFill>
+              </a:defRPr>
+            </a:pPr>
+            <a:r>
+              <a:t>      Hard to debug where it went wrong</a:t>
+            </a:r>
+          </a:p>
+          <a:p>
+            <a:pPr>
+              <a:spcBef>
+                <a:spcPts val="800"/>
+              </a:spcBef>
+              <a:spcAft>
+                <a:spcPts val="800"/>
+              </a:spcAft>
+              <a:defRPr sz="2200">
+                <a:solidFill>
+                  <a:srgbClr val="FFFFFF"/>
+                </a:solidFill>
+              </a:defRPr>
+            </a:pPr>
+            <a:r>
+              <a:t>      Lost progress, start over from scratch</a:t>
+            </a:r>
+          </a:p>
+          <a:p>
+            <a:pPr>
+              <a:spcBef>
+                <a:spcPts val="800"/>
+              </a:spcBef>
+              <a:spcAft>
+                <a:spcPts val="800"/>
+              </a:spcAft>
+              <a:defRPr sz="2200">
+                <a:solidFill>
+                  <a:srgbClr val="FFFFFF"/>
+                </a:solidFill>
+              </a:defRPr>
+            </a:pPr>
+            <a:r>
+              <a:t>  The Power of Small Steps</a:t>
+            </a:r>
+          </a:p>
+          <a:p>
+            <a:pPr>
+              <a:spcBef>
+                <a:spcPts val="800"/>
+              </a:spcBef>
+              <a:spcAft>
+                <a:spcPts val="800"/>
+              </a:spcAft>
+              <a:defRPr sz="2200">
+                <a:solidFill>
+                  <a:srgbClr val="FFFFFF"/>
+                </a:solidFill>
+              </a:defRPr>
+            </a:pPr>
+            <a:r>
+              <a:t>      Break feature into 5 verifiable steps</a:t>
+            </a:r>
+          </a:p>
+          <a:p>
+            <a:pPr>
+              <a:spcBef>
+                <a:spcPts val="800"/>
+              </a:spcBef>
+              <a:spcAft>
+                <a:spcPts val="800"/>
+              </a:spcAft>
+              <a:defRPr sz="2200">
+                <a:solidFill>
+                  <a:srgbClr val="FFFFFF"/>
+                </a:solidFill>
+              </a:defRPr>
+            </a:pPr>
+            <a:r>
+              <a:t>      Each step = concrete, testable output</a:t>
+            </a:r>
+          </a:p>
+          <a:p>
+            <a:pPr>
+              <a:spcBef>
+                <a:spcPts val="800"/>
+              </a:spcBef>
+              <a:spcAft>
+                <a:spcPts val="800"/>
+              </a:spcAft>
+              <a:defRPr sz="2200">
+                <a:solidFill>
+                  <a:srgbClr val="FFFFFF"/>
+                </a:solidFill>
+              </a:defRPr>
+            </a:pPr>
+            <a:r>
+              <a:t>      Failure happens early, easy to fix</a:t>
+            </a:r>
+          </a:p>
+          <a:p>
+            <a:pPr>
+              <a:spcBef>
+                <a:spcPts val="800"/>
+              </a:spcBef>
+              <a:spcAft>
+                <a:spcPts val="800"/>
+              </a:spcAft>
+              <a:defRPr sz="2200">
+                <a:solidFill>
+                  <a:srgbClr val="FFFFFF"/>
+                </a:solidFill>
+              </a:defRPr>
+            </a:pPr>
+            <a:r>
+              <a:t>      Progress is saved at each checkpoint</a:t>
+            </a:r>
+          </a:p>
+        </p:txBody>
+      </p:sp>
     </p:spTree>
   </p:cSld>
   <p:clrMapOvr>
@@ -24283,6 +26457,209 @@
           </a:p>
         </p:txBody>
       </p:sp>
+      <p:sp>
+        <p:nvSpPr>
+          <p:cNvPr id="4" name="TextBox 3"/>
+          <p:cNvSpPr txBox="1"/>
+          <p:nvPr/>
+        </p:nvSpPr>
+        <p:spPr>
+          <a:xfrm>
+            <a:off x="457200" y="1463040"/>
+            <a:ext cx="11277295" cy="4572000"/>
+          </a:xfrm>
+          <a:prstGeom prst="rect">
+            <a:avLst/>
+          </a:prstGeom>
+          <a:noFill/>
+        </p:spPr>
+        <p:txBody>
+          <a:bodyPr wrap="square">
+            <a:spAutoFit/>
+          </a:bodyPr>
+          <a:lstStyle/>
+          <a:p>
+            <a:pPr>
+              <a:spcBef>
+                <a:spcPts val="800"/>
+              </a:spcBef>
+              <a:spcAft>
+                <a:spcPts val="800"/>
+              </a:spcAft>
+              <a:defRPr sz="2200">
+                <a:solidFill>
+                  <a:srgbClr val="FFFFFF"/>
+                </a:solidFill>
+              </a:defRPr>
+            </a:pPr>
+            <a:r>
+              <a:t>  Over-Organized (Fragile)</a:t>
+            </a:r>
+          </a:p>
+          <a:p>
+            <a:pPr>
+              <a:spcBef>
+                <a:spcPts val="800"/>
+              </a:spcBef>
+              <a:spcAft>
+                <a:spcPts val="800"/>
+              </a:spcAft>
+              <a:defRPr sz="2200">
+                <a:solidFill>
+                  <a:srgbClr val="FFFFFF"/>
+                </a:solidFill>
+              </a:defRPr>
+            </a:pPr>
+            <a:r>
+              <a:t>      Deep folder hierarchies: /src/api/v1/endpoints/user/profile/settings/</a:t>
+            </a:r>
+          </a:p>
+          <a:p>
+            <a:pPr>
+              <a:spcBef>
+                <a:spcPts val="800"/>
+              </a:spcBef>
+              <a:spcAft>
+                <a:spcPts val="800"/>
+              </a:spcAft>
+              <a:defRPr sz="2200">
+                <a:solidFill>
+                  <a:srgbClr val="FFFFFF"/>
+                </a:solidFill>
+              </a:defRPr>
+            </a:pPr>
+            <a:r>
+              <a:t>      Many small files scattered across tree</a:t>
+            </a:r>
+          </a:p>
+          <a:p>
+            <a:pPr>
+              <a:spcBef>
+                <a:spcPts val="800"/>
+              </a:spcBef>
+              <a:spcAft>
+                <a:spcPts val="800"/>
+              </a:spcAft>
+              <a:defRPr sz="2200">
+                <a:solidFill>
+                  <a:srgbClr val="FFFFFF"/>
+                </a:solidFill>
+              </a:defRPr>
+            </a:pPr>
+            <a:r>
+              <a:t>      Hard to navigate, easy to lose context</a:t>
+            </a:r>
+          </a:p>
+          <a:p>
+            <a:pPr>
+              <a:spcBef>
+                <a:spcPts val="800"/>
+              </a:spcBef>
+              <a:spcAft>
+                <a:spcPts val="800"/>
+              </a:spcAft>
+              <a:defRPr sz="2200">
+                <a:solidFill>
+                  <a:srgbClr val="FFFFFF"/>
+                </a:solidFill>
+              </a:defRPr>
+            </a:pPr>
+            <a:r>
+              <a:t>      Refactoring = moving dozens of files</a:t>
+            </a:r>
+          </a:p>
+          <a:p>
+            <a:pPr>
+              <a:spcBef>
+                <a:spcPts val="800"/>
+              </a:spcBef>
+              <a:spcAft>
+                <a:spcPts val="800"/>
+              </a:spcAft>
+              <a:defRPr sz="2200">
+                <a:solidFill>
+                  <a:srgbClr val="FFFFFF"/>
+                </a:solidFill>
+              </a:defRPr>
+            </a:pPr>
+            <a:r>
+              <a:t>  Convention-Routed (Robust)</a:t>
+            </a:r>
+          </a:p>
+          <a:p>
+            <a:pPr>
+              <a:spcBef>
+                <a:spcPts val="800"/>
+              </a:spcBef>
+              <a:spcAft>
+                <a:spcPts val="800"/>
+              </a:spcAft>
+              <a:defRPr sz="2200">
+                <a:solidFill>
+                  <a:srgbClr val="FFFFFF"/>
+                </a:solidFill>
+              </a:defRPr>
+            </a:pPr>
+            <a:r>
+              <a:t>      Flat or shallow structure: /src/endpoints/</a:t>
+            </a:r>
+          </a:p>
+          <a:p>
+            <a:pPr>
+              <a:spcBef>
+                <a:spcPts val="800"/>
+              </a:spcBef>
+              <a:spcAft>
+                <a:spcPts val="800"/>
+              </a:spcAft>
+              <a:defRPr sz="2200">
+                <a:solidFill>
+                  <a:srgbClr val="FFFFFF"/>
+                </a:solidFill>
+              </a:defRPr>
+            </a:pPr>
+            <a:r>
+              <a:t>      File naming encodes purpose: user_profile_api.py, user_settings_api.py</a:t>
+            </a:r>
+          </a:p>
+          <a:p>
+            <a:pPr>
+              <a:spcBef>
+                <a:spcPts val="800"/>
+              </a:spcBef>
+              <a:spcAft>
+                <a:spcPts val="800"/>
+              </a:spcAft>
+              <a:defRPr sz="2200">
+                <a:solidFill>
+                  <a:srgbClr val="FFFFFF"/>
+                </a:solidFill>
+              </a:defRPr>
+            </a:pPr>
+            <a:r>
+              <a:t>      Easy to scan, context clear from names</a:t>
+            </a:r>
+          </a:p>
+          <a:p>
+            <a:pPr>
+              <a:spcBef>
+                <a:spcPts val="800"/>
+              </a:spcBef>
+              <a:spcAft>
+                <a:spcPts val="800"/>
+              </a:spcAft>
+              <a:defRPr sz="2200">
+                <a:solidFill>
+                  <a:srgbClr val="FFFFFF"/>
+                </a:solidFill>
+              </a:defRPr>
+            </a:pPr>
+            <a:r>
+              <a:t>      Refactoring = renaming files</a:t>
+            </a:r>
+          </a:p>
+        </p:txBody>
+      </p:sp>
     </p:spTree>
   </p:cSld>
   <p:clrMapOvr>
@@ -24387,6 +26764,83 @@
           </a:p>
         </p:txBody>
       </p:sp>
+      <p:sp>
+        <p:nvSpPr>
+          <p:cNvPr id="4" name="TextBox 3"/>
+          <p:cNvSpPr txBox="1"/>
+          <p:nvPr/>
+        </p:nvSpPr>
+        <p:spPr>
+          <a:xfrm>
+            <a:off x="457200" y="1463040"/>
+            <a:ext cx="11277295" cy="4572000"/>
+          </a:xfrm>
+          <a:prstGeom prst="rect">
+            <a:avLst/>
+          </a:prstGeom>
+          <a:noFill/>
+        </p:spPr>
+        <p:txBody>
+          <a:bodyPr wrap="square">
+            <a:spAutoFit/>
+          </a:bodyPr>
+          <a:lstStyle/>
+          <a:p>
+            <a:pPr>
+              <a:spcBef>
+                <a:spcPts val="800"/>
+              </a:spcBef>
+              <a:spcAft>
+                <a:spcPts val="800"/>
+              </a:spcAft>
+              <a:defRPr sz="2200">
+                <a:solidFill>
+                  <a:srgbClr val="FFFFFF"/>
+                </a:solidFill>
+              </a:defRPr>
+            </a:pPr>
+            <a:r>
+              <a:t>  Topic</a:t>
+            </a:r>
+          </a:p>
+          <a:p>
+            <a:pPr>
+              <a:spcBef>
+                <a:spcPts val="800"/>
+              </a:spcBef>
+              <a:spcAft>
+                <a:spcPts val="800"/>
+              </a:spcAft>
+              <a:defRPr sz="2200">
+                <a:solidFill>
+                  <a:srgbClr val="FFFFFF"/>
+                </a:solidFill>
+              </a:defRPr>
+            </a:pPr>
+            <a:r>
+              <a:t>      Point 1</a:t>
+            </a:r>
+          </a:p>
+          <a:p>
+            <a:pPr>
+              <a:spcBef>
+                <a:spcPts val="800"/>
+              </a:spcBef>
+              <a:spcAft>
+                <a:spcPts val="800"/>
+              </a:spcAft>
+              <a:defRPr sz="2200">
+                <a:solidFill>
+                  <a:srgbClr val="FFFFFF"/>
+                </a:solidFill>
+              </a:defRPr>
+            </a:pPr>
+            <a:r>
+              <a:t>      Point 2</a:t>
+            </a:r>
+          </a:p>
+        </p:txBody>
+      </p:sp>
     </p:spTree>
   </p:cSld>
   <p:clrMapOvr>
@@ -24663,6 +27117,119 @@
           </a:p>
         </p:txBody>
       </p:sp>
+      <p:sp>
+        <p:nvSpPr>
+          <p:cNvPr id="4" name="TextBox 3"/>
+          <p:cNvSpPr txBox="1"/>
+          <p:nvPr/>
+        </p:nvSpPr>
+        <p:spPr>
+          <a:xfrm>
+            <a:off x="457200" y="1463040"/>
+            <a:ext cx="11277295" cy="4572000"/>
+          </a:xfrm>
+          <a:prstGeom prst="rect">
+            <a:avLst/>
+          </a:prstGeom>
+          <a:noFill/>
+        </p:spPr>
+        <p:txBody>
+          <a:bodyPr wrap="square">
+            <a:spAutoFit/>
+          </a:bodyPr>
+          <a:lstStyle/>
+          <a:p>
+            <a:pPr>
+              <a:spcBef>
+                <a:spcPts val="800"/>
+              </a:spcBef>
+              <a:spcAft>
+                <a:spcPts val="800"/>
+              </a:spcAft>
+              <a:defRPr sz="2200">
+                <a:solidFill>
+                  <a:srgbClr val="FFFFFF"/>
+                </a:solidFill>
+              </a:defRPr>
+            </a:pPr>
+            <a:r>
+              <a:t>  A PM's CLAUDE.</a:t>
+            </a:r>
+          </a:p>
+          <a:p>
+            <a:pPr>
+              <a:spcBef>
+                <a:spcPts val="800"/>
+              </a:spcBef>
+              <a:spcAft>
+                <a:spcPts val="800"/>
+              </a:spcAft>
+              <a:defRPr sz="2200">
+                <a:solidFill>
+                  <a:srgbClr val="FFFFFF"/>
+                </a:solidFill>
+              </a:defRPr>
+            </a:pPr>
+            <a:r>
+              <a:t>  Example: 'I'm a PM at a B2B SaaS company.</a:t>
+            </a:r>
+          </a:p>
+          <a:p>
+            <a:pPr>
+              <a:spcBef>
+                <a:spcPts val="800"/>
+              </a:spcBef>
+              <a:spcAft>
+                <a:spcPts val="800"/>
+              </a:spcAft>
+              <a:defRPr sz="2200">
+                <a:solidFill>
+                  <a:srgbClr val="FFFFFF"/>
+                </a:solidFill>
+              </a:defRPr>
+            </a:pPr>
+            <a:r>
+              <a:t>  Claude reads this automatically — no more starting every conversation with background info.</a:t>
+            </a:r>
+          </a:p>
+          <a:p>
+            <a:pPr>
+              <a:spcBef>
+                <a:spcPts val="800"/>
+              </a:spcBef>
+              <a:spcAft>
+                <a:spcPts val="800"/>
+              </a:spcAft>
+              <a:defRPr sz="2200">
+                <a:solidFill>
+                  <a:srgbClr val="FFFFFF"/>
+                </a:solidFill>
+              </a:defRPr>
+            </a:pPr>
+            <a:r>
+              <a:t>  Source: Mohit Aggarwal's 'Claude Code for Product Managers' — invest 15 min, save hours.</a:t>
+            </a:r>
+          </a:p>
+          <a:p>
+            <a:pPr>
+              <a:spcBef>
+                <a:spcPts val="800"/>
+              </a:spcBef>
+              <a:spcAft>
+                <a:spcPts val="800"/>
+              </a:spcAft>
+              <a:defRPr sz="2200">
+                <a:solidFill>
+                  <a:srgbClr val="FFFFFF"/>
+                </a:solidFill>
+              </a:defRPr>
+            </a:pPr>
+            <a:r>
+              <a:t>  This ties directly to Engineering Principle #10: Build for Restart, Not Perfection — CLAUDE.</a:t>
+            </a:r>
+          </a:p>
+        </p:txBody>
+      </p:sp>
     </p:spTree>
   </p:cSld>
   <p:clrMapOvr>
@@ -24828,6 +27395,119 @@
           </a:p>
         </p:txBody>
       </p:sp>
+      <p:sp>
+        <p:nvSpPr>
+          <p:cNvPr id="4" name="TextBox 3"/>
+          <p:cNvSpPr txBox="1"/>
+          <p:nvPr/>
+        </p:nvSpPr>
+        <p:spPr>
+          <a:xfrm>
+            <a:off x="457200" y="1463040"/>
+            <a:ext cx="11277295" cy="4572000"/>
+          </a:xfrm>
+          <a:prstGeom prst="rect">
+            <a:avLst/>
+          </a:prstGeom>
+          <a:noFill/>
+        </p:spPr>
+        <p:txBody>
+          <a:bodyPr wrap="square">
+            <a:spAutoFit/>
+          </a:bodyPr>
+          <a:lstStyle/>
+          <a:p>
+            <a:pPr>
+              <a:spcBef>
+                <a:spcPts val="800"/>
+              </a:spcBef>
+              <a:spcAft>
+                <a:spcPts val="800"/>
+              </a:spcAft>
+              <a:defRPr sz="2200">
+                <a:solidFill>
+                  <a:srgbClr val="FFFFFF"/>
+                </a:solidFill>
+              </a:defRPr>
+            </a:pPr>
+            <a:r>
+              <a:t>  Pruning rule: 'Would removing this line cause Claude to make mistakes? If not, cut it.</a:t>
+            </a:r>
+          </a:p>
+          <a:p>
+            <a:pPr>
+              <a:spcBef>
+                <a:spcPts val="800"/>
+              </a:spcBef>
+              <a:spcAft>
+                <a:spcPts val="800"/>
+              </a:spcAft>
+              <a:defRPr sz="2200">
+                <a:solidFill>
+                  <a:srgbClr val="FFFFFF"/>
+                </a:solidFill>
+              </a:defRPr>
+            </a:pPr>
+            <a:r>
+              <a:t>  Monthly review cadence — put it on your calendar.</a:t>
+            </a:r>
+          </a:p>
+          <a:p>
+            <a:pPr>
+              <a:spcBef>
+                <a:spcPts val="800"/>
+              </a:spcBef>
+              <a:spcAft>
+                <a:spcPts val="800"/>
+              </a:spcAft>
+              <a:defRPr sz="2200">
+                <a:solidFill>
+                  <a:srgbClr val="FFFFFF"/>
+                </a:solidFill>
+              </a:defRPr>
+            </a:pPr>
+            <a:r>
+              <a:t>  Signs of bloat: Claude following old conventions you've abandoned, conflicting rules, generic advice that adds no value.</a:t>
+            </a:r>
+          </a:p>
+          <a:p>
+            <a:pPr>
+              <a:spcBef>
+                <a:spcPts val="800"/>
+              </a:spcBef>
+              <a:spcAft>
+                <a:spcPts val="800"/>
+              </a:spcAft>
+              <a:defRPr sz="2200">
+                <a:solidFill>
+                  <a:srgbClr val="FFFFFF"/>
+                </a:solidFill>
+              </a:defRPr>
+            </a:pPr>
+            <a:r>
+              <a:t>  Short, specific CLAUDE.</a:t>
+            </a:r>
+          </a:p>
+          <a:p>
+            <a:pPr>
+              <a:spcBef>
+                <a:spcPts val="800"/>
+              </a:spcBef>
+              <a:spcAft>
+                <a:spcPts val="800"/>
+              </a:spcAft>
+              <a:defRPr sz="2200">
+                <a:solidFill>
+                  <a:srgbClr val="FFFFFF"/>
+                </a:solidFill>
+              </a:defRPr>
+            </a:pPr>
+            <a:r>
+              <a:t>  Source: Reza Rezvani — 'I spent months blaming Claude for not understanding my project while doing nothing to help it...</a:t>
+            </a:r>
+          </a:p>
+        </p:txBody>
+      </p:sp>
     </p:spTree>
   </p:cSld>
   <p:clrMapOvr>
@@ -25175,6 +27855,83 @@
           </a:p>
         </p:txBody>
       </p:sp>
+      <p:sp>
+        <p:nvSpPr>
+          <p:cNvPr id="4" name="TextBox 3"/>
+          <p:cNvSpPr txBox="1"/>
+          <p:nvPr/>
+        </p:nvSpPr>
+        <p:spPr>
+          <a:xfrm>
+            <a:off x="457200" y="1463040"/>
+            <a:ext cx="11277295" cy="4572000"/>
+          </a:xfrm>
+          <a:prstGeom prst="rect">
+            <a:avLst/>
+          </a:prstGeom>
+          <a:noFill/>
+        </p:spPr>
+        <p:txBody>
+          <a:bodyPr wrap="square">
+            <a:spAutoFit/>
+          </a:bodyPr>
+          <a:lstStyle/>
+          <a:p>
+            <a:pPr>
+              <a:spcBef>
+                <a:spcPts val="800"/>
+              </a:spcBef>
+              <a:spcAft>
+                <a:spcPts val="800"/>
+              </a:spcAft>
+              <a:defRPr sz="2200">
+                <a:solidFill>
+                  <a:srgbClr val="FFFFFF"/>
+                </a:solidFill>
+              </a:defRPr>
+            </a:pPr>
+            <a:r>
+              <a:t>  Topic</a:t>
+            </a:r>
+          </a:p>
+          <a:p>
+            <a:pPr>
+              <a:spcBef>
+                <a:spcPts val="800"/>
+              </a:spcBef>
+              <a:spcAft>
+                <a:spcPts val="800"/>
+              </a:spcAft>
+              <a:defRPr sz="2200">
+                <a:solidFill>
+                  <a:srgbClr val="FFFFFF"/>
+                </a:solidFill>
+              </a:defRPr>
+            </a:pPr>
+            <a:r>
+              <a:t>      Point 1</a:t>
+            </a:r>
+          </a:p>
+          <a:p>
+            <a:pPr>
+              <a:spcBef>
+                <a:spcPts val="800"/>
+              </a:spcBef>
+              <a:spcAft>
+                <a:spcPts val="800"/>
+              </a:spcAft>
+              <a:defRPr sz="2200">
+                <a:solidFill>
+                  <a:srgbClr val="FFFFFF"/>
+                </a:solidFill>
+              </a:defRPr>
+            </a:pPr>
+            <a:r>
+              <a:t>      Point 2</a:t>
+            </a:r>
+          </a:p>
+        </p:txBody>
+      </p:sp>
     </p:spTree>
   </p:cSld>
   <p:clrMapOvr>
@@ -25279,6 +28036,83 @@
           </a:p>
         </p:txBody>
       </p:sp>
+      <p:sp>
+        <p:nvSpPr>
+          <p:cNvPr id="4" name="TextBox 3"/>
+          <p:cNvSpPr txBox="1"/>
+          <p:nvPr/>
+        </p:nvSpPr>
+        <p:spPr>
+          <a:xfrm>
+            <a:off x="457200" y="1463040"/>
+            <a:ext cx="11277295" cy="4572000"/>
+          </a:xfrm>
+          <a:prstGeom prst="rect">
+            <a:avLst/>
+          </a:prstGeom>
+          <a:noFill/>
+        </p:spPr>
+        <p:txBody>
+          <a:bodyPr wrap="square">
+            <a:spAutoFit/>
+          </a:bodyPr>
+          <a:lstStyle/>
+          <a:p>
+            <a:pPr>
+              <a:spcBef>
+                <a:spcPts val="800"/>
+              </a:spcBef>
+              <a:spcAft>
+                <a:spcPts val="800"/>
+              </a:spcAft>
+              <a:defRPr sz="2200">
+                <a:solidFill>
+                  <a:srgbClr val="FFFFFF"/>
+                </a:solidFill>
+              </a:defRPr>
+            </a:pPr>
+            <a:r>
+              <a:t>  Topic</a:t>
+            </a:r>
+          </a:p>
+          <a:p>
+            <a:pPr>
+              <a:spcBef>
+                <a:spcPts val="800"/>
+              </a:spcBef>
+              <a:spcAft>
+                <a:spcPts val="800"/>
+              </a:spcAft>
+              <a:defRPr sz="2200">
+                <a:solidFill>
+                  <a:srgbClr val="FFFFFF"/>
+                </a:solidFill>
+              </a:defRPr>
+            </a:pPr>
+            <a:r>
+              <a:t>      Point 1</a:t>
+            </a:r>
+          </a:p>
+          <a:p>
+            <a:pPr>
+              <a:spcBef>
+                <a:spcPts val="800"/>
+              </a:spcBef>
+              <a:spcAft>
+                <a:spcPts val="800"/>
+              </a:spcAft>
+              <a:defRPr sz="2200">
+                <a:solidFill>
+                  <a:srgbClr val="FFFFFF"/>
+                </a:solidFill>
+              </a:defRPr>
+            </a:pPr>
+            <a:r>
+              <a:t>      Point 2</a:t>
+            </a:r>
+          </a:p>
+        </p:txBody>
+      </p:sp>
     </p:spTree>
   </p:cSld>
   <p:clrMapOvr>
@@ -26000,6 +28834,83 @@
           </a:p>
         </p:txBody>
       </p:sp>
+      <p:sp>
+        <p:nvSpPr>
+          <p:cNvPr id="4" name="TextBox 3"/>
+          <p:cNvSpPr txBox="1"/>
+          <p:nvPr/>
+        </p:nvSpPr>
+        <p:spPr>
+          <a:xfrm>
+            <a:off x="457200" y="1463040"/>
+            <a:ext cx="11277295" cy="4572000"/>
+          </a:xfrm>
+          <a:prstGeom prst="rect">
+            <a:avLst/>
+          </a:prstGeom>
+          <a:noFill/>
+        </p:spPr>
+        <p:txBody>
+          <a:bodyPr wrap="square">
+            <a:spAutoFit/>
+          </a:bodyPr>
+          <a:lstStyle/>
+          <a:p>
+            <a:pPr>
+              <a:spcBef>
+                <a:spcPts val="800"/>
+              </a:spcBef>
+              <a:spcAft>
+                <a:spcPts val="800"/>
+              </a:spcAft>
+              <a:defRPr sz="2200">
+                <a:solidFill>
+                  <a:srgbClr val="FFFFFF"/>
+                </a:solidFill>
+              </a:defRPr>
+            </a:pPr>
+            <a:r>
+              <a:t>  Topic</a:t>
+            </a:r>
+          </a:p>
+          <a:p>
+            <a:pPr>
+              <a:spcBef>
+                <a:spcPts val="800"/>
+              </a:spcBef>
+              <a:spcAft>
+                <a:spcPts val="800"/>
+              </a:spcAft>
+              <a:defRPr sz="2200">
+                <a:solidFill>
+                  <a:srgbClr val="FFFFFF"/>
+                </a:solidFill>
+              </a:defRPr>
+            </a:pPr>
+            <a:r>
+              <a:t>      Point 1</a:t>
+            </a:r>
+          </a:p>
+          <a:p>
+            <a:pPr>
+              <a:spcBef>
+                <a:spcPts val="800"/>
+              </a:spcBef>
+              <a:spcAft>
+                <a:spcPts val="800"/>
+              </a:spcAft>
+              <a:defRPr sz="2200">
+                <a:solidFill>
+                  <a:srgbClr val="FFFFFF"/>
+                </a:solidFill>
+              </a:defRPr>
+            </a:pPr>
+            <a:r>
+              <a:t>      Point 2</a:t>
+            </a:r>
+          </a:p>
+        </p:txBody>
+      </p:sp>
     </p:spTree>
   </p:cSld>
   <p:clrMapOvr>
@@ -26104,6 +29015,83 @@
           </a:p>
         </p:txBody>
       </p:sp>
+      <p:sp>
+        <p:nvSpPr>
+          <p:cNvPr id="4" name="TextBox 3"/>
+          <p:cNvSpPr txBox="1"/>
+          <p:nvPr/>
+        </p:nvSpPr>
+        <p:spPr>
+          <a:xfrm>
+            <a:off x="457200" y="1463040"/>
+            <a:ext cx="11277295" cy="4572000"/>
+          </a:xfrm>
+          <a:prstGeom prst="rect">
+            <a:avLst/>
+          </a:prstGeom>
+          <a:noFill/>
+        </p:spPr>
+        <p:txBody>
+          <a:bodyPr wrap="square">
+            <a:spAutoFit/>
+          </a:bodyPr>
+          <a:lstStyle/>
+          <a:p>
+            <a:pPr>
+              <a:spcBef>
+                <a:spcPts val="800"/>
+              </a:spcBef>
+              <a:spcAft>
+                <a:spcPts val="800"/>
+              </a:spcAft>
+              <a:defRPr sz="2200">
+                <a:solidFill>
+                  <a:srgbClr val="FFFFFF"/>
+                </a:solidFill>
+              </a:defRPr>
+            </a:pPr>
+            <a:r>
+              <a:t>  Topic</a:t>
+            </a:r>
+          </a:p>
+          <a:p>
+            <a:pPr>
+              <a:spcBef>
+                <a:spcPts val="800"/>
+              </a:spcBef>
+              <a:spcAft>
+                <a:spcPts val="800"/>
+              </a:spcAft>
+              <a:defRPr sz="2200">
+                <a:solidFill>
+                  <a:srgbClr val="FFFFFF"/>
+                </a:solidFill>
+              </a:defRPr>
+            </a:pPr>
+            <a:r>
+              <a:t>      Point 1</a:t>
+            </a:r>
+          </a:p>
+          <a:p>
+            <a:pPr>
+              <a:spcBef>
+                <a:spcPts val="800"/>
+              </a:spcBef>
+              <a:spcAft>
+                <a:spcPts val="800"/>
+              </a:spcAft>
+              <a:defRPr sz="2200">
+                <a:solidFill>
+                  <a:srgbClr val="FFFFFF"/>
+                </a:solidFill>
+              </a:defRPr>
+            </a:pPr>
+            <a:r>
+              <a:t>      Point 2</a:t>
+            </a:r>
+          </a:p>
+        </p:txBody>
+      </p:sp>
     </p:spTree>
   </p:cSld>
   <p:clrMapOvr>
@@ -26557,6 +29545,137 @@
           </a:p>
         </p:txBody>
       </p:sp>
+      <p:sp>
+        <p:nvSpPr>
+          <p:cNvPr id="4" name="TextBox 3"/>
+          <p:cNvSpPr txBox="1"/>
+          <p:nvPr/>
+        </p:nvSpPr>
+        <p:spPr>
+          <a:xfrm>
+            <a:off x="457200" y="1463040"/>
+            <a:ext cx="11277295" cy="4572000"/>
+          </a:xfrm>
+          <a:prstGeom prst="rect">
+            <a:avLst/>
+          </a:prstGeom>
+          <a:noFill/>
+        </p:spPr>
+        <p:txBody>
+          <a:bodyPr wrap="square">
+            <a:spAutoFit/>
+          </a:bodyPr>
+          <a:lstStyle/>
+          <a:p>
+            <a:pPr>
+              <a:spcBef>
+                <a:spcPts val="800"/>
+              </a:spcBef>
+              <a:spcAft>
+                <a:spcPts val="800"/>
+              </a:spcAft>
+              <a:defRPr sz="2200">
+                <a:solidFill>
+                  <a:srgbClr val="FFFFFF"/>
+                </a:solidFill>
+              </a:defRPr>
+            </a:pPr>
+            <a:r>
+              <a:t>  Chunking Strategy</a:t>
+            </a:r>
+          </a:p>
+          <a:p>
+            <a:pPr>
+              <a:spcBef>
+                <a:spcPts val="800"/>
+              </a:spcBef>
+              <a:spcAft>
+                <a:spcPts val="800"/>
+              </a:spcAft>
+              <a:defRPr sz="2200">
+                <a:solidFill>
+                  <a:srgbClr val="FFFFFF"/>
+                </a:solidFill>
+              </a:defRPr>
+            </a:pPr>
+            <a:r>
+              <a:t>      Work on one module at a time</a:t>
+            </a:r>
+          </a:p>
+          <a:p>
+            <a:pPr>
+              <a:spcBef>
+                <a:spcPts val="800"/>
+              </a:spcBef>
+              <a:spcAft>
+                <a:spcPts val="800"/>
+              </a:spcAft>
+              <a:defRPr sz="2200">
+                <a:solidFill>
+                  <a:srgbClr val="FFFFFF"/>
+                </a:solidFill>
+              </a:defRPr>
+            </a:pPr>
+            <a:r>
+              <a:t>      Complete and verify before moving to next</a:t>
+            </a:r>
+          </a:p>
+          <a:p>
+            <a:pPr>
+              <a:spcBef>
+                <a:spcPts val="800"/>
+              </a:spcBef>
+              <a:spcAft>
+                <a:spcPts val="800"/>
+              </a:spcAft>
+              <a:defRPr sz="2200">
+                <a:solidFill>
+                  <a:srgbClr val="FFFFFF"/>
+                </a:solidFill>
+              </a:defRPr>
+            </a:pPr>
+            <a:r>
+              <a:t>  Fresh Sessions</a:t>
+            </a:r>
+          </a:p>
+          <a:p>
+            <a:pPr>
+              <a:spcBef>
+                <a:spcPts val="800"/>
+              </a:spcBef>
+              <a:spcAft>
+                <a:spcPts val="800"/>
+              </a:spcAft>
+              <a:defRPr sz="2200">
+                <a:solidFill>
+                  <a:srgbClr val="FFFFFF"/>
+                </a:solidFill>
+              </a:defRPr>
+            </a:pPr>
+            <a:r>
+              <a:t>      /clear between distinct tasks</a:t>
+            </a:r>
+          </a:p>
+          <a:p>
+            <a:pPr>
+              <a:spcBef>
+                <a:spcPts val="800"/>
+              </a:spcBef>
+              <a:spcAft>
+                <a:spcPts val="800"/>
+              </a:spcAft>
+              <a:defRPr sz="2200">
+                <a:solidFill>
+                  <a:srgbClr val="FFFFFF"/>
+                </a:solidFill>
+              </a:defRPr>
+            </a:pPr>
+            <a:r>
+              <a:t>      Start new session for unrelated work</a:t>
+            </a:r>
+          </a:p>
+        </p:txBody>
+      </p:sp>
     </p:spTree>
   </p:cSld>
   <p:clrMapOvr>
@@ -26661,6 +29780,137 @@
           </a:p>
         </p:txBody>
       </p:sp>
+      <p:sp>
+        <p:nvSpPr>
+          <p:cNvPr id="4" name="TextBox 3"/>
+          <p:cNvSpPr txBox="1"/>
+          <p:nvPr/>
+        </p:nvSpPr>
+        <p:spPr>
+          <a:xfrm>
+            <a:off x="457200" y="1463040"/>
+            <a:ext cx="11277295" cy="4572000"/>
+          </a:xfrm>
+          <a:prstGeom prst="rect">
+            <a:avLst/>
+          </a:prstGeom>
+          <a:noFill/>
+        </p:spPr>
+        <p:txBody>
+          <a:bodyPr wrap="square">
+            <a:spAutoFit/>
+          </a:bodyPr>
+          <a:lstStyle/>
+          <a:p>
+            <a:pPr>
+              <a:spcBef>
+                <a:spcPts val="800"/>
+              </a:spcBef>
+              <a:spcAft>
+                <a:spcPts val="800"/>
+              </a:spcAft>
+              <a:defRPr sz="2200">
+                <a:solidFill>
+                  <a:srgbClr val="FFFFFF"/>
+                </a:solidFill>
+              </a:defRPr>
+            </a:pPr>
+            <a:r>
+              <a:t>  Context window is finite — currently 200K tokens for Claude, but effective quality degrades well before the limit.</a:t>
+            </a:r>
+          </a:p>
+          <a:p>
+            <a:pPr>
+              <a:spcBef>
+                <a:spcPts val="800"/>
+              </a:spcBef>
+              <a:spcAft>
+                <a:spcPts val="800"/>
+              </a:spcAft>
+              <a:defRPr sz="2200">
+                <a:solidFill>
+                  <a:srgbClr val="FFFFFF"/>
+                </a:solidFill>
+              </a:defRPr>
+            </a:pPr>
+            <a:r>
+              <a:t>  MCP tools: each server registers tool descriptions that stay in context permanently during the session.</a:t>
+            </a:r>
+          </a:p>
+          <a:p>
+            <a:pPr>
+              <a:spcBef>
+                <a:spcPts val="800"/>
+              </a:spcBef>
+              <a:spcAft>
+                <a:spcPts val="800"/>
+              </a:spcAft>
+              <a:defRPr sz="2200">
+                <a:solidFill>
+                  <a:srgbClr val="FFFFFF"/>
+                </a:solidFill>
+              </a:defRPr>
+            </a:pPr>
+            <a:r>
+              <a:t>  Solution: Only enable MCP servers you actually need for the current task.</a:t>
+            </a:r>
+          </a:p>
+          <a:p>
+            <a:pPr>
+              <a:spcBef>
+                <a:spcPts val="800"/>
+              </a:spcBef>
+              <a:spcAft>
+                <a:spcPts val="800"/>
+              </a:spcAft>
+              <a:defRPr sz="2200">
+                <a:solidFill>
+                  <a:srgbClr val="FFFFFF"/>
+                </a:solidFill>
+              </a:defRPr>
+            </a:pPr>
+            <a:r>
+              <a:t>  /cost shows your current token usage — check it periodically.</a:t>
+            </a:r>
+          </a:p>
+          <a:p>
+            <a:pPr>
+              <a:spcBef>
+                <a:spcPts val="800"/>
+              </a:spcBef>
+              <a:spcAft>
+                <a:spcPts val="800"/>
+              </a:spcAft>
+              <a:defRPr sz="2200">
+                <a:solidFill>
+                  <a:srgbClr val="FFFFFF"/>
+                </a:solidFill>
+              </a:defRPr>
+            </a:pPr>
+            <a:r>
+              <a:t>  /compact summarizes conversation history to free up context without losing key decisions.</a:t>
+            </a:r>
+          </a:p>
+          <a:p>
+            <a:pPr>
+              <a:spcBef>
+                <a:spcPts val="800"/>
+              </a:spcBef>
+              <a:spcAft>
+                <a:spcPts val="800"/>
+              </a:spcAft>
+              <a:defRPr sz="2200">
+                <a:solidFill>
+                  <a:srgbClr val="FFFFFF"/>
+                </a:solidFill>
+              </a:defRPr>
+            </a:pPr>
+            <a:r>
+              <a:t>  Source: Reza Rezvani — monitoring context was the second major breakthrough after Plan Mode.</a:t>
+            </a:r>
+          </a:p>
+        </p:txBody>
+      </p:sp>
     </p:spTree>
   </p:cSld>
   <p:clrMapOvr>
@@ -27444,6 +30694,227 @@
           </a:p>
         </p:txBody>
       </p:sp>
+      <p:sp>
+        <p:nvSpPr>
+          <p:cNvPr id="4" name="TextBox 3"/>
+          <p:cNvSpPr txBox="1"/>
+          <p:nvPr/>
+        </p:nvSpPr>
+        <p:spPr>
+          <a:xfrm>
+            <a:off x="457200" y="1463040"/>
+            <a:ext cx="11277295" cy="4572000"/>
+          </a:xfrm>
+          <a:prstGeom prst="rect">
+            <a:avLst/>
+          </a:prstGeom>
+          <a:noFill/>
+        </p:spPr>
+        <p:txBody>
+          <a:bodyPr wrap="square">
+            <a:spAutoFit/>
+          </a:bodyPr>
+          <a:lstStyle/>
+          <a:p>
+            <a:pPr>
+              <a:spcBef>
+                <a:spcPts val="800"/>
+              </a:spcBef>
+              <a:spcAft>
+                <a:spcPts val="800"/>
+              </a:spcAft>
+              <a:defRPr sz="2200">
+                <a:solidFill>
+                  <a:srgbClr val="FFFFFF"/>
+                </a:solidFill>
+              </a:defRPr>
+            </a:pPr>
+            <a:r>
+              <a:t>  Session Management</a:t>
+            </a:r>
+          </a:p>
+          <a:p>
+            <a:pPr>
+              <a:spcBef>
+                <a:spcPts val="800"/>
+              </a:spcBef>
+              <a:spcAft>
+                <a:spcPts val="800"/>
+              </a:spcAft>
+              <a:defRPr sz="2200">
+                <a:solidFill>
+                  <a:srgbClr val="FFFFFF"/>
+                </a:solidFill>
+              </a:defRPr>
+            </a:pPr>
+            <a:r>
+              <a:t>      /init - Start fresh session</a:t>
+            </a:r>
+          </a:p>
+          <a:p>
+            <a:pPr>
+              <a:spcBef>
+                <a:spcPts val="800"/>
+              </a:spcBef>
+              <a:spcAft>
+                <a:spcPts val="800"/>
+              </a:spcAft>
+              <a:defRPr sz="2200">
+                <a:solidFill>
+                  <a:srgbClr val="FFFFFF"/>
+                </a:solidFill>
+              </a:defRPr>
+            </a:pPr>
+            <a:r>
+              <a:t>      /clear - Clear history</a:t>
+            </a:r>
+          </a:p>
+          <a:p>
+            <a:pPr>
+              <a:spcBef>
+                <a:spcPts val="800"/>
+              </a:spcBef>
+              <a:spcAft>
+                <a:spcPts val="800"/>
+              </a:spcAft>
+              <a:defRPr sz="2200">
+                <a:solidFill>
+                  <a:srgbClr val="FFFFFF"/>
+                </a:solidFill>
+              </a:defRPr>
+            </a:pPr>
+            <a:r>
+              <a:t>      /compact - Summarize conversation</a:t>
+            </a:r>
+          </a:p>
+          <a:p>
+            <a:pPr>
+              <a:spcBef>
+                <a:spcPts val="800"/>
+              </a:spcBef>
+              <a:spcAft>
+                <a:spcPts val="800"/>
+              </a:spcAft>
+              <a:defRPr sz="2200">
+                <a:solidFill>
+                  <a:srgbClr val="FFFFFF"/>
+                </a:solidFill>
+              </a:defRPr>
+            </a:pPr>
+            <a:r>
+              <a:t>  Model &amp; Output</a:t>
+            </a:r>
+          </a:p>
+          <a:p>
+            <a:pPr>
+              <a:spcBef>
+                <a:spcPts val="800"/>
+              </a:spcBef>
+              <a:spcAft>
+                <a:spcPts val="800"/>
+              </a:spcAft>
+              <a:defRPr sz="2200">
+                <a:solidFill>
+                  <a:srgbClr val="FFFFFF"/>
+                </a:solidFill>
+              </a:defRPr>
+            </a:pPr>
+            <a:r>
+              <a:t>      /model - Switch models</a:t>
+            </a:r>
+          </a:p>
+          <a:p>
+            <a:pPr>
+              <a:spcBef>
+                <a:spcPts val="800"/>
+              </a:spcBef>
+              <a:spcAft>
+                <a:spcPts val="800"/>
+              </a:spcAft>
+              <a:defRPr sz="2200">
+                <a:solidFill>
+                  <a:srgbClr val="FFFFFF"/>
+                </a:solidFill>
+              </a:defRPr>
+            </a:pPr>
+            <a:r>
+              <a:t>      /thinking - Toggle reasoning</a:t>
+            </a:r>
+          </a:p>
+          <a:p>
+            <a:pPr>
+              <a:spcBef>
+                <a:spcPts val="800"/>
+              </a:spcBef>
+              <a:spcAft>
+                <a:spcPts val="800"/>
+              </a:spcAft>
+              <a:defRPr sz="2200">
+                <a:solidFill>
+                  <a:srgbClr val="FFFFFF"/>
+                </a:solidFill>
+              </a:defRPr>
+            </a:pPr>
+            <a:r>
+              <a:t>      /cost - Show token usage</a:t>
+            </a:r>
+          </a:p>
+          <a:p>
+            <a:pPr>
+              <a:spcBef>
+                <a:spcPts val="800"/>
+              </a:spcBef>
+              <a:spcAft>
+                <a:spcPts val="800"/>
+              </a:spcAft>
+              <a:defRPr sz="2200">
+                <a:solidFill>
+                  <a:srgbClr val="FFFFFF"/>
+                </a:solidFill>
+              </a:defRPr>
+            </a:pPr>
+            <a:r>
+              <a:t>  Permissions</a:t>
+            </a:r>
+          </a:p>
+          <a:p>
+            <a:pPr>
+              <a:spcBef>
+                <a:spcPts val="800"/>
+              </a:spcBef>
+              <a:spcAft>
+                <a:spcPts val="800"/>
+              </a:spcAft>
+              <a:defRPr sz="2200">
+                <a:solidFill>
+                  <a:srgbClr val="FFFFFF"/>
+                </a:solidFill>
+              </a:defRPr>
+            </a:pPr>
+            <a:r>
+              <a:t>      /permissions - View/change level</a:t>
+            </a:r>
+          </a:p>
+          <a:p>
+            <a:pPr>
+              <a:spcBef>
+                <a:spcPts val="800"/>
+              </a:spcBef>
+              <a:spcAft>
+                <a:spcPts val="800"/>
+              </a:spcAft>
+              <a:defRPr sz="2200">
+                <a:solidFill>
+                  <a:srgbClr val="FFFFFF"/>
+                </a:solidFill>
+              </a:defRPr>
+            </a:pPr>
+            <a:r>
+              <a:t>      /allowed-tools - List enabled tools</a:t>
+            </a:r>
+          </a:p>
+        </p:txBody>
+      </p:sp>
     </p:spTree>
   </p:cSld>
   <p:clrMapOvr>
@@ -27548,6 +31019,191 @@
           </a:p>
         </p:txBody>
       </p:sp>
+      <p:sp>
+        <p:nvSpPr>
+          <p:cNvPr id="4" name="TextBox 3"/>
+          <p:cNvSpPr txBox="1"/>
+          <p:nvPr/>
+        </p:nvSpPr>
+        <p:spPr>
+          <a:xfrm>
+            <a:off x="457200" y="1463040"/>
+            <a:ext cx="11277295" cy="4572000"/>
+          </a:xfrm>
+          <a:prstGeom prst="rect">
+            <a:avLst/>
+          </a:prstGeom>
+          <a:noFill/>
+        </p:spPr>
+        <p:txBody>
+          <a:bodyPr wrap="square">
+            <a:spAutoFit/>
+          </a:bodyPr>
+          <a:lstStyle/>
+          <a:p>
+            <a:pPr>
+              <a:spcBef>
+                <a:spcPts val="800"/>
+              </a:spcBef>
+              <a:spcAft>
+                <a:spcPts val="800"/>
+              </a:spcAft>
+              <a:defRPr sz="2200">
+                <a:solidFill>
+                  <a:srgbClr val="FFFFFF"/>
+                </a:solidFill>
+              </a:defRPr>
+            </a:pPr>
+            <a:r>
+              <a:t>  /init</a:t>
+            </a:r>
+          </a:p>
+          <a:p>
+            <a:pPr>
+              <a:spcBef>
+                <a:spcPts val="800"/>
+              </a:spcBef>
+              <a:spcAft>
+                <a:spcPts val="800"/>
+              </a:spcAft>
+              <a:defRPr sz="2200">
+                <a:solidFill>
+                  <a:srgbClr val="FFFFFF"/>
+                </a:solidFill>
+              </a:defRPr>
+            </a:pPr>
+            <a:r>
+              <a:t>      Starts completely fresh session</a:t>
+            </a:r>
+          </a:p>
+          <a:p>
+            <a:pPr>
+              <a:spcBef>
+                <a:spcPts val="800"/>
+              </a:spcBef>
+              <a:spcAft>
+                <a:spcPts val="800"/>
+              </a:spcAft>
+              <a:defRPr sz="2200">
+                <a:solidFill>
+                  <a:srgbClr val="FFFFFF"/>
+                </a:solidFill>
+              </a:defRPr>
+            </a:pPr>
+            <a:r>
+              <a:t>      Clears all context and history</a:t>
+            </a:r>
+          </a:p>
+          <a:p>
+            <a:pPr>
+              <a:spcBef>
+                <a:spcPts val="800"/>
+              </a:spcBef>
+              <a:spcAft>
+                <a:spcPts val="800"/>
+              </a:spcAft>
+              <a:defRPr sz="2200">
+                <a:solidFill>
+                  <a:srgbClr val="FFFFFF"/>
+                </a:solidFill>
+              </a:defRPr>
+            </a:pPr>
+            <a:r>
+              <a:t>  /clear</a:t>
+            </a:r>
+          </a:p>
+          <a:p>
+            <a:pPr>
+              <a:spcBef>
+                <a:spcPts val="800"/>
+              </a:spcBef>
+              <a:spcAft>
+                <a:spcPts val="800"/>
+              </a:spcAft>
+              <a:defRPr sz="2200">
+                <a:solidFill>
+                  <a:srgbClr val="FFFFFF"/>
+                </a:solidFill>
+              </a:defRPr>
+            </a:pPr>
+            <a:r>
+              <a:t>      Clears conversation history</a:t>
+            </a:r>
+          </a:p>
+          <a:p>
+            <a:pPr>
+              <a:spcBef>
+                <a:spcPts val="800"/>
+              </a:spcBef>
+              <a:spcAft>
+                <a:spcPts val="800"/>
+              </a:spcAft>
+              <a:defRPr sz="2200">
+                <a:solidFill>
+                  <a:srgbClr val="FFFFFF"/>
+                </a:solidFill>
+              </a:defRPr>
+            </a:pPr>
+            <a:r>
+              <a:t>      Keeps CLAUDE.md and file tree</a:t>
+            </a:r>
+          </a:p>
+          <a:p>
+            <a:pPr>
+              <a:spcBef>
+                <a:spcPts val="800"/>
+              </a:spcBef>
+              <a:spcAft>
+                <a:spcPts val="800"/>
+              </a:spcAft>
+              <a:defRPr sz="2200">
+                <a:solidFill>
+                  <a:srgbClr val="FFFFFF"/>
+                </a:solidFill>
+              </a:defRPr>
+            </a:pPr>
+            <a:r>
+              <a:t>  /compact</a:t>
+            </a:r>
+          </a:p>
+          <a:p>
+            <a:pPr>
+              <a:spcBef>
+                <a:spcPts val="800"/>
+              </a:spcBef>
+              <a:spcAft>
+                <a:spcPts val="800"/>
+              </a:spcAft>
+              <a:defRPr sz="2200">
+                <a:solidFill>
+                  <a:srgbClr val="FFFFFF"/>
+                </a:solidFill>
+              </a:defRPr>
+            </a:pPr>
+            <a:r>
+              <a:t>      Summarizes conversation</a:t>
+            </a:r>
+          </a:p>
+          <a:p>
+            <a:pPr>
+              <a:spcBef>
+                <a:spcPts val="800"/>
+              </a:spcBef>
+              <a:spcAft>
+                <a:spcPts val="800"/>
+              </a:spcAft>
+              <a:defRPr sz="2200">
+                <a:solidFill>
+                  <a:srgbClr val="FFFFFF"/>
+                </a:solidFill>
+              </a:defRPr>
+            </a:pPr>
+            <a:r>
+              <a:t>      Reduces token usage</a:t>
+            </a:r>
+          </a:p>
+        </p:txBody>
+      </p:sp>
     </p:spTree>
   </p:cSld>
   <p:clrMapOvr>
@@ -27652,6 +31308,173 @@
           </a:p>
         </p:txBody>
       </p:sp>
+      <p:sp>
+        <p:nvSpPr>
+          <p:cNvPr id="4" name="TextBox 3"/>
+          <p:cNvSpPr txBox="1"/>
+          <p:nvPr/>
+        </p:nvSpPr>
+        <p:spPr>
+          <a:xfrm>
+            <a:off x="457200" y="1463040"/>
+            <a:ext cx="11277295" cy="4572000"/>
+          </a:xfrm>
+          <a:prstGeom prst="rect">
+            <a:avLst/>
+          </a:prstGeom>
+          <a:noFill/>
+        </p:spPr>
+        <p:txBody>
+          <a:bodyPr wrap="square">
+            <a:spAutoFit/>
+          </a:bodyPr>
+          <a:lstStyle/>
+          <a:p>
+            <a:pPr>
+              <a:spcBef>
+                <a:spcPts val="800"/>
+              </a:spcBef>
+              <a:spcAft>
+                <a:spcPts val="800"/>
+              </a:spcAft>
+              <a:defRPr sz="2200">
+                <a:solidFill>
+                  <a:srgbClr val="FFFFFF"/>
+                </a:solidFill>
+              </a:defRPr>
+            </a:pPr>
+            <a:r>
+              <a:t>  /model</a:t>
+            </a:r>
+          </a:p>
+          <a:p>
+            <a:pPr>
+              <a:spcBef>
+                <a:spcPts val="800"/>
+              </a:spcBef>
+              <a:spcAft>
+                <a:spcPts val="800"/>
+              </a:spcAft>
+              <a:defRPr sz="2200">
+                <a:solidFill>
+                  <a:srgbClr val="FFFFFF"/>
+                </a:solidFill>
+              </a:defRPr>
+            </a:pPr>
+            <a:r>
+              <a:t>      Switch models mid-session</a:t>
+            </a:r>
+          </a:p>
+          <a:p>
+            <a:pPr>
+              <a:spcBef>
+                <a:spcPts val="800"/>
+              </a:spcBef>
+              <a:spcAft>
+                <a:spcPts val="800"/>
+              </a:spcAft>
+              <a:defRPr sz="2200">
+                <a:solidFill>
+                  <a:srgbClr val="FFFFFF"/>
+                </a:solidFill>
+              </a:defRPr>
+            </a:pPr>
+            <a:r>
+              <a:t>      Each model has different tradeoffs</a:t>
+            </a:r>
+          </a:p>
+          <a:p>
+            <a:pPr>
+              <a:spcBef>
+                <a:spcPts val="800"/>
+              </a:spcBef>
+              <a:spcAft>
+                <a:spcPts val="800"/>
+              </a:spcAft>
+              <a:defRPr sz="2200">
+                <a:solidFill>
+                  <a:srgbClr val="FFFFFF"/>
+                </a:solidFill>
+              </a:defRPr>
+            </a:pPr>
+            <a:r>
+              <a:t>      Change affects current session only</a:t>
+            </a:r>
+          </a:p>
+          <a:p>
+            <a:pPr>
+              <a:spcBef>
+                <a:spcPts val="800"/>
+              </a:spcBef>
+              <a:spcAft>
+                <a:spcPts val="800"/>
+              </a:spcAft>
+              <a:defRPr sz="2200">
+                <a:solidFill>
+                  <a:srgbClr val="FFFFFF"/>
+                </a:solidFill>
+              </a:defRPr>
+            </a:pPr>
+            <a:r>
+              <a:t>  /thinking</a:t>
+            </a:r>
+          </a:p>
+          <a:p>
+            <a:pPr>
+              <a:spcBef>
+                <a:spcPts val="800"/>
+              </a:spcBef>
+              <a:spcAft>
+                <a:spcPts val="800"/>
+              </a:spcAft>
+              <a:defRPr sz="2200">
+                <a:solidFill>
+                  <a:srgbClr val="FFFFFF"/>
+                </a:solidFill>
+              </a:defRPr>
+            </a:pPr>
+            <a:r>
+              <a:t>      Toggles extended reasoning</a:t>
+            </a:r>
+          </a:p>
+          <a:p>
+            <a:pPr>
+              <a:spcBef>
+                <a:spcPts val="800"/>
+              </a:spcBef>
+              <a:spcAft>
+                <a:spcPts val="800"/>
+              </a:spcAft>
+              <a:defRPr sz="2200">
+                <a:solidFill>
+                  <a:srgbClr val="FFFFFF"/>
+                </a:solidFill>
+              </a:defRPr>
+            </a:pPr>
+            <a:r>
+              <a:t>      Shows step-by-step thinking</a:t>
+            </a:r>
+          </a:p>
+          <a:p>
+            <a:pPr>
+              <a:spcBef>
+                <a:spcPts val="800"/>
+              </a:spcBef>
+              <a:spcAft>
+                <a:spcPts val="800"/>
+              </a:spcAft>
+              <a:defRPr sz="2200">
+                <a:solidFill>
+                  <a:srgbClr val="FFFFFF"/>
+                </a:solidFill>
+              </a:defRPr>
+            </a:pPr>
+            <a:r>
+              <a:t>      Useful for debugging</a:t>
+            </a:r>
+          </a:p>
+        </p:txBody>
+      </p:sp>
     </p:spTree>
   </p:cSld>
   <p:clrMapOvr>
@@ -27756,6 +31579,155 @@
           </a:p>
         </p:txBody>
       </p:sp>
+      <p:sp>
+        <p:nvSpPr>
+          <p:cNvPr id="4" name="TextBox 3"/>
+          <p:cNvSpPr txBox="1"/>
+          <p:nvPr/>
+        </p:nvSpPr>
+        <p:spPr>
+          <a:xfrm>
+            <a:off x="457200" y="1463040"/>
+            <a:ext cx="11277295" cy="4572000"/>
+          </a:xfrm>
+          <a:prstGeom prst="rect">
+            <a:avLst/>
+          </a:prstGeom>
+          <a:noFill/>
+        </p:spPr>
+        <p:txBody>
+          <a:bodyPr wrap="square">
+            <a:spAutoFit/>
+          </a:bodyPr>
+          <a:lstStyle/>
+          <a:p>
+            <a:pPr>
+              <a:spcBef>
+                <a:spcPts val="800"/>
+              </a:spcBef>
+              <a:spcAft>
+                <a:spcPts val="800"/>
+              </a:spcAft>
+              <a:defRPr sz="2200">
+                <a:solidFill>
+                  <a:srgbClr val="FFFFFF"/>
+                </a:solidFill>
+              </a:defRPr>
+            </a:pPr>
+            <a:r>
+              <a:t>  /permissions</a:t>
+            </a:r>
+          </a:p>
+          <a:p>
+            <a:pPr>
+              <a:spcBef>
+                <a:spcPts val="800"/>
+              </a:spcBef>
+              <a:spcAft>
+                <a:spcPts val="800"/>
+              </a:spcAft>
+              <a:defRPr sz="2200">
+                <a:solidFill>
+                  <a:srgbClr val="FFFFFF"/>
+                </a:solidFill>
+              </a:defRPr>
+            </a:pPr>
+            <a:r>
+              <a:t>      View current permission level</a:t>
+            </a:r>
+          </a:p>
+          <a:p>
+            <a:pPr>
+              <a:spcBef>
+                <a:spcPts val="800"/>
+              </a:spcBef>
+              <a:spcAft>
+                <a:spcPts val="800"/>
+              </a:spcAft>
+              <a:defRPr sz="2200">
+                <a:solidFill>
+                  <a:srgbClr val="FFFFFF"/>
+                </a:solidFill>
+              </a:defRPr>
+            </a:pPr>
+            <a:r>
+              <a:t>      Change: /permissions suggest-only</a:t>
+            </a:r>
+          </a:p>
+          <a:p>
+            <a:pPr>
+              <a:spcBef>
+                <a:spcPts val="800"/>
+              </a:spcBef>
+              <a:spcAft>
+                <a:spcPts val="800"/>
+              </a:spcAft>
+              <a:defRPr sz="2200">
+                <a:solidFill>
+                  <a:srgbClr val="FFFFFF"/>
+                </a:solidFill>
+              </a:defRPr>
+            </a:pPr>
+            <a:r>
+              <a:t>      Controls autonomy</a:t>
+            </a:r>
+          </a:p>
+          <a:p>
+            <a:pPr>
+              <a:spcBef>
+                <a:spcPts val="800"/>
+              </a:spcBef>
+              <a:spcAft>
+                <a:spcPts val="800"/>
+              </a:spcAft>
+              <a:defRPr sz="2200">
+                <a:solidFill>
+                  <a:srgbClr val="FFFFFF"/>
+                </a:solidFill>
+              </a:defRPr>
+            </a:pPr>
+            <a:r>
+              <a:t>  /allowed-tools</a:t>
+            </a:r>
+          </a:p>
+          <a:p>
+            <a:pPr>
+              <a:spcBef>
+                <a:spcPts val="800"/>
+              </a:spcBef>
+              <a:spcAft>
+                <a:spcPts val="800"/>
+              </a:spcAft>
+              <a:defRPr sz="2200">
+                <a:solidFill>
+                  <a:srgbClr val="FFFFFF"/>
+                </a:solidFill>
+              </a:defRPr>
+            </a:pPr>
+            <a:r>
+              <a:t>      Shows enabled tools</a:t>
+            </a:r>
+          </a:p>
+          <a:p>
+            <a:pPr>
+              <a:spcBef>
+                <a:spcPts val="800"/>
+              </a:spcBef>
+              <a:spcAft>
+                <a:spcPts val="800"/>
+              </a:spcAft>
+              <a:defRPr sz="2200">
+                <a:solidFill>
+                  <a:srgbClr val="FFFFFF"/>
+                </a:solidFill>
+              </a:defRPr>
+            </a:pPr>
+            <a:r>
+              <a:t>      Useful for debugging restrictions</a:t>
+            </a:r>
+          </a:p>
+        </p:txBody>
+      </p:sp>
     </p:spTree>
   </p:cSld>
   <p:clrMapOvr>
@@ -27860,6 +31832,227 @@
           </a:p>
         </p:txBody>
       </p:sp>
+      <p:sp>
+        <p:nvSpPr>
+          <p:cNvPr id="4" name="TextBox 3"/>
+          <p:cNvSpPr txBox="1"/>
+          <p:nvPr/>
+        </p:nvSpPr>
+        <p:spPr>
+          <a:xfrm>
+            <a:off x="457200" y="1463040"/>
+            <a:ext cx="11277295" cy="4572000"/>
+          </a:xfrm>
+          <a:prstGeom prst="rect">
+            <a:avLst/>
+          </a:prstGeom>
+          <a:noFill/>
+        </p:spPr>
+        <p:txBody>
+          <a:bodyPr wrap="square">
+            <a:spAutoFit/>
+          </a:bodyPr>
+          <a:lstStyle/>
+          <a:p>
+            <a:pPr>
+              <a:spcBef>
+                <a:spcPts val="800"/>
+              </a:spcBef>
+              <a:spcAft>
+                <a:spcPts val="800"/>
+              </a:spcAft>
+              <a:defRPr sz="2200">
+                <a:solidFill>
+                  <a:srgbClr val="FFFFFF"/>
+                </a:solidFill>
+              </a:defRPr>
+            </a:pPr>
+            <a:r>
+              <a:t>  /output-format</a:t>
+            </a:r>
+          </a:p>
+          <a:p>
+            <a:pPr>
+              <a:spcBef>
+                <a:spcPts val="800"/>
+              </a:spcBef>
+              <a:spcAft>
+                <a:spcPts val="800"/>
+              </a:spcAft>
+              <a:defRPr sz="2200">
+                <a:solidFill>
+                  <a:srgbClr val="FFFFFF"/>
+                </a:solidFill>
+              </a:defRPr>
+            </a:pPr>
+            <a:r>
+              <a:t>      concise - Minimal</a:t>
+            </a:r>
+          </a:p>
+          <a:p>
+            <a:pPr>
+              <a:spcBef>
+                <a:spcPts val="800"/>
+              </a:spcBef>
+              <a:spcAft>
+                <a:spcPts val="800"/>
+              </a:spcAft>
+              <a:defRPr sz="2200">
+                <a:solidFill>
+                  <a:srgbClr val="FFFFFF"/>
+                </a:solidFill>
+              </a:defRPr>
+            </a:pPr>
+            <a:r>
+              <a:t>      verbose - Detailed</a:t>
+            </a:r>
+          </a:p>
+          <a:p>
+            <a:pPr>
+              <a:spcBef>
+                <a:spcPts val="800"/>
+              </a:spcBef>
+              <a:spcAft>
+                <a:spcPts val="800"/>
+              </a:spcAft>
+              <a:defRPr sz="2200">
+                <a:solidFill>
+                  <a:srgbClr val="FFFFFF"/>
+                </a:solidFill>
+              </a:defRPr>
+            </a:pPr>
+            <a:r>
+              <a:t>      diff - Changes only</a:t>
+            </a:r>
+          </a:p>
+          <a:p>
+            <a:pPr>
+              <a:spcBef>
+                <a:spcPts val="800"/>
+              </a:spcBef>
+              <a:spcAft>
+                <a:spcPts val="800"/>
+              </a:spcAft>
+              <a:defRPr sz="2200">
+                <a:solidFill>
+                  <a:srgbClr val="FFFFFF"/>
+                </a:solidFill>
+              </a:defRPr>
+            </a:pPr>
+            <a:r>
+              <a:t>  /verbose</a:t>
+            </a:r>
+          </a:p>
+          <a:p>
+            <a:pPr>
+              <a:spcBef>
+                <a:spcPts val="800"/>
+              </a:spcBef>
+              <a:spcAft>
+                <a:spcPts val="800"/>
+              </a:spcAft>
+              <a:defRPr sz="2200">
+                <a:solidFill>
+                  <a:srgbClr val="FFFFFF"/>
+                </a:solidFill>
+              </a:defRPr>
+            </a:pPr>
+            <a:r>
+              <a:t>      Toggles detailed output</a:t>
+            </a:r>
+          </a:p>
+          <a:p>
+            <a:pPr>
+              <a:spcBef>
+                <a:spcPts val="800"/>
+              </a:spcBef>
+              <a:spcAft>
+                <a:spcPts val="800"/>
+              </a:spcAft>
+              <a:defRPr sz="2200">
+                <a:solidFill>
+                  <a:srgbClr val="FFFFFF"/>
+                </a:solidFill>
+              </a:defRPr>
+            </a:pPr>
+            <a:r>
+              <a:t>      Shows tool calls</a:t>
+            </a:r>
+          </a:p>
+          <a:p>
+            <a:pPr>
+              <a:spcBef>
+                <a:spcPts val="800"/>
+              </a:spcBef>
+              <a:spcAft>
+                <a:spcPts val="800"/>
+              </a:spcAft>
+              <a:defRPr sz="2200">
+                <a:solidFill>
+                  <a:srgbClr val="FFFFFF"/>
+                </a:solidFill>
+              </a:defRPr>
+            </a:pPr>
+            <a:r>
+              <a:t>      Great for learning</a:t>
+            </a:r>
+          </a:p>
+          <a:p>
+            <a:pPr>
+              <a:spcBef>
+                <a:spcPts val="800"/>
+              </a:spcBef>
+              <a:spcAft>
+                <a:spcPts val="800"/>
+              </a:spcAft>
+              <a:defRPr sz="2200">
+                <a:solidFill>
+                  <a:srgbClr val="FFFFFF"/>
+                </a:solidFill>
+              </a:defRPr>
+            </a:pPr>
+            <a:r>
+              <a:t>  /cost</a:t>
+            </a:r>
+          </a:p>
+          <a:p>
+            <a:pPr>
+              <a:spcBef>
+                <a:spcPts val="800"/>
+              </a:spcBef>
+              <a:spcAft>
+                <a:spcPts val="800"/>
+              </a:spcAft>
+              <a:defRPr sz="2200">
+                <a:solidFill>
+                  <a:srgbClr val="FFFFFF"/>
+                </a:solidFill>
+              </a:defRPr>
+            </a:pPr>
+            <a:r>
+              <a:t>      Shows token usage</a:t>
+            </a:r>
+          </a:p>
+          <a:p>
+            <a:pPr>
+              <a:spcBef>
+                <a:spcPts val="800"/>
+              </a:spcBef>
+              <a:spcAft>
+                <a:spcPts val="800"/>
+              </a:spcAft>
+              <a:defRPr sz="2200">
+                <a:solidFill>
+                  <a:srgbClr val="FFFFFF"/>
+                </a:solidFill>
+              </a:defRPr>
+            </a:pPr>
+            <a:r>
+              <a:t>      Estimated API cost</a:t>
+            </a:r>
+          </a:p>
+        </p:txBody>
+      </p:sp>
     </p:spTree>
   </p:cSld>
   <p:clrMapOvr>
@@ -28930,6 +33123,119 @@
           </a:p>
         </p:txBody>
       </p:sp>
+      <p:sp>
+        <p:nvSpPr>
+          <p:cNvPr id="4" name="TextBox 3"/>
+          <p:cNvSpPr txBox="1"/>
+          <p:nvPr/>
+        </p:nvSpPr>
+        <p:spPr>
+          <a:xfrm>
+            <a:off x="457200" y="1463040"/>
+            <a:ext cx="11277295" cy="4572000"/>
+          </a:xfrm>
+          <a:prstGeom prst="rect">
+            <a:avLst/>
+          </a:prstGeom>
+          <a:noFill/>
+        </p:spPr>
+        <p:txBody>
+          <a:bodyPr wrap="square">
+            <a:spAutoFit/>
+          </a:bodyPr>
+          <a:lstStyle/>
+          <a:p>
+            <a:pPr>
+              <a:spcBef>
+                <a:spcPts val="800"/>
+              </a:spcBef>
+              <a:spcAft>
+                <a:spcPts val="800"/>
+              </a:spcAft>
+              <a:defRPr sz="2200">
+                <a:solidFill>
+                  <a:srgbClr val="FFFFFF"/>
+                </a:solidFill>
+              </a:defRPr>
+            </a:pPr>
+            <a:r>
+              <a:t>  Claude will ask about things you hadn't thought through: 'What happens when a token expires mid-request?', 'Do you ne...</a:t>
+            </a:r>
+          </a:p>
+          <a:p>
+            <a:pPr>
+              <a:spcBef>
+                <a:spcPts val="800"/>
+              </a:spcBef>
+              <a:spcAft>
+                <a:spcPts val="800"/>
+              </a:spcAft>
+              <a:defRPr sz="2200">
+                <a:solidFill>
+                  <a:srgbClr val="FFFFFF"/>
+                </a:solidFill>
+              </a:defRPr>
+            </a:pPr>
+            <a:r>
+              <a:t>  This isn't Claude being annoying — it's Claude preventing future bugs.</a:t>
+            </a:r>
+          </a:p>
+          <a:p>
+            <a:pPr>
+              <a:spcBef>
+                <a:spcPts val="800"/>
+              </a:spcBef>
+              <a:spcAft>
+                <a:spcPts val="800"/>
+              </a:spcAft>
+              <a:defRPr sz="2200">
+                <a:solidFill>
+                  <a:srgbClr val="FFFFFF"/>
+                </a:solidFill>
+              </a:defRPr>
+            </a:pPr>
+            <a:r>
+              <a:t>  The output SPEC.</a:t>
+            </a:r>
+          </a:p>
+          <a:p>
+            <a:pPr>
+              <a:spcBef>
+                <a:spcPts val="800"/>
+              </a:spcBef>
+              <a:spcAft>
+                <a:spcPts val="800"/>
+              </a:spcAft>
+              <a:defRPr sz="2200">
+                <a:solidFill>
+                  <a:srgbClr val="FFFFFF"/>
+                </a:solidFill>
+              </a:defRPr>
+            </a:pPr>
+            <a:r>
+              <a:t>  Combine with Plan Mode: Interview → Spec → Plan → Execute.</a:t>
+            </a:r>
+          </a:p>
+          <a:p>
+            <a:pPr>
+              <a:spcBef>
+                <a:spcPts val="800"/>
+              </a:spcBef>
+              <a:spcAft>
+                <a:spcPts val="800"/>
+              </a:spcAft>
+              <a:defRPr sz="2200">
+                <a:solidFill>
+                  <a:srgbClr val="FFFFFF"/>
+                </a:solidFill>
+              </a:defRPr>
+            </a:pPr>
+            <a:r>
+              <a:t>  Source: Reza Rezvani — this pattern eliminated most of his 'Claude didn't understand what I wanted' complaints.</a:t>
+            </a:r>
+          </a:p>
+        </p:txBody>
+      </p:sp>
     </p:spTree>
   </p:cSld>
   <p:clrMapOvr>
@@ -29138,6 +33444,137 @@
           </a:p>
         </p:txBody>
       </p:sp>
+      <p:sp>
+        <p:nvSpPr>
+          <p:cNvPr id="4" name="TextBox 3"/>
+          <p:cNvSpPr txBox="1"/>
+          <p:nvPr/>
+        </p:nvSpPr>
+        <p:spPr>
+          <a:xfrm>
+            <a:off x="457200" y="1463040"/>
+            <a:ext cx="11277295" cy="4572000"/>
+          </a:xfrm>
+          <a:prstGeom prst="rect">
+            <a:avLst/>
+          </a:prstGeom>
+          <a:noFill/>
+        </p:spPr>
+        <p:txBody>
+          <a:bodyPr wrap="square">
+            <a:spAutoFit/>
+          </a:bodyPr>
+          <a:lstStyle/>
+          <a:p>
+            <a:pPr>
+              <a:spcBef>
+                <a:spcPts val="800"/>
+              </a:spcBef>
+              <a:spcAft>
+                <a:spcPts val="800"/>
+              </a:spcAft>
+              <a:defRPr sz="2200">
+                <a:solidFill>
+                  <a:srgbClr val="FFFFFF"/>
+                </a:solidFill>
+              </a:defRPr>
+            </a:pPr>
+            <a:r>
+              <a:t>  Context degrades over long sessions — like starting a meeting where someone's been talking for 20 minutes about somet...</a:t>
+            </a:r>
+          </a:p>
+          <a:p>
+            <a:pPr>
+              <a:spcBef>
+                <a:spcPts val="800"/>
+              </a:spcBef>
+              <a:spcAft>
+                <a:spcPts val="800"/>
+              </a:spcAft>
+              <a:defRPr sz="2200">
+                <a:solidFill>
+                  <a:srgbClr val="FFFFFF"/>
+                </a:solidFill>
+              </a:defRPr>
+            </a:pPr>
+            <a:r>
+              <a:t>  The correction spiral: after 2 failed attempts to correct output, your context is poisoned with conflicting instructi...</a:t>
+            </a:r>
+          </a:p>
+          <a:p>
+            <a:pPr>
+              <a:spcBef>
+                <a:spcPts val="800"/>
+              </a:spcBef>
+              <a:spcAft>
+                <a:spcPts val="800"/>
+              </a:spcAft>
+              <a:defRPr sz="2200">
+                <a:solidFill>
+                  <a:srgbClr val="FFFFFF"/>
+                </a:solidFill>
+              </a:defRPr>
+            </a:pPr>
+            <a:r>
+              <a:t>  Quote: 'I spent months blaming Claude for not understanding my project while doing nothing to help it understand.</a:t>
+            </a:r>
+          </a:p>
+          <a:p>
+            <a:pPr>
+              <a:spcBef>
+                <a:spcPts val="800"/>
+              </a:spcBef>
+              <a:spcAft>
+                <a:spcPts val="800"/>
+              </a:spcAft>
+              <a:defRPr sz="2200">
+                <a:solidFill>
+                  <a:srgbClr val="FFFFFF"/>
+                </a:solidFill>
+              </a:defRPr>
+            </a:pPr>
+            <a:r>
+              <a:t>  Rule of thumb: one task per session.</a:t>
+            </a:r>
+          </a:p>
+          <a:p>
+            <a:pPr>
+              <a:spcBef>
+                <a:spcPts val="800"/>
+              </a:spcBef>
+              <a:spcAft>
+                <a:spcPts val="800"/>
+              </a:spcAft>
+              <a:defRPr sz="2200">
+                <a:solidFill>
+                  <a:srgbClr val="FFFFFF"/>
+                </a:solidFill>
+              </a:defRPr>
+            </a:pPr>
+            <a:r>
+              <a:t>  The anti-pattern has a name: 'vibes-driven development' — just hoping Claude gets it right without structure.</a:t>
+            </a:r>
+          </a:p>
+          <a:p>
+            <a:pPr>
+              <a:spcBef>
+                <a:spcPts val="800"/>
+              </a:spcBef>
+              <a:spcAft>
+                <a:spcPts val="800"/>
+              </a:spcAft>
+              <a:defRPr sz="2200">
+                <a:solidFill>
+                  <a:srgbClr val="FFFFFF"/>
+                </a:solidFill>
+              </a:defRPr>
+            </a:pPr>
+            <a:r>
+              <a:t>  According to MIT 2025 research, 95% of AI projects fail — and $644B has been lost globally on failed AI implementations.</a:t>
+            </a:r>
+          </a:p>
+        </p:txBody>
+      </p:sp>
     </p:spTree>
   </p:cSld>
   <p:clrMapOvr>
@@ -29407,6 +33844,245 @@
           </a:p>
         </p:txBody>
       </p:sp>
+      <p:sp>
+        <p:nvSpPr>
+          <p:cNvPr id="4" name="TextBox 3"/>
+          <p:cNvSpPr txBox="1"/>
+          <p:nvPr/>
+        </p:nvSpPr>
+        <p:spPr>
+          <a:xfrm>
+            <a:off x="457200" y="1463040"/>
+            <a:ext cx="11277295" cy="4572000"/>
+          </a:xfrm>
+          <a:prstGeom prst="rect">
+            <a:avLst/>
+          </a:prstGeom>
+          <a:noFill/>
+        </p:spPr>
+        <p:txBody>
+          <a:bodyPr wrap="square">
+            <a:spAutoFit/>
+          </a:bodyPr>
+          <a:lstStyle/>
+          <a:p>
+            <a:pPr>
+              <a:spcBef>
+                <a:spcPts val="800"/>
+              </a:spcBef>
+              <a:spcAft>
+                <a:spcPts val="800"/>
+              </a:spcAft>
+              <a:defRPr sz="2200">
+                <a:solidFill>
+                  <a:srgbClr val="FFFFFF"/>
+                </a:solidFill>
+              </a:defRPr>
+            </a:pPr>
+            <a:r>
+              <a:t>  Approval-Based Actions</a:t>
+            </a:r>
+          </a:p>
+          <a:p>
+            <a:pPr>
+              <a:spcBef>
+                <a:spcPts val="800"/>
+              </a:spcBef>
+              <a:spcAft>
+                <a:spcPts val="800"/>
+              </a:spcAft>
+              <a:defRPr sz="2200">
+                <a:solidFill>
+                  <a:srgbClr val="FFFFFF"/>
+                </a:solidFill>
+              </a:defRPr>
+            </a:pPr>
+            <a:r>
+              <a:t>      By default, asks before executing</a:t>
+            </a:r>
+          </a:p>
+          <a:p>
+            <a:pPr>
+              <a:spcBef>
+                <a:spcPts val="800"/>
+              </a:spcBef>
+              <a:spcAft>
+                <a:spcPts val="800"/>
+              </a:spcAft>
+              <a:defRPr sz="2200">
+                <a:solidFill>
+                  <a:srgbClr val="FFFFFF"/>
+                </a:solidFill>
+              </a:defRPr>
+            </a:pPr>
+            <a:r>
+              <a:t>      Review diffs before applying</a:t>
+            </a:r>
+          </a:p>
+          <a:p>
+            <a:pPr>
+              <a:spcBef>
+                <a:spcPts val="800"/>
+              </a:spcBef>
+              <a:spcAft>
+                <a:spcPts val="800"/>
+              </a:spcAft>
+              <a:defRPr sz="2200">
+                <a:solidFill>
+                  <a:srgbClr val="FFFFFF"/>
+                </a:solidFill>
+              </a:defRPr>
+            </a:pPr>
+            <a:r>
+              <a:t>      Opt-in to auto-approval</a:t>
+            </a:r>
+          </a:p>
+          <a:p>
+            <a:pPr>
+              <a:spcBef>
+                <a:spcPts val="800"/>
+              </a:spcBef>
+              <a:spcAft>
+                <a:spcPts val="800"/>
+              </a:spcAft>
+              <a:defRPr sz="2200">
+                <a:solidFill>
+                  <a:srgbClr val="FFFFFF"/>
+                </a:solidFill>
+              </a:defRPr>
+            </a:pPr>
+            <a:r>
+              <a:t>  Trust Levels</a:t>
+            </a:r>
+          </a:p>
+          <a:p>
+            <a:pPr>
+              <a:spcBef>
+                <a:spcPts val="800"/>
+              </a:spcBef>
+              <a:spcAft>
+                <a:spcPts val="800"/>
+              </a:spcAft>
+              <a:defRPr sz="2200">
+                <a:solidFill>
+                  <a:srgbClr val="FFFFFF"/>
+                </a:solidFill>
+              </a:defRPr>
+            </a:pPr>
+            <a:r>
+              <a:t>      Suggest Only: Never apply changes</a:t>
+            </a:r>
+          </a:p>
+          <a:p>
+            <a:pPr>
+              <a:spcBef>
+                <a:spcPts val="800"/>
+              </a:spcBef>
+              <a:spcAft>
+                <a:spcPts val="800"/>
+              </a:spcAft>
+              <a:defRPr sz="2200">
+                <a:solidFill>
+                  <a:srgbClr val="FFFFFF"/>
+                </a:solidFill>
+              </a:defRPr>
+            </a:pPr>
+            <a:r>
+              <a:t>      Auto-Approve Read: Read freely, ask before write</a:t>
+            </a:r>
+          </a:p>
+          <a:p>
+            <a:pPr>
+              <a:spcBef>
+                <a:spcPts val="800"/>
+              </a:spcBef>
+              <a:spcAft>
+                <a:spcPts val="800"/>
+              </a:spcAft>
+              <a:defRPr sz="2200">
+                <a:solidFill>
+                  <a:srgbClr val="FFFFFF"/>
+                </a:solidFill>
+              </a:defRPr>
+            </a:pPr>
+            <a:r>
+              <a:t>      Auto-Approve All: Full autonomy</a:t>
+            </a:r>
+          </a:p>
+          <a:p>
+            <a:pPr>
+              <a:spcBef>
+                <a:spcPts val="800"/>
+              </a:spcBef>
+              <a:spcAft>
+                <a:spcPts val="800"/>
+              </a:spcAft>
+              <a:defRPr sz="2200">
+                <a:solidFill>
+                  <a:srgbClr val="FFFFFF"/>
+                </a:solidFill>
+              </a:defRPr>
+            </a:pPr>
+            <a:r>
+              <a:t>  Allowlists &amp; Blocklists</a:t>
+            </a:r>
+          </a:p>
+          <a:p>
+            <a:pPr>
+              <a:spcBef>
+                <a:spcPts val="800"/>
+              </a:spcBef>
+              <a:spcAft>
+                <a:spcPts val="800"/>
+              </a:spcAft>
+              <a:defRPr sz="2200">
+                <a:solidFill>
+                  <a:srgbClr val="FFFFFF"/>
+                </a:solidFill>
+              </a:defRPr>
+            </a:pPr>
+            <a:r>
+              <a:t>      Specify which commands allowed</a:t>
+            </a:r>
+          </a:p>
+          <a:p>
+            <a:pPr>
+              <a:spcBef>
+                <a:spcPts val="800"/>
+              </a:spcBef>
+              <a:spcAft>
+                <a:spcPts val="800"/>
+              </a:spcAft>
+              <a:defRPr sz="2200">
+                <a:solidFill>
+                  <a:srgbClr val="FFFFFF"/>
+                </a:solidFill>
+              </a:defRPr>
+            </a:pPr>
+            <a:r>
+              <a:t>      Block dangerous commands</a:t>
+            </a:r>
+          </a:p>
+          <a:p>
+            <a:pPr>
+              <a:spcBef>
+                <a:spcPts val="800"/>
+              </a:spcBef>
+              <a:spcAft>
+                <a:spcPts val="800"/>
+              </a:spcAft>
+              <a:defRPr sz="2200">
+                <a:solidFill>
+                  <a:srgbClr val="FFFFFF"/>
+                </a:solidFill>
+              </a:defRPr>
+            </a:pPr>
+            <a:r>
+              <a:t>      Configure per-project</a:t>
+            </a:r>
+          </a:p>
+        </p:txBody>
+      </p:sp>
     </p:spTree>
   </p:cSld>
   <p:clrMapOvr>
@@ -30211,6 +34887,191 @@
           </a:p>
         </p:txBody>
       </p:sp>
+      <p:sp>
+        <p:nvSpPr>
+          <p:cNvPr id="4" name="TextBox 3"/>
+          <p:cNvSpPr txBox="1"/>
+          <p:nvPr/>
+        </p:nvSpPr>
+        <p:spPr>
+          <a:xfrm>
+            <a:off x="457200" y="1463040"/>
+            <a:ext cx="11277295" cy="4572000"/>
+          </a:xfrm>
+          <a:prstGeom prst="rect">
+            <a:avLst/>
+          </a:prstGeom>
+          <a:noFill/>
+        </p:spPr>
+        <p:txBody>
+          <a:bodyPr wrap="square">
+            <a:spAutoFit/>
+          </a:bodyPr>
+          <a:lstStyle/>
+          <a:p>
+            <a:pPr>
+              <a:spcBef>
+                <a:spcPts val="800"/>
+              </a:spcBef>
+              <a:spcAft>
+                <a:spcPts val="800"/>
+              </a:spcAft>
+              <a:defRPr sz="2200">
+                <a:solidFill>
+                  <a:srgbClr val="FFFFFF"/>
+                </a:solidFill>
+              </a:defRPr>
+            </a:pPr>
+            <a:r>
+              <a:t>  Command Allowlists</a:t>
+            </a:r>
+          </a:p>
+          <a:p>
+            <a:pPr>
+              <a:spcBef>
+                <a:spcPts val="800"/>
+              </a:spcBef>
+              <a:spcAft>
+                <a:spcPts val="800"/>
+              </a:spcAft>
+              <a:defRPr sz="2200">
+                <a:solidFill>
+                  <a:srgbClr val="FFFFFF"/>
+                </a:solidFill>
+              </a:defRPr>
+            </a:pPr>
+            <a:r>
+              <a:t>      Specify exactly which commands permitted</a:t>
+            </a:r>
+          </a:p>
+          <a:p>
+            <a:pPr>
+              <a:spcBef>
+                <a:spcPts val="800"/>
+              </a:spcBef>
+              <a:spcAft>
+                <a:spcPts val="800"/>
+              </a:spcAft>
+              <a:defRPr sz="2200">
+                <a:solidFill>
+                  <a:srgbClr val="FFFFFF"/>
+                </a:solidFill>
+              </a:defRPr>
+            </a:pPr>
+            <a:r>
+              <a:t>      Strictest security</a:t>
+            </a:r>
+          </a:p>
+          <a:p>
+            <a:pPr>
+              <a:spcBef>
+                <a:spcPts val="800"/>
+              </a:spcBef>
+              <a:spcAft>
+                <a:spcPts val="800"/>
+              </a:spcAft>
+              <a:defRPr sz="2200">
+                <a:solidFill>
+                  <a:srgbClr val="FFFFFF"/>
+                </a:solidFill>
+              </a:defRPr>
+            </a:pPr>
+            <a:r>
+              <a:t>  Command Blocklists</a:t>
+            </a:r>
+          </a:p>
+          <a:p>
+            <a:pPr>
+              <a:spcBef>
+                <a:spcPts val="800"/>
+              </a:spcBef>
+              <a:spcAft>
+                <a:spcPts val="800"/>
+              </a:spcAft>
+              <a:defRPr sz="2200">
+                <a:solidFill>
+                  <a:srgbClr val="FFFFFF"/>
+                </a:solidFill>
+              </a:defRPr>
+            </a:pPr>
+            <a:r>
+              <a:t>      Block specific dangerous commands</a:t>
+            </a:r>
+          </a:p>
+          <a:p>
+            <a:pPr>
+              <a:spcBef>
+                <a:spcPts val="800"/>
+              </a:spcBef>
+              <a:spcAft>
+                <a:spcPts val="800"/>
+              </a:spcAft>
+              <a:defRPr sz="2200">
+                <a:solidFill>
+                  <a:srgbClr val="FFFFFF"/>
+                </a:solidFill>
+              </a:defRPr>
+            </a:pPr>
+            <a:r>
+              <a:t>      Everything else permitted</a:t>
+            </a:r>
+          </a:p>
+          <a:p>
+            <a:pPr>
+              <a:spcBef>
+                <a:spcPts val="800"/>
+              </a:spcBef>
+              <a:spcAft>
+                <a:spcPts val="800"/>
+              </a:spcAft>
+              <a:defRPr sz="2200">
+                <a:solidFill>
+                  <a:srgbClr val="FFFFFF"/>
+                </a:solidFill>
+              </a:defRPr>
+            </a:pPr>
+            <a:r>
+              <a:t>  File Access Patterns</a:t>
+            </a:r>
+          </a:p>
+          <a:p>
+            <a:pPr>
+              <a:spcBef>
+                <a:spcPts val="800"/>
+              </a:spcBef>
+              <a:spcAft>
+                <a:spcPts val="800"/>
+              </a:spcAft>
+              <a:defRPr sz="2200">
+                <a:solidFill>
+                  <a:srgbClr val="FFFFFF"/>
+                </a:solidFill>
+              </a:defRPr>
+            </a:pPr>
+            <a:r>
+              <a:t>      Block writes to sensitive directories</a:t>
+            </a:r>
+          </a:p>
+          <a:p>
+            <a:pPr>
+              <a:spcBef>
+                <a:spcPts val="800"/>
+              </a:spcBef>
+              <a:spcAft>
+                <a:spcPts val="800"/>
+              </a:spcAft>
+              <a:defRPr sz="2200">
+                <a:solidFill>
+                  <a:srgbClr val="FFFFFF"/>
+                </a:solidFill>
+              </a:defRPr>
+            </a:pPr>
+            <a:r>
+              <a:t>      Allow reads but prevent modifications</a:t>
+            </a:r>
+          </a:p>
+        </p:txBody>
+      </p:sp>
     </p:spTree>
   </p:cSld>
   <p:clrMapOvr>
@@ -30490,6 +35351,245 @@
           </a:p>
         </p:txBody>
       </p:sp>
+      <p:sp>
+        <p:nvSpPr>
+          <p:cNvPr id="4" name="TextBox 3"/>
+          <p:cNvSpPr txBox="1"/>
+          <p:nvPr/>
+        </p:nvSpPr>
+        <p:spPr>
+          <a:xfrm>
+            <a:off x="457200" y="1463040"/>
+            <a:ext cx="11277295" cy="4572000"/>
+          </a:xfrm>
+          <a:prstGeom prst="rect">
+            <a:avLst/>
+          </a:prstGeom>
+          <a:noFill/>
+        </p:spPr>
+        <p:txBody>
+          <a:bodyPr wrap="square">
+            <a:spAutoFit/>
+          </a:bodyPr>
+          <a:lstStyle/>
+          <a:p>
+            <a:pPr>
+              <a:spcBef>
+                <a:spcPts val="800"/>
+              </a:spcBef>
+              <a:spcAft>
+                <a:spcPts val="800"/>
+              </a:spcAft>
+              <a:defRPr sz="2200">
+                <a:solidFill>
+                  <a:srgbClr val="FFFFFF"/>
+                </a:solidFill>
+              </a:defRPr>
+            </a:pPr>
+            <a:r>
+              <a:t>  Audit Logs</a:t>
+            </a:r>
+          </a:p>
+          <a:p>
+            <a:pPr>
+              <a:spcBef>
+                <a:spcPts val="800"/>
+              </a:spcBef>
+              <a:spcAft>
+                <a:spcPts val="800"/>
+              </a:spcAft>
+              <a:defRPr sz="2200">
+                <a:solidFill>
+                  <a:srgbClr val="FFFFFF"/>
+                </a:solidFill>
+              </a:defRPr>
+            </a:pPr>
+            <a:r>
+              <a:t>      Track every action</a:t>
+            </a:r>
+          </a:p>
+          <a:p>
+            <a:pPr>
+              <a:spcBef>
+                <a:spcPts val="800"/>
+              </a:spcBef>
+              <a:spcAft>
+                <a:spcPts val="800"/>
+              </a:spcAft>
+              <a:defRPr sz="2200">
+                <a:solidFill>
+                  <a:srgbClr val="FFFFFF"/>
+                </a:solidFill>
+              </a:defRPr>
+            </a:pPr>
+            <a:r>
+              <a:t>      Centralized logging</a:t>
+            </a:r>
+          </a:p>
+          <a:p>
+            <a:pPr>
+              <a:spcBef>
+                <a:spcPts val="800"/>
+              </a:spcBef>
+              <a:spcAft>
+                <a:spcPts val="800"/>
+              </a:spcAft>
+              <a:defRPr sz="2200">
+                <a:solidFill>
+                  <a:srgbClr val="FFFFFF"/>
+                </a:solidFill>
+              </a:defRPr>
+            </a:pPr>
+            <a:r>
+              <a:t>      Searchable history</a:t>
+            </a:r>
+          </a:p>
+          <a:p>
+            <a:pPr>
+              <a:spcBef>
+                <a:spcPts val="800"/>
+              </a:spcBef>
+              <a:spcAft>
+                <a:spcPts val="800"/>
+              </a:spcAft>
+              <a:defRPr sz="2200">
+                <a:solidFill>
+                  <a:srgbClr val="FFFFFF"/>
+                </a:solidFill>
+              </a:defRPr>
+            </a:pPr>
+            <a:r>
+              <a:t>  Compliance</a:t>
+            </a:r>
+          </a:p>
+          <a:p>
+            <a:pPr>
+              <a:spcBef>
+                <a:spcPts val="800"/>
+              </a:spcBef>
+              <a:spcAft>
+                <a:spcPts val="800"/>
+              </a:spcAft>
+              <a:defRPr sz="2200">
+                <a:solidFill>
+                  <a:srgbClr val="FFFFFF"/>
+                </a:solidFill>
+              </a:defRPr>
+            </a:pPr>
+            <a:r>
+              <a:t>      SOC 2 Type II</a:t>
+            </a:r>
+          </a:p>
+          <a:p>
+            <a:pPr>
+              <a:spcBef>
+                <a:spcPts val="800"/>
+              </a:spcBef>
+              <a:spcAft>
+                <a:spcPts val="800"/>
+              </a:spcAft>
+              <a:defRPr sz="2200">
+                <a:solidFill>
+                  <a:srgbClr val="FFFFFF"/>
+                </a:solidFill>
+              </a:defRPr>
+            </a:pPr>
+            <a:r>
+              <a:t>      Data residency controls</a:t>
+            </a:r>
+          </a:p>
+          <a:p>
+            <a:pPr>
+              <a:spcBef>
+                <a:spcPts val="800"/>
+              </a:spcBef>
+              <a:spcAft>
+                <a:spcPts val="800"/>
+              </a:spcAft>
+              <a:defRPr sz="2200">
+                <a:solidFill>
+                  <a:srgbClr val="FFFFFF"/>
+                </a:solidFill>
+              </a:defRPr>
+            </a:pPr>
+            <a:r>
+              <a:t>      GDPR compliance</a:t>
+            </a:r>
+          </a:p>
+          <a:p>
+            <a:pPr>
+              <a:spcBef>
+                <a:spcPts val="800"/>
+              </a:spcBef>
+              <a:spcAft>
+                <a:spcPts val="800"/>
+              </a:spcAft>
+              <a:defRPr sz="2200">
+                <a:solidFill>
+                  <a:srgbClr val="FFFFFF"/>
+                </a:solidFill>
+              </a:defRPr>
+            </a:pPr>
+            <a:r>
+              <a:t>  Data Governance</a:t>
+            </a:r>
+          </a:p>
+          <a:p>
+            <a:pPr>
+              <a:spcBef>
+                <a:spcPts val="800"/>
+              </a:spcBef>
+              <a:spcAft>
+                <a:spcPts val="800"/>
+              </a:spcAft>
+              <a:defRPr sz="2200">
+                <a:solidFill>
+                  <a:srgbClr val="FFFFFF"/>
+                </a:solidFill>
+              </a:defRPr>
+            </a:pPr>
+            <a:r>
+              <a:t>      Control what leaves environment</a:t>
+            </a:r>
+          </a:p>
+          <a:p>
+            <a:pPr>
+              <a:spcBef>
+                <a:spcPts val="800"/>
+              </a:spcBef>
+              <a:spcAft>
+                <a:spcPts val="800"/>
+              </a:spcAft>
+              <a:defRPr sz="2200">
+                <a:solidFill>
+                  <a:srgbClr val="FFFFFF"/>
+                </a:solidFill>
+              </a:defRPr>
+            </a:pPr>
+            <a:r>
+              <a:t>      On-premises options</a:t>
+            </a:r>
+          </a:p>
+          <a:p>
+            <a:pPr>
+              <a:spcBef>
+                <a:spcPts val="800"/>
+              </a:spcBef>
+              <a:spcAft>
+                <a:spcPts val="800"/>
+              </a:spcAft>
+              <a:defRPr sz="2200">
+                <a:solidFill>
+                  <a:srgbClr val="FFFFFF"/>
+                </a:solidFill>
+              </a:defRPr>
+            </a:pPr>
+            <a:r>
+              <a:t>      Retention policies</a:t>
+            </a:r>
+          </a:p>
+        </p:txBody>
+      </p:sp>
     </p:spTree>
   </p:cSld>
   <p:clrMapOvr>
@@ -31168,6 +36268,155 @@
           </a:p>
         </p:txBody>
       </p:sp>
+      <p:sp>
+        <p:nvSpPr>
+          <p:cNvPr id="4" name="TextBox 3"/>
+          <p:cNvSpPr txBox="1"/>
+          <p:nvPr/>
+        </p:nvSpPr>
+        <p:spPr>
+          <a:xfrm>
+            <a:off x="457200" y="1463040"/>
+            <a:ext cx="11277295" cy="4572000"/>
+          </a:xfrm>
+          <a:prstGeom prst="rect">
+            <a:avLst/>
+          </a:prstGeom>
+          <a:noFill/>
+        </p:spPr>
+        <p:txBody>
+          <a:bodyPr wrap="square">
+            <a:spAutoFit/>
+          </a:bodyPr>
+          <a:lstStyle/>
+          <a:p>
+            <a:pPr>
+              <a:spcBef>
+                <a:spcPts val="800"/>
+              </a:spcBef>
+              <a:spcAft>
+                <a:spcPts val="800"/>
+              </a:spcAft>
+              <a:defRPr sz="2200">
+                <a:solidFill>
+                  <a:srgbClr val="FFFFFF"/>
+                </a:solidFill>
+              </a:defRPr>
+            </a:pPr>
+            <a:r>
+              <a:t>  How It Works</a:t>
+            </a:r>
+          </a:p>
+          <a:p>
+            <a:pPr>
+              <a:spcBef>
+                <a:spcPts val="800"/>
+              </a:spcBef>
+              <a:spcAft>
+                <a:spcPts val="800"/>
+              </a:spcAft>
+              <a:defRPr sz="2200">
+                <a:solidFill>
+                  <a:srgbClr val="FFFFFF"/>
+                </a:solidFill>
+              </a:defRPr>
+            </a:pPr>
+            <a:r>
+              <a:t>      Makes changes</a:t>
+            </a:r>
+          </a:p>
+          <a:p>
+            <a:pPr>
+              <a:spcBef>
+                <a:spcPts val="800"/>
+              </a:spcBef>
+              <a:spcAft>
+                <a:spcPts val="800"/>
+              </a:spcAft>
+              <a:defRPr sz="2200">
+                <a:solidFill>
+                  <a:srgbClr val="FFFFFF"/>
+                </a:solidFill>
+              </a:defRPr>
+            </a:pPr>
+            <a:r>
+              <a:t>      Generates commit message</a:t>
+            </a:r>
+          </a:p>
+          <a:p>
+            <a:pPr>
+              <a:spcBef>
+                <a:spcPts val="800"/>
+              </a:spcBef>
+              <a:spcAft>
+                <a:spcPts val="800"/>
+              </a:spcAft>
+              <a:defRPr sz="2200">
+                <a:solidFill>
+                  <a:srgbClr val="FFFFFF"/>
+                </a:solidFill>
+              </a:defRPr>
+            </a:pPr>
+            <a:r>
+              <a:t>      Prompts approval</a:t>
+            </a:r>
+          </a:p>
+          <a:p>
+            <a:pPr>
+              <a:spcBef>
+                <a:spcPts val="800"/>
+              </a:spcBef>
+              <a:spcAft>
+                <a:spcPts val="800"/>
+              </a:spcAft>
+              <a:defRPr sz="2200">
+                <a:solidFill>
+                  <a:srgbClr val="FFFFFF"/>
+                </a:solidFill>
+              </a:defRPr>
+            </a:pPr>
+            <a:r>
+              <a:t>  Quality</a:t>
+            </a:r>
+          </a:p>
+          <a:p>
+            <a:pPr>
+              <a:spcBef>
+                <a:spcPts val="800"/>
+              </a:spcBef>
+              <a:spcAft>
+                <a:spcPts val="800"/>
+              </a:spcAft>
+              <a:defRPr sz="2200">
+                <a:solidFill>
+                  <a:srgbClr val="FFFFFF"/>
+                </a:solidFill>
+              </a:defRPr>
+            </a:pPr>
+            <a:r>
+              <a:t>      Conventional Commits format</a:t>
+            </a:r>
+          </a:p>
+          <a:p>
+            <a:pPr>
+              <a:spcBef>
+                <a:spcPts val="800"/>
+              </a:spcBef>
+              <a:spcAft>
+                <a:spcPts val="800"/>
+              </a:spcAft>
+              <a:defRPr sz="2200">
+                <a:solidFill>
+                  <a:srgbClr val="FFFFFF"/>
+                </a:solidFill>
+              </a:defRPr>
+            </a:pPr>
+            <a:r>
+              <a:t>      Better than manual</a:t>
+            </a:r>
+          </a:p>
+        </p:txBody>
+      </p:sp>
     </p:spTree>
   </p:cSld>
   <p:clrMapOvr>
@@ -31272,6 +36521,137 @@
           </a:p>
         </p:txBody>
       </p:sp>
+      <p:sp>
+        <p:nvSpPr>
+          <p:cNvPr id="4" name="TextBox 3"/>
+          <p:cNvSpPr txBox="1"/>
+          <p:nvPr/>
+        </p:nvSpPr>
+        <p:spPr>
+          <a:xfrm>
+            <a:off x="457200" y="1463040"/>
+            <a:ext cx="11277295" cy="4572000"/>
+          </a:xfrm>
+          <a:prstGeom prst="rect">
+            <a:avLst/>
+          </a:prstGeom>
+          <a:noFill/>
+        </p:spPr>
+        <p:txBody>
+          <a:bodyPr wrap="square">
+            <a:spAutoFit/>
+          </a:bodyPr>
+          <a:lstStyle/>
+          <a:p>
+            <a:pPr>
+              <a:spcBef>
+                <a:spcPts val="800"/>
+              </a:spcBef>
+              <a:spcAft>
+                <a:spcPts val="800"/>
+              </a:spcAft>
+              <a:defRPr sz="2200">
+                <a:solidFill>
+                  <a:srgbClr val="FFFFFF"/>
+                </a:solidFill>
+              </a:defRPr>
+            </a:pPr>
+            <a:r>
+              <a:t>  Working memory → Context window: Both degrade under load.</a:t>
+            </a:r>
+          </a:p>
+          <a:p>
+            <a:pPr>
+              <a:spcBef>
+                <a:spcPts val="800"/>
+              </a:spcBef>
+              <a:spcAft>
+                <a:spcPts val="800"/>
+              </a:spcAft>
+              <a:defRPr sz="2200">
+                <a:solidFill>
+                  <a:srgbClr val="FFFFFF"/>
+                </a:solidFill>
+              </a:defRPr>
+            </a:pPr>
+            <a:r>
+              <a:t>  Short-term → Session history: When you study, you move important things from short-term to long-term memory through n...</a:t>
+            </a:r>
+          </a:p>
+          <a:p>
+            <a:pPr>
+              <a:spcBef>
+                <a:spcPts val="800"/>
+              </a:spcBef>
+              <a:spcAft>
+                <a:spcPts val="800"/>
+              </a:spcAft>
+              <a:defRPr sz="2200">
+                <a:solidFill>
+                  <a:srgbClr val="FFFFFF"/>
+                </a:solidFill>
+              </a:defRPr>
+            </a:pPr>
+            <a:r>
+              <a:t>  Long-term → CLAUDE.</a:t>
+            </a:r>
+          </a:p>
+          <a:p>
+            <a:pPr>
+              <a:spcBef>
+                <a:spcPts val="800"/>
+              </a:spcBef>
+              <a:spcAft>
+                <a:spcPts val="800"/>
+              </a:spcAft>
+              <a:defRPr sz="2200">
+                <a:solidFill>
+                  <a:srgbClr val="FFFFFF"/>
+                </a:solidFill>
+              </a:defRPr>
+            </a:pPr>
+            <a:r>
+              <a:t>  Muscle memory → Skills / custom commands: Just like you don't consciously think about typing, skills and commands let...</a:t>
+            </a:r>
+          </a:p>
+          <a:p>
+            <a:pPr>
+              <a:spcBef>
+                <a:spcPts val="800"/>
+              </a:spcBef>
+              <a:spcAft>
+                <a:spcPts val="800"/>
+              </a:spcAft>
+              <a:defRPr sz="2200">
+                <a:solidFill>
+                  <a:srgbClr val="FFFFFF"/>
+                </a:solidFill>
+              </a:defRPr>
+            </a:pPr>
+            <a:r>
+              <a:t>  Scott's framing: Context window is short-term memory.</a:t>
+            </a:r>
+          </a:p>
+          <a:p>
+            <a:pPr>
+              <a:spcBef>
+                <a:spcPts val="800"/>
+              </a:spcBef>
+              <a:spcAft>
+                <a:spcPts val="800"/>
+              </a:spcAft>
+              <a:defRPr sz="2200">
+                <a:solidFill>
+                  <a:srgbClr val="FFFFFF"/>
+                </a:solidFill>
+              </a:defRPr>
+            </a:pPr>
+            <a:r>
+              <a:t>  Everything that follows today — CLAUDE.</a:t>
+            </a:r>
+          </a:p>
+        </p:txBody>
+      </p:sp>
     </p:spTree>
   </p:cSld>
   <p:clrMapOvr>
@@ -31376,6 +36756,155 @@
           </a:p>
         </p:txBody>
       </p:sp>
+      <p:sp>
+        <p:nvSpPr>
+          <p:cNvPr id="4" name="TextBox 3"/>
+          <p:cNvSpPr txBox="1"/>
+          <p:nvPr/>
+        </p:nvSpPr>
+        <p:spPr>
+          <a:xfrm>
+            <a:off x="457200" y="1463040"/>
+            <a:ext cx="11277295" cy="4572000"/>
+          </a:xfrm>
+          <a:prstGeom prst="rect">
+            <a:avLst/>
+          </a:prstGeom>
+          <a:noFill/>
+        </p:spPr>
+        <p:txBody>
+          <a:bodyPr wrap="square">
+            <a:spAutoFit/>
+          </a:bodyPr>
+          <a:lstStyle/>
+          <a:p>
+            <a:pPr>
+              <a:spcBef>
+                <a:spcPts val="800"/>
+              </a:spcBef>
+              <a:spcAft>
+                <a:spcPts val="800"/>
+              </a:spcAft>
+              <a:defRPr sz="2200">
+                <a:solidFill>
+                  <a:srgbClr val="FFFFFF"/>
+                </a:solidFill>
+              </a:defRPr>
+            </a:pPr>
+            <a:r>
+              <a:t>  Creating</a:t>
+            </a:r>
+          </a:p>
+          <a:p>
+            <a:pPr>
+              <a:spcBef>
+                <a:spcPts val="800"/>
+              </a:spcBef>
+              <a:spcAft>
+                <a:spcPts val="800"/>
+              </a:spcAft>
+              <a:defRPr sz="2200">
+                <a:solidFill>
+                  <a:srgbClr val="FFFFFF"/>
+                </a:solidFill>
+              </a:defRPr>
+            </a:pPr>
+            <a:r>
+              <a:t>      Proper names</a:t>
+            </a:r>
+          </a:p>
+          <a:p>
+            <a:pPr>
+              <a:spcBef>
+                <a:spcPts val="800"/>
+              </a:spcBef>
+              <a:spcAft>
+                <a:spcPts val="800"/>
+              </a:spcAft>
+              <a:defRPr sz="2200">
+                <a:solidFill>
+                  <a:srgbClr val="FFFFFF"/>
+                </a:solidFill>
+              </a:defRPr>
+            </a:pPr>
+            <a:r>
+              <a:t>      Team conventions</a:t>
+            </a:r>
+          </a:p>
+          <a:p>
+            <a:pPr>
+              <a:spcBef>
+                <a:spcPts val="800"/>
+              </a:spcBef>
+              <a:spcAft>
+                <a:spcPts val="800"/>
+              </a:spcAft>
+              <a:defRPr sz="2200">
+                <a:solidFill>
+                  <a:srgbClr val="FFFFFF"/>
+                </a:solidFill>
+              </a:defRPr>
+            </a:pPr>
+            <a:r>
+              <a:t>      Auto checkout</a:t>
+            </a:r>
+          </a:p>
+          <a:p>
+            <a:pPr>
+              <a:spcBef>
+                <a:spcPts val="800"/>
+              </a:spcBef>
+              <a:spcAft>
+                <a:spcPts val="800"/>
+              </a:spcAft>
+              <a:defRPr sz="2200">
+                <a:solidFill>
+                  <a:srgbClr val="FFFFFF"/>
+                </a:solidFill>
+              </a:defRPr>
+            </a:pPr>
+            <a:r>
+              <a:t>  Naming</a:t>
+            </a:r>
+          </a:p>
+          <a:p>
+            <a:pPr>
+              <a:spcBef>
+                <a:spcPts val="800"/>
+              </a:spcBef>
+              <a:spcAft>
+                <a:spcPts val="800"/>
+              </a:spcAft>
+              <a:defRPr sz="2200">
+                <a:solidFill>
+                  <a:srgbClr val="FFFFFF"/>
+                </a:solidFill>
+              </a:defRPr>
+            </a:pPr>
+            <a:r>
+              <a:t>      Configurable</a:t>
+            </a:r>
+          </a:p>
+          <a:p>
+            <a:pPr>
+              <a:spcBef>
+                <a:spcPts val="800"/>
+              </a:spcBef>
+              <a:spcAft>
+                <a:spcPts val="800"/>
+              </a:spcAft>
+              <a:defRPr sz="2200">
+                <a:solidFill>
+                  <a:srgbClr val="FFFFFF"/>
+                </a:solidFill>
+              </a:defRPr>
+            </a:pPr>
+            <a:r>
+              <a:t>      Includes tickets</a:t>
+            </a:r>
+          </a:p>
+        </p:txBody>
+      </p:sp>
     </p:spTree>
   </p:cSld>
   <p:clrMapOvr>
@@ -31655,6 +37184,173 @@
           </a:p>
         </p:txBody>
       </p:sp>
+      <p:sp>
+        <p:nvSpPr>
+          <p:cNvPr id="4" name="TextBox 3"/>
+          <p:cNvSpPr txBox="1"/>
+          <p:nvPr/>
+        </p:nvSpPr>
+        <p:spPr>
+          <a:xfrm>
+            <a:off x="457200" y="1463040"/>
+            <a:ext cx="11277295" cy="4572000"/>
+          </a:xfrm>
+          <a:prstGeom prst="rect">
+            <a:avLst/>
+          </a:prstGeom>
+          <a:noFill/>
+        </p:spPr>
+        <p:txBody>
+          <a:bodyPr wrap="square">
+            <a:spAutoFit/>
+          </a:bodyPr>
+          <a:lstStyle/>
+          <a:p>
+            <a:pPr>
+              <a:spcBef>
+                <a:spcPts val="800"/>
+              </a:spcBef>
+              <a:spcAft>
+                <a:spcPts val="800"/>
+              </a:spcAft>
+              <a:defRPr sz="2200">
+                <a:solidFill>
+                  <a:srgbClr val="FFFFFF"/>
+                </a:solidFill>
+              </a:defRPr>
+            </a:pPr>
+            <a:r>
+              <a:t>  Description</a:t>
+            </a:r>
+          </a:p>
+          <a:p>
+            <a:pPr>
+              <a:spcBef>
+                <a:spcPts val="800"/>
+              </a:spcBef>
+              <a:spcAft>
+                <a:spcPts val="800"/>
+              </a:spcAft>
+              <a:defRPr sz="2200">
+                <a:solidFill>
+                  <a:srgbClr val="FFFFFF"/>
+                </a:solidFill>
+              </a:defRPr>
+            </a:pPr>
+            <a:r>
+              <a:t>      Title from commits</a:t>
+            </a:r>
+          </a:p>
+          <a:p>
+            <a:pPr>
+              <a:spcBef>
+                <a:spcPts val="800"/>
+              </a:spcBef>
+              <a:spcAft>
+                <a:spcPts val="800"/>
+              </a:spcAft>
+              <a:defRPr sz="2200">
+                <a:solidFill>
+                  <a:srgbClr val="FFFFFF"/>
+                </a:solidFill>
+              </a:defRPr>
+            </a:pPr>
+            <a:r>
+              <a:t>      Summarizes changes</a:t>
+            </a:r>
+          </a:p>
+          <a:p>
+            <a:pPr>
+              <a:spcBef>
+                <a:spcPts val="800"/>
+              </a:spcBef>
+              <a:spcAft>
+                <a:spcPts val="800"/>
+              </a:spcAft>
+              <a:defRPr sz="2200">
+                <a:solidFill>
+                  <a:srgbClr val="FFFFFF"/>
+                </a:solidFill>
+              </a:defRPr>
+            </a:pPr>
+            <a:r>
+              <a:t>      Testing steps</a:t>
+            </a:r>
+          </a:p>
+          <a:p>
+            <a:pPr>
+              <a:spcBef>
+                <a:spcPts val="800"/>
+              </a:spcBef>
+              <a:spcAft>
+                <a:spcPts val="800"/>
+              </a:spcAft>
+              <a:defRPr sz="2200">
+                <a:solidFill>
+                  <a:srgbClr val="FFFFFF"/>
+                </a:solidFill>
+              </a:defRPr>
+            </a:pPr>
+            <a:r>
+              <a:t>  Links</a:t>
+            </a:r>
+          </a:p>
+          <a:p>
+            <a:pPr>
+              <a:spcBef>
+                <a:spcPts val="800"/>
+              </a:spcBef>
+              <a:spcAft>
+                <a:spcPts val="800"/>
+              </a:spcAft>
+              <a:defRPr sz="2200">
+                <a:solidFill>
+                  <a:srgbClr val="FFFFFF"/>
+                </a:solidFill>
+              </a:defRPr>
+            </a:pPr>
+            <a:r>
+              <a:t>      JIRA tickets</a:t>
+            </a:r>
+          </a:p>
+          <a:p>
+            <a:pPr>
+              <a:spcBef>
+                <a:spcPts val="800"/>
+              </a:spcBef>
+              <a:spcAft>
+                <a:spcPts val="800"/>
+              </a:spcAft>
+              <a:defRPr sz="2200">
+                <a:solidFill>
+                  <a:srgbClr val="FFFFFF"/>
+                </a:solidFill>
+              </a:defRPr>
+            </a:pPr>
+            <a:r>
+              <a:t>      GitHub issues</a:t>
+            </a:r>
+          </a:p>
+          <a:p>
+            <a:pPr>
+              <a:spcBef>
+                <a:spcPts val="800"/>
+              </a:spcBef>
+              <a:spcAft>
+                <a:spcPts val="800"/>
+              </a:spcAft>
+              <a:defRPr sz="2200">
+                <a:solidFill>
+                  <a:srgbClr val="FFFFFF"/>
+                </a:solidFill>
+              </a:defRPr>
+            </a:pPr>
+            <a:r>
+              <a:t>      Auto-closes</a:t>
+            </a:r>
+          </a:p>
+        </p:txBody>
+      </p:sp>
     </p:spTree>
   </p:cSld>
   <p:clrMapOvr>
@@ -31759,6 +37455,191 @@
           </a:p>
         </p:txBody>
       </p:sp>
+      <p:sp>
+        <p:nvSpPr>
+          <p:cNvPr id="4" name="TextBox 3"/>
+          <p:cNvSpPr txBox="1"/>
+          <p:nvPr/>
+        </p:nvSpPr>
+        <p:spPr>
+          <a:xfrm>
+            <a:off x="457200" y="1463040"/>
+            <a:ext cx="11277295" cy="4572000"/>
+          </a:xfrm>
+          <a:prstGeom prst="rect">
+            <a:avLst/>
+          </a:prstGeom>
+          <a:noFill/>
+        </p:spPr>
+        <p:txBody>
+          <a:bodyPr wrap="square">
+            <a:spAutoFit/>
+          </a:bodyPr>
+          <a:lstStyle/>
+          <a:p>
+            <a:pPr>
+              <a:spcBef>
+                <a:spcPts val="800"/>
+              </a:spcBef>
+              <a:spcAft>
+                <a:spcPts val="800"/>
+              </a:spcAft>
+              <a:defRPr sz="2200">
+                <a:solidFill>
+                  <a:srgbClr val="FFFFFF"/>
+                </a:solidFill>
+              </a:defRPr>
+            </a:pPr>
+            <a:r>
+              <a:t>  Blame</a:t>
+            </a:r>
+          </a:p>
+          <a:p>
+            <a:pPr>
+              <a:spcBef>
+                <a:spcPts val="800"/>
+              </a:spcBef>
+              <a:spcAft>
+                <a:spcPts val="800"/>
+              </a:spcAft>
+              <a:defRPr sz="2200">
+                <a:solidFill>
+                  <a:srgbClr val="FFFFFF"/>
+                </a:solidFill>
+              </a:defRPr>
+            </a:pPr>
+            <a:r>
+              <a:t>      Who changed this?</a:t>
+            </a:r>
+          </a:p>
+          <a:p>
+            <a:pPr>
+              <a:spcBef>
+                <a:spcPts val="800"/>
+              </a:spcBef>
+              <a:spcAft>
+                <a:spcPts val="800"/>
+              </a:spcAft>
+              <a:defRPr sz="2200">
+                <a:solidFill>
+                  <a:srgbClr val="FFFFFF"/>
+                </a:solidFill>
+              </a:defRPr>
+            </a:pPr>
+            <a:r>
+              <a:t>      When and why</a:t>
+            </a:r>
+          </a:p>
+          <a:p>
+            <a:pPr>
+              <a:spcBef>
+                <a:spcPts val="800"/>
+              </a:spcBef>
+              <a:spcAft>
+                <a:spcPts val="800"/>
+              </a:spcAft>
+              <a:defRPr sz="2200">
+                <a:solidFill>
+                  <a:srgbClr val="FFFFFF"/>
+                </a:solidFill>
+              </a:defRPr>
+            </a:pPr>
+            <a:r>
+              <a:t>  Logs</a:t>
+            </a:r>
+          </a:p>
+          <a:p>
+            <a:pPr>
+              <a:spcBef>
+                <a:spcPts val="800"/>
+              </a:spcBef>
+              <a:spcAft>
+                <a:spcPts val="800"/>
+              </a:spcAft>
+              <a:defRPr sz="2200">
+                <a:solidFill>
+                  <a:srgbClr val="FFFFFF"/>
+                </a:solidFill>
+              </a:defRPr>
+            </a:pPr>
+            <a:r>
+              <a:t>      Changes over time</a:t>
+            </a:r>
+          </a:p>
+          <a:p>
+            <a:pPr>
+              <a:spcBef>
+                <a:spcPts val="800"/>
+              </a:spcBef>
+              <a:spcAft>
+                <a:spcPts val="800"/>
+              </a:spcAft>
+              <a:defRPr sz="2200">
+                <a:solidFill>
+                  <a:srgbClr val="FFFFFF"/>
+                </a:solidFill>
+              </a:defRPr>
+            </a:pPr>
+            <a:r>
+              <a:t>      Hot spot identification</a:t>
+            </a:r>
+          </a:p>
+          <a:p>
+            <a:pPr>
+              <a:spcBef>
+                <a:spcPts val="800"/>
+              </a:spcBef>
+              <a:spcAft>
+                <a:spcPts val="800"/>
+              </a:spcAft>
+              <a:defRPr sz="2200">
+                <a:solidFill>
+                  <a:srgbClr val="FFFFFF"/>
+                </a:solidFill>
+              </a:defRPr>
+            </a:pPr>
+            <a:r>
+              <a:t>  Tracking</a:t>
+            </a:r>
+          </a:p>
+          <a:p>
+            <a:pPr>
+              <a:spcBef>
+                <a:spcPts val="800"/>
+              </a:spcBef>
+              <a:spcAft>
+                <a:spcPts val="800"/>
+              </a:spcAft>
+              <a:defRPr sz="2200">
+                <a:solidFill>
+                  <a:srgbClr val="FFFFFF"/>
+                </a:solidFill>
+              </a:defRPr>
+            </a:pPr>
+            <a:r>
+              <a:t>      Version diffs</a:t>
+            </a:r>
+          </a:p>
+          <a:p>
+            <a:pPr>
+              <a:spcBef>
+                <a:spcPts val="800"/>
+              </a:spcBef>
+              <a:spcAft>
+                <a:spcPts val="800"/>
+              </a:spcAft>
+              <a:defRPr sz="2200">
+                <a:solidFill>
+                  <a:srgbClr val="FFFFFF"/>
+                </a:solidFill>
+              </a:defRPr>
+            </a:pPr>
+            <a:r>
+              <a:t>      Changelog generation</a:t>
+            </a:r>
+          </a:p>
+        </p:txBody>
+      </p:sp>
     </p:spTree>
   </p:cSld>
   <p:clrMapOvr>
@@ -32280,6 +38161,191 @@
           </a:p>
         </p:txBody>
       </p:sp>
+      <p:sp>
+        <p:nvSpPr>
+          <p:cNvPr id="4" name="TextBox 3"/>
+          <p:cNvSpPr txBox="1"/>
+          <p:nvPr/>
+        </p:nvSpPr>
+        <p:spPr>
+          <a:xfrm>
+            <a:off x="457200" y="1463040"/>
+            <a:ext cx="11277295" cy="4572000"/>
+          </a:xfrm>
+          <a:prstGeom prst="rect">
+            <a:avLst/>
+          </a:prstGeom>
+          <a:noFill/>
+        </p:spPr>
+        <p:txBody>
+          <a:bodyPr wrap="square">
+            <a:spAutoFit/>
+          </a:bodyPr>
+          <a:lstStyle/>
+          <a:p>
+            <a:pPr>
+              <a:spcBef>
+                <a:spcPts val="800"/>
+              </a:spcBef>
+              <a:spcAft>
+                <a:spcPts val="800"/>
+              </a:spcAft>
+              <a:defRPr sz="2200">
+                <a:solidFill>
+                  <a:srgbClr val="FFFFFF"/>
+                </a:solidFill>
+              </a:defRPr>
+            </a:pPr>
+            <a:r>
+              <a:t>  Core</a:t>
+            </a:r>
+          </a:p>
+          <a:p>
+            <a:pPr>
+              <a:spcBef>
+                <a:spcPts val="800"/>
+              </a:spcBef>
+              <a:spcAft>
+                <a:spcPts val="800"/>
+              </a:spcAft>
+              <a:defRPr sz="2200">
+                <a:solidFill>
+                  <a:srgbClr val="FFFFFF"/>
+                </a:solidFill>
+              </a:defRPr>
+            </a:pPr>
+            <a:r>
+              <a:t>      read_file</a:t>
+            </a:r>
+          </a:p>
+          <a:p>
+            <a:pPr>
+              <a:spcBef>
+                <a:spcPts val="800"/>
+              </a:spcBef>
+              <a:spcAft>
+                <a:spcPts val="800"/>
+              </a:spcAft>
+              <a:defRPr sz="2200">
+                <a:solidFill>
+                  <a:srgbClr val="FFFFFF"/>
+                </a:solidFill>
+              </a:defRPr>
+            </a:pPr>
+            <a:r>
+              <a:t>      write_file</a:t>
+            </a:r>
+          </a:p>
+          <a:p>
+            <a:pPr>
+              <a:spcBef>
+                <a:spcPts val="800"/>
+              </a:spcBef>
+              <a:spcAft>
+                <a:spcPts val="800"/>
+              </a:spcAft>
+              <a:defRPr sz="2200">
+                <a:solidFill>
+                  <a:srgbClr val="FFFFFF"/>
+                </a:solidFill>
+              </a:defRPr>
+            </a:pPr>
+            <a:r>
+              <a:t>      edit_file</a:t>
+            </a:r>
+          </a:p>
+          <a:p>
+            <a:pPr>
+              <a:spcBef>
+                <a:spcPts val="800"/>
+              </a:spcBef>
+              <a:spcAft>
+                <a:spcPts val="800"/>
+              </a:spcAft>
+              <a:defRPr sz="2200">
+                <a:solidFill>
+                  <a:srgbClr val="FFFFFF"/>
+                </a:solidFill>
+              </a:defRPr>
+            </a:pPr>
+            <a:r>
+              <a:t>      search</a:t>
+            </a:r>
+          </a:p>
+          <a:p>
+            <a:pPr>
+              <a:spcBef>
+                <a:spcPts val="800"/>
+              </a:spcBef>
+              <a:spcAft>
+                <a:spcPts val="800"/>
+              </a:spcAft>
+              <a:defRPr sz="2200">
+                <a:solidFill>
+                  <a:srgbClr val="FFFFFF"/>
+                </a:solidFill>
+              </a:defRPr>
+            </a:pPr>
+            <a:r>
+              <a:t>  Intelligent</a:t>
+            </a:r>
+          </a:p>
+          <a:p>
+            <a:pPr>
+              <a:spcBef>
+                <a:spcPts val="800"/>
+              </a:spcBef>
+              <a:spcAft>
+                <a:spcPts val="800"/>
+              </a:spcAft>
+              <a:defRPr sz="2200">
+                <a:solidFill>
+                  <a:srgbClr val="FFFFFF"/>
+                </a:solidFill>
+              </a:defRPr>
+            </a:pPr>
+            <a:r>
+              <a:t>      Line-based</a:t>
+            </a:r>
+          </a:p>
+          <a:p>
+            <a:pPr>
+              <a:spcBef>
+                <a:spcPts val="800"/>
+              </a:spcBef>
+              <a:spcAft>
+                <a:spcPts val="800"/>
+              </a:spcAft>
+              <a:defRPr sz="2200">
+                <a:solidFill>
+                  <a:srgbClr val="FFFFFF"/>
+                </a:solidFill>
+              </a:defRPr>
+            </a:pPr>
+            <a:r>
+              <a:t>      Search-replace</a:t>
+            </a:r>
+          </a:p>
+          <a:p>
+            <a:pPr>
+              <a:spcBef>
+                <a:spcPts val="800"/>
+              </a:spcBef>
+              <a:spcAft>
+                <a:spcPts val="800"/>
+              </a:spcAft>
+              <a:defRPr sz="2200">
+                <a:solidFill>
+                  <a:srgbClr val="FFFFFF"/>
+                </a:solidFill>
+              </a:defRPr>
+            </a:pPr>
+            <a:r>
+              <a:t>      Multi-file</a:t>
+            </a:r>
+          </a:p>
+        </p:txBody>
+      </p:sp>
     </p:spTree>
   </p:cSld>
   <p:clrMapOvr>
@@ -32384,6 +38450,173 @@
           </a:p>
         </p:txBody>
       </p:sp>
+      <p:sp>
+        <p:nvSpPr>
+          <p:cNvPr id="4" name="TextBox 3"/>
+          <p:cNvSpPr txBox="1"/>
+          <p:nvPr/>
+        </p:nvSpPr>
+        <p:spPr>
+          <a:xfrm>
+            <a:off x="457200" y="1463040"/>
+            <a:ext cx="11277295" cy="4572000"/>
+          </a:xfrm>
+          <a:prstGeom prst="rect">
+            <a:avLst/>
+          </a:prstGeom>
+          <a:noFill/>
+        </p:spPr>
+        <p:txBody>
+          <a:bodyPr wrap="square">
+            <a:spAutoFit/>
+          </a:bodyPr>
+          <a:lstStyle/>
+          <a:p>
+            <a:pPr>
+              <a:spcBef>
+                <a:spcPts val="800"/>
+              </a:spcBef>
+              <a:spcAft>
+                <a:spcPts val="800"/>
+              </a:spcAft>
+              <a:defRPr sz="2200">
+                <a:solidFill>
+                  <a:srgbClr val="FFFFFF"/>
+                </a:solidFill>
+              </a:defRPr>
+            </a:pPr>
+            <a:r>
+              <a:t>  Coordinated</a:t>
+            </a:r>
+          </a:p>
+          <a:p>
+            <a:pPr>
+              <a:spcBef>
+                <a:spcPts val="800"/>
+              </a:spcBef>
+              <a:spcAft>
+                <a:spcPts val="800"/>
+              </a:spcAft>
+              <a:defRPr sz="2200">
+                <a:solidFill>
+                  <a:srgbClr val="FFFFFF"/>
+                </a:solidFill>
+              </a:defRPr>
+            </a:pPr>
+            <a:r>
+              <a:t>      Multiple files together</a:t>
+            </a:r>
+          </a:p>
+          <a:p>
+            <a:pPr>
+              <a:spcBef>
+                <a:spcPts val="800"/>
+              </a:spcBef>
+              <a:spcAft>
+                <a:spcPts val="800"/>
+              </a:spcAft>
+              <a:defRPr sz="2200">
+                <a:solidFill>
+                  <a:srgbClr val="FFFFFF"/>
+                </a:solidFill>
+              </a:defRPr>
+            </a:pPr>
+            <a:r>
+              <a:t>      Maintains consistency</a:t>
+            </a:r>
+          </a:p>
+          <a:p>
+            <a:pPr>
+              <a:spcBef>
+                <a:spcPts val="800"/>
+              </a:spcBef>
+              <a:spcAft>
+                <a:spcPts val="800"/>
+              </a:spcAft>
+              <a:defRPr sz="2200">
+                <a:solidFill>
+                  <a:srgbClr val="FFFFFF"/>
+                </a:solidFill>
+              </a:defRPr>
+            </a:pPr>
+            <a:r>
+              <a:t>      Tracks deps</a:t>
+            </a:r>
+          </a:p>
+          <a:p>
+            <a:pPr>
+              <a:spcBef>
+                <a:spcPts val="800"/>
+              </a:spcBef>
+              <a:spcAft>
+                <a:spcPts val="800"/>
+              </a:spcAft>
+              <a:defRPr sz="2200">
+                <a:solidFill>
+                  <a:srgbClr val="FFFFFF"/>
+                </a:solidFill>
+              </a:defRPr>
+            </a:pPr>
+            <a:r>
+              <a:t>  Patterns</a:t>
+            </a:r>
+          </a:p>
+          <a:p>
+            <a:pPr>
+              <a:spcBef>
+                <a:spcPts val="800"/>
+              </a:spcBef>
+              <a:spcAft>
+                <a:spcPts val="800"/>
+              </a:spcAft>
+              <a:defRPr sz="2200">
+                <a:solidFill>
+                  <a:srgbClr val="FFFFFF"/>
+                </a:solidFill>
+              </a:defRPr>
+            </a:pPr>
+            <a:r>
+              <a:t>      Extract method</a:t>
+            </a:r>
+          </a:p>
+          <a:p>
+            <a:pPr>
+              <a:spcBef>
+                <a:spcPts val="800"/>
+              </a:spcBef>
+              <a:spcAft>
+                <a:spcPts val="800"/>
+              </a:spcAft>
+              <a:defRPr sz="2200">
+                <a:solidFill>
+                  <a:srgbClr val="FFFFFF"/>
+                </a:solidFill>
+              </a:defRPr>
+            </a:pPr>
+            <a:r>
+              <a:t>      Rename</a:t>
+            </a:r>
+          </a:p>
+          <a:p>
+            <a:pPr>
+              <a:spcBef>
+                <a:spcPts val="800"/>
+              </a:spcBef>
+              <a:spcAft>
+                <a:spcPts val="800"/>
+              </a:spcAft>
+              <a:defRPr sz="2200">
+                <a:solidFill>
+                  <a:srgbClr val="FFFFFF"/>
+                </a:solidFill>
+              </a:defRPr>
+            </a:pPr>
+            <a:r>
+              <a:t>      Move code</a:t>
+            </a:r>
+          </a:p>
+        </p:txBody>
+      </p:sp>
     </p:spTree>
   </p:cSld>
   <p:clrMapOvr>
@@ -32488,6 +38721,191 @@
           </a:p>
         </p:txBody>
       </p:sp>
+      <p:sp>
+        <p:nvSpPr>
+          <p:cNvPr id="4" name="TextBox 3"/>
+          <p:cNvSpPr txBox="1"/>
+          <p:nvPr/>
+        </p:nvSpPr>
+        <p:spPr>
+          <a:xfrm>
+            <a:off x="457200" y="1463040"/>
+            <a:ext cx="11277295" cy="4572000"/>
+          </a:xfrm>
+          <a:prstGeom prst="rect">
+            <a:avLst/>
+          </a:prstGeom>
+          <a:noFill/>
+        </p:spPr>
+        <p:txBody>
+          <a:bodyPr wrap="square">
+            <a:spAutoFit/>
+          </a:bodyPr>
+          <a:lstStyle/>
+          <a:p>
+            <a:pPr>
+              <a:spcBef>
+                <a:spcPts val="800"/>
+              </a:spcBef>
+              <a:spcAft>
+                <a:spcPts val="800"/>
+              </a:spcAft>
+              <a:defRPr sz="2200">
+                <a:solidFill>
+                  <a:srgbClr val="FFFFFF"/>
+                </a:solidFill>
+              </a:defRPr>
+            </a:pPr>
+            <a:r>
+              <a:t>  Boilerplate</a:t>
+            </a:r>
+          </a:p>
+          <a:p>
+            <a:pPr>
+              <a:spcBef>
+                <a:spcPts val="800"/>
+              </a:spcBef>
+              <a:spcAft>
+                <a:spcPts val="800"/>
+              </a:spcAft>
+              <a:defRPr sz="2200">
+                <a:solidFill>
+                  <a:srgbClr val="FFFFFF"/>
+                </a:solidFill>
+              </a:defRPr>
+            </a:pPr>
+            <a:r>
+              <a:t>      CRUD</a:t>
+            </a:r>
+          </a:p>
+          <a:p>
+            <a:pPr>
+              <a:spcBef>
+                <a:spcPts val="800"/>
+              </a:spcBef>
+              <a:spcAft>
+                <a:spcPts val="800"/>
+              </a:spcAft>
+              <a:defRPr sz="2200">
+                <a:solidFill>
+                  <a:srgbClr val="FFFFFF"/>
+                </a:solidFill>
+              </a:defRPr>
+            </a:pPr>
+            <a:r>
+              <a:t>      API endpoints</a:t>
+            </a:r>
+          </a:p>
+          <a:p>
+            <a:pPr>
+              <a:spcBef>
+                <a:spcPts val="800"/>
+              </a:spcBef>
+              <a:spcAft>
+                <a:spcPts val="800"/>
+              </a:spcAft>
+              <a:defRPr sz="2200">
+                <a:solidFill>
+                  <a:srgbClr val="FFFFFF"/>
+                </a:solidFill>
+              </a:defRPr>
+            </a:pPr>
+            <a:r>
+              <a:t>      Models</a:t>
+            </a:r>
+          </a:p>
+          <a:p>
+            <a:pPr>
+              <a:spcBef>
+                <a:spcPts val="800"/>
+              </a:spcBef>
+              <a:spcAft>
+                <a:spcPts val="800"/>
+              </a:spcAft>
+              <a:defRPr sz="2200">
+                <a:solidFill>
+                  <a:srgbClr val="FFFFFF"/>
+                </a:solidFill>
+              </a:defRPr>
+            </a:pPr>
+            <a:r>
+              <a:t>      Tests</a:t>
+            </a:r>
+          </a:p>
+          <a:p>
+            <a:pPr>
+              <a:spcBef>
+                <a:spcPts val="800"/>
+              </a:spcBef>
+              <a:spcAft>
+                <a:spcPts val="800"/>
+              </a:spcAft>
+              <a:defRPr sz="2200">
+                <a:solidFill>
+                  <a:srgbClr val="FFFFFF"/>
+                </a:solidFill>
+              </a:defRPr>
+            </a:pPr>
+            <a:r>
+              <a:t>  Migrations</a:t>
+            </a:r>
+          </a:p>
+          <a:p>
+            <a:pPr>
+              <a:spcBef>
+                <a:spcPts val="800"/>
+              </a:spcBef>
+              <a:spcAft>
+                <a:spcPts val="800"/>
+              </a:spcAft>
+              <a:defRPr sz="2200">
+                <a:solidFill>
+                  <a:srgbClr val="FFFFFF"/>
+                </a:solidFill>
+              </a:defRPr>
+            </a:pPr>
+            <a:r>
+              <a:t>      Schema changes</a:t>
+            </a:r>
+          </a:p>
+          <a:p>
+            <a:pPr>
+              <a:spcBef>
+                <a:spcPts val="800"/>
+              </a:spcBef>
+              <a:spcAft>
+                <a:spcPts val="800"/>
+              </a:spcAft>
+              <a:defRPr sz="2200">
+                <a:solidFill>
+                  <a:srgbClr val="FFFFFF"/>
+                </a:solidFill>
+              </a:defRPr>
+            </a:pPr>
+            <a:r>
+              <a:t>      Data transforms</a:t>
+            </a:r>
+          </a:p>
+          <a:p>
+            <a:pPr>
+              <a:spcBef>
+                <a:spcPts val="800"/>
+              </a:spcBef>
+              <a:spcAft>
+                <a:spcPts val="800"/>
+              </a:spcAft>
+              <a:defRPr sz="2200">
+                <a:solidFill>
+                  <a:srgbClr val="FFFFFF"/>
+                </a:solidFill>
+              </a:defRPr>
+            </a:pPr>
+            <a:r>
+              <a:t>      Rollbacks</a:t>
+            </a:r>
+          </a:p>
+        </p:txBody>
+      </p:sp>
     </p:spTree>
   </p:cSld>
   <p:clrMapOvr>
@@ -33044,6 +39462,191 @@
           </a:p>
         </p:txBody>
       </p:sp>
+      <p:sp>
+        <p:nvSpPr>
+          <p:cNvPr id="4" name="TextBox 3"/>
+          <p:cNvSpPr txBox="1"/>
+          <p:nvPr/>
+        </p:nvSpPr>
+        <p:spPr>
+          <a:xfrm>
+            <a:off x="457200" y="1463040"/>
+            <a:ext cx="11277295" cy="4572000"/>
+          </a:xfrm>
+          <a:prstGeom prst="rect">
+            <a:avLst/>
+          </a:prstGeom>
+          <a:noFill/>
+        </p:spPr>
+        <p:txBody>
+          <a:bodyPr wrap="square">
+            <a:spAutoFit/>
+          </a:bodyPr>
+          <a:lstStyle/>
+          <a:p>
+            <a:pPr>
+              <a:spcBef>
+                <a:spcPts val="800"/>
+              </a:spcBef>
+              <a:spcAft>
+                <a:spcPts val="800"/>
+              </a:spcAft>
+              <a:defRPr sz="2200">
+                <a:solidFill>
+                  <a:srgbClr val="FFFFFF"/>
+                </a:solidFill>
+              </a:defRPr>
+            </a:pPr>
+            <a:r>
+              <a:t>  Types</a:t>
+            </a:r>
+          </a:p>
+          <a:p>
+            <a:pPr>
+              <a:spcBef>
+                <a:spcPts val="800"/>
+              </a:spcBef>
+              <a:spcAft>
+                <a:spcPts val="800"/>
+              </a:spcAft>
+              <a:defRPr sz="2200">
+                <a:solidFill>
+                  <a:srgbClr val="FFFFFF"/>
+                </a:solidFill>
+              </a:defRPr>
+            </a:pPr>
+            <a:r>
+              <a:t>      Unit</a:t>
+            </a:r>
+          </a:p>
+          <a:p>
+            <a:pPr>
+              <a:spcBef>
+                <a:spcPts val="800"/>
+              </a:spcBef>
+              <a:spcAft>
+                <a:spcPts val="800"/>
+              </a:spcAft>
+              <a:defRPr sz="2200">
+                <a:solidFill>
+                  <a:srgbClr val="FFFFFF"/>
+                </a:solidFill>
+              </a:defRPr>
+            </a:pPr>
+            <a:r>
+              <a:t>      Integration</a:t>
+            </a:r>
+          </a:p>
+          <a:p>
+            <a:pPr>
+              <a:spcBef>
+                <a:spcPts val="800"/>
+              </a:spcBef>
+              <a:spcAft>
+                <a:spcPts val="800"/>
+              </a:spcAft>
+              <a:defRPr sz="2200">
+                <a:solidFill>
+                  <a:srgbClr val="FFFFFF"/>
+                </a:solidFill>
+              </a:defRPr>
+            </a:pPr>
+            <a:r>
+              <a:t>      Edge cases</a:t>
+            </a:r>
+          </a:p>
+          <a:p>
+            <a:pPr>
+              <a:spcBef>
+                <a:spcPts val="800"/>
+              </a:spcBef>
+              <a:spcAft>
+                <a:spcPts val="800"/>
+              </a:spcAft>
+              <a:defRPr sz="2200">
+                <a:solidFill>
+                  <a:srgbClr val="FFFFFF"/>
+                </a:solidFill>
+              </a:defRPr>
+            </a:pPr>
+            <a:r>
+              <a:t>      Mocks</a:t>
+            </a:r>
+          </a:p>
+          <a:p>
+            <a:pPr>
+              <a:spcBef>
+                <a:spcPts val="800"/>
+              </a:spcBef>
+              <a:spcAft>
+                <a:spcPts val="800"/>
+              </a:spcAft>
+              <a:defRPr sz="2200">
+                <a:solidFill>
+                  <a:srgbClr val="FFFFFF"/>
+                </a:solidFill>
+              </a:defRPr>
+            </a:pPr>
+            <a:r>
+              <a:t>  Quality</a:t>
+            </a:r>
+          </a:p>
+          <a:p>
+            <a:pPr>
+              <a:spcBef>
+                <a:spcPts val="800"/>
+              </a:spcBef>
+              <a:spcAft>
+                <a:spcPts val="800"/>
+              </a:spcAft>
+              <a:defRPr sz="2200">
+                <a:solidFill>
+                  <a:srgbClr val="FFFFFF"/>
+                </a:solidFill>
+              </a:defRPr>
+            </a:pPr>
+            <a:r>
+              <a:t>      80%+ coverage</a:t>
+            </a:r>
+          </a:p>
+          <a:p>
+            <a:pPr>
+              <a:spcBef>
+                <a:spcPts val="800"/>
+              </a:spcBef>
+              <a:spcAft>
+                <a:spcPts val="800"/>
+              </a:spcAft>
+              <a:defRPr sz="2200">
+                <a:solidFill>
+                  <a:srgbClr val="FFFFFF"/>
+                </a:solidFill>
+              </a:defRPr>
+            </a:pPr>
+            <a:r>
+              <a:t>      Happy/sad paths</a:t>
+            </a:r>
+          </a:p>
+          <a:p>
+            <a:pPr>
+              <a:spcBef>
+                <a:spcPts val="800"/>
+              </a:spcBef>
+              <a:spcAft>
+                <a:spcPts val="800"/>
+              </a:spcAft>
+              <a:defRPr sz="2200">
+                <a:solidFill>
+                  <a:srgbClr val="FFFFFF"/>
+                </a:solidFill>
+              </a:defRPr>
+            </a:pPr>
+            <a:r>
+              <a:t>      Readable</a:t>
+            </a:r>
+          </a:p>
+        </p:txBody>
+      </p:sp>
     </p:spTree>
   </p:cSld>
   <p:clrMapOvr>
@@ -33148,6 +39751,119 @@
           </a:p>
         </p:txBody>
       </p:sp>
+      <p:sp>
+        <p:nvSpPr>
+          <p:cNvPr id="4" name="TextBox 3"/>
+          <p:cNvSpPr txBox="1"/>
+          <p:nvPr/>
+        </p:nvSpPr>
+        <p:spPr>
+          <a:xfrm>
+            <a:off x="457200" y="1463040"/>
+            <a:ext cx="11277295" cy="4572000"/>
+          </a:xfrm>
+          <a:prstGeom prst="rect">
+            <a:avLst/>
+          </a:prstGeom>
+          <a:noFill/>
+        </p:spPr>
+        <p:txBody>
+          <a:bodyPr wrap="square">
+            <a:spAutoFit/>
+          </a:bodyPr>
+          <a:lstStyle/>
+          <a:p>
+            <a:pPr>
+              <a:spcBef>
+                <a:spcPts val="800"/>
+              </a:spcBef>
+              <a:spcAft>
+                <a:spcPts val="800"/>
+              </a:spcAft>
+              <a:defRPr sz="2200">
+                <a:solidFill>
+                  <a:srgbClr val="FFFFFF"/>
+                </a:solidFill>
+              </a:defRPr>
+            </a:pPr>
+            <a:r>
+              <a:t>  The verification loop: write code → write tests → run tests → if fail, Claude fixes → run again.</a:t>
+            </a:r>
+          </a:p>
+          <a:p>
+            <a:pPr>
+              <a:spcBef>
+                <a:spcPts val="800"/>
+              </a:spcBef>
+              <a:spcAft>
+                <a:spcPts val="800"/>
+              </a:spcAft>
+              <a:defRPr sz="2200">
+                <a:solidFill>
+                  <a:srgbClr val="FFFFFF"/>
+                </a:solidFill>
+              </a:defRPr>
+            </a:pPr>
+            <a:r>
+              <a:t>  Key insight: Claude is confident even when wrong.</a:t>
+            </a:r>
+          </a:p>
+          <a:p>
+            <a:pPr>
+              <a:spcBef>
+                <a:spcPts val="800"/>
+              </a:spcBef>
+              <a:spcAft>
+                <a:spcPts val="800"/>
+              </a:spcAft>
+              <a:defRPr sz="2200">
+                <a:solidFill>
+                  <a:srgbClr val="FFFFFF"/>
+                </a:solidFill>
+              </a:defRPr>
+            </a:pPr>
+            <a:r>
+              <a:t>  Almost right is worse than clearly wrong — almost right passes tests, ships to production, breaks at 3 AM.</a:t>
+            </a:r>
+          </a:p>
+          <a:p>
+            <a:pPr>
+              <a:spcBef>
+                <a:spcPts val="800"/>
+              </a:spcBef>
+              <a:spcAft>
+                <a:spcPts val="800"/>
+              </a:spcAft>
+              <a:defRPr sz="2200">
+                <a:solidFill>
+                  <a:srgbClr val="FFFFFF"/>
+                </a:solidFill>
+              </a:defRPr>
+            </a:pPr>
+            <a:r>
+              <a:t>  Ties to Principle #4: Build trust mechanisms, not just capabilities.</a:t>
+            </a:r>
+          </a:p>
+          <a:p>
+            <a:pPr>
+              <a:spcBef>
+                <a:spcPts val="800"/>
+              </a:spcBef>
+              <a:spcAft>
+                <a:spcPts val="800"/>
+              </a:spcAft>
+              <a:defRPr sz="2200">
+                <a:solidFill>
+                  <a:srgbClr val="FFFFFF"/>
+                </a:solidFill>
+              </a:defRPr>
+            </a:pPr>
+            <a:r>
+              <a:t>  Always run existing tests after changes — regressions are the silent killer.</a:t>
+            </a:r>
+          </a:p>
+        </p:txBody>
+      </p:sp>
     </p:spTree>
   </p:cSld>
   <p:clrMapOvr>
@@ -33252,6 +39968,209 @@
           </a:p>
         </p:txBody>
       </p:sp>
+      <p:sp>
+        <p:nvSpPr>
+          <p:cNvPr id="4" name="TextBox 3"/>
+          <p:cNvSpPr txBox="1"/>
+          <p:nvPr/>
+        </p:nvSpPr>
+        <p:spPr>
+          <a:xfrm>
+            <a:off x="457200" y="1463040"/>
+            <a:ext cx="11277295" cy="4572000"/>
+          </a:xfrm>
+          <a:prstGeom prst="rect">
+            <a:avLst/>
+          </a:prstGeom>
+          <a:noFill/>
+        </p:spPr>
+        <p:txBody>
+          <a:bodyPr wrap="square">
+            <a:spAutoFit/>
+          </a:bodyPr>
+          <a:lstStyle/>
+          <a:p>
+            <a:pPr>
+              <a:spcBef>
+                <a:spcPts val="800"/>
+              </a:spcBef>
+              <a:spcAft>
+                <a:spcPts val="800"/>
+              </a:spcAft>
+              <a:defRPr sz="2200">
+                <a:solidFill>
+                  <a:srgbClr val="FFFFFF"/>
+                </a:solidFill>
+              </a:defRPr>
+            </a:pPr>
+            <a:r>
+              <a:t>  Types</a:t>
+            </a:r>
+          </a:p>
+          <a:p>
+            <a:pPr>
+              <a:spcBef>
+                <a:spcPts val="800"/>
+              </a:spcBef>
+              <a:spcAft>
+                <a:spcPts val="800"/>
+              </a:spcAft>
+              <a:defRPr sz="2200">
+                <a:solidFill>
+                  <a:srgbClr val="FFFFFF"/>
+                </a:solidFill>
+              </a:defRPr>
+            </a:pPr>
+            <a:r>
+              <a:t>      READMEs</a:t>
+            </a:r>
+          </a:p>
+          <a:p>
+            <a:pPr>
+              <a:spcBef>
+                <a:spcPts val="800"/>
+              </a:spcBef>
+              <a:spcAft>
+                <a:spcPts val="800"/>
+              </a:spcAft>
+              <a:defRPr sz="2200">
+                <a:solidFill>
+                  <a:srgbClr val="FFFFFF"/>
+                </a:solidFill>
+              </a:defRPr>
+            </a:pPr>
+            <a:r>
+              <a:t>      API docs</a:t>
+            </a:r>
+          </a:p>
+          <a:p>
+            <a:pPr>
+              <a:spcBef>
+                <a:spcPts val="800"/>
+              </a:spcBef>
+              <a:spcAft>
+                <a:spcPts val="800"/>
+              </a:spcAft>
+              <a:defRPr sz="2200">
+                <a:solidFill>
+                  <a:srgbClr val="FFFFFF"/>
+                </a:solidFill>
+              </a:defRPr>
+            </a:pPr>
+            <a:r>
+              <a:t>      Comments</a:t>
+            </a:r>
+          </a:p>
+          <a:p>
+            <a:pPr>
+              <a:spcBef>
+                <a:spcPts val="800"/>
+              </a:spcBef>
+              <a:spcAft>
+                <a:spcPts val="800"/>
+              </a:spcAft>
+              <a:defRPr sz="2200">
+                <a:solidFill>
+                  <a:srgbClr val="FFFFFF"/>
+                </a:solidFill>
+              </a:defRPr>
+            </a:pPr>
+            <a:r>
+              <a:t>      Architecture</a:t>
+            </a:r>
+          </a:p>
+          <a:p>
+            <a:pPr>
+              <a:spcBef>
+                <a:spcPts val="800"/>
+              </a:spcBef>
+              <a:spcAft>
+                <a:spcPts val="800"/>
+              </a:spcAft>
+              <a:defRPr sz="2200">
+                <a:solidFill>
+                  <a:srgbClr val="FFFFFF"/>
+                </a:solidFill>
+              </a:defRPr>
+            </a:pPr>
+            <a:r>
+              <a:t>  Quality</a:t>
+            </a:r>
+          </a:p>
+          <a:p>
+            <a:pPr>
+              <a:spcBef>
+                <a:spcPts val="800"/>
+              </a:spcBef>
+              <a:spcAft>
+                <a:spcPts val="800"/>
+              </a:spcAft>
+              <a:defRPr sz="2200">
+                <a:solidFill>
+                  <a:srgbClr val="FFFFFF"/>
+                </a:solidFill>
+              </a:defRPr>
+            </a:pPr>
+            <a:r>
+              <a:t>      Clear</a:t>
+            </a:r>
+          </a:p>
+          <a:p>
+            <a:pPr>
+              <a:spcBef>
+                <a:spcPts val="800"/>
+              </a:spcBef>
+              <a:spcAft>
+                <a:spcPts val="800"/>
+              </a:spcAft>
+              <a:defRPr sz="2200">
+                <a:solidFill>
+                  <a:srgbClr val="FFFFFF"/>
+                </a:solidFill>
+              </a:defRPr>
+            </a:pPr>
+            <a:r>
+              <a:t>      Examples</a:t>
+            </a:r>
+          </a:p>
+          <a:p>
+            <a:pPr>
+              <a:spcBef>
+                <a:spcPts val="800"/>
+              </a:spcBef>
+              <a:spcAft>
+                <a:spcPts val="800"/>
+              </a:spcAft>
+              <a:defRPr sz="2200">
+                <a:solidFill>
+                  <a:srgbClr val="FFFFFF"/>
+                </a:solidFill>
+              </a:defRPr>
+            </a:pPr>
+            <a:r>
+              <a:t>      Up-to-date</a:t>
+            </a:r>
+          </a:p>
+          <a:p>
+            <a:pPr>
+              <a:spcBef>
+                <a:spcPts val="800"/>
+              </a:spcBef>
+              <a:spcAft>
+                <a:spcPts val="800"/>
+              </a:spcAft>
+              <a:defRPr sz="2200">
+                <a:solidFill>
+                  <a:srgbClr val="FFFFFF"/>
+                </a:solidFill>
+              </a:defRPr>
+            </a:pPr>
+            <a:r>
+              <a:t>      Formatted</a:t>
+            </a:r>
+          </a:p>
+        </p:txBody>
+      </p:sp>
     </p:spTree>
   </p:cSld>
   <p:clrMapOvr>
@@ -33596,6 +40515,227 @@
           <a:lstStyle/>
           <a:p>
             <a:pPr algn="ctr"/>
+          </a:p>
+        </p:txBody>
+      </p:sp>
+      <p:sp>
+        <p:nvSpPr>
+          <p:cNvPr id="4" name="TextBox 3"/>
+          <p:cNvSpPr txBox="1"/>
+          <p:nvPr/>
+        </p:nvSpPr>
+        <p:spPr>
+          <a:xfrm>
+            <a:off x="457200" y="1463040"/>
+            <a:ext cx="11277295" cy="4572000"/>
+          </a:xfrm>
+          <a:prstGeom prst="rect">
+            <a:avLst/>
+          </a:prstGeom>
+          <a:noFill/>
+        </p:spPr>
+        <p:txBody>
+          <a:bodyPr wrap="square">
+            <a:spAutoFit/>
+          </a:bodyPr>
+          <a:lstStyle/>
+          <a:p>
+            <a:pPr>
+              <a:spcBef>
+                <a:spcPts val="800"/>
+              </a:spcBef>
+              <a:spcAft>
+                <a:spcPts val="800"/>
+              </a:spcAft>
+              <a:defRPr sz="2200">
+                <a:solidFill>
+                  <a:srgbClr val="FFFFFF"/>
+                </a:solidFill>
+              </a:defRPr>
+            </a:pPr>
+            <a:r>
+              <a:t>  Natural Language to SQL</a:t>
+            </a:r>
+          </a:p>
+          <a:p>
+            <a:pPr>
+              <a:spcBef>
+                <a:spcPts val="800"/>
+              </a:spcBef>
+              <a:spcAft>
+                <a:spcPts val="800"/>
+              </a:spcAft>
+              <a:defRPr sz="2200">
+                <a:solidFill>
+                  <a:srgbClr val="FFFFFF"/>
+                </a:solidFill>
+              </a:defRPr>
+            </a:pPr>
+            <a:r>
+              <a:t>      Describe what you want in plain English - Claude Code writes the query</a:t>
+            </a:r>
+          </a:p>
+          <a:p>
+            <a:pPr>
+              <a:spcBef>
+                <a:spcPts val="800"/>
+              </a:spcBef>
+              <a:spcAft>
+                <a:spcPts val="800"/>
+              </a:spcAft>
+              <a:defRPr sz="2200">
+                <a:solidFill>
+                  <a:srgbClr val="FFFFFF"/>
+                </a:solidFill>
+              </a:defRPr>
+            </a:pPr>
+            <a:r>
+              <a:t>      Simple SELECT with WHERE clauses</a:t>
+            </a:r>
+          </a:p>
+          <a:p>
+            <a:pPr>
+              <a:spcBef>
+                <a:spcPts val="800"/>
+              </a:spcBef>
+              <a:spcAft>
+                <a:spcPts val="800"/>
+              </a:spcAft>
+              <a:defRPr sz="2200">
+                <a:solidFill>
+                  <a:srgbClr val="FFFFFF"/>
+                </a:solidFill>
+              </a:defRPr>
+            </a:pPr>
+            <a:r>
+              <a:t>      Complex multi-table JOINs with proper relationships</a:t>
+            </a:r>
+          </a:p>
+          <a:p>
+            <a:pPr>
+              <a:spcBef>
+                <a:spcPts val="800"/>
+              </a:spcBef>
+              <a:spcAft>
+                <a:spcPts val="800"/>
+              </a:spcAft>
+              <a:defRPr sz="2200">
+                <a:solidFill>
+                  <a:srgbClr val="FFFFFF"/>
+                </a:solidFill>
+              </a:defRPr>
+            </a:pPr>
+            <a:r>
+              <a:t>      Subqueries and correlated subqueries</a:t>
+            </a:r>
+          </a:p>
+          <a:p>
+            <a:pPr>
+              <a:spcBef>
+                <a:spcPts val="800"/>
+              </a:spcBef>
+              <a:spcAft>
+                <a:spcPts val="800"/>
+              </a:spcAft>
+              <a:defRPr sz="2200">
+                <a:solidFill>
+                  <a:srgbClr val="FFFFFF"/>
+                </a:solidFill>
+              </a:defRPr>
+            </a:pPr>
+            <a:r>
+              <a:t>      Common Table Expressions (CTEs) for readability</a:t>
+            </a:r>
+          </a:p>
+          <a:p>
+            <a:pPr>
+              <a:spcBef>
+                <a:spcPts val="800"/>
+              </a:spcBef>
+              <a:spcAft>
+                <a:spcPts val="800"/>
+              </a:spcAft>
+              <a:defRPr sz="2200">
+                <a:solidFill>
+                  <a:srgbClr val="FFFFFF"/>
+                </a:solidFill>
+              </a:defRPr>
+            </a:pPr>
+            <a:r>
+              <a:t>      Window functions for analytics (ROW_NUMBER, RANK, running totals)</a:t>
+            </a:r>
+          </a:p>
+          <a:p>
+            <a:pPr>
+              <a:spcBef>
+                <a:spcPts val="800"/>
+              </a:spcBef>
+              <a:spcAft>
+                <a:spcPts val="800"/>
+              </a:spcAft>
+              <a:defRPr sz="2200">
+                <a:solidFill>
+                  <a:srgbClr val="FFFFFF"/>
+                </a:solidFill>
+              </a:defRPr>
+            </a:pPr>
+            <a:r>
+              <a:t>  Database-Aware</a:t>
+            </a:r>
+          </a:p>
+          <a:p>
+            <a:pPr>
+              <a:spcBef>
+                <a:spcPts val="800"/>
+              </a:spcBef>
+              <a:spcAft>
+                <a:spcPts val="800"/>
+              </a:spcAft>
+              <a:defRPr sz="2200">
+                <a:solidFill>
+                  <a:srgbClr val="FFFFFF"/>
+                </a:solidFill>
+              </a:defRPr>
+            </a:pPr>
+            <a:r>
+              <a:t>      Adapts syntax to your database engine (PostgreSQL, MySQL, SQLite)</a:t>
+            </a:r>
+          </a:p>
+          <a:p>
+            <a:pPr>
+              <a:spcBef>
+                <a:spcPts val="800"/>
+              </a:spcBef>
+              <a:spcAft>
+                <a:spcPts val="800"/>
+              </a:spcAft>
+              <a:defRPr sz="2200">
+                <a:solidFill>
+                  <a:srgbClr val="FFFFFF"/>
+                </a:solidFill>
+              </a:defRPr>
+            </a:pPr>
+            <a:r>
+              <a:t>      Uses database-specific features when beneficial (JSONB in Postgres, stored procedures in MySQL)</a:t>
+            </a:r>
+          </a:p>
+          <a:p>
+            <a:pPr>
+              <a:spcBef>
+                <a:spcPts val="800"/>
+              </a:spcBef>
+              <a:spcAft>
+                <a:spcPts val="800"/>
+              </a:spcAft>
+              <a:defRPr sz="2200">
+                <a:solidFill>
+                  <a:srgbClr val="FFFFFF"/>
+                </a:solidFill>
+              </a:defRPr>
+            </a:pPr>
+            <a:r>
+              <a:t>      Includes appropriate indexes and constraints in recommendations</a:t>
+            </a:r>
           </a:p>
         </p:txBody>
       </p:sp>

--- a/slides/Day2_Claude_Code_Fundamentals.pptx
+++ b/slides/Day2_Claude_Code_Fundamentals.pptx
@@ -18687,12 +18687,15 @@
           <a:lstStyle/>
           <a:p>
             <a:pPr algn="ctr">
-              <a:defRPr sz="2000" b="1">
-                <a:solidFill>
-                  <a:srgbClr val="FFFFFF"/>
-                </a:solidFill>
-              </a:defRPr>
-            </a:pPr>
+              <a:defRPr sz="1800" b="1">
+                <a:solidFill>
+                  <a:srgbClr val="FFFFFF"/>
+                </a:solidFill>
+              </a:defRPr>
+            </a:pPr>
+            <a:r>
+              <a:t>PostgreSQL</a:t>
+            </a:r>
           </a:p>
         </p:txBody>
       </p:sp>
@@ -18842,12 +18845,15 @@
           <a:lstStyle/>
           <a:p>
             <a:pPr algn="ctr">
-              <a:defRPr sz="2000" b="1">
-                <a:solidFill>
-                  <a:srgbClr val="FFFFFF"/>
-                </a:solidFill>
-              </a:defRPr>
-            </a:pPr>
+              <a:defRPr sz="1800" b="1">
+                <a:solidFill>
+                  <a:srgbClr val="FFFFFF"/>
+                </a:solidFill>
+              </a:defRPr>
+            </a:pPr>
+            <a:r>
+              <a:t>MySQL</a:t>
+            </a:r>
           </a:p>
         </p:txBody>
       </p:sp>
@@ -18997,12 +19003,15 @@
           <a:lstStyle/>
           <a:p>
             <a:pPr algn="ctr">
-              <a:defRPr sz="2000" b="1">
-                <a:solidFill>
-                  <a:srgbClr val="FFFFFF"/>
-                </a:solidFill>
-              </a:defRPr>
-            </a:pPr>
+              <a:defRPr sz="1800" b="1">
+                <a:solidFill>
+                  <a:srgbClr val="FFFFFF"/>
+                </a:solidFill>
+              </a:defRPr>
+            </a:pPr>
+            <a:r>
+              <a:t>SQLite</a:t>
+            </a:r>
           </a:p>
         </p:txBody>
       </p:sp>
@@ -34464,12 +34473,15 @@
           <a:lstStyle/>
           <a:p>
             <a:pPr algn="ctr">
-              <a:defRPr sz="2000" b="1">
-                <a:solidFill>
-                  <a:srgbClr val="FFFFFF"/>
-                </a:solidFill>
-              </a:defRPr>
-            </a:pPr>
+              <a:defRPr sz="1800" b="1">
+                <a:solidFill>
+                  <a:srgbClr val="FFFFFF"/>
+                </a:solidFill>
+              </a:defRPr>
+            </a:pPr>
+            <a:r>
+              <a:t>Suggest Only</a:t>
+            </a:r>
           </a:p>
         </p:txBody>
       </p:sp>
@@ -34619,12 +34631,15 @@
           <a:lstStyle/>
           <a:p>
             <a:pPr algn="ctr">
-              <a:defRPr sz="2000" b="1">
-                <a:solidFill>
-                  <a:srgbClr val="FFFFFF"/>
-                </a:solidFill>
-              </a:defRPr>
-            </a:pPr>
+              <a:defRPr sz="1800" b="1">
+                <a:solidFill>
+                  <a:srgbClr val="FFFFFF"/>
+                </a:solidFill>
+              </a:defRPr>
+            </a:pPr>
+            <a:r>
+              <a:t>Auto-Approve Read</a:t>
+            </a:r>
           </a:p>
         </p:txBody>
       </p:sp>
@@ -34774,12 +34789,15 @@
           <a:lstStyle/>
           <a:p>
             <a:pPr algn="ctr">
-              <a:defRPr sz="2000" b="1">
-                <a:solidFill>
-                  <a:srgbClr val="FFFFFF"/>
-                </a:solidFill>
-              </a:defRPr>
-            </a:pPr>
+              <a:defRPr sz="1800" b="1">
+                <a:solidFill>
+                  <a:srgbClr val="FFFFFF"/>
+                </a:solidFill>
+              </a:defRPr>
+            </a:pPr>
+            <a:r>
+              <a:t>Auto-Approve All</a:t>
+            </a:r>
           </a:p>
         </p:txBody>
       </p:sp>

--- a/slides/Day2_Claude_Code_Fundamentals.pptx
+++ b/slides/Day2_Claude_Code_Fundamentals.pptx
@@ -26545,7 +26545,7 @@
           <a:noFill/>
         </p:spPr>
         <p:txBody>
-          <a:bodyPr wrap="none">
+          <a:bodyPr wrap="square">
             <a:spAutoFit/>
           </a:bodyPr>
           <a:lstStyle/>
@@ -32563,7 +32563,7 @@
           <a:noFill/>
         </p:spPr>
         <p:txBody>
-          <a:bodyPr wrap="none">
+          <a:bodyPr wrap="square">
             <a:spAutoFit/>
           </a:bodyPr>
           <a:lstStyle/>
@@ -33859,7 +33859,49 @@
               </a:defRPr>
             </a:pPr>
             <a:r>
-              <a:t>CLAUDE.md is a configuration file that lives in your project root.\n\nClaude Code reads it first, every session.\n\nIt's your project's instruction manual for AI.</a:t>
+              <a:t>CLAUDE.md is a configuration file that lives in your project root.</a:t>
+            </a:r>
+          </a:p>
+          <a:p>
+            <a:pPr>
+              <a:defRPr sz="2400">
+                <a:solidFill>
+                  <a:srgbClr val="8B95A5"/>
+                </a:solidFill>
+              </a:defRPr>
+            </a:pPr>
+          </a:p>
+          <a:p>
+            <a:pPr>
+              <a:defRPr sz="2400">
+                <a:solidFill>
+                  <a:srgbClr val="8B95A5"/>
+                </a:solidFill>
+              </a:defRPr>
+            </a:pPr>
+            <a:r>
+              <a:t>Claude Code reads it first, every session.</a:t>
+            </a:r>
+          </a:p>
+          <a:p>
+            <a:pPr>
+              <a:defRPr sz="2400">
+                <a:solidFill>
+                  <a:srgbClr val="8B95A5"/>
+                </a:solidFill>
+              </a:defRPr>
+            </a:pPr>
+          </a:p>
+          <a:p>
+            <a:pPr>
+              <a:defRPr sz="2400">
+                <a:solidFill>
+                  <a:srgbClr val="8B95A5"/>
+                </a:solidFill>
+              </a:defRPr>
+            </a:pPr>
+            <a:r>
+              <a:t>It's your project's instruction manual for AI.</a:t>
             </a:r>
           </a:p>
         </p:txBody>
@@ -35037,7 +35079,7 @@
           <a:noFill/>
         </p:spPr>
         <p:txBody>
-          <a:bodyPr wrap="none">
+          <a:bodyPr wrap="square">
             <a:spAutoFit/>
           </a:bodyPr>
           <a:lstStyle/>
@@ -36011,7 +36053,7 @@
           <a:noFill/>
         </p:spPr>
         <p:txBody>
-          <a:bodyPr wrap="none">
+          <a:bodyPr wrap="square">
             <a:spAutoFit/>
           </a:bodyPr>
           <a:lstStyle/>
@@ -37062,7 +37104,7 @@
           <a:noFill/>
         </p:spPr>
         <p:txBody>
-          <a:bodyPr wrap="none">
+          <a:bodyPr wrap="square">
             <a:spAutoFit/>
           </a:bodyPr>
           <a:lstStyle/>
@@ -37279,7 +37321,7 @@
           <a:noFill/>
         </p:spPr>
         <p:txBody>
-          <a:bodyPr wrap="none">
+          <a:bodyPr wrap="square">
             <a:spAutoFit/>
           </a:bodyPr>
           <a:lstStyle/>
@@ -37918,7 +37960,7 @@
           <a:noFill/>
         </p:spPr>
         <p:txBody>
-          <a:bodyPr wrap="none">
+          <a:bodyPr wrap="square">
             <a:spAutoFit/>
           </a:bodyPr>
           <a:lstStyle/>
@@ -38232,7 +38274,7 @@
           <a:noFill/>
         </p:spPr>
         <p:txBody>
-          <a:bodyPr wrap="none">
+          <a:bodyPr wrap="square">
             <a:spAutoFit/>
           </a:bodyPr>
           <a:lstStyle/>
@@ -38587,7 +38629,7 @@
           <a:noFill/>
         </p:spPr>
         <p:txBody>
-          <a:bodyPr wrap="none">
+          <a:bodyPr wrap="square">
             <a:spAutoFit/>
           </a:bodyPr>
           <a:lstStyle/>
@@ -41779,7 +41821,7 @@
           <a:noFill/>
         </p:spPr>
         <p:txBody>
-          <a:bodyPr wrap="none">
+          <a:bodyPr wrap="square">
             <a:spAutoFit/>
           </a:bodyPr>
           <a:lstStyle/>
@@ -44172,7 +44214,7 @@
           <a:noFill/>
         </p:spPr>
         <p:txBody>
-          <a:bodyPr wrap="none">
+          <a:bodyPr wrap="square">
             <a:spAutoFit/>
           </a:bodyPr>
           <a:lstStyle/>
@@ -45575,7 +45617,7 @@
           <a:noFill/>
         </p:spPr>
         <p:txBody>
-          <a:bodyPr wrap="none">
+          <a:bodyPr wrap="square">
             <a:spAutoFit/>
           </a:bodyPr>
           <a:lstStyle/>
@@ -46561,7 +46603,7 @@
           <a:noFill/>
         </p:spPr>
         <p:txBody>
-          <a:bodyPr wrap="none">
+          <a:bodyPr wrap="square">
             <a:spAutoFit/>
           </a:bodyPr>
           <a:lstStyle/>
@@ -46961,7 +47003,7 @@
           <a:noFill/>
         </p:spPr>
         <p:txBody>
-          <a:bodyPr wrap="none">
+          <a:bodyPr wrap="square">
             <a:spAutoFit/>
           </a:bodyPr>
           <a:lstStyle/>
@@ -47301,7 +47343,7 @@
           <a:noFill/>
         </p:spPr>
         <p:txBody>
-          <a:bodyPr wrap="none">
+          <a:bodyPr wrap="square">
             <a:spAutoFit/>
           </a:bodyPr>
           <a:lstStyle/>
@@ -50724,7 +50766,7 @@
           <a:noFill/>
         </p:spPr>
         <p:txBody>
-          <a:bodyPr wrap="none">
+          <a:bodyPr wrap="square">
             <a:spAutoFit/>
           </a:bodyPr>
           <a:lstStyle/>
@@ -55450,7 +55492,28 @@
               </a:defRPr>
             </a:pPr>
             <a:r>
-              <a:t>When uncertain, Claude Code asks first.\n\nSafety &gt; Speed.</a:t>
+              <a:t>When uncertain, Claude Code asks first.</a:t>
+            </a:r>
+          </a:p>
+          <a:p>
+            <a:pPr>
+              <a:defRPr sz="2400">
+                <a:solidFill>
+                  <a:srgbClr val="8B95A5"/>
+                </a:solidFill>
+              </a:defRPr>
+            </a:pPr>
+          </a:p>
+          <a:p>
+            <a:pPr>
+              <a:defRPr sz="2400">
+                <a:solidFill>
+                  <a:srgbClr val="8B95A5"/>
+                </a:solidFill>
+              </a:defRPr>
+            </a:pPr>
+            <a:r>
+              <a:t>Safety &gt; Speed.</a:t>
             </a:r>
           </a:p>
         </p:txBody>
@@ -60357,7 +60420,7 @@
           <a:noFill/>
         </p:spPr>
         <p:txBody>
-          <a:bodyPr wrap="none">
+          <a:bodyPr wrap="square">
             <a:spAutoFit/>
           </a:bodyPr>
           <a:lstStyle/>

--- a/slides/Day2_Claude_Code_Fundamentals.pptx
+++ b/slides/Day2_Claude_Code_Fundamentals.pptx
@@ -24558,14 +24558,14 @@
           <a:lstStyle/>
           <a:p>
             <a:pPr algn="ctr">
-              <a:defRPr sz="3600" b="1">
+              <a:defRPr sz="2800" b="1">
                 <a:solidFill>
                   <a:srgbClr val="0B0F1A"/>
                 </a:solidFill>
               </a:defRPr>
             </a:pPr>
             <a:r>
-              <a:t>database</a:t>
+              <a:t>🗄</a:t>
             </a:r>
           </a:p>
         </p:txBody>
@@ -24718,14 +24718,14 @@
           <a:lstStyle/>
           <a:p>
             <a:pPr algn="ctr">
-              <a:defRPr sz="3600" b="1">
+              <a:defRPr sz="2800" b="1">
                 <a:solidFill>
                   <a:srgbClr val="0B0F1A"/>
                 </a:solidFill>
               </a:defRPr>
             </a:pPr>
             <a:r>
-              <a:t>database</a:t>
+              <a:t>🗄</a:t>
             </a:r>
           </a:p>
         </p:txBody>
@@ -24878,14 +24878,14 @@
           <a:lstStyle/>
           <a:p>
             <a:pPr algn="ctr">
-              <a:defRPr sz="3600" b="1">
+              <a:defRPr sz="2800" b="1">
                 <a:solidFill>
                   <a:srgbClr val="0B0F1A"/>
                 </a:solidFill>
               </a:defRPr>
             </a:pPr>
             <a:r>
-              <a:t>database</a:t>
+              <a:t>🗄</a:t>
             </a:r>
           </a:p>
         </p:txBody>
@@ -55774,14 +55774,14 @@
           <a:lstStyle/>
           <a:p>
             <a:pPr algn="ctr">
-              <a:defRPr sz="3600" b="1">
+              <a:defRPr sz="2800" b="1">
                 <a:solidFill>
                   <a:srgbClr val="0B0F1A"/>
                 </a:solidFill>
               </a:defRPr>
             </a:pPr>
             <a:r>
-              <a:t>eye</a:t>
+              <a:t>👁</a:t>
             </a:r>
           </a:p>
         </p:txBody>
@@ -55934,14 +55934,14 @@
           <a:lstStyle/>
           <a:p>
             <a:pPr algn="ctr">
-              <a:defRPr sz="3600" b="1">
+              <a:defRPr sz="2800" b="1">
                 <a:solidFill>
                   <a:srgbClr val="0B0F1A"/>
                 </a:solidFill>
               </a:defRPr>
             </a:pPr>
             <a:r>
-              <a:t>book</a:t>
+              <a:t>📖</a:t>
             </a:r>
           </a:p>
         </p:txBody>
@@ -56094,14 +56094,14 @@
           <a:lstStyle/>
           <a:p>
             <a:pPr algn="ctr">
-              <a:defRPr sz="3600" b="1">
+              <a:defRPr sz="2800" b="1">
                 <a:solidFill>
                   <a:srgbClr val="0B0F1A"/>
                 </a:solidFill>
               </a:defRPr>
             </a:pPr>
             <a:r>
-              <a:t>zap</a:t>
+              <a:t>⚡</a:t>
             </a:r>
           </a:p>
         </p:txBody>

--- a/slides/Day2_Claude_Code_Fundamentals.pptx
+++ b/slides/Day2_Claude_Code_Fundamentals.pptx
@@ -254,11 +254,41 @@
 <pc:chgInfo xmlns:a="http://schemas.openxmlformats.org/drawingml/2006/main" xmlns:r="http://schemas.openxmlformats.org/officeDocument/2006/relationships" xmlns:ac="http://schemas.microsoft.com/office/drawing/2013/main/command" xmlns:pc="http://schemas.microsoft.com/office/powerpoint/2013/main/command">
   <pc:docChgLst>
     <pc:chgData name="Scott Hay" userId="e95d3f44-f6c0-414c-b281-41a9346c1b81" providerId="ADAL" clId="{4D76341F-F64C-4A8E-A4EF-1A11730F38E9}"/>
-    <pc:docChg chg="custSel modSld">
-      <pc:chgData name="Scott Hay" userId="e95d3f44-f6c0-414c-b281-41a9346c1b81" providerId="ADAL" clId="{4D76341F-F64C-4A8E-A4EF-1A11730F38E9}" dt="2026-03-01T23:12:00.985" v="59" actId="478"/>
+    <pc:docChg chg="undo custSel modSld">
+      <pc:chgData name="Scott Hay" userId="e95d3f44-f6c0-414c-b281-41a9346c1b81" providerId="ADAL" clId="{4D76341F-F64C-4A8E-A4EF-1A11730F38E9}" dt="2026-03-02T00:51:44.576" v="63" actId="20577"/>
       <pc:docMkLst>
         <pc:docMk/>
       </pc:docMkLst>
+      <pc:sldChg chg="modSp mod">
+        <pc:chgData name="Scott Hay" userId="e95d3f44-f6c0-414c-b281-41a9346c1b81" providerId="ADAL" clId="{4D76341F-F64C-4A8E-A4EF-1A11730F38E9}" dt="2026-03-02T00:51:04.186" v="61" actId="20577"/>
+        <pc:sldMkLst>
+          <pc:docMk/>
+          <pc:sldMk cId="0" sldId="256"/>
+        </pc:sldMkLst>
+        <pc:spChg chg="mod">
+          <ac:chgData name="Scott Hay" userId="e95d3f44-f6c0-414c-b281-41a9346c1b81" providerId="ADAL" clId="{4D76341F-F64C-4A8E-A4EF-1A11730F38E9}" dt="2026-03-02T00:51:04.186" v="61" actId="20577"/>
+          <ac:spMkLst>
+            <pc:docMk/>
+            <pc:sldMk cId="0" sldId="256"/>
+            <ac:spMk id="4" creationId="{00000000-0000-0000-0000-000000000000}"/>
+          </ac:spMkLst>
+        </pc:spChg>
+      </pc:sldChg>
+      <pc:sldChg chg="modSp mod">
+        <pc:chgData name="Scott Hay" userId="e95d3f44-f6c0-414c-b281-41a9346c1b81" providerId="ADAL" clId="{4D76341F-F64C-4A8E-A4EF-1A11730F38E9}" dt="2026-03-02T00:51:44.576" v="63" actId="20577"/>
+        <pc:sldMkLst>
+          <pc:docMk/>
+          <pc:sldMk cId="0" sldId="263"/>
+        </pc:sldMkLst>
+        <pc:spChg chg="mod">
+          <ac:chgData name="Scott Hay" userId="e95d3f44-f6c0-414c-b281-41a9346c1b81" providerId="ADAL" clId="{4D76341F-F64C-4A8E-A4EF-1A11730F38E9}" dt="2026-03-02T00:51:44.576" v="63" actId="20577"/>
+          <ac:spMkLst>
+            <pc:docMk/>
+            <pc:sldMk cId="0" sldId="263"/>
+            <ac:spMk id="4" creationId="{00000000-0000-0000-0000-000000000000}"/>
+          </ac:spMkLst>
+        </pc:spChg>
+      </pc:sldChg>
       <pc:sldChg chg="modSp mod">
         <pc:chgData name="Scott Hay" userId="e95d3f44-f6c0-414c-b281-41a9346c1b81" providerId="ADAL" clId="{4D76341F-F64C-4A8E-A4EF-1A11730F38E9}" dt="2026-03-01T23:11:55.081" v="58" actId="27636"/>
         <pc:sldMkLst>
@@ -20097,8 +20127,8 @@
         </p:nvSpPr>
         <p:spPr>
           <a:xfrm>
-            <a:off x="457200" y="5029200"/>
-            <a:ext cx="11277295" cy="457200"/>
+            <a:off x="9456307" y="5029200"/>
+            <a:ext cx="2278188" cy="400110"/>
           </a:xfrm>
           <a:prstGeom prst="rect">
             <a:avLst/>
@@ -20119,7 +20149,8 @@
               </a:defRPr>
             </a:pPr>
             <a:r>
-              <a:t>- © 2026 AIA Copilot</a:t>
+              <a:rPr dirty="0"/>
+              <a:t>© 2026 AIA Copilot</a:t>
             </a:r>
           </a:p>
         </p:txBody>
@@ -20706,37 +20737,136 @@
           <a:lstStyle/>
           <a:p>
             <a:pPr algn="ctr">
-              <a:defRPr sz="1800" b="1">
-                <a:solidFill>
-                  <a:srgbClr val="FFFFFF"/>
-                </a:solidFill>
-              </a:defRPr>
-            </a:pPr>
-            <a:r>
-              <a:t>Account</a:t>
-            </a:r>
-          </a:p>
-          <a:p>
-            <a:pPr algn="ctr">
-              <a:spcBef>
-                <a:spcPts val="800"/>
-              </a:spcBef>
-              <a:defRPr sz="1300">
-                <a:solidFill>
-                  <a:srgbClr val="8B95A5"/>
-                </a:solidFill>
-              </a:defRPr>
-            </a:pPr>
-            <a:r>
-              <a:t>Anthropic account (Pro or Max plan)</a:t>
-            </a:r>
-            <a:br/>
-            <a:r>
-              <a:t>Claude Code CLI: npm install -g @anthropic-ai/claude-code</a:t>
-            </a:r>
-            <a:br/>
-            <a:r>
-              <a:t>Authenticate: claude login</a:t>
+              <a:defRPr sz="1400" b="1">
+                <a:solidFill>
+                  <a:srgbClr val="F8F8F2"/>
+                </a:solidFill>
+                <a:latin typeface="Consolas"/>
+              </a:defRPr>
+            </a:pPr>
+            <a:r>
+              <a:t># Method 1: Native install (recommended — auto-updates)</a:t>
+            </a:r>
+          </a:p>
+          <a:p>
+            <a:pPr>
+              <a:defRPr sz="1400">
+                <a:solidFill>
+                  <a:srgbClr val="F8F8F2"/>
+                </a:solidFill>
+                <a:latin typeface="Consolas"/>
+              </a:defRPr>
+            </a:pPr>
+            <a:r>
+              <a:t>curl -fsSL https://claude.ai/install.sh | bash</a:t>
+            </a:r>
+          </a:p>
+          <a:p>
+            <a:pPr>
+              <a:defRPr sz="1400">
+                <a:solidFill>
+                  <a:srgbClr val="F8F8F2"/>
+                </a:solidFill>
+                <a:latin typeface="Consolas"/>
+              </a:defRPr>
+            </a:pPr>
+          </a:p>
+          <a:p>
+            <a:pPr>
+              <a:defRPr sz="1400">
+                <a:solidFill>
+                  <a:srgbClr val="F8F8F2"/>
+                </a:solidFill>
+                <a:latin typeface="Consolas"/>
+              </a:defRPr>
+            </a:pPr>
+            <a:r>
+              <a:t># Method 2: Homebrew (macOS/Linux — manual updates)</a:t>
+            </a:r>
+          </a:p>
+          <a:p>
+            <a:pPr>
+              <a:defRPr sz="1400">
+                <a:solidFill>
+                  <a:srgbClr val="F8F8F2"/>
+                </a:solidFill>
+                <a:latin typeface="Consolas"/>
+              </a:defRPr>
+            </a:pPr>
+            <a:r>
+              <a:t>brew install --cask claude-code</a:t>
+            </a:r>
+          </a:p>
+          <a:p>
+            <a:pPr>
+              <a:defRPr sz="1400">
+                <a:solidFill>
+                  <a:srgbClr val="F8F8F2"/>
+                </a:solidFill>
+                <a:latin typeface="Consolas"/>
+              </a:defRPr>
+            </a:pPr>
+          </a:p>
+          <a:p>
+            <a:pPr>
+              <a:defRPr sz="1400">
+                <a:solidFill>
+                  <a:srgbClr val="F8F8F2"/>
+                </a:solidFill>
+                <a:latin typeface="Consolas"/>
+              </a:defRPr>
+            </a:pPr>
+            <a:r>
+              <a:t># Method 3: WinGet (Windows — manual updates)</a:t>
+            </a:r>
+          </a:p>
+          <a:p>
+            <a:pPr>
+              <a:defRPr sz="1400">
+                <a:solidFill>
+                  <a:srgbClr val="F8F8F2"/>
+                </a:solidFill>
+                <a:latin typeface="Consolas"/>
+              </a:defRPr>
+            </a:pPr>
+            <a:r>
+              <a:t>winget install Anthropic.ClaudeCode</a:t>
+            </a:r>
+          </a:p>
+          <a:p>
+            <a:pPr>
+              <a:defRPr sz="1400">
+                <a:solidFill>
+                  <a:srgbClr val="F8F8F2"/>
+                </a:solidFill>
+                <a:latin typeface="Consolas"/>
+              </a:defRPr>
+            </a:pPr>
+          </a:p>
+          <a:p>
+            <a:pPr>
+              <a:defRPr sz="1400">
+                <a:solidFill>
+                  <a:srgbClr val="F8F8F2"/>
+                </a:solidFill>
+                <a:latin typeface="Consolas"/>
+              </a:defRPr>
+            </a:pPr>
+            <a:r>
+              <a:t># Verify installation</a:t>
+            </a:r>
+          </a:p>
+          <a:p>
+            <a:pPr>
+              <a:defRPr sz="1400">
+                <a:solidFill>
+                  <a:srgbClr val="F8F8F2"/>
+                </a:solidFill>
+                <a:latin typeface="Consolas"/>
+              </a:defRPr>
+            </a:pPr>
+            <a:r>
+              <a:t>claude --version</a:t>
             </a:r>
           </a:p>
         </p:txBody>
@@ -24242,118 +24372,115 @@
             <a:pPr>
               <a:defRPr sz="1400">
                 <a:solidFill>
-                  <a:srgbClr val="FFFFFF"/>
+                  <a:srgbClr val="F8F8F2"/>
                 </a:solidFill>
                 <a:latin typeface="Consolas"/>
               </a:defRPr>
             </a:pPr>
             <a:r>
-              <a:t># Method 1: Global install via npm (recommended)</a:t>
+              <a:t># Method 1: Native install (recommended — auto-updates)</a:t>
             </a:r>
           </a:p>
           <a:p>
             <a:pPr>
               <a:defRPr sz="1400">
                 <a:solidFill>
-                  <a:srgbClr val="FFFFFF"/>
+                  <a:srgbClr val="F8F8F2"/>
                 </a:solidFill>
                 <a:latin typeface="Consolas"/>
               </a:defRPr>
             </a:pPr>
             <a:r>
-              <a:t>npm install -g @anthropic-ai/claude-code</a:t>
+              <a:t>curl -fsSL https://claude.ai/install.sh | bash</a:t>
             </a:r>
           </a:p>
           <a:p>
             <a:pPr>
               <a:defRPr sz="1400">
                 <a:solidFill>
-                  <a:srgbClr val="FFFFFF"/>
+                  <a:srgbClr val="F8F8F2"/>
                 </a:solidFill>
                 <a:latin typeface="Consolas"/>
               </a:defRPr>
             </a:pPr>
-            <a:endParaRPr/>
           </a:p>
           <a:p>
             <a:pPr>
               <a:defRPr sz="1400">
                 <a:solidFill>
-                  <a:srgbClr val="FFFFFF"/>
+                  <a:srgbClr val="F8F8F2"/>
                 </a:solidFill>
                 <a:latin typeface="Consolas"/>
               </a:defRPr>
             </a:pPr>
             <a:r>
-              <a:t># Method 2: Homebrew (macOS/Linux)</a:t>
+              <a:t># Method 2: Homebrew (macOS/Linux — manual updates)</a:t>
             </a:r>
           </a:p>
           <a:p>
             <a:pPr>
               <a:defRPr sz="1400">
                 <a:solidFill>
-                  <a:srgbClr val="FFFFFF"/>
+                  <a:srgbClr val="F8F8F2"/>
                 </a:solidFill>
                 <a:latin typeface="Consolas"/>
               </a:defRPr>
             </a:pPr>
             <a:r>
-              <a:t>brew install claude-code</a:t>
+              <a:t>brew install --cask claude-code</a:t>
             </a:r>
           </a:p>
           <a:p>
             <a:pPr>
               <a:defRPr sz="1400">
                 <a:solidFill>
-                  <a:srgbClr val="FFFFFF"/>
+                  <a:srgbClr val="F8F8F2"/>
                 </a:solidFill>
                 <a:latin typeface="Consolas"/>
               </a:defRPr>
             </a:pPr>
-            <a:endParaRPr/>
           </a:p>
           <a:p>
             <a:pPr>
               <a:defRPr sz="1400">
                 <a:solidFill>
-                  <a:srgbClr val="FFFFFF"/>
+                  <a:srgbClr val="F8F8F2"/>
                 </a:solidFill>
                 <a:latin typeface="Consolas"/>
               </a:defRPr>
             </a:pPr>
             <a:r>
-              <a:t># Method 3: npx (no install, always latest)</a:t>
+              <a:t># Method 3: WinGet (Windows — manual updates)</a:t>
             </a:r>
           </a:p>
           <a:p>
             <a:pPr>
               <a:defRPr sz="1400">
                 <a:solidFill>
-                  <a:srgbClr val="FFFFFF"/>
+                  <a:srgbClr val="F8F8F2"/>
                 </a:solidFill>
                 <a:latin typeface="Consolas"/>
               </a:defRPr>
             </a:pPr>
             <a:r>
-              <a:t>npx @anthropic-ai/claude-code</a:t>
+              <a:t>winget install Anthropic.ClaudeCode</a:t>
             </a:r>
           </a:p>
           <a:p>
             <a:pPr>
               <a:defRPr sz="1400">
                 <a:solidFill>
-                  <a:srgbClr val="FFFFFF"/>
+                  <a:srgbClr val="F8F8F2"/>
                 </a:solidFill>
                 <a:latin typeface="Consolas"/>
               </a:defRPr>
             </a:pPr>
-            <a:endParaRPr/>
           </a:p>
           <a:p>
             <a:pPr>
               <a:defRPr sz="1400">
                 <a:solidFill>
-                  <a:srgbClr val="FFFFFF"/>
+                  <a:srgbClr val="F8F8F2"/>
                 </a:solidFill>
                 <a:latin typeface="Consolas"/>
               </a:defRPr>
@@ -24366,7 +24493,7 @@
             <a:pPr>
               <a:defRPr sz="1400">
                 <a:solidFill>
-                  <a:srgbClr val="FFFFFF"/>
+                  <a:srgbClr val="F8F8F2"/>
                 </a:solidFill>
                 <a:latin typeface="Consolas"/>
               </a:defRPr>
@@ -56667,6 +56794,7 @@
               </a:defRPr>
             </a:pPr>
             <a:r>
+              <a:rPr dirty="0"/>
               <a:t>  Working memory → Context window: Both degrade under load.</a:t>
             </a:r>
           </a:p>
@@ -56685,6 +56813,7 @@
               </a:defRPr>
             </a:pPr>
             <a:r>
+              <a:rPr dirty="0"/>
               <a:t>  Short-term → Session history: When you study, you move important things from short-term to long-term memory through n...</a:t>
             </a:r>
           </a:p>
@@ -56703,6 +56832,7 @@
               </a:defRPr>
             </a:pPr>
             <a:r>
+              <a:rPr dirty="0"/>
               <a:t>  Long-term → CLAUDE.</a:t>
             </a:r>
           </a:p>
@@ -56721,8 +56851,10 @@
               </a:defRPr>
             </a:pPr>
             <a:r>
+              <a:rPr dirty="0"/>
               <a:t>  Muscle memory → Skills / custom commands: Just like you don't consciously think about typing, skills and commands let...</a:t>
             </a:r>
+            <a:endParaRPr lang="en-US" dirty="0"/>
           </a:p>
           <a:p>
             <a:pPr>
@@ -56739,6 +56871,7 @@
               </a:defRPr>
             </a:pPr>
             <a:r>
+              <a:rPr lang="en-US" dirty="0"/>
               <a:t>  Scott's framing: Context window is short-term memory.</a:t>
             </a:r>
           </a:p>
@@ -56757,6 +56890,7 @@
               </a:defRPr>
             </a:pPr>
             <a:r>
+              <a:rPr lang="en-US" dirty="0"/>
               <a:t>  Everything that follows today — CLAUDE.</a:t>
             </a:r>
           </a:p>

--- a/slides/Day2_Claude_Code_Fundamentals.pptx
+++ b/slides/Day2_Claude_Code_Fundamentals.pptx
@@ -245,7 +245,7 @@
 <file path=ppt/revisionInfo.xml><?xml version="1.0" encoding="utf-8"?>
 <p1510:revInfo xmlns:a="http://schemas.openxmlformats.org/drawingml/2006/main" xmlns:r="http://schemas.openxmlformats.org/officeDocument/2006/relationships" xmlns:p1510="http://schemas.microsoft.com/office/powerpoint/2015/10/main">
   <p1510:revLst>
-    <p1510:client id="{E139C36B-8AB1-447E-AA47-07FFCAD28EDF}" v="1" dt="2026-03-01T23:11:54.861"/>
+    <p1510:client id="{E139C36B-8AB1-447E-AA47-07FFCAD28EDF}" v="2" dt="2026-03-02T01:49:24.476"/>
   </p1510:revLst>
 </p1510:revInfo>
 </file>
@@ -255,7 +255,7 @@
   <pc:docChgLst>
     <pc:chgData name="Scott Hay" userId="e95d3f44-f6c0-414c-b281-41a9346c1b81" providerId="ADAL" clId="{4D76341F-F64C-4A8E-A4EF-1A11730F38E9}"/>
     <pc:docChg chg="undo custSel modSld">
-      <pc:chgData name="Scott Hay" userId="e95d3f44-f6c0-414c-b281-41a9346c1b81" providerId="ADAL" clId="{4D76341F-F64C-4A8E-A4EF-1A11730F38E9}" dt="2026-03-02T00:51:44.576" v="63" actId="20577"/>
+      <pc:chgData name="Scott Hay" userId="e95d3f44-f6c0-414c-b281-41a9346c1b81" providerId="ADAL" clId="{4D76341F-F64C-4A8E-A4EF-1A11730F38E9}" dt="2026-03-02T01:49:32.898" v="82" actId="108"/>
       <pc:docMkLst>
         <pc:docMk/>
       </pc:docMkLst>
@@ -290,7 +290,7 @@
         </pc:spChg>
       </pc:sldChg>
       <pc:sldChg chg="modSp mod">
-        <pc:chgData name="Scott Hay" userId="e95d3f44-f6c0-414c-b281-41a9346c1b81" providerId="ADAL" clId="{4D76341F-F64C-4A8E-A4EF-1A11730F38E9}" dt="2026-03-01T23:11:55.081" v="58" actId="27636"/>
+        <pc:chgData name="Scott Hay" userId="e95d3f44-f6c0-414c-b281-41a9346c1b81" providerId="ADAL" clId="{4D76341F-F64C-4A8E-A4EF-1A11730F38E9}" dt="2026-03-02T01:49:32.898" v="82" actId="108"/>
         <pc:sldMkLst>
           <pc:docMk/>
           <pc:sldMk cId="0" sldId="265"/>
@@ -304,7 +304,15 @@
           </ac:spMkLst>
         </pc:spChg>
         <pc:spChg chg="mod">
-          <ac:chgData name="Scott Hay" userId="e95d3f44-f6c0-414c-b281-41a9346c1b81" providerId="ADAL" clId="{4D76341F-F64C-4A8E-A4EF-1A11730F38E9}" dt="2026-03-01T23:11:55.081" v="58" actId="27636"/>
+          <ac:chgData name="Scott Hay" userId="e95d3f44-f6c0-414c-b281-41a9346c1b81" providerId="ADAL" clId="{4D76341F-F64C-4A8E-A4EF-1A11730F38E9}" dt="2026-03-02T01:48:51.608" v="65" actId="14100"/>
+          <ac:spMkLst>
+            <pc:docMk/>
+            <pc:sldMk cId="0" sldId="265"/>
+            <ac:spMk id="11" creationId="{00000000-0000-0000-0000-000000000000}"/>
+          </ac:spMkLst>
+        </pc:spChg>
+        <pc:spChg chg="mod">
+          <ac:chgData name="Scott Hay" userId="e95d3f44-f6c0-414c-b281-41a9346c1b81" providerId="ADAL" clId="{4D76341F-F64C-4A8E-A4EF-1A11730F38E9}" dt="2026-03-02T01:49:32.898" v="82" actId="108"/>
           <ac:spMkLst>
             <pc:docMk/>
             <pc:sldMk cId="0" sldId="265"/>
@@ -883,7 +891,7 @@
         </pc:spChg>
       </pc:sldChg>
       <pc:sldChg chg="modSp mod">
-        <pc:chgData name="Scott Hay" userId="e95d3f44-f6c0-414c-b281-41a9346c1b81" providerId="ADAL" clId="{4D76341F-F64C-4A8E-A4EF-1A11730F38E9}" dt="2026-03-01T23:11:55.045" v="47" actId="27636"/>
+        <pc:chgData name="Scott Hay" userId="e95d3f44-f6c0-414c-b281-41a9346c1b81" providerId="ADAL" clId="{4D76341F-F64C-4A8E-A4EF-1A11730F38E9}" dt="2026-03-02T01:49:24.526" v="76" actId="27636"/>
         <pc:sldMkLst>
           <pc:docMk/>
           <pc:sldMk cId="0" sldId="350"/>
@@ -913,7 +921,7 @@
           </ac:spMkLst>
         </pc:spChg>
         <pc:spChg chg="mod">
-          <ac:chgData name="Scott Hay" userId="e95d3f44-f6c0-414c-b281-41a9346c1b81" providerId="ADAL" clId="{4D76341F-F64C-4A8E-A4EF-1A11730F38E9}" dt="2026-03-01T23:11:55.045" v="47" actId="27636"/>
+          <ac:chgData name="Scott Hay" userId="e95d3f44-f6c0-414c-b281-41a9346c1b81" providerId="ADAL" clId="{4D76341F-F64C-4A8E-A4EF-1A11730F38E9}" dt="2026-03-02T01:49:24.526" v="76" actId="27636"/>
           <ac:spMkLst>
             <pc:docMk/>
             <pc:sldMk cId="0" sldId="350"/>
@@ -20561,6 +20569,7 @@
               </a:defRPr>
             </a:pPr>
             <a:r>
+              <a:rPr dirty="0"/>
               <a:t>Tools</a:t>
             </a:r>
           </a:p>
@@ -20576,14 +20585,21 @@
               </a:defRPr>
             </a:pPr>
             <a:r>
+              <a:rPr dirty="0"/>
               <a:t>Terminal (iTerm2, Windows Terminal, etc.)</a:t>
             </a:r>
-            <a:br/>
-            <a:r>
+            <a:br>
+              <a:rPr dirty="0"/>
+            </a:br>
+            <a:r>
+              <a:rPr dirty="0"/>
               <a:t>Git installed and configured</a:t>
             </a:r>
-            <a:br/>
-            <a:r>
+            <a:br>
+              <a:rPr dirty="0"/>
+            </a:br>
+            <a:r>
+              <a:rPr dirty="0"/>
               <a:t>VS Code or JetBrains IDE (optional)</a:t>
             </a:r>
           </a:p>
@@ -20598,7 +20614,7 @@
         <p:spPr>
           <a:xfrm>
             <a:off x="7604607" y="2011680"/>
-            <a:ext cx="2286000" cy="3200400"/>
+            <a:ext cx="2970628" cy="4846320"/>
           </a:xfrm>
           <a:prstGeom prst="roundRect">
             <a:avLst/>
@@ -20723,7 +20739,7 @@
         <p:spPr>
           <a:xfrm>
             <a:off x="7696047" y="3657600"/>
-            <a:ext cx="2103120" cy="1371600"/>
+            <a:ext cx="2879188" cy="1371600"/>
           </a:xfrm>
           <a:prstGeom prst="rect">
             <a:avLst/>
@@ -20732,141 +20748,65 @@
         </p:spPr>
         <p:txBody>
           <a:bodyPr wrap="square">
-            <a:normAutofit fontScale="92500"/>
+            <a:noAutofit/>
           </a:bodyPr>
           <a:lstStyle/>
           <a:p>
             <a:pPr algn="ctr">
-              <a:defRPr sz="1400" b="1">
-                <a:solidFill>
-                  <a:srgbClr val="F8F8F2"/>
+              <a:defRPr sz="1800" b="1">
+                <a:solidFill>
+                  <a:srgbClr val="FFFFFF"/>
                 </a:solidFill>
                 <a:latin typeface="Consolas"/>
               </a:defRPr>
             </a:pPr>
             <a:r>
-              <a:t># Method 1: Native install (recommended — auto-updates)</a:t>
-            </a:r>
-          </a:p>
-          <a:p>
-            <a:pPr>
-              <a:defRPr sz="1400">
-                <a:solidFill>
-                  <a:srgbClr val="F8F8F2"/>
-                </a:solidFill>
-                <a:latin typeface="Consolas"/>
-              </a:defRPr>
-            </a:pPr>
-            <a:r>
-              <a:t>curl -fsSL https://claude.ai/install.sh | bash</a:t>
-            </a:r>
-          </a:p>
-          <a:p>
-            <a:pPr>
-              <a:defRPr sz="1400">
-                <a:solidFill>
-                  <a:srgbClr val="F8F8F2"/>
-                </a:solidFill>
-                <a:latin typeface="Consolas"/>
-              </a:defRPr>
-            </a:pPr>
-          </a:p>
-          <a:p>
-            <a:pPr>
-              <a:defRPr sz="1400">
-                <a:solidFill>
-                  <a:srgbClr val="F8F8F2"/>
-                </a:solidFill>
-                <a:latin typeface="Consolas"/>
-              </a:defRPr>
-            </a:pPr>
-            <a:r>
-              <a:t># Method 2: Homebrew (macOS/Linux — manual updates)</a:t>
-            </a:r>
-          </a:p>
-          <a:p>
-            <a:pPr>
-              <a:defRPr sz="1400">
-                <a:solidFill>
-                  <a:srgbClr val="F8F8F2"/>
-                </a:solidFill>
-                <a:latin typeface="Consolas"/>
-              </a:defRPr>
-            </a:pPr>
-            <a:r>
-              <a:t>brew install --cask claude-code</a:t>
-            </a:r>
-          </a:p>
-          <a:p>
-            <a:pPr>
-              <a:defRPr sz="1400">
-                <a:solidFill>
-                  <a:srgbClr val="F8F8F2"/>
-                </a:solidFill>
-                <a:latin typeface="Consolas"/>
-              </a:defRPr>
-            </a:pPr>
-          </a:p>
-          <a:p>
-            <a:pPr>
-              <a:defRPr sz="1400">
-                <a:solidFill>
-                  <a:srgbClr val="F8F8F2"/>
-                </a:solidFill>
-                <a:latin typeface="Consolas"/>
-              </a:defRPr>
-            </a:pPr>
-            <a:r>
-              <a:t># Method 3: WinGet (Windows — manual updates)</a:t>
-            </a:r>
-          </a:p>
-          <a:p>
-            <a:pPr>
-              <a:defRPr sz="1400">
-                <a:solidFill>
-                  <a:srgbClr val="F8F8F2"/>
-                </a:solidFill>
-                <a:latin typeface="Consolas"/>
-              </a:defRPr>
-            </a:pPr>
-            <a:r>
-              <a:t>winget install Anthropic.ClaudeCode</a:t>
-            </a:r>
-          </a:p>
-          <a:p>
-            <a:pPr>
-              <a:defRPr sz="1400">
-                <a:solidFill>
-                  <a:srgbClr val="F8F8F2"/>
-                </a:solidFill>
-                <a:latin typeface="Consolas"/>
-              </a:defRPr>
-            </a:pPr>
-          </a:p>
-          <a:p>
-            <a:pPr>
-              <a:defRPr sz="1400">
-                <a:solidFill>
-                  <a:srgbClr val="F8F8F2"/>
-                </a:solidFill>
-                <a:latin typeface="Consolas"/>
-              </a:defRPr>
-            </a:pPr>
-            <a:r>
-              <a:t># Verify installation</a:t>
-            </a:r>
-          </a:p>
-          <a:p>
-            <a:pPr>
-              <a:defRPr sz="1400">
-                <a:solidFill>
-                  <a:srgbClr val="F8F8F2"/>
-                </a:solidFill>
-                <a:latin typeface="Consolas"/>
-              </a:defRPr>
-            </a:pPr>
-            <a:r>
-              <a:t>claude --version</a:t>
+              <a:t>Account</a:t>
+            </a:r>
+          </a:p>
+          <a:p>
+            <a:pPr algn="ctr">
+              <a:spcBef>
+                <a:spcPts val="400"/>
+              </a:spcBef>
+              <a:defRPr sz="1100">
+                <a:solidFill>
+                  <a:srgbClr val="8A8F98"/>
+                </a:solidFill>
+              </a:defRPr>
+            </a:pPr>
+            <a:r>
+              <a:t>Anthropic Pro or Max plan</a:t>
+            </a:r>
+          </a:p>
+          <a:p>
+            <a:pPr algn="ctr">
+              <a:spcBef>
+                <a:spcPts val="400"/>
+              </a:spcBef>
+              <a:defRPr sz="1100">
+                <a:solidFill>
+                  <a:srgbClr val="8A8F98"/>
+                </a:solidFill>
+              </a:defRPr>
+            </a:pPr>
+            <a:r>
+              <a:t>Install: claude.ai/install.sh</a:t>
+            </a:r>
+          </a:p>
+          <a:p>
+            <a:pPr algn="ctr">
+              <a:spcBef>
+                <a:spcPts val="400"/>
+              </a:spcBef>
+              <a:defRPr sz="1100">
+                <a:solidFill>
+                  <a:srgbClr val="8A8F98"/>
+                </a:solidFill>
+              </a:defRPr>
+            </a:pPr>
+            <a:r>
+              <a:t>Authenticate: claude login</a:t>
             </a:r>
           </a:p>
         </p:txBody>
@@ -24403,6 +24343,7 @@
                 <a:latin typeface="Consolas"/>
               </a:defRPr>
             </a:pPr>
+            <a:endParaRPr/>
           </a:p>
           <a:p>
             <a:pPr>
@@ -24439,6 +24380,7 @@
                 <a:latin typeface="Consolas"/>
               </a:defRPr>
             </a:pPr>
+            <a:endParaRPr/>
           </a:p>
           <a:p>
             <a:pPr>
@@ -24475,6 +24417,7 @@
                 <a:latin typeface="Consolas"/>
               </a:defRPr>
             </a:pPr>
+            <a:endParaRPr/>
           </a:p>
           <a:p>
             <a:pPr>
@@ -61798,7 +61741,7 @@
         </p:spPr>
         <p:txBody>
           <a:bodyPr wrap="square">
-            <a:normAutofit fontScale="92500"/>
+            <a:normAutofit lnSpcReduction="10000"/>
           </a:bodyPr>
           <a:lstStyle/>
           <a:p>

--- a/slides/Day2_Claude_Code_Fundamentals.pptx
+++ b/slides/Day2_Claude_Code_Fundamentals.pptx
@@ -56709,8 +56709,8 @@
         </p:nvSpPr>
         <p:spPr>
           <a:xfrm>
-            <a:off x="457200" y="1463040"/>
-            <a:ext cx="11277295" cy="4572000"/>
+            <a:off x="914400" y="1828800"/>
+            <a:ext cx="3200400" cy="822960"/>
           </a:xfrm>
           <a:prstGeom prst="rect">
             <a:avLst/>
@@ -56723,118 +56723,435 @@
           </a:bodyPr>
           <a:lstStyle/>
           <a:p>
-            <a:pPr>
-              <a:spcBef>
-                <a:spcPts val="800"/>
-              </a:spcBef>
-              <a:spcAft>
-                <a:spcPts val="800"/>
-              </a:spcAft>
-              <a:defRPr sz="2200">
-                <a:solidFill>
-                  <a:srgbClr val="FFFFFF"/>
-                </a:solidFill>
-              </a:defRPr>
-            </a:pPr>
-            <a:r>
-              <a:rPr dirty="0"/>
-              <a:t>  Working memory → Context window: Both degrade under load.</a:t>
-            </a:r>
-          </a:p>
-          <a:p>
-            <a:pPr>
-              <a:spcBef>
-                <a:spcPts val="800"/>
-              </a:spcBef>
-              <a:spcAft>
-                <a:spcPts val="800"/>
-              </a:spcAft>
-              <a:defRPr sz="2200">
-                <a:solidFill>
-                  <a:srgbClr val="FFFFFF"/>
-                </a:solidFill>
-              </a:defRPr>
-            </a:pPr>
-            <a:r>
-              <a:rPr dirty="0"/>
-              <a:t>  Short-term → Session history: When you study, you move important things from short-term to long-term memory through n...</a:t>
-            </a:r>
-          </a:p>
-          <a:p>
-            <a:pPr>
-              <a:spcBef>
-                <a:spcPts val="800"/>
-              </a:spcBef>
-              <a:spcAft>
-                <a:spcPts val="800"/>
-              </a:spcAft>
-              <a:defRPr sz="2200">
-                <a:solidFill>
-                  <a:srgbClr val="FFFFFF"/>
-                </a:solidFill>
-              </a:defRPr>
-            </a:pPr>
-            <a:r>
-              <a:rPr dirty="0"/>
-              <a:t>  Long-term → CLAUDE.</a:t>
-            </a:r>
-          </a:p>
-          <a:p>
-            <a:pPr>
-              <a:spcBef>
-                <a:spcPts val="800"/>
-              </a:spcBef>
-              <a:spcAft>
-                <a:spcPts val="800"/>
-              </a:spcAft>
-              <a:defRPr sz="2200">
-                <a:solidFill>
-                  <a:srgbClr val="FFFFFF"/>
-                </a:solidFill>
-              </a:defRPr>
-            </a:pPr>
-            <a:r>
-              <a:rPr dirty="0"/>
-              <a:t>  Muscle memory → Skills / custom commands: Just like you don't consciously think about typing, skills and commands let...</a:t>
-            </a:r>
-            <a:endParaRPr lang="en-US" dirty="0"/>
-          </a:p>
-          <a:p>
-            <a:pPr>
-              <a:spcBef>
-                <a:spcPts val="800"/>
-              </a:spcBef>
-              <a:spcAft>
-                <a:spcPts val="800"/>
-              </a:spcAft>
-              <a:defRPr sz="2200">
-                <a:solidFill>
-                  <a:srgbClr val="FFFFFF"/>
-                </a:solidFill>
-              </a:defRPr>
-            </a:pPr>
-            <a:r>
-              <a:rPr lang="en-US" dirty="0"/>
-              <a:t>  Scott's framing: Context window is short-term memory.</a:t>
-            </a:r>
-          </a:p>
-          <a:p>
-            <a:pPr>
-              <a:spcBef>
-                <a:spcPts val="800"/>
-              </a:spcBef>
-              <a:spcAft>
-                <a:spcPts val="800"/>
-              </a:spcAft>
-              <a:defRPr sz="2200">
-                <a:solidFill>
-                  <a:srgbClr val="FFFFFF"/>
-                </a:solidFill>
-              </a:defRPr>
-            </a:pPr>
-            <a:r>
-              <a:rPr lang="en-US" dirty="0"/>
-              <a:t>  Everything that follows today — CLAUDE.</a:t>
+            <a:pPr algn="r">
+              <a:defRPr sz="2200" b="1">
+                <a:solidFill>
+                  <a:srgbClr val="FF6B6B"/>
+                </a:solidFill>
+              </a:defRPr>
+            </a:pPr>
+            <a:r>
+              <a:t>Working memory</a:t>
+            </a:r>
+          </a:p>
+        </p:txBody>
+      </p:sp>
+      <p:sp>
+        <p:nvSpPr>
+          <p:cNvPr id="5" name="TextBox 4"/>
+          <p:cNvSpPr txBox="1"/>
+          <p:nvPr/>
+        </p:nvSpPr>
+        <p:spPr>
+          <a:xfrm>
+            <a:off x="4297680" y="1828800"/>
+            <a:ext cx="731520" cy="822960"/>
+          </a:xfrm>
+          <a:prstGeom prst="rect">
+            <a:avLst/>
+          </a:prstGeom>
+          <a:noFill/>
+        </p:spPr>
+        <p:txBody>
+          <a:bodyPr wrap="none">
+            <a:spAutoFit/>
+          </a:bodyPr>
+          <a:lstStyle/>
+          <a:p>
+            <a:pPr algn="ctr">
+              <a:defRPr sz="2800">
+                <a:solidFill>
+                  <a:srgbClr val="8A8F98"/>
+                </a:solidFill>
+              </a:defRPr>
+            </a:pPr>
+            <a:r>
+              <a:t>→</a:t>
+            </a:r>
+          </a:p>
+        </p:txBody>
+      </p:sp>
+      <p:sp>
+        <p:nvSpPr>
+          <p:cNvPr id="6" name="TextBox 5"/>
+          <p:cNvSpPr txBox="1"/>
+          <p:nvPr/>
+        </p:nvSpPr>
+        <p:spPr>
+          <a:xfrm>
+            <a:off x="5212080" y="1828800"/>
+            <a:ext cx="3657600" cy="822960"/>
+          </a:xfrm>
+          <a:prstGeom prst="rect">
+            <a:avLst/>
+          </a:prstGeom>
+          <a:noFill/>
+        </p:spPr>
+        <p:txBody>
+          <a:bodyPr wrap="square">
+            <a:spAutoFit/>
+          </a:bodyPr>
+          <a:lstStyle/>
+          <a:p>
+            <a:pPr algn="l">
+              <a:defRPr sz="2200" b="1">
+                <a:solidFill>
+                  <a:srgbClr val="00D4AA"/>
+                </a:solidFill>
+              </a:defRPr>
+            </a:pPr>
+            <a:r>
+              <a:t>Context window</a:t>
+            </a:r>
+          </a:p>
+        </p:txBody>
+      </p:sp>
+      <p:sp>
+        <p:nvSpPr>
+          <p:cNvPr id="7" name="TextBox 6"/>
+          <p:cNvSpPr txBox="1"/>
+          <p:nvPr/>
+        </p:nvSpPr>
+        <p:spPr>
+          <a:xfrm>
+            <a:off x="914400" y="2651760"/>
+            <a:ext cx="3200400" cy="822960"/>
+          </a:xfrm>
+          <a:prstGeom prst="rect">
+            <a:avLst/>
+          </a:prstGeom>
+          <a:noFill/>
+        </p:spPr>
+        <p:txBody>
+          <a:bodyPr wrap="square">
+            <a:spAutoFit/>
+          </a:bodyPr>
+          <a:lstStyle/>
+          <a:p>
+            <a:pPr algn="r">
+              <a:defRPr sz="2200" b="1">
+                <a:solidFill>
+                  <a:srgbClr val="FF6B6B"/>
+                </a:solidFill>
+              </a:defRPr>
+            </a:pPr>
+            <a:r>
+              <a:t>Short-term memory</a:t>
+            </a:r>
+          </a:p>
+        </p:txBody>
+      </p:sp>
+      <p:sp>
+        <p:nvSpPr>
+          <p:cNvPr id="8" name="TextBox 7"/>
+          <p:cNvSpPr txBox="1"/>
+          <p:nvPr/>
+        </p:nvSpPr>
+        <p:spPr>
+          <a:xfrm>
+            <a:off x="4297680" y="2651760"/>
+            <a:ext cx="731520" cy="822960"/>
+          </a:xfrm>
+          <a:prstGeom prst="rect">
+            <a:avLst/>
+          </a:prstGeom>
+          <a:noFill/>
+        </p:spPr>
+        <p:txBody>
+          <a:bodyPr wrap="none">
+            <a:spAutoFit/>
+          </a:bodyPr>
+          <a:lstStyle/>
+          <a:p>
+            <a:pPr algn="ctr">
+              <a:defRPr sz="2800">
+                <a:solidFill>
+                  <a:srgbClr val="8A8F98"/>
+                </a:solidFill>
+              </a:defRPr>
+            </a:pPr>
+            <a:r>
+              <a:t>→</a:t>
+            </a:r>
+          </a:p>
+        </p:txBody>
+      </p:sp>
+      <p:sp>
+        <p:nvSpPr>
+          <p:cNvPr id="9" name="TextBox 8"/>
+          <p:cNvSpPr txBox="1"/>
+          <p:nvPr/>
+        </p:nvSpPr>
+        <p:spPr>
+          <a:xfrm>
+            <a:off x="5212080" y="2651760"/>
+            <a:ext cx="3657600" cy="822960"/>
+          </a:xfrm>
+          <a:prstGeom prst="rect">
+            <a:avLst/>
+          </a:prstGeom>
+          <a:noFill/>
+        </p:spPr>
+        <p:txBody>
+          <a:bodyPr wrap="square">
+            <a:spAutoFit/>
+          </a:bodyPr>
+          <a:lstStyle/>
+          <a:p>
+            <a:pPr algn="l">
+              <a:defRPr sz="2200" b="1">
+                <a:solidFill>
+                  <a:srgbClr val="00D4AA"/>
+                </a:solidFill>
+              </a:defRPr>
+            </a:pPr>
+            <a:r>
+              <a:t>Session history</a:t>
+            </a:r>
+          </a:p>
+        </p:txBody>
+      </p:sp>
+      <p:sp>
+        <p:nvSpPr>
+          <p:cNvPr id="10" name="TextBox 9"/>
+          <p:cNvSpPr txBox="1"/>
+          <p:nvPr/>
+        </p:nvSpPr>
+        <p:spPr>
+          <a:xfrm>
+            <a:off x="914400" y="3474720"/>
+            <a:ext cx="3200400" cy="822960"/>
+          </a:xfrm>
+          <a:prstGeom prst="rect">
+            <a:avLst/>
+          </a:prstGeom>
+          <a:noFill/>
+        </p:spPr>
+        <p:txBody>
+          <a:bodyPr wrap="square">
+            <a:spAutoFit/>
+          </a:bodyPr>
+          <a:lstStyle/>
+          <a:p>
+            <a:pPr algn="r">
+              <a:defRPr sz="2200" b="1">
+                <a:solidFill>
+                  <a:srgbClr val="FF6B6B"/>
+                </a:solidFill>
+              </a:defRPr>
+            </a:pPr>
+            <a:r>
+              <a:t>Long-term memory</a:t>
+            </a:r>
+          </a:p>
+        </p:txBody>
+      </p:sp>
+      <p:sp>
+        <p:nvSpPr>
+          <p:cNvPr id="11" name="TextBox 10"/>
+          <p:cNvSpPr txBox="1"/>
+          <p:nvPr/>
+        </p:nvSpPr>
+        <p:spPr>
+          <a:xfrm>
+            <a:off x="4297680" y="3474720"/>
+            <a:ext cx="731520" cy="822960"/>
+          </a:xfrm>
+          <a:prstGeom prst="rect">
+            <a:avLst/>
+          </a:prstGeom>
+          <a:noFill/>
+        </p:spPr>
+        <p:txBody>
+          <a:bodyPr wrap="none">
+            <a:spAutoFit/>
+          </a:bodyPr>
+          <a:lstStyle/>
+          <a:p>
+            <a:pPr algn="ctr">
+              <a:defRPr sz="2800">
+                <a:solidFill>
+                  <a:srgbClr val="8A8F98"/>
+                </a:solidFill>
+              </a:defRPr>
+            </a:pPr>
+            <a:r>
+              <a:t>→</a:t>
+            </a:r>
+          </a:p>
+        </p:txBody>
+      </p:sp>
+      <p:sp>
+        <p:nvSpPr>
+          <p:cNvPr id="12" name="TextBox 11"/>
+          <p:cNvSpPr txBox="1"/>
+          <p:nvPr/>
+        </p:nvSpPr>
+        <p:spPr>
+          <a:xfrm>
+            <a:off x="5212080" y="3474720"/>
+            <a:ext cx="3657600" cy="822960"/>
+          </a:xfrm>
+          <a:prstGeom prst="rect">
+            <a:avLst/>
+          </a:prstGeom>
+          <a:noFill/>
+        </p:spPr>
+        <p:txBody>
+          <a:bodyPr wrap="square">
+            <a:spAutoFit/>
+          </a:bodyPr>
+          <a:lstStyle/>
+          <a:p>
+            <a:pPr algn="l">
+              <a:defRPr sz="2200" b="1">
+                <a:solidFill>
+                  <a:srgbClr val="00D4AA"/>
+                </a:solidFill>
+              </a:defRPr>
+            </a:pPr>
+            <a:r>
+              <a:t>CLAUDE.md</a:t>
+            </a:r>
+          </a:p>
+        </p:txBody>
+      </p:sp>
+      <p:sp>
+        <p:nvSpPr>
+          <p:cNvPr id="13" name="TextBox 12"/>
+          <p:cNvSpPr txBox="1"/>
+          <p:nvPr/>
+        </p:nvSpPr>
+        <p:spPr>
+          <a:xfrm>
+            <a:off x="914400" y="4297680"/>
+            <a:ext cx="3200400" cy="822960"/>
+          </a:xfrm>
+          <a:prstGeom prst="rect">
+            <a:avLst/>
+          </a:prstGeom>
+          <a:noFill/>
+        </p:spPr>
+        <p:txBody>
+          <a:bodyPr wrap="square">
+            <a:spAutoFit/>
+          </a:bodyPr>
+          <a:lstStyle/>
+          <a:p>
+            <a:pPr algn="r">
+              <a:defRPr sz="2200" b="1">
+                <a:solidFill>
+                  <a:srgbClr val="FF6B6B"/>
+                </a:solidFill>
+              </a:defRPr>
+            </a:pPr>
+            <a:r>
+              <a:t>Muscle memory</a:t>
+            </a:r>
+          </a:p>
+        </p:txBody>
+      </p:sp>
+      <p:sp>
+        <p:nvSpPr>
+          <p:cNvPr id="14" name="TextBox 13"/>
+          <p:cNvSpPr txBox="1"/>
+          <p:nvPr/>
+        </p:nvSpPr>
+        <p:spPr>
+          <a:xfrm>
+            <a:off x="4297680" y="4297680"/>
+            <a:ext cx="731520" cy="822960"/>
+          </a:xfrm>
+          <a:prstGeom prst="rect">
+            <a:avLst/>
+          </a:prstGeom>
+          <a:noFill/>
+        </p:spPr>
+        <p:txBody>
+          <a:bodyPr wrap="none">
+            <a:spAutoFit/>
+          </a:bodyPr>
+          <a:lstStyle/>
+          <a:p>
+            <a:pPr algn="ctr">
+              <a:defRPr sz="2800">
+                <a:solidFill>
+                  <a:srgbClr val="8A8F98"/>
+                </a:solidFill>
+              </a:defRPr>
+            </a:pPr>
+            <a:r>
+              <a:t>→</a:t>
+            </a:r>
+          </a:p>
+        </p:txBody>
+      </p:sp>
+      <p:sp>
+        <p:nvSpPr>
+          <p:cNvPr id="15" name="TextBox 14"/>
+          <p:cNvSpPr txBox="1"/>
+          <p:nvPr/>
+        </p:nvSpPr>
+        <p:spPr>
+          <a:xfrm>
+            <a:off x="5212080" y="4297680"/>
+            <a:ext cx="3657600" cy="822960"/>
+          </a:xfrm>
+          <a:prstGeom prst="rect">
+            <a:avLst/>
+          </a:prstGeom>
+          <a:noFill/>
+        </p:spPr>
+        <p:txBody>
+          <a:bodyPr wrap="square">
+            <a:spAutoFit/>
+          </a:bodyPr>
+          <a:lstStyle/>
+          <a:p>
+            <a:pPr algn="l">
+              <a:defRPr sz="2200" b="1">
+                <a:solidFill>
+                  <a:srgbClr val="00D4AA"/>
+                </a:solidFill>
+              </a:defRPr>
+            </a:pPr>
+            <a:r>
+              <a:t>Skills &amp; commands</a:t>
+            </a:r>
+          </a:p>
+        </p:txBody>
+      </p:sp>
+      <p:sp>
+        <p:nvSpPr>
+          <p:cNvPr id="16" name="TextBox 15"/>
+          <p:cNvSpPr txBox="1"/>
+          <p:nvPr/>
+        </p:nvSpPr>
+        <p:spPr>
+          <a:xfrm>
+            <a:off x="1371600" y="5303520"/>
+            <a:ext cx="8229600" cy="548640"/>
+          </a:xfrm>
+          <a:prstGeom prst="rect">
+            <a:avLst/>
+          </a:prstGeom>
+          <a:noFill/>
+        </p:spPr>
+        <p:txBody>
+          <a:bodyPr wrap="square">
+            <a:spAutoFit/>
+          </a:bodyPr>
+          <a:lstStyle/>
+          <a:p>
+            <a:pPr algn="ctr">
+              <a:defRPr sz="1600">
+                <a:solidFill>
+                  <a:srgbClr val="8A8F98"/>
+                </a:solidFill>
+              </a:defRPr>
+            </a:pPr>
+            <a:r>
+              <a:t>Everything today teaches you how to manage these four memory layers.</a:t>
             </a:r>
           </a:p>
         </p:txBody>

--- a/slides/Day2_Claude_Code_Fundamentals.pptx
+++ b/slides/Day2_Claude_Code_Fundamentals.pptx
@@ -255,7 +255,7 @@
   <pc:docChgLst>
     <pc:chgData name="Scott Hay" userId="e95d3f44-f6c0-414c-b281-41a9346c1b81" providerId="ADAL" clId="{4D76341F-F64C-4A8E-A4EF-1A11730F38E9}"/>
     <pc:docChg chg="undo custSel modSld">
-      <pc:chgData name="Scott Hay" userId="e95d3f44-f6c0-414c-b281-41a9346c1b81" providerId="ADAL" clId="{4D76341F-F64C-4A8E-A4EF-1A11730F38E9}" dt="2026-03-02T01:49:32.898" v="82" actId="108"/>
+      <pc:chgData name="Scott Hay" userId="e95d3f44-f6c0-414c-b281-41a9346c1b81" providerId="ADAL" clId="{4D76341F-F64C-4A8E-A4EF-1A11730F38E9}" dt="2026-03-02T01:59:12.747" v="87" actId="14100"/>
       <pc:docMkLst>
         <pc:docMk/>
       </pc:docMkLst>
@@ -290,7 +290,7 @@
         </pc:spChg>
       </pc:sldChg>
       <pc:sldChg chg="modSp mod">
-        <pc:chgData name="Scott Hay" userId="e95d3f44-f6c0-414c-b281-41a9346c1b81" providerId="ADAL" clId="{4D76341F-F64C-4A8E-A4EF-1A11730F38E9}" dt="2026-03-02T01:49:32.898" v="82" actId="108"/>
+        <pc:chgData name="Scott Hay" userId="e95d3f44-f6c0-414c-b281-41a9346c1b81" providerId="ADAL" clId="{4D76341F-F64C-4A8E-A4EF-1A11730F38E9}" dt="2026-03-02T01:59:12.747" v="87" actId="14100"/>
         <pc:sldMkLst>
           <pc:docMk/>
           <pc:sldMk cId="0" sldId="265"/>
@@ -304,7 +304,7 @@
           </ac:spMkLst>
         </pc:spChg>
         <pc:spChg chg="mod">
-          <ac:chgData name="Scott Hay" userId="e95d3f44-f6c0-414c-b281-41a9346c1b81" providerId="ADAL" clId="{4D76341F-F64C-4A8E-A4EF-1A11730F38E9}" dt="2026-03-02T01:48:51.608" v="65" actId="14100"/>
+          <ac:chgData name="Scott Hay" userId="e95d3f44-f6c0-414c-b281-41a9346c1b81" providerId="ADAL" clId="{4D76341F-F64C-4A8E-A4EF-1A11730F38E9}" dt="2026-03-02T01:59:12.747" v="87" actId="14100"/>
           <ac:spMkLst>
             <pc:docMk/>
             <pc:sldMk cId="0" sldId="265"/>
@@ -312,7 +312,7 @@
           </ac:spMkLst>
         </pc:spChg>
         <pc:spChg chg="mod">
-          <ac:chgData name="Scott Hay" userId="e95d3f44-f6c0-414c-b281-41a9346c1b81" providerId="ADAL" clId="{4D76341F-F64C-4A8E-A4EF-1A11730F38E9}" dt="2026-03-02T01:49:32.898" v="82" actId="108"/>
+          <ac:chgData name="Scott Hay" userId="e95d3f44-f6c0-414c-b281-41a9346c1b81" providerId="ADAL" clId="{4D76341F-F64C-4A8E-A4EF-1A11730F38E9}" dt="2026-03-02T01:58:50.425" v="85" actId="14100"/>
           <ac:spMkLst>
             <pc:docMk/>
             <pc:sldMk cId="0" sldId="265"/>
@@ -20614,7 +20614,7 @@
         <p:spPr>
           <a:xfrm>
             <a:off x="7604607" y="2011680"/>
-            <a:ext cx="2970628" cy="4846320"/>
+            <a:ext cx="2286001" cy="3200400"/>
           </a:xfrm>
           <a:prstGeom prst="roundRect">
             <a:avLst/>
@@ -20739,7 +20739,7 @@
         <p:spPr>
           <a:xfrm>
             <a:off x="7696047" y="3657600"/>
-            <a:ext cx="2879188" cy="1371600"/>
+            <a:ext cx="2194866" cy="1371600"/>
           </a:xfrm>
           <a:prstGeom prst="rect">
             <a:avLst/>
@@ -20761,6 +20761,7 @@
               </a:defRPr>
             </a:pPr>
             <a:r>
+              <a:rPr dirty="0"/>
               <a:t>Account</a:t>
             </a:r>
           </a:p>
@@ -20776,6 +20777,7 @@
               </a:defRPr>
             </a:pPr>
             <a:r>
+              <a:rPr dirty="0"/>
               <a:t>Anthropic Pro or Max plan</a:t>
             </a:r>
           </a:p>
@@ -20791,6 +20793,7 @@
               </a:defRPr>
             </a:pPr>
             <a:r>
+              <a:rPr dirty="0"/>
               <a:t>Install: claude.ai/install.sh</a:t>
             </a:r>
           </a:p>
@@ -20806,7 +20809,16 @@
               </a:defRPr>
             </a:pPr>
             <a:r>
-              <a:t>Authenticate: claude login</a:t>
+              <a:rPr dirty="0"/>
+              <a:t>Authenticate: </a:t>
+            </a:r>
+            <a:r>
+              <a:rPr dirty="0" err="1"/>
+              <a:t>claude</a:t>
+            </a:r>
+            <a:r>
+              <a:rPr dirty="0"/>
+              <a:t> login</a:t>
             </a:r>
           </a:p>
         </p:txBody>
@@ -41719,43 +41731,8 @@
         </p:nvSpPr>
         <p:spPr>
           <a:xfrm>
-            <a:off x="457200" y="1371600"/>
-            <a:ext cx="411480" cy="411480"/>
-          </a:xfrm>
-          <a:prstGeom prst="rect">
-            <a:avLst/>
-          </a:prstGeom>
-          <a:noFill/>
-        </p:spPr>
-        <p:txBody>
-          <a:bodyPr wrap="none" anchor="ctr">
-            <a:spAutoFit/>
-          </a:bodyPr>
-          <a:lstStyle/>
-          <a:p>
-            <a:pPr algn="ctr">
-              <a:defRPr sz="2000" b="1">
-                <a:solidFill>
-                  <a:srgbClr val="0B0F1A"/>
-                </a:solidFill>
-              </a:defRPr>
-            </a:pPr>
-            <a:r>
-              <a:t>v</a:t>
-            </a:r>
-          </a:p>
-        </p:txBody>
-      </p:sp>
-      <p:sp>
-        <p:nvSpPr>
-          <p:cNvPr id="6" name="TextBox 5"/>
-          <p:cNvSpPr txBox="1"/>
-          <p:nvPr/>
-        </p:nvSpPr>
-        <p:spPr>
-          <a:xfrm>
-            <a:off x="1005840" y="1417320"/>
-            <a:ext cx="10728655" cy="731520"/>
+            <a:off x="731520" y="1828800"/>
+            <a:ext cx="1645920" cy="365760"/>
           </a:xfrm>
           <a:prstGeom prst="rect">
             <a:avLst/>
@@ -41769,107 +41746,28 @@
           <a:lstStyle/>
           <a:p>
             <a:pPr>
-              <a:defRPr sz="2200">
-                <a:solidFill>
-                  <a:srgbClr val="FFFFFF"/>
-                </a:solidFill>
-              </a:defRPr>
-            </a:pPr>
-            <a:r>
-              <a:t>Lab 1: Debug a real authentication bug, write comprehensive tests, generate documentation</a:t>
-            </a:r>
-          </a:p>
-        </p:txBody>
-      </p:sp>
-      <p:sp>
-        <p:nvSpPr>
-          <p:cNvPr id="7" name="Oval 6"/>
-          <p:cNvSpPr/>
-          <p:nvPr/>
-        </p:nvSpPr>
-        <p:spPr>
-          <a:xfrm>
-            <a:off x="457200" y="2194560"/>
-            <a:ext cx="411480" cy="411480"/>
-          </a:xfrm>
-          <a:prstGeom prst="ellipse">
-            <a:avLst/>
-          </a:prstGeom>
-          <a:solidFill>
-            <a:srgbClr val="00D4AA"/>
-          </a:solidFill>
-          <a:ln>
-            <a:noFill/>
-          </a:ln>
-        </p:spPr>
-        <p:style>
-          <a:lnRef idx="1">
-            <a:schemeClr val="accent1"/>
-          </a:lnRef>
-          <a:fillRef idx="3">
-            <a:schemeClr val="accent1"/>
-          </a:fillRef>
-          <a:effectRef idx="2">
-            <a:schemeClr val="accent1"/>
-          </a:effectRef>
-          <a:fontRef idx="minor">
-            <a:schemeClr val="lt1"/>
-          </a:fontRef>
-        </p:style>
-        <p:txBody>
-          <a:bodyPr rtlCol="0" anchor="ctr"/>
-          <a:lstStyle/>
-          <a:p>
-            <a:pPr algn="ctr"/>
-            <a:endParaRPr/>
-          </a:p>
-        </p:txBody>
-      </p:sp>
-      <p:sp>
-        <p:nvSpPr>
-          <p:cNvPr id="8" name="TextBox 7"/>
+              <a:defRPr sz="1800" b="1">
+                <a:solidFill>
+                  <a:srgbClr val="00D4AA"/>
+                </a:solidFill>
+              </a:defRPr>
+            </a:pPr>
+            <a:r>
+              <a:t>Exercise 1:</a:t>
+            </a:r>
+          </a:p>
+        </p:txBody>
+      </p:sp>
+      <p:sp>
+        <p:nvSpPr>
+          <p:cNvPr id="6" name="TextBox 5"/>
           <p:cNvSpPr txBox="1"/>
           <p:nvPr/>
         </p:nvSpPr>
         <p:spPr>
           <a:xfrm>
-            <a:off x="457200" y="2194560"/>
-            <a:ext cx="411480" cy="411480"/>
-          </a:xfrm>
-          <a:prstGeom prst="rect">
-            <a:avLst/>
-          </a:prstGeom>
-          <a:noFill/>
-        </p:spPr>
-        <p:txBody>
-          <a:bodyPr wrap="none" anchor="ctr">
-            <a:spAutoFit/>
-          </a:bodyPr>
-          <a:lstStyle/>
-          <a:p>
-            <a:pPr algn="ctr">
-              <a:defRPr sz="2000" b="1">
-                <a:solidFill>
-                  <a:srgbClr val="0B0F1A"/>
-                </a:solidFill>
-              </a:defRPr>
-            </a:pPr>
-            <a:r>
-              <a:t>v</a:t>
-            </a:r>
-          </a:p>
-        </p:txBody>
-      </p:sp>
-      <p:sp>
-        <p:nvSpPr>
-          <p:cNvPr id="9" name="TextBox 8"/>
-          <p:cNvSpPr txBox="1"/>
-          <p:nvPr/>
-        </p:nvSpPr>
-        <p:spPr>
-          <a:xfrm>
-            <a:off x="1005840" y="2240280"/>
-            <a:ext cx="10728655" cy="731520"/>
+            <a:off x="2468880" y="1828800"/>
+            <a:ext cx="7772400" cy="640080"/>
           </a:xfrm>
           <a:prstGeom prst="rect">
             <a:avLst/>
@@ -41883,107 +41781,28 @@
           <a:lstStyle/>
           <a:p>
             <a:pPr>
-              <a:defRPr sz="2200">
-                <a:solidFill>
-                  <a:srgbClr val="FFFFFF"/>
-                </a:solidFill>
-              </a:defRPr>
-            </a:pPr>
-            <a:r>
-              <a:t>Lab 2: Refactor a legacy module, create feature branch, generate semantic commits, and submit a PR</a:t>
-            </a:r>
-          </a:p>
-        </p:txBody>
-      </p:sp>
-      <p:sp>
-        <p:nvSpPr>
-          <p:cNvPr id="10" name="Oval 9"/>
-          <p:cNvSpPr/>
-          <p:nvPr/>
-        </p:nvSpPr>
-        <p:spPr>
-          <a:xfrm>
-            <a:off x="457200" y="3017520"/>
-            <a:ext cx="411480" cy="411480"/>
-          </a:xfrm>
-          <a:prstGeom prst="ellipse">
-            <a:avLst/>
-          </a:prstGeom>
-          <a:solidFill>
-            <a:srgbClr val="00D4AA"/>
-          </a:solidFill>
-          <a:ln>
-            <a:noFill/>
-          </a:ln>
-        </p:spPr>
-        <p:style>
-          <a:lnRef idx="1">
-            <a:schemeClr val="accent1"/>
-          </a:lnRef>
-          <a:fillRef idx="3">
-            <a:schemeClr val="accent1"/>
-          </a:fillRef>
-          <a:effectRef idx="2">
-            <a:schemeClr val="accent1"/>
-          </a:effectRef>
-          <a:fontRef idx="minor">
-            <a:schemeClr val="lt1"/>
-          </a:fontRef>
-        </p:style>
-        <p:txBody>
-          <a:bodyPr rtlCol="0" anchor="ctr"/>
-          <a:lstStyle/>
-          <a:p>
-            <a:pPr algn="ctr"/>
-            <a:endParaRPr/>
-          </a:p>
-        </p:txBody>
-      </p:sp>
-      <p:sp>
-        <p:nvSpPr>
-          <p:cNvPr id="11" name="TextBox 10"/>
+              <a:defRPr sz="1600">
+                <a:solidFill>
+                  <a:srgbClr val="FFFFFF"/>
+                </a:solidFill>
+              </a:defRPr>
+            </a:pPr>
+            <a:r>
+              <a:t>Build a complete Business Dashboard from a single prompt — API, database, and UI</a:t>
+            </a:r>
+          </a:p>
+        </p:txBody>
+      </p:sp>
+      <p:sp>
+        <p:nvSpPr>
+          <p:cNvPr id="7" name="TextBox 6"/>
           <p:cNvSpPr txBox="1"/>
           <p:nvPr/>
         </p:nvSpPr>
         <p:spPr>
           <a:xfrm>
-            <a:off x="457200" y="3017520"/>
-            <a:ext cx="411480" cy="411480"/>
-          </a:xfrm>
-          <a:prstGeom prst="rect">
-            <a:avLst/>
-          </a:prstGeom>
-          <a:noFill/>
-        </p:spPr>
-        <p:txBody>
-          <a:bodyPr wrap="none" anchor="ctr">
-            <a:spAutoFit/>
-          </a:bodyPr>
-          <a:lstStyle/>
-          <a:p>
-            <a:pPr algn="ctr">
-              <a:defRPr sz="2000" b="1">
-                <a:solidFill>
-                  <a:srgbClr val="0B0F1A"/>
-                </a:solidFill>
-              </a:defRPr>
-            </a:pPr>
-            <a:r>
-              <a:t>v</a:t>
-            </a:r>
-          </a:p>
-        </p:txBody>
-      </p:sp>
-      <p:sp>
-        <p:nvSpPr>
-          <p:cNvPr id="12" name="TextBox 11"/>
-          <p:cNvSpPr txBox="1"/>
-          <p:nvPr/>
-        </p:nvSpPr>
-        <p:spPr>
-          <a:xfrm>
-            <a:off x="1005840" y="3063240"/>
-            <a:ext cx="10728655" cy="731520"/>
+            <a:off x="731520" y="2606040"/>
+            <a:ext cx="1645920" cy="365760"/>
           </a:xfrm>
           <a:prstGeom prst="rect">
             <a:avLst/>
@@ -41997,107 +41816,28 @@
           <a:lstStyle/>
           <a:p>
             <a:pPr>
-              <a:defRPr sz="2200">
-                <a:solidFill>
-                  <a:srgbClr val="FFFFFF"/>
-                </a:solidFill>
-              </a:defRPr>
-            </a:pPr>
-            <a:r>
-              <a:t>Bonus: Custom CLAUDE.md for your team's coding standards</a:t>
-            </a:r>
-          </a:p>
-        </p:txBody>
-      </p:sp>
-      <p:sp>
-        <p:nvSpPr>
-          <p:cNvPr id="13" name="Oval 12"/>
-          <p:cNvSpPr/>
-          <p:nvPr/>
-        </p:nvSpPr>
-        <p:spPr>
-          <a:xfrm>
-            <a:off x="457200" y="3840480"/>
-            <a:ext cx="411480" cy="411480"/>
-          </a:xfrm>
-          <a:prstGeom prst="ellipse">
-            <a:avLst/>
-          </a:prstGeom>
-          <a:solidFill>
-            <a:srgbClr val="00D4AA"/>
-          </a:solidFill>
-          <a:ln>
-            <a:noFill/>
-          </a:ln>
-        </p:spPr>
-        <p:style>
-          <a:lnRef idx="1">
-            <a:schemeClr val="accent1"/>
-          </a:lnRef>
-          <a:fillRef idx="3">
-            <a:schemeClr val="accent1"/>
-          </a:fillRef>
-          <a:effectRef idx="2">
-            <a:schemeClr val="accent1"/>
-          </a:effectRef>
-          <a:fontRef idx="minor">
-            <a:schemeClr val="lt1"/>
-          </a:fontRef>
-        </p:style>
-        <p:txBody>
-          <a:bodyPr rtlCol="0" anchor="ctr"/>
-          <a:lstStyle/>
-          <a:p>
-            <a:pPr algn="ctr"/>
-            <a:endParaRPr/>
-          </a:p>
-        </p:txBody>
-      </p:sp>
-      <p:sp>
-        <p:nvSpPr>
-          <p:cNvPr id="14" name="TextBox 13"/>
+              <a:defRPr sz="1800" b="1">
+                <a:solidFill>
+                  <a:srgbClr val="00D4AA"/>
+                </a:solidFill>
+              </a:defRPr>
+            </a:pPr>
+            <a:r>
+              <a:t>Exercise 2:</a:t>
+            </a:r>
+          </a:p>
+        </p:txBody>
+      </p:sp>
+      <p:sp>
+        <p:nvSpPr>
+          <p:cNvPr id="8" name="TextBox 7"/>
           <p:cNvSpPr txBox="1"/>
           <p:nvPr/>
         </p:nvSpPr>
         <p:spPr>
           <a:xfrm>
-            <a:off x="457200" y="3840480"/>
-            <a:ext cx="411480" cy="411480"/>
-          </a:xfrm>
-          <a:prstGeom prst="rect">
-            <a:avLst/>
-          </a:prstGeom>
-          <a:noFill/>
-        </p:spPr>
-        <p:txBody>
-          <a:bodyPr wrap="none" anchor="ctr">
-            <a:spAutoFit/>
-          </a:bodyPr>
-          <a:lstStyle/>
-          <a:p>
-            <a:pPr algn="ctr">
-              <a:defRPr sz="2000" b="1">
-                <a:solidFill>
-                  <a:srgbClr val="0B0F1A"/>
-                </a:solidFill>
-              </a:defRPr>
-            </a:pPr>
-            <a:r>
-              <a:t>v</a:t>
-            </a:r>
-          </a:p>
-        </p:txBody>
-      </p:sp>
-      <p:sp>
-        <p:nvSpPr>
-          <p:cNvPr id="15" name="TextBox 14"/>
-          <p:cNvSpPr txBox="1"/>
-          <p:nvPr/>
-        </p:nvSpPr>
-        <p:spPr>
-          <a:xfrm>
-            <a:off x="1005840" y="3886200"/>
-            <a:ext cx="10728655" cy="731520"/>
+            <a:off x="2468880" y="2606040"/>
+            <a:ext cx="7772400" cy="640080"/>
           </a:xfrm>
           <a:prstGeom prst="rect">
             <a:avLst/>
@@ -42111,14 +41851,224 @@
           <a:lstStyle/>
           <a:p>
             <a:pPr>
-              <a:defRPr sz="2200">
-                <a:solidFill>
-                  <a:srgbClr val="FFFFFF"/>
-                </a:solidFill>
-              </a:defRPr>
-            </a:pPr>
-            <a:r>
-              <a:t>Bonus: .claudeignore patterns optimized for your stack</a:t>
+              <a:defRPr sz="1600">
+                <a:solidFill>
+                  <a:srgbClr val="FFFFFF"/>
+                </a:solidFill>
+              </a:defRPr>
+            </a:pPr>
+            <a:r>
+              <a:t>Add a project brain with CLAUDE.md — conventions that enforce themselves</a:t>
+            </a:r>
+          </a:p>
+        </p:txBody>
+      </p:sp>
+      <p:sp>
+        <p:nvSpPr>
+          <p:cNvPr id="9" name="TextBox 8"/>
+          <p:cNvSpPr txBox="1"/>
+          <p:nvPr/>
+        </p:nvSpPr>
+        <p:spPr>
+          <a:xfrm>
+            <a:off x="731520" y="3383280"/>
+            <a:ext cx="1645920" cy="365760"/>
+          </a:xfrm>
+          <a:prstGeom prst="rect">
+            <a:avLst/>
+          </a:prstGeom>
+          <a:noFill/>
+        </p:spPr>
+        <p:txBody>
+          <a:bodyPr wrap="square">
+            <a:spAutoFit/>
+          </a:bodyPr>
+          <a:lstStyle/>
+          <a:p>
+            <a:pPr>
+              <a:defRPr sz="1800" b="1">
+                <a:solidFill>
+                  <a:srgbClr val="00D4AA"/>
+                </a:solidFill>
+              </a:defRPr>
+            </a:pPr>
+            <a:r>
+              <a:t>Exercise 3:</a:t>
+            </a:r>
+          </a:p>
+        </p:txBody>
+      </p:sp>
+      <p:sp>
+        <p:nvSpPr>
+          <p:cNvPr id="10" name="TextBox 9"/>
+          <p:cNvSpPr txBox="1"/>
+          <p:nvPr/>
+        </p:nvSpPr>
+        <p:spPr>
+          <a:xfrm>
+            <a:off x="2468880" y="3383280"/>
+            <a:ext cx="7772400" cy="640080"/>
+          </a:xfrm>
+          <a:prstGeom prst="rect">
+            <a:avLst/>
+          </a:prstGeom>
+          <a:noFill/>
+        </p:spPr>
+        <p:txBody>
+          <a:bodyPr wrap="square">
+            <a:spAutoFit/>
+          </a:bodyPr>
+          <a:lstStyle/>
+          <a:p>
+            <a:pPr>
+              <a:defRPr sz="1600">
+                <a:solidFill>
+                  <a:srgbClr val="FFFFFF"/>
+                </a:solidFill>
+              </a:defRPr>
+            </a:pPr>
+            <a:r>
+              <a:t>Master @ mentions for precision context, plus break-and-recover workflows</a:t>
+            </a:r>
+          </a:p>
+        </p:txBody>
+      </p:sp>
+      <p:sp>
+        <p:nvSpPr>
+          <p:cNvPr id="11" name="TextBox 10"/>
+          <p:cNvSpPr txBox="1"/>
+          <p:nvPr/>
+        </p:nvSpPr>
+        <p:spPr>
+          <a:xfrm>
+            <a:off x="731520" y="4160520"/>
+            <a:ext cx="1645920" cy="365760"/>
+          </a:xfrm>
+          <a:prstGeom prst="rect">
+            <a:avLst/>
+          </a:prstGeom>
+          <a:noFill/>
+        </p:spPr>
+        <p:txBody>
+          <a:bodyPr wrap="square">
+            <a:spAutoFit/>
+          </a:bodyPr>
+          <a:lstStyle/>
+          <a:p>
+            <a:pPr>
+              <a:defRPr sz="1800" b="1">
+                <a:solidFill>
+                  <a:srgbClr val="00D4AA"/>
+                </a:solidFill>
+              </a:defRPr>
+            </a:pPr>
+            <a:r>
+              <a:t>Exercise 4:</a:t>
+            </a:r>
+          </a:p>
+        </p:txBody>
+      </p:sp>
+      <p:sp>
+        <p:nvSpPr>
+          <p:cNvPr id="12" name="TextBox 11"/>
+          <p:cNvSpPr txBox="1"/>
+          <p:nvPr/>
+        </p:nvSpPr>
+        <p:spPr>
+          <a:xfrm>
+            <a:off x="2468880" y="4160520"/>
+            <a:ext cx="7772400" cy="640080"/>
+          </a:xfrm>
+          <a:prstGeom prst="rect">
+            <a:avLst/>
+          </a:prstGeom>
+          <a:noFill/>
+        </p:spPr>
+        <p:txBody>
+          <a:bodyPr wrap="square">
+            <a:spAutoFit/>
+          </a:bodyPr>
+          <a:lstStyle/>
+          <a:p>
+            <a:pPr>
+              <a:defRPr sz="1600">
+                <a:solidFill>
+                  <a:srgbClr val="FFFFFF"/>
+                </a:solidFill>
+              </a:defRPr>
+            </a:pPr>
+            <a:r>
+              <a:t>Iterate to great — charts, filters, production hardening</a:t>
+            </a:r>
+          </a:p>
+        </p:txBody>
+      </p:sp>
+      <p:sp>
+        <p:nvSpPr>
+          <p:cNvPr id="13" name="TextBox 12"/>
+          <p:cNvSpPr txBox="1"/>
+          <p:nvPr/>
+        </p:nvSpPr>
+        <p:spPr>
+          <a:xfrm>
+            <a:off x="731520" y="4937760"/>
+            <a:ext cx="1645920" cy="365760"/>
+          </a:xfrm>
+          <a:prstGeom prst="rect">
+            <a:avLst/>
+          </a:prstGeom>
+          <a:noFill/>
+        </p:spPr>
+        <p:txBody>
+          <a:bodyPr wrap="square">
+            <a:spAutoFit/>
+          </a:bodyPr>
+          <a:lstStyle/>
+          <a:p>
+            <a:pPr>
+              <a:defRPr sz="1800" b="1">
+                <a:solidFill>
+                  <a:srgbClr val="00D4AA"/>
+                </a:solidFill>
+              </a:defRPr>
+            </a:pPr>
+            <a:r>
+              <a:t>Exercise 5:</a:t>
+            </a:r>
+          </a:p>
+        </p:txBody>
+      </p:sp>
+      <p:sp>
+        <p:nvSpPr>
+          <p:cNvPr id="14" name="TextBox 13"/>
+          <p:cNvSpPr txBox="1"/>
+          <p:nvPr/>
+        </p:nvSpPr>
+        <p:spPr>
+          <a:xfrm>
+            <a:off x="2468880" y="4937760"/>
+            <a:ext cx="7772400" cy="640080"/>
+          </a:xfrm>
+          <a:prstGeom prst="rect">
+            <a:avLst/>
+          </a:prstGeom>
+          <a:noFill/>
+        </p:spPr>
+        <p:txBody>
+          <a:bodyPr wrap="square">
+            <a:spAutoFit/>
+          </a:bodyPr>
+          <a:lstStyle/>
+          <a:p>
+            <a:pPr>
+              <a:defRPr sz="1600">
+                <a:solidFill>
+                  <a:srgbClr val="FFFFFF"/>
+                </a:solidFill>
+              </a:defRPr>
+            </a:pPr>
+            <a:r>
+              <a:t>Git workflow in natural language — branches, commits, and merges</a:t>
             </a:r>
           </a:p>
         </p:txBody>
@@ -57124,6 +57074,426 @@
       <p:sp>
         <p:nvSpPr>
           <p:cNvPr id="16" name="TextBox 15"/>
+          <p:cNvSpPr txBox="1"/>
+          <p:nvPr/>
+        </p:nvSpPr>
+        <p:spPr>
+          <a:xfrm>
+            <a:off x="1371600" y="5303520"/>
+            <a:ext cx="8229600" cy="548640"/>
+          </a:xfrm>
+          <a:prstGeom prst="rect">
+            <a:avLst/>
+          </a:prstGeom>
+          <a:noFill/>
+        </p:spPr>
+        <p:txBody>
+          <a:bodyPr wrap="square">
+            <a:spAutoFit/>
+          </a:bodyPr>
+          <a:lstStyle/>
+          <a:p>
+            <a:pPr algn="ctr">
+              <a:defRPr sz="1600">
+                <a:solidFill>
+                  <a:srgbClr val="8A8F98"/>
+                </a:solidFill>
+              </a:defRPr>
+            </a:pPr>
+            <a:r>
+              <a:t>Everything today teaches you how to manage these four memory layers.</a:t>
+            </a:r>
+          </a:p>
+        </p:txBody>
+      </p:sp>
+      <p:sp>
+        <p:nvSpPr>
+          <p:cNvPr id="17" name="TextBox 16"/>
+          <p:cNvSpPr txBox="1"/>
+          <p:nvPr/>
+        </p:nvSpPr>
+        <p:spPr>
+          <a:xfrm>
+            <a:off x="4297680" y="1828800"/>
+            <a:ext cx="731520" cy="822960"/>
+          </a:xfrm>
+          <a:prstGeom prst="rect">
+            <a:avLst/>
+          </a:prstGeom>
+          <a:noFill/>
+        </p:spPr>
+        <p:txBody>
+          <a:bodyPr wrap="none">
+            <a:spAutoFit/>
+          </a:bodyPr>
+          <a:lstStyle/>
+          <a:p>
+            <a:pPr algn="ctr">
+              <a:defRPr sz="2800">
+                <a:solidFill>
+                  <a:srgbClr val="8A8F98"/>
+                </a:solidFill>
+              </a:defRPr>
+            </a:pPr>
+            <a:r>
+              <a:t>→</a:t>
+            </a:r>
+          </a:p>
+        </p:txBody>
+      </p:sp>
+      <p:sp>
+        <p:nvSpPr>
+          <p:cNvPr id="18" name="TextBox 17"/>
+          <p:cNvSpPr txBox="1"/>
+          <p:nvPr/>
+        </p:nvSpPr>
+        <p:spPr>
+          <a:xfrm>
+            <a:off x="5212080" y="1828800"/>
+            <a:ext cx="3657600" cy="822960"/>
+          </a:xfrm>
+          <a:prstGeom prst="rect">
+            <a:avLst/>
+          </a:prstGeom>
+          <a:noFill/>
+        </p:spPr>
+        <p:txBody>
+          <a:bodyPr wrap="square">
+            <a:spAutoFit/>
+          </a:bodyPr>
+          <a:lstStyle/>
+          <a:p>
+            <a:pPr algn="l">
+              <a:defRPr sz="2200" b="1">
+                <a:solidFill>
+                  <a:srgbClr val="00D4AA"/>
+                </a:solidFill>
+              </a:defRPr>
+            </a:pPr>
+            <a:r>
+              <a:t>Context window</a:t>
+            </a:r>
+          </a:p>
+        </p:txBody>
+      </p:sp>
+      <p:sp>
+        <p:nvSpPr>
+          <p:cNvPr id="19" name="TextBox 18"/>
+          <p:cNvSpPr txBox="1"/>
+          <p:nvPr/>
+        </p:nvSpPr>
+        <p:spPr>
+          <a:xfrm>
+            <a:off x="914400" y="2651760"/>
+            <a:ext cx="3200400" cy="822960"/>
+          </a:xfrm>
+          <a:prstGeom prst="rect">
+            <a:avLst/>
+          </a:prstGeom>
+          <a:noFill/>
+        </p:spPr>
+        <p:txBody>
+          <a:bodyPr wrap="square">
+            <a:spAutoFit/>
+          </a:bodyPr>
+          <a:lstStyle/>
+          <a:p>
+            <a:pPr algn="r">
+              <a:defRPr sz="2200" b="1">
+                <a:solidFill>
+                  <a:srgbClr val="FF6B6B"/>
+                </a:solidFill>
+              </a:defRPr>
+            </a:pPr>
+            <a:r>
+              <a:t>Short-term memory</a:t>
+            </a:r>
+          </a:p>
+        </p:txBody>
+      </p:sp>
+      <p:sp>
+        <p:nvSpPr>
+          <p:cNvPr id="20" name="TextBox 19"/>
+          <p:cNvSpPr txBox="1"/>
+          <p:nvPr/>
+        </p:nvSpPr>
+        <p:spPr>
+          <a:xfrm>
+            <a:off x="4297680" y="2651760"/>
+            <a:ext cx="731520" cy="822960"/>
+          </a:xfrm>
+          <a:prstGeom prst="rect">
+            <a:avLst/>
+          </a:prstGeom>
+          <a:noFill/>
+        </p:spPr>
+        <p:txBody>
+          <a:bodyPr wrap="none">
+            <a:spAutoFit/>
+          </a:bodyPr>
+          <a:lstStyle/>
+          <a:p>
+            <a:pPr algn="ctr">
+              <a:defRPr sz="2800">
+                <a:solidFill>
+                  <a:srgbClr val="8A8F98"/>
+                </a:solidFill>
+              </a:defRPr>
+            </a:pPr>
+            <a:r>
+              <a:t>→</a:t>
+            </a:r>
+          </a:p>
+        </p:txBody>
+      </p:sp>
+      <p:sp>
+        <p:nvSpPr>
+          <p:cNvPr id="21" name="TextBox 20"/>
+          <p:cNvSpPr txBox="1"/>
+          <p:nvPr/>
+        </p:nvSpPr>
+        <p:spPr>
+          <a:xfrm>
+            <a:off x="5212080" y="2651760"/>
+            <a:ext cx="3657600" cy="822960"/>
+          </a:xfrm>
+          <a:prstGeom prst="rect">
+            <a:avLst/>
+          </a:prstGeom>
+          <a:noFill/>
+        </p:spPr>
+        <p:txBody>
+          <a:bodyPr wrap="square">
+            <a:spAutoFit/>
+          </a:bodyPr>
+          <a:lstStyle/>
+          <a:p>
+            <a:pPr algn="l">
+              <a:defRPr sz="2200" b="1">
+                <a:solidFill>
+                  <a:srgbClr val="00D4AA"/>
+                </a:solidFill>
+              </a:defRPr>
+            </a:pPr>
+            <a:r>
+              <a:t>Session history</a:t>
+            </a:r>
+          </a:p>
+        </p:txBody>
+      </p:sp>
+      <p:sp>
+        <p:nvSpPr>
+          <p:cNvPr id="22" name="TextBox 21"/>
+          <p:cNvSpPr txBox="1"/>
+          <p:nvPr/>
+        </p:nvSpPr>
+        <p:spPr>
+          <a:xfrm>
+            <a:off x="914400" y="3474720"/>
+            <a:ext cx="3200400" cy="822960"/>
+          </a:xfrm>
+          <a:prstGeom prst="rect">
+            <a:avLst/>
+          </a:prstGeom>
+          <a:noFill/>
+        </p:spPr>
+        <p:txBody>
+          <a:bodyPr wrap="square">
+            <a:spAutoFit/>
+          </a:bodyPr>
+          <a:lstStyle/>
+          <a:p>
+            <a:pPr algn="r">
+              <a:defRPr sz="2200" b="1">
+                <a:solidFill>
+                  <a:srgbClr val="FF6B6B"/>
+                </a:solidFill>
+              </a:defRPr>
+            </a:pPr>
+            <a:r>
+              <a:t>Long-term memory</a:t>
+            </a:r>
+          </a:p>
+        </p:txBody>
+      </p:sp>
+      <p:sp>
+        <p:nvSpPr>
+          <p:cNvPr id="23" name="TextBox 22"/>
+          <p:cNvSpPr txBox="1"/>
+          <p:nvPr/>
+        </p:nvSpPr>
+        <p:spPr>
+          <a:xfrm>
+            <a:off x="4297680" y="3474720"/>
+            <a:ext cx="731520" cy="822960"/>
+          </a:xfrm>
+          <a:prstGeom prst="rect">
+            <a:avLst/>
+          </a:prstGeom>
+          <a:noFill/>
+        </p:spPr>
+        <p:txBody>
+          <a:bodyPr wrap="none">
+            <a:spAutoFit/>
+          </a:bodyPr>
+          <a:lstStyle/>
+          <a:p>
+            <a:pPr algn="ctr">
+              <a:defRPr sz="2800">
+                <a:solidFill>
+                  <a:srgbClr val="8A8F98"/>
+                </a:solidFill>
+              </a:defRPr>
+            </a:pPr>
+            <a:r>
+              <a:t>→</a:t>
+            </a:r>
+          </a:p>
+        </p:txBody>
+      </p:sp>
+      <p:sp>
+        <p:nvSpPr>
+          <p:cNvPr id="24" name="TextBox 23"/>
+          <p:cNvSpPr txBox="1"/>
+          <p:nvPr/>
+        </p:nvSpPr>
+        <p:spPr>
+          <a:xfrm>
+            <a:off x="5212080" y="3474720"/>
+            <a:ext cx="3657600" cy="822960"/>
+          </a:xfrm>
+          <a:prstGeom prst="rect">
+            <a:avLst/>
+          </a:prstGeom>
+          <a:noFill/>
+        </p:spPr>
+        <p:txBody>
+          <a:bodyPr wrap="square">
+            <a:spAutoFit/>
+          </a:bodyPr>
+          <a:lstStyle/>
+          <a:p>
+            <a:pPr algn="l">
+              <a:defRPr sz="2200" b="1">
+                <a:solidFill>
+                  <a:srgbClr val="00D4AA"/>
+                </a:solidFill>
+              </a:defRPr>
+            </a:pPr>
+            <a:r>
+              <a:t>CLAUDE.md</a:t>
+            </a:r>
+          </a:p>
+        </p:txBody>
+      </p:sp>
+      <p:sp>
+        <p:nvSpPr>
+          <p:cNvPr id="25" name="TextBox 24"/>
+          <p:cNvSpPr txBox="1"/>
+          <p:nvPr/>
+        </p:nvSpPr>
+        <p:spPr>
+          <a:xfrm>
+            <a:off x="914400" y="4297680"/>
+            <a:ext cx="3200400" cy="822960"/>
+          </a:xfrm>
+          <a:prstGeom prst="rect">
+            <a:avLst/>
+          </a:prstGeom>
+          <a:noFill/>
+        </p:spPr>
+        <p:txBody>
+          <a:bodyPr wrap="square">
+            <a:spAutoFit/>
+          </a:bodyPr>
+          <a:lstStyle/>
+          <a:p>
+            <a:pPr algn="r">
+              <a:defRPr sz="2200" b="1">
+                <a:solidFill>
+                  <a:srgbClr val="FF6B6B"/>
+                </a:solidFill>
+              </a:defRPr>
+            </a:pPr>
+            <a:r>
+              <a:t>Muscle memory</a:t>
+            </a:r>
+          </a:p>
+        </p:txBody>
+      </p:sp>
+      <p:sp>
+        <p:nvSpPr>
+          <p:cNvPr id="26" name="TextBox 25"/>
+          <p:cNvSpPr txBox="1"/>
+          <p:nvPr/>
+        </p:nvSpPr>
+        <p:spPr>
+          <a:xfrm>
+            <a:off x="4297680" y="4297680"/>
+            <a:ext cx="731520" cy="822960"/>
+          </a:xfrm>
+          <a:prstGeom prst="rect">
+            <a:avLst/>
+          </a:prstGeom>
+          <a:noFill/>
+        </p:spPr>
+        <p:txBody>
+          <a:bodyPr wrap="none">
+            <a:spAutoFit/>
+          </a:bodyPr>
+          <a:lstStyle/>
+          <a:p>
+            <a:pPr algn="ctr">
+              <a:defRPr sz="2800">
+                <a:solidFill>
+                  <a:srgbClr val="8A8F98"/>
+                </a:solidFill>
+              </a:defRPr>
+            </a:pPr>
+            <a:r>
+              <a:t>→</a:t>
+            </a:r>
+          </a:p>
+        </p:txBody>
+      </p:sp>
+      <p:sp>
+        <p:nvSpPr>
+          <p:cNvPr id="27" name="TextBox 26"/>
+          <p:cNvSpPr txBox="1"/>
+          <p:nvPr/>
+        </p:nvSpPr>
+        <p:spPr>
+          <a:xfrm>
+            <a:off x="5212080" y="4297680"/>
+            <a:ext cx="3657600" cy="822960"/>
+          </a:xfrm>
+          <a:prstGeom prst="rect">
+            <a:avLst/>
+          </a:prstGeom>
+          <a:noFill/>
+        </p:spPr>
+        <p:txBody>
+          <a:bodyPr wrap="square">
+            <a:spAutoFit/>
+          </a:bodyPr>
+          <a:lstStyle/>
+          <a:p>
+            <a:pPr algn="l">
+              <a:defRPr sz="2200" b="1">
+                <a:solidFill>
+                  <a:srgbClr val="00D4AA"/>
+                </a:solidFill>
+              </a:defRPr>
+            </a:pPr>
+            <a:r>
+              <a:t>Skills &amp; commands</a:t>
+            </a:r>
+          </a:p>
+        </p:txBody>
+      </p:sp>
+      <p:sp>
+        <p:nvSpPr>
+          <p:cNvPr id="28" name="TextBox 27"/>
           <p:cNvSpPr txBox="1"/>
           <p:nvPr/>
         </p:nvSpPr>

--- a/slides/Day2_Claude_Code_Fundamentals.pptx
+++ b/slides/Day2_Claude_Code_Fundamentals.pptx
@@ -15,7 +15,6 @@
     <p:sldId id="260" r:id="rId6"/>
     <p:sldId id="261" r:id="rId7"/>
     <p:sldId id="262" r:id="rId8"/>
-    <p:sldId id="263" r:id="rId9"/>
     <p:sldId id="264" r:id="rId10"/>
     <p:sldId id="265" r:id="rId11"/>
     <p:sldId id="266" r:id="rId12"/>
@@ -34,6 +33,7 @@
     <p:sldId id="279" r:id="rId25"/>
     <p:sldId id="280" r:id="rId26"/>
     <p:sldId id="281" r:id="rId27"/>
+    <p:sldId id="263" r:id="rId9"/>
     <p:sldId id="282" r:id="rId28"/>
     <p:sldId id="283" r:id="rId29"/>
     <p:sldId id="284" r:id="rId30"/>
@@ -6142,6 +6142,13 @@
               <a:t>   The loop doesn't always work perfectly - let's talk about what happens when things go wrong</a:t>
             </a:r>
           </a:p>
+          <a:p>
+            <a:br/>
+            <a:br/>
+            <a:r>
+              <a:t>SELF-HEALING LOOP: This is what makes Claude Code truly agentic. When it hits an error — a dependency failure, a syntax mistake, a port conflict — it doesn't stop and hand you the error. It reads the error message, reasons about the cause, fixes it, and re-runs. Students will see this in Lab 2A when Claude builds the dashboard. Tell them to count how many errors Claude fixes on its own during the build. That count is the difference between a code generator and an autonomous agent.</a:t>
+            </a:r>
+          </a:p>
         </p:txBody>
       </p:sp>
       <p:sp>
@@ -6300,6 +6307,13 @@
           <a:p>
             <a:r>
               <a:t>   Now that you understand the engine, let's talk about how to configure it with CLAUDE.md</a:t>
+            </a:r>
+          </a:p>
+          <a:p>
+            <a:br/>
+            <a:br/>
+            <a:r>
+              <a:t>SELF-HEALING LOOP: This is what makes Claude Code truly agentic. When it hits an error — a dependency failure, a syntax mistake, a port conflict — it doesn't stop and hand you the error. It reads the error message, reasons about the cause, fixes it, and re-runs. Students will see this in Lab 2A when Claude builds the dashboard. Tell them to count how many errors Claude fixes on its own during the build. That count is the difference between a code generator and an autonomous agent.</a:t>
             </a:r>
           </a:p>
         </p:txBody>
@@ -20204,8 +20218,8 @@
         </p:nvSpPr>
         <p:spPr>
           <a:xfrm>
-            <a:off x="457200" y="731520"/>
-            <a:ext cx="11277295" cy="914400"/>
+            <a:off x="457200" y="457200"/>
+            <a:ext cx="11277295" cy="731520"/>
           </a:xfrm>
           <a:prstGeom prst="rect">
             <a:avLst/>
@@ -20219,14 +20233,14 @@
           <a:lstStyle/>
           <a:p>
             <a:pPr algn="ctr">
-              <a:defRPr sz="4000" b="1">
-                <a:solidFill>
-                  <a:srgbClr val="FFFFFF"/>
-                </a:solidFill>
-              </a:defRPr>
-            </a:pPr>
-            <a:r>
-              <a:t>System Requirements</a:t>
+              <a:defRPr sz="3600" b="1">
+                <a:solidFill>
+                  <a:srgbClr val="FFFFFF"/>
+                </a:solidFill>
+              </a:defRPr>
+            </a:pPr>
+            <a:r>
+              <a:t>Installation Methods</a:t>
             </a:r>
           </a:p>
         </p:txBody>
@@ -20239,19 +20253,17 @@
         </p:nvSpPr>
         <p:spPr>
           <a:xfrm>
-            <a:off x="2301087" y="2011680"/>
-            <a:ext cx="2286000" cy="3200400"/>
+            <a:off x="914400" y="1645920"/>
+            <a:ext cx="10362895" cy="4114800"/>
           </a:xfrm>
           <a:prstGeom prst="roundRect">
             <a:avLst/>
           </a:prstGeom>
           <a:solidFill>
-            <a:srgbClr val="141A26"/>
+            <a:srgbClr val="1E1E2E"/>
           </a:solidFill>
-          <a:ln w="25400">
-            <a:solidFill>
-              <a:srgbClr val="00D4AA"/>
-            </a:solidFill>
+          <a:ln>
+            <a:noFill/>
           </a:ln>
         </p:spPr>
         <p:style>
@@ -20279,45 +20291,36 @@
       </p:sp>
       <p:sp>
         <p:nvSpPr>
-          <p:cNvPr id="4" name="Oval 3"/>
-          <p:cNvSpPr/>
-          <p:nvPr/>
-        </p:nvSpPr>
-        <p:spPr>
-          <a:xfrm>
-            <a:off x="2986887" y="2468880"/>
-            <a:ext cx="914400" cy="914400"/>
-          </a:xfrm>
-          <a:prstGeom prst="ellipse">
-            <a:avLst/>
-          </a:prstGeom>
-          <a:solidFill>
-            <a:srgbClr val="00D4AA"/>
-          </a:solidFill>
-          <a:ln>
-            <a:noFill/>
-          </a:ln>
-        </p:spPr>
-        <p:style>
-          <a:lnRef idx="1">
-            <a:schemeClr val="accent1"/>
-          </a:lnRef>
-          <a:fillRef idx="3">
-            <a:schemeClr val="accent1"/>
-          </a:fillRef>
-          <a:effectRef idx="2">
-            <a:schemeClr val="accent1"/>
-          </a:effectRef>
-          <a:fontRef idx="minor">
-            <a:schemeClr val="lt1"/>
-          </a:fontRef>
-        </p:style>
-        <p:txBody>
-          <a:bodyPr rtlCol="0" anchor="ctr"/>
-          <a:lstStyle/>
-          <a:p>
-            <a:pPr algn="ctr"/>
-            <a:endParaRPr/>
+          <p:cNvPr id="4" name="TextBox 3"/>
+          <p:cNvSpPr txBox="1"/>
+          <p:nvPr/>
+        </p:nvSpPr>
+        <p:spPr>
+          <a:xfrm>
+            <a:off x="1097280" y="1783080"/>
+            <a:ext cx="1828800" cy="365760"/>
+          </a:xfrm>
+          <a:prstGeom prst="rect">
+            <a:avLst/>
+          </a:prstGeom>
+          <a:noFill/>
+        </p:spPr>
+        <p:txBody>
+          <a:bodyPr wrap="none">
+            <a:spAutoFit/>
+          </a:bodyPr>
+          <a:lstStyle/>
+          <a:p>
+            <a:pPr>
+              <a:defRPr sz="1200" b="1">
+                <a:solidFill>
+                  <a:srgbClr val="00D4AA"/>
+                </a:solidFill>
+              </a:defRPr>
+            </a:pPr>
+            <a:r>
+              <a:t>BASH</a:t>
+            </a:r>
           </a:p>
         </p:txBody>
       </p:sp>
@@ -20329,8 +20332,8 @@
         </p:nvSpPr>
         <p:spPr>
           <a:xfrm>
-            <a:off x="2986887" y="2468880"/>
-            <a:ext cx="914400" cy="914400"/>
+            <a:off x="1097280" y="2194560"/>
+            <a:ext cx="9997135" cy="3291840"/>
           </a:xfrm>
           <a:prstGeom prst="rect">
             <a:avLst/>
@@ -20338,487 +20341,145 @@
           <a:noFill/>
         </p:spPr>
         <p:txBody>
-          <a:bodyPr wrap="none" anchor="ctr">
+          <a:bodyPr wrap="square">
             <a:spAutoFit/>
           </a:bodyPr>
           <a:lstStyle/>
           <a:p>
-            <a:pPr algn="ctr">
-              <a:defRPr sz="3600" b="1">
-                <a:solidFill>
-                  <a:srgbClr val="0B0F1A"/>
-                </a:solidFill>
-              </a:defRPr>
-            </a:pPr>
-            <a:r>
-              <a:t>1</a:t>
-            </a:r>
-          </a:p>
-        </p:txBody>
-      </p:sp>
-      <p:sp>
-        <p:nvSpPr>
-          <p:cNvPr id="6" name="TextBox 5"/>
-          <p:cNvSpPr txBox="1"/>
-          <p:nvPr/>
-        </p:nvSpPr>
-        <p:spPr>
-          <a:xfrm>
-            <a:off x="2392527" y="3657600"/>
-            <a:ext cx="2103120" cy="1371600"/>
-          </a:xfrm>
-          <a:prstGeom prst="rect">
-            <a:avLst/>
-          </a:prstGeom>
-          <a:noFill/>
-        </p:spPr>
-        <p:txBody>
-          <a:bodyPr wrap="square">
-            <a:normAutofit/>
-          </a:bodyPr>
-          <a:lstStyle/>
-          <a:p>
-            <a:pPr algn="ctr">
-              <a:defRPr sz="1800" b="1">
-                <a:solidFill>
-                  <a:srgbClr val="FFFFFF"/>
-                </a:solidFill>
-              </a:defRPr>
-            </a:pPr>
-            <a:r>
-              <a:t>Machine</a:t>
-            </a:r>
-          </a:p>
-          <a:p>
-            <a:pPr algn="ctr">
-              <a:spcBef>
-                <a:spcPts val="800"/>
-              </a:spcBef>
-              <a:defRPr sz="1300">
-                <a:solidFill>
-                  <a:srgbClr val="8B95A5"/>
-                </a:solidFill>
-              </a:defRPr>
-            </a:pPr>
-            <a:r>
-              <a:t>macOS, Linux, or Windows (via WSL)</a:t>
-            </a:r>
-            <a:br/>
-            <a:r>
-              <a:t>8GB+ RAM recommended</a:t>
-            </a:r>
-            <a:br/>
-            <a:r>
-              <a:t>Node.js 18+ required</a:t>
-            </a:r>
-          </a:p>
-        </p:txBody>
-      </p:sp>
-      <p:sp>
-        <p:nvSpPr>
-          <p:cNvPr id="7" name="Rounded Rectangle 6"/>
-          <p:cNvSpPr/>
-          <p:nvPr/>
-        </p:nvSpPr>
-        <p:spPr>
-          <a:xfrm>
-            <a:off x="4952847" y="2011680"/>
-            <a:ext cx="2286000" cy="3200400"/>
-          </a:xfrm>
-          <a:prstGeom prst="roundRect">
-            <a:avLst/>
-          </a:prstGeom>
-          <a:solidFill>
-            <a:srgbClr val="141A26"/>
-          </a:solidFill>
-          <a:ln w="25400">
-            <a:solidFill>
-              <a:srgbClr val="00D4AA"/>
-            </a:solidFill>
-          </a:ln>
-        </p:spPr>
-        <p:style>
-          <a:lnRef idx="1">
-            <a:schemeClr val="accent1"/>
-          </a:lnRef>
-          <a:fillRef idx="3">
-            <a:schemeClr val="accent1"/>
-          </a:fillRef>
-          <a:effectRef idx="2">
-            <a:schemeClr val="accent1"/>
-          </a:effectRef>
-          <a:fontRef idx="minor">
-            <a:schemeClr val="lt1"/>
-          </a:fontRef>
-        </p:style>
-        <p:txBody>
-          <a:bodyPr rtlCol="0" anchor="ctr"/>
-          <a:lstStyle/>
-          <a:p>
-            <a:pPr algn="ctr"/>
-            <a:endParaRPr/>
-          </a:p>
-        </p:txBody>
-      </p:sp>
-      <p:sp>
-        <p:nvSpPr>
-          <p:cNvPr id="8" name="Oval 7"/>
-          <p:cNvSpPr/>
-          <p:nvPr/>
-        </p:nvSpPr>
-        <p:spPr>
-          <a:xfrm>
-            <a:off x="5638647" y="2468880"/>
-            <a:ext cx="914400" cy="914400"/>
-          </a:xfrm>
-          <a:prstGeom prst="ellipse">
-            <a:avLst/>
-          </a:prstGeom>
-          <a:solidFill>
-            <a:srgbClr val="00D4AA"/>
-          </a:solidFill>
-          <a:ln>
-            <a:noFill/>
-          </a:ln>
-        </p:spPr>
-        <p:style>
-          <a:lnRef idx="1">
-            <a:schemeClr val="accent1"/>
-          </a:lnRef>
-          <a:fillRef idx="3">
-            <a:schemeClr val="accent1"/>
-          </a:fillRef>
-          <a:effectRef idx="2">
-            <a:schemeClr val="accent1"/>
-          </a:effectRef>
-          <a:fontRef idx="minor">
-            <a:schemeClr val="lt1"/>
-          </a:fontRef>
-        </p:style>
-        <p:txBody>
-          <a:bodyPr rtlCol="0" anchor="ctr"/>
-          <a:lstStyle/>
-          <a:p>
-            <a:pPr algn="ctr"/>
-            <a:endParaRPr/>
-          </a:p>
-        </p:txBody>
-      </p:sp>
-      <p:sp>
-        <p:nvSpPr>
-          <p:cNvPr id="9" name="TextBox 8"/>
-          <p:cNvSpPr txBox="1"/>
-          <p:nvPr/>
-        </p:nvSpPr>
-        <p:spPr>
-          <a:xfrm>
-            <a:off x="5638647" y="2468880"/>
-            <a:ext cx="914400" cy="914400"/>
-          </a:xfrm>
-          <a:prstGeom prst="rect">
-            <a:avLst/>
-          </a:prstGeom>
-          <a:noFill/>
-        </p:spPr>
-        <p:txBody>
-          <a:bodyPr wrap="none" anchor="ctr">
-            <a:spAutoFit/>
-          </a:bodyPr>
-          <a:lstStyle/>
-          <a:p>
-            <a:pPr algn="ctr">
-              <a:defRPr sz="3600" b="1">
-                <a:solidFill>
-                  <a:srgbClr val="0B0F1A"/>
-                </a:solidFill>
-              </a:defRPr>
-            </a:pPr>
-            <a:r>
-              <a:t>2</a:t>
-            </a:r>
-          </a:p>
-        </p:txBody>
-      </p:sp>
-      <p:sp>
-        <p:nvSpPr>
-          <p:cNvPr id="10" name="TextBox 9"/>
-          <p:cNvSpPr txBox="1"/>
-          <p:nvPr/>
-        </p:nvSpPr>
-        <p:spPr>
-          <a:xfrm>
-            <a:off x="5044287" y="3657600"/>
-            <a:ext cx="2103120" cy="1371600"/>
-          </a:xfrm>
-          <a:prstGeom prst="rect">
-            <a:avLst/>
-          </a:prstGeom>
-          <a:noFill/>
-        </p:spPr>
-        <p:txBody>
-          <a:bodyPr wrap="square">
-            <a:normAutofit lnSpcReduction="10000"/>
-          </a:bodyPr>
-          <a:lstStyle/>
-          <a:p>
-            <a:pPr algn="ctr">
-              <a:defRPr sz="1800" b="1">
-                <a:solidFill>
-                  <a:srgbClr val="FFFFFF"/>
-                </a:solidFill>
-              </a:defRPr>
-            </a:pPr>
-            <a:r>
-              <a:rPr dirty="0"/>
-              <a:t>Tools</a:t>
-            </a:r>
-          </a:p>
-          <a:p>
-            <a:pPr algn="ctr">
-              <a:spcBef>
-                <a:spcPts val="800"/>
-              </a:spcBef>
-              <a:defRPr sz="1300">
-                <a:solidFill>
-                  <a:srgbClr val="8B95A5"/>
-                </a:solidFill>
-              </a:defRPr>
-            </a:pPr>
-            <a:r>
-              <a:rPr dirty="0"/>
-              <a:t>Terminal (iTerm2, Windows Terminal, etc.)</a:t>
-            </a:r>
-            <a:br>
-              <a:rPr dirty="0"/>
-            </a:br>
-            <a:r>
-              <a:rPr dirty="0"/>
-              <a:t>Git installed and configured</a:t>
-            </a:r>
-            <a:br>
-              <a:rPr dirty="0"/>
-            </a:br>
-            <a:r>
-              <a:rPr dirty="0"/>
-              <a:t>VS Code or JetBrains IDE (optional)</a:t>
-            </a:r>
-          </a:p>
-        </p:txBody>
-      </p:sp>
-      <p:sp>
-        <p:nvSpPr>
-          <p:cNvPr id="11" name="Rounded Rectangle 10"/>
-          <p:cNvSpPr/>
-          <p:nvPr/>
-        </p:nvSpPr>
-        <p:spPr>
-          <a:xfrm>
-            <a:off x="7604607" y="2011680"/>
-            <a:ext cx="2286001" cy="3200400"/>
-          </a:xfrm>
-          <a:prstGeom prst="roundRect">
-            <a:avLst/>
-          </a:prstGeom>
-          <a:solidFill>
-            <a:srgbClr val="141A26"/>
-          </a:solidFill>
-          <a:ln w="25400">
-            <a:solidFill>
-              <a:srgbClr val="00D4AA"/>
-            </a:solidFill>
-          </a:ln>
-        </p:spPr>
-        <p:style>
-          <a:lnRef idx="1">
-            <a:schemeClr val="accent1"/>
-          </a:lnRef>
-          <a:fillRef idx="3">
-            <a:schemeClr val="accent1"/>
-          </a:fillRef>
-          <a:effectRef idx="2">
-            <a:schemeClr val="accent1"/>
-          </a:effectRef>
-          <a:fontRef idx="minor">
-            <a:schemeClr val="lt1"/>
-          </a:fontRef>
-        </p:style>
-        <p:txBody>
-          <a:bodyPr rtlCol="0" anchor="ctr"/>
-          <a:lstStyle/>
-          <a:p>
-            <a:pPr algn="ctr"/>
-            <a:endParaRPr/>
-          </a:p>
-        </p:txBody>
-      </p:sp>
-      <p:sp>
-        <p:nvSpPr>
-          <p:cNvPr id="12" name="Oval 11"/>
-          <p:cNvSpPr/>
-          <p:nvPr/>
-        </p:nvSpPr>
-        <p:spPr>
-          <a:xfrm>
-            <a:off x="8290407" y="2468880"/>
-            <a:ext cx="914400" cy="914400"/>
-          </a:xfrm>
-          <a:prstGeom prst="ellipse">
-            <a:avLst/>
-          </a:prstGeom>
-          <a:solidFill>
-            <a:srgbClr val="00D4AA"/>
-          </a:solidFill>
-          <a:ln>
-            <a:noFill/>
-          </a:ln>
-        </p:spPr>
-        <p:style>
-          <a:lnRef idx="1">
-            <a:schemeClr val="accent1"/>
-          </a:lnRef>
-          <a:fillRef idx="3">
-            <a:schemeClr val="accent1"/>
-          </a:fillRef>
-          <a:effectRef idx="2">
-            <a:schemeClr val="accent1"/>
-          </a:effectRef>
-          <a:fontRef idx="minor">
-            <a:schemeClr val="lt1"/>
-          </a:fontRef>
-        </p:style>
-        <p:txBody>
-          <a:bodyPr rtlCol="0" anchor="ctr"/>
-          <a:lstStyle/>
-          <a:p>
-            <a:pPr algn="ctr"/>
-            <a:endParaRPr/>
-          </a:p>
-        </p:txBody>
-      </p:sp>
-      <p:sp>
-        <p:nvSpPr>
-          <p:cNvPr id="13" name="TextBox 12"/>
-          <p:cNvSpPr txBox="1"/>
-          <p:nvPr/>
-        </p:nvSpPr>
-        <p:spPr>
-          <a:xfrm>
-            <a:off x="8290407" y="2468880"/>
-            <a:ext cx="914400" cy="914400"/>
-          </a:xfrm>
-          <a:prstGeom prst="rect">
-            <a:avLst/>
-          </a:prstGeom>
-          <a:noFill/>
-        </p:spPr>
-        <p:txBody>
-          <a:bodyPr wrap="none" anchor="ctr">
-            <a:spAutoFit/>
-          </a:bodyPr>
-          <a:lstStyle/>
-          <a:p>
-            <a:pPr algn="ctr">
-              <a:defRPr sz="3600" b="1">
-                <a:solidFill>
-                  <a:srgbClr val="0B0F1A"/>
-                </a:solidFill>
-              </a:defRPr>
-            </a:pPr>
-            <a:r>
-              <a:t>3</a:t>
-            </a:r>
-          </a:p>
-        </p:txBody>
-      </p:sp>
-      <p:sp>
-        <p:nvSpPr>
-          <p:cNvPr id="14" name="TextBox 13"/>
-          <p:cNvSpPr txBox="1"/>
-          <p:nvPr/>
-        </p:nvSpPr>
-        <p:spPr>
-          <a:xfrm>
-            <a:off x="7696047" y="3657600"/>
-            <a:ext cx="2194866" cy="1371600"/>
-          </a:xfrm>
-          <a:prstGeom prst="rect">
-            <a:avLst/>
-          </a:prstGeom>
-          <a:noFill/>
-        </p:spPr>
-        <p:txBody>
-          <a:bodyPr wrap="square">
-            <a:noAutofit/>
-          </a:bodyPr>
-          <a:lstStyle/>
-          <a:p>
-            <a:pPr algn="ctr">
-              <a:defRPr sz="1800" b="1">
-                <a:solidFill>
-                  <a:srgbClr val="FFFFFF"/>
+            <a:pPr>
+              <a:defRPr sz="1400">
+                <a:solidFill>
+                  <a:srgbClr val="F8F8F2"/>
                 </a:solidFill>
                 <a:latin typeface="Consolas"/>
               </a:defRPr>
             </a:pPr>
             <a:r>
-              <a:rPr dirty="0"/>
-              <a:t>Account</a:t>
-            </a:r>
-          </a:p>
-          <a:p>
-            <a:pPr algn="ctr">
-              <a:spcBef>
-                <a:spcPts val="400"/>
-              </a:spcBef>
-              <a:defRPr sz="1100">
-                <a:solidFill>
-                  <a:srgbClr val="8A8F98"/>
-                </a:solidFill>
-              </a:defRPr>
-            </a:pPr>
-            <a:r>
-              <a:rPr dirty="0"/>
-              <a:t>Anthropic Pro or Max plan</a:t>
-            </a:r>
-          </a:p>
-          <a:p>
-            <a:pPr algn="ctr">
-              <a:spcBef>
-                <a:spcPts val="400"/>
-              </a:spcBef>
-              <a:defRPr sz="1100">
-                <a:solidFill>
-                  <a:srgbClr val="8A8F98"/>
-                </a:solidFill>
-              </a:defRPr>
-            </a:pPr>
-            <a:r>
-              <a:rPr dirty="0"/>
-              <a:t>Install: claude.ai/install.sh</a:t>
-            </a:r>
-          </a:p>
-          <a:p>
-            <a:pPr algn="ctr">
-              <a:spcBef>
-                <a:spcPts val="400"/>
-              </a:spcBef>
-              <a:defRPr sz="1100">
-                <a:solidFill>
-                  <a:srgbClr val="8A8F98"/>
-                </a:solidFill>
-              </a:defRPr>
-            </a:pPr>
-            <a:r>
-              <a:rPr dirty="0"/>
-              <a:t>Authenticate: </a:t>
-            </a:r>
-            <a:r>
-              <a:rPr dirty="0" err="1"/>
-              <a:t>claude</a:t>
-            </a:r>
-            <a:r>
-              <a:rPr dirty="0"/>
-              <a:t> login</a:t>
+              <a:t># Method 1: Native install (recommended — auto-updates)</a:t>
+            </a:r>
+          </a:p>
+          <a:p>
+            <a:pPr>
+              <a:defRPr sz="1400">
+                <a:solidFill>
+                  <a:srgbClr val="F8F8F2"/>
+                </a:solidFill>
+                <a:latin typeface="Consolas"/>
+              </a:defRPr>
+            </a:pPr>
+            <a:r>
+              <a:t>curl -fsSL https://claude.ai/install.sh | bash</a:t>
+            </a:r>
+          </a:p>
+          <a:p>
+            <a:pPr>
+              <a:defRPr sz="1400">
+                <a:solidFill>
+                  <a:srgbClr val="F8F8F2"/>
+                </a:solidFill>
+                <a:latin typeface="Consolas"/>
+              </a:defRPr>
+            </a:pPr>
+            <a:endParaRPr/>
+          </a:p>
+          <a:p>
+            <a:pPr>
+              <a:defRPr sz="1400">
+                <a:solidFill>
+                  <a:srgbClr val="F8F8F2"/>
+                </a:solidFill>
+                <a:latin typeface="Consolas"/>
+              </a:defRPr>
+            </a:pPr>
+            <a:r>
+              <a:t># Method 2: Homebrew (macOS/Linux — manual updates)</a:t>
+            </a:r>
+          </a:p>
+          <a:p>
+            <a:pPr>
+              <a:defRPr sz="1400">
+                <a:solidFill>
+                  <a:srgbClr val="F8F8F2"/>
+                </a:solidFill>
+                <a:latin typeface="Consolas"/>
+              </a:defRPr>
+            </a:pPr>
+            <a:r>
+              <a:t>brew install --cask claude-code</a:t>
+            </a:r>
+          </a:p>
+          <a:p>
+            <a:pPr>
+              <a:defRPr sz="1400">
+                <a:solidFill>
+                  <a:srgbClr val="F8F8F2"/>
+                </a:solidFill>
+                <a:latin typeface="Consolas"/>
+              </a:defRPr>
+            </a:pPr>
+            <a:endParaRPr/>
+          </a:p>
+          <a:p>
+            <a:pPr>
+              <a:defRPr sz="1400">
+                <a:solidFill>
+                  <a:srgbClr val="F8F8F2"/>
+                </a:solidFill>
+                <a:latin typeface="Consolas"/>
+              </a:defRPr>
+            </a:pPr>
+            <a:r>
+              <a:t># Method 3: WinGet (Windows — manual updates)</a:t>
+            </a:r>
+          </a:p>
+          <a:p>
+            <a:pPr>
+              <a:defRPr sz="1400">
+                <a:solidFill>
+                  <a:srgbClr val="F8F8F2"/>
+                </a:solidFill>
+                <a:latin typeface="Consolas"/>
+              </a:defRPr>
+            </a:pPr>
+            <a:r>
+              <a:t>winget install Anthropic.ClaudeCode</a:t>
+            </a:r>
+          </a:p>
+          <a:p>
+            <a:pPr>
+              <a:defRPr sz="1400">
+                <a:solidFill>
+                  <a:srgbClr val="F8F8F2"/>
+                </a:solidFill>
+                <a:latin typeface="Consolas"/>
+              </a:defRPr>
+            </a:pPr>
+            <a:endParaRPr/>
+          </a:p>
+          <a:p>
+            <a:pPr>
+              <a:defRPr sz="1400">
+                <a:solidFill>
+                  <a:srgbClr val="F8F8F2"/>
+                </a:solidFill>
+                <a:latin typeface="Consolas"/>
+              </a:defRPr>
+            </a:pPr>
+            <a:r>
+              <a:t># Verify installation</a:t>
+            </a:r>
+          </a:p>
+          <a:p>
+            <a:pPr>
+              <a:defRPr sz="1400">
+                <a:solidFill>
+                  <a:srgbClr val="F8F8F2"/>
+                </a:solidFill>
+                <a:latin typeface="Consolas"/>
+              </a:defRPr>
+            </a:pPr>
+            <a:r>
+              <a:t>claude --version</a:t>
             </a:r>
           </a:p>
         </p:txBody>
@@ -24215,27 +23876,27 @@
               </a:defRPr>
             </a:pPr>
             <a:r>
-              <a:t>Installation Methods</a:t>
-            </a:r>
-          </a:p>
-        </p:txBody>
-      </p:sp>
-      <p:sp>
-        <p:nvSpPr>
-          <p:cNvPr id="3" name="Rounded Rectangle 2"/>
+              <a:t>Two Ways to Use Claude Code</a:t>
+            </a:r>
+          </a:p>
+        </p:txBody>
+      </p:sp>
+      <p:sp>
+        <p:nvSpPr>
+          <p:cNvPr id="3" name="Rectangle 2"/>
           <p:cNvSpPr/>
           <p:nvPr/>
         </p:nvSpPr>
         <p:spPr>
           <a:xfrm>
-            <a:off x="914400" y="1645920"/>
-            <a:ext cx="10362895" cy="4114800"/>
-          </a:xfrm>
-          <a:prstGeom prst="roundRect">
+            <a:off x="6077559" y="1371600"/>
+            <a:ext cx="36576" cy="4572000"/>
+          </a:xfrm>
+          <a:prstGeom prst="rect">
             <a:avLst/>
           </a:prstGeom>
           <a:solidFill>
-            <a:srgbClr val="1E1E2E"/>
+            <a:srgbClr val="00D4AA"/>
           </a:solidFill>
           <a:ln>
             <a:noFill/>
@@ -24272,8 +23933,8 @@
         </p:nvSpPr>
         <p:spPr>
           <a:xfrm>
-            <a:off x="1097280" y="1783080"/>
-            <a:ext cx="1828800" cy="365760"/>
+            <a:off x="457200" y="1463040"/>
+            <a:ext cx="5364327" cy="731520"/>
           </a:xfrm>
           <a:prstGeom prst="rect">
             <a:avLst/>
@@ -24286,15 +23947,15 @@
           </a:bodyPr>
           <a:lstStyle/>
           <a:p>
-            <a:pPr>
-              <a:defRPr sz="1200" b="1">
+            <a:pPr algn="ctr">
+              <a:defRPr sz="2800" b="1">
                 <a:solidFill>
                   <a:srgbClr val="00D4AA"/>
                 </a:solidFill>
               </a:defRPr>
             </a:pPr>
             <a:r>
-              <a:t>BASH</a:t>
+              <a:t>Terminal (CLI)</a:t>
             </a:r>
           </a:p>
         </p:txBody>
@@ -24307,8 +23968,8 @@
         </p:nvSpPr>
         <p:spPr>
           <a:xfrm>
-            <a:off x="1097280" y="2194560"/>
-            <a:ext cx="9997135" cy="3291840"/>
+            <a:off x="457200" y="2286000"/>
+            <a:ext cx="5364327" cy="3657600"/>
           </a:xfrm>
           <a:prstGeom prst="rect">
             <a:avLst/>
@@ -24322,139 +23983,210 @@
           <a:lstStyle/>
           <a:p>
             <a:pPr>
-              <a:defRPr sz="1400">
-                <a:solidFill>
-                  <a:srgbClr val="F8F8F2"/>
-                </a:solidFill>
-                <a:latin typeface="Consolas"/>
-              </a:defRPr>
-            </a:pPr>
-            <a:r>
-              <a:t># Method 1: Native install (recommended — auto-updates)</a:t>
-            </a:r>
-          </a:p>
-          <a:p>
-            <a:pPr>
-              <a:defRPr sz="1400">
-                <a:solidFill>
-                  <a:srgbClr val="F8F8F2"/>
-                </a:solidFill>
-                <a:latin typeface="Consolas"/>
-              </a:defRPr>
-            </a:pPr>
-            <a:r>
-              <a:t>curl -fsSL https://claude.ai/install.sh | bash</a:t>
-            </a:r>
-          </a:p>
-          <a:p>
-            <a:pPr>
-              <a:defRPr sz="1400">
-                <a:solidFill>
-                  <a:srgbClr val="F8F8F2"/>
-                </a:solidFill>
-                <a:latin typeface="Consolas"/>
-              </a:defRPr>
-            </a:pPr>
-            <a:endParaRPr/>
-          </a:p>
-          <a:p>
-            <a:pPr>
-              <a:defRPr sz="1400">
-                <a:solidFill>
-                  <a:srgbClr val="F8F8F2"/>
-                </a:solidFill>
-                <a:latin typeface="Consolas"/>
-              </a:defRPr>
-            </a:pPr>
-            <a:r>
-              <a:t># Method 2: Homebrew (macOS/Linux — manual updates)</a:t>
-            </a:r>
-          </a:p>
-          <a:p>
-            <a:pPr>
-              <a:defRPr sz="1400">
-                <a:solidFill>
-                  <a:srgbClr val="F8F8F2"/>
-                </a:solidFill>
-                <a:latin typeface="Consolas"/>
-              </a:defRPr>
-            </a:pPr>
-            <a:r>
-              <a:t>brew install --cask claude-code</a:t>
-            </a:r>
-          </a:p>
-          <a:p>
-            <a:pPr>
-              <a:defRPr sz="1400">
-                <a:solidFill>
-                  <a:srgbClr val="F8F8F2"/>
-                </a:solidFill>
-                <a:latin typeface="Consolas"/>
-              </a:defRPr>
-            </a:pPr>
-            <a:endParaRPr/>
-          </a:p>
-          <a:p>
-            <a:pPr>
-              <a:defRPr sz="1400">
-                <a:solidFill>
-                  <a:srgbClr val="F8F8F2"/>
-                </a:solidFill>
-                <a:latin typeface="Consolas"/>
-              </a:defRPr>
-            </a:pPr>
-            <a:r>
-              <a:t># Method 3: WinGet (Windows — manual updates)</a:t>
-            </a:r>
-          </a:p>
-          <a:p>
-            <a:pPr>
-              <a:defRPr sz="1400">
-                <a:solidFill>
-                  <a:srgbClr val="F8F8F2"/>
-                </a:solidFill>
-                <a:latin typeface="Consolas"/>
-              </a:defRPr>
-            </a:pPr>
-            <a:r>
-              <a:t>winget install Anthropic.ClaudeCode</a:t>
-            </a:r>
-          </a:p>
-          <a:p>
-            <a:pPr>
-              <a:defRPr sz="1400">
-                <a:solidFill>
-                  <a:srgbClr val="F8F8F2"/>
-                </a:solidFill>
-                <a:latin typeface="Consolas"/>
-              </a:defRPr>
-            </a:pPr>
-            <a:endParaRPr/>
-          </a:p>
-          <a:p>
-            <a:pPr>
-              <a:defRPr sz="1400">
-                <a:solidFill>
-                  <a:srgbClr val="F8F8F2"/>
-                </a:solidFill>
-                <a:latin typeface="Consolas"/>
-              </a:defRPr>
-            </a:pPr>
-            <a:r>
-              <a:t># Verify installation</a:t>
-            </a:r>
-          </a:p>
-          <a:p>
-            <a:pPr>
-              <a:defRPr sz="1400">
-                <a:solidFill>
-                  <a:srgbClr val="F8F8F2"/>
-                </a:solidFill>
-                <a:latin typeface="Consolas"/>
-              </a:defRPr>
-            </a:pPr>
-            <a:r>
-              <a:t>claude --version</a:t>
+              <a:spcAft>
+                <a:spcPts val="1200"/>
+              </a:spcAft>
+              <a:defRPr sz="1800">
+                <a:solidFill>
+                  <a:srgbClr val="FFFFFF"/>
+                </a:solidFill>
+              </a:defRPr>
+            </a:pPr>
+            <a:r>
+              <a:t>  Run 'claude' in any project directory</a:t>
+            </a:r>
+          </a:p>
+          <a:p>
+            <a:pPr>
+              <a:spcAft>
+                <a:spcPts val="1200"/>
+              </a:spcAft>
+              <a:defRPr sz="1800">
+                <a:solidFill>
+                  <a:srgbClr val="FFFFFF"/>
+                </a:solidFill>
+              </a:defRPr>
+            </a:pPr>
+            <a:r>
+              <a:t>  Full power — all commands available</a:t>
+            </a:r>
+          </a:p>
+          <a:p>
+            <a:pPr>
+              <a:spcAft>
+                <a:spcPts val="1200"/>
+              </a:spcAft>
+              <a:defRPr sz="1800">
+                <a:solidFill>
+                  <a:srgbClr val="FFFFFF"/>
+                </a:solidFill>
+              </a:defRPr>
+            </a:pPr>
+            <a:r>
+              <a:t>  Best for: dedicated coding sessions</a:t>
+            </a:r>
+          </a:p>
+          <a:p>
+            <a:pPr>
+              <a:spcAft>
+                <a:spcPts val="1200"/>
+              </a:spcAft>
+              <a:defRPr sz="1800">
+                <a:solidFill>
+                  <a:srgbClr val="FFFFFF"/>
+                </a:solidFill>
+              </a:defRPr>
+            </a:pPr>
+            <a:r>
+              <a:t>  Multiple instances via tabs/tmux</a:t>
+            </a:r>
+          </a:p>
+          <a:p>
+            <a:pPr>
+              <a:spcAft>
+                <a:spcPts val="1200"/>
+              </a:spcAft>
+              <a:defRPr sz="1800">
+                <a:solidFill>
+                  <a:srgbClr val="FFFFFF"/>
+                </a:solidFill>
+              </a:defRPr>
+            </a:pPr>
+            <a:r>
+              <a:t>  Direct file system access</a:t>
+            </a:r>
+          </a:p>
+        </p:txBody>
+      </p:sp>
+      <p:sp>
+        <p:nvSpPr>
+          <p:cNvPr id="6" name="TextBox 5"/>
+          <p:cNvSpPr txBox="1"/>
+          <p:nvPr/>
+        </p:nvSpPr>
+        <p:spPr>
+          <a:xfrm>
+            <a:off x="6370167" y="1463040"/>
+            <a:ext cx="5364327" cy="731520"/>
+          </a:xfrm>
+          <a:prstGeom prst="rect">
+            <a:avLst/>
+          </a:prstGeom>
+          <a:noFill/>
+        </p:spPr>
+        <p:txBody>
+          <a:bodyPr wrap="none">
+            <a:spAutoFit/>
+          </a:bodyPr>
+          <a:lstStyle/>
+          <a:p>
+            <a:pPr algn="ctr">
+              <a:defRPr sz="2800" b="1">
+                <a:solidFill>
+                  <a:srgbClr val="E86B4A"/>
+                </a:solidFill>
+              </a:defRPr>
+            </a:pPr>
+            <a:r>
+              <a:t>IDE Integration</a:t>
+            </a:r>
+          </a:p>
+        </p:txBody>
+      </p:sp>
+      <p:sp>
+        <p:nvSpPr>
+          <p:cNvPr id="7" name="TextBox 6"/>
+          <p:cNvSpPr txBox="1"/>
+          <p:nvPr/>
+        </p:nvSpPr>
+        <p:spPr>
+          <a:xfrm>
+            <a:off x="6370167" y="2286000"/>
+            <a:ext cx="5364327" cy="3657600"/>
+          </a:xfrm>
+          <a:prstGeom prst="rect">
+            <a:avLst/>
+          </a:prstGeom>
+          <a:noFill/>
+        </p:spPr>
+        <p:txBody>
+          <a:bodyPr wrap="square">
+            <a:spAutoFit/>
+          </a:bodyPr>
+          <a:lstStyle/>
+          <a:p>
+            <a:pPr>
+              <a:spcAft>
+                <a:spcPts val="1200"/>
+              </a:spcAft>
+              <a:defRPr sz="1800">
+                <a:solidFill>
+                  <a:srgbClr val="FFFFFF"/>
+                </a:solidFill>
+              </a:defRPr>
+            </a:pPr>
+            <a:r>
+              <a:t>  Run in VS Code or JetBrains terminal</a:t>
+            </a:r>
+          </a:p>
+          <a:p>
+            <a:pPr>
+              <a:spcAft>
+                <a:spcPts val="1200"/>
+              </a:spcAft>
+              <a:defRPr sz="1800">
+                <a:solidFill>
+                  <a:srgbClr val="FFFFFF"/>
+                </a:solidFill>
+              </a:defRPr>
+            </a:pPr>
+            <a:r>
+              <a:t>  Changes appear live in your editor</a:t>
+            </a:r>
+          </a:p>
+          <a:p>
+            <a:pPr>
+              <a:spcAft>
+                <a:spcPts val="1200"/>
+              </a:spcAft>
+              <a:defRPr sz="1800">
+                <a:solidFill>
+                  <a:srgbClr val="FFFFFF"/>
+                </a:solidFill>
+              </a:defRPr>
+            </a:pPr>
+            <a:r>
+              <a:t>  Claude sees diagnostic errors automatically</a:t>
+            </a:r>
+          </a:p>
+          <a:p>
+            <a:pPr>
+              <a:spcAft>
+                <a:spcPts val="1200"/>
+              </a:spcAft>
+              <a:defRPr sz="1800">
+                <a:solidFill>
+                  <a:srgbClr val="FFFFFF"/>
+                </a:solidFill>
+              </a:defRPr>
+            </a:pPr>
+            <a:r>
+              <a:t>  Reads your open files and selections</a:t>
+            </a:r>
+          </a:p>
+          <a:p>
+            <a:pPr>
+              <a:spcAft>
+                <a:spcPts val="1200"/>
+              </a:spcAft>
+              <a:defRPr sz="1800">
+                <a:solidFill>
+                  <a:srgbClr val="FFFFFF"/>
+                </a:solidFill>
+              </a:defRPr>
+            </a:pPr>
+            <a:r>
+              <a:t>  Best for: editing while you code</a:t>
             </a:r>
           </a:p>
         </p:txBody>
@@ -28726,8 +28458,8 @@
         </p:nvSpPr>
         <p:spPr>
           <a:xfrm>
-            <a:off x="457200" y="457200"/>
-            <a:ext cx="11277295" cy="731520"/>
+            <a:off x="457200" y="365760"/>
+            <a:ext cx="11277295" cy="640080"/>
           </a:xfrm>
           <a:prstGeom prst="rect">
             <a:avLst/>
@@ -28740,38 +28472,41 @@
           </a:bodyPr>
           <a:lstStyle/>
           <a:p>
-            <a:pPr algn="ctr">
-              <a:defRPr sz="3600" b="1">
-                <a:solidFill>
-                  <a:srgbClr val="FFFFFF"/>
-                </a:solidFill>
-              </a:defRPr>
-            </a:pPr>
-            <a:r>
-              <a:t>Two Ways to Use Claude Code</a:t>
-            </a:r>
-          </a:p>
-        </p:txBody>
-      </p:sp>
-      <p:sp>
-        <p:nvSpPr>
-          <p:cNvPr id="3" name="Rectangle 2"/>
+            <a:pPr>
+              <a:defRPr sz="3200" b="1">
+                <a:solidFill>
+                  <a:srgbClr val="FFFFFF"/>
+                </a:solidFill>
+              </a:defRPr>
+            </a:pPr>
+            <a:r>
+              <a:t>Claude Code Desktop Interface</a:t>
+            </a:r>
+          </a:p>
+        </p:txBody>
+      </p:sp>
+      <p:sp>
+        <p:nvSpPr>
+          <p:cNvPr id="3" name="Rounded Rectangle 2"/>
           <p:cNvSpPr/>
           <p:nvPr/>
         </p:nvSpPr>
         <p:spPr>
           <a:xfrm>
-            <a:off x="6077559" y="1371600"/>
-            <a:ext cx="36576" cy="4572000"/>
-          </a:xfrm>
-          <a:prstGeom prst="rect">
+            <a:off x="914400" y="1280160"/>
+            <a:ext cx="10362895" cy="4754880"/>
+          </a:xfrm>
+          <a:prstGeom prst="roundRect">
             <a:avLst/>
           </a:prstGeom>
           <a:solidFill>
-            <a:srgbClr val="00D4AA"/>
+            <a:srgbClr val="141A26"/>
           </a:solidFill>
-          <a:ln>
-            <a:noFill/>
+          <a:ln w="25400">
+            <a:solidFill>
+              <a:srgbClr val="00D4AA"/>
+            </a:solidFill>
+            <a:prstDash val="sysDash"/>
           </a:ln>
         </p:spPr>
         <p:style>
@@ -28805,8 +28540,8 @@
         </p:nvSpPr>
         <p:spPr>
           <a:xfrm>
-            <a:off x="457200" y="1463040"/>
-            <a:ext cx="5364327" cy="731520"/>
+            <a:off x="914400" y="3200400"/>
+            <a:ext cx="10362895" cy="914400"/>
           </a:xfrm>
           <a:prstGeom prst="rect">
             <a:avLst/>
@@ -28820,28 +28555,34 @@
           <a:lstStyle/>
           <a:p>
             <a:pPr algn="ctr">
-              <a:defRPr sz="2800" b="1">
-                <a:solidFill>
-                  <a:srgbClr val="00D4AA"/>
-                </a:solidFill>
-              </a:defRPr>
-            </a:pPr>
-            <a:r>
-              <a:t>Terminal (CLI)</a:t>
-            </a:r>
-          </a:p>
-        </p:txBody>
-      </p:sp>
-      <p:sp>
-        <p:nvSpPr>
-          <p:cNvPr id="5" name="TextBox 4"/>
+              <a:defRPr sz="2400" b="1">
+                <a:solidFill>
+                  <a:srgbClr val="8B95A5"/>
+                </a:solidFill>
+              </a:defRPr>
+            </a:pPr>
+            <a:r>
+              <a:t>[Screenshot]</a:t>
+            </a:r>
+          </a:p>
+        </p:txBody>
+      </p:sp>
+      <p:sp>
+        <p:nvSpPr>
+          <p:cNvPr id="6" name="TextBox 5">
+            <a:extLst>
+              <a:ext uri="{FF2B5EF4-FFF2-40B4-BE49-F238E27FC236}">
+                <a16:creationId xmlns:a16="http://schemas.microsoft.com/office/drawing/2014/main" id="{20DA46C1-A09C-CC85-41D0-591C5CEE27C2}"/>
+              </a:ext>
+            </a:extLst>
+          </p:cNvPr>
           <p:cNvSpPr txBox="1"/>
           <p:nvPr/>
         </p:nvSpPr>
         <p:spPr>
           <a:xfrm>
-            <a:off x="457200" y="2286000"/>
-            <a:ext cx="5364327" cy="3657600"/>
+            <a:off x="7300452" y="1778568"/>
+            <a:ext cx="3976843" cy="3785652"/>
           </a:xfrm>
           <a:prstGeom prst="rect">
             <a:avLst/>
@@ -28854,215 +28595,224 @@
           </a:bodyPr>
           <a:lstStyle/>
           <a:p>
-            <a:pPr>
-              <a:spcAft>
-                <a:spcPts val="1200"/>
-              </a:spcAft>
-              <a:defRPr sz="1800">
-                <a:solidFill>
-                  <a:srgbClr val="FFFFFF"/>
-                </a:solidFill>
-              </a:defRPr>
-            </a:pPr>
-            <a:r>
-              <a:t>  Run 'claude' in any project directory</a:t>
-            </a:r>
-          </a:p>
-          <a:p>
-            <a:pPr>
-              <a:spcAft>
-                <a:spcPts val="1200"/>
-              </a:spcAft>
-              <a:defRPr sz="1800">
-                <a:solidFill>
-                  <a:srgbClr val="FFFFFF"/>
-                </a:solidFill>
-              </a:defRPr>
-            </a:pPr>
-            <a:r>
-              <a:t>  Full power — all commands available</a:t>
-            </a:r>
-          </a:p>
-          <a:p>
-            <a:pPr>
-              <a:spcAft>
-                <a:spcPts val="1200"/>
-              </a:spcAft>
-              <a:defRPr sz="1800">
-                <a:solidFill>
-                  <a:srgbClr val="FFFFFF"/>
-                </a:solidFill>
-              </a:defRPr>
-            </a:pPr>
-            <a:r>
-              <a:t>  Best for: dedicated coding sessions</a:t>
-            </a:r>
-          </a:p>
-          <a:p>
-            <a:pPr>
-              <a:spcAft>
-                <a:spcPts val="1200"/>
-              </a:spcAft>
-              <a:defRPr sz="1800">
-                <a:solidFill>
-                  <a:srgbClr val="FFFFFF"/>
-                </a:solidFill>
-              </a:defRPr>
-            </a:pPr>
-            <a:r>
-              <a:t>  Multiple instances via tabs/tmux</a:t>
-            </a:r>
-          </a:p>
-          <a:p>
-            <a:pPr>
-              <a:spcAft>
-                <a:spcPts val="1200"/>
-              </a:spcAft>
-              <a:defRPr sz="1800">
-                <a:solidFill>
-                  <a:srgbClr val="FFFFFF"/>
-                </a:solidFill>
-              </a:defRPr>
-            </a:pPr>
-            <a:r>
-              <a:t>  Direct file system access</a:t>
-            </a:r>
-          </a:p>
-        </p:txBody>
-      </p:sp>
-      <p:sp>
-        <p:nvSpPr>
-          <p:cNvPr id="6" name="TextBox 5"/>
-          <p:cNvSpPr txBox="1"/>
-          <p:nvPr/>
-        </p:nvSpPr>
-        <p:spPr>
-          <a:xfrm>
-            <a:off x="6370167" y="1463040"/>
-            <a:ext cx="5364327" cy="731520"/>
-          </a:xfrm>
-          <a:prstGeom prst="rect">
-            <a:avLst/>
-          </a:prstGeom>
-          <a:noFill/>
-        </p:spPr>
-        <p:txBody>
-          <a:bodyPr wrap="none">
-            <a:spAutoFit/>
-          </a:bodyPr>
-          <a:lstStyle/>
-          <a:p>
-            <a:pPr algn="ctr">
-              <a:defRPr sz="2800" b="1">
-                <a:solidFill>
-                  <a:srgbClr val="E86B4A"/>
-                </a:solidFill>
-              </a:defRPr>
-            </a:pPr>
-            <a:r>
-              <a:t>IDE Integration</a:t>
-            </a:r>
-          </a:p>
-        </p:txBody>
-      </p:sp>
-      <p:sp>
-        <p:nvSpPr>
-          <p:cNvPr id="7" name="TextBox 6"/>
-          <p:cNvSpPr txBox="1"/>
-          <p:nvPr/>
-        </p:nvSpPr>
-        <p:spPr>
-          <a:xfrm>
-            <a:off x="6370167" y="2286000"/>
-            <a:ext cx="5364327" cy="3657600"/>
-          </a:xfrm>
-          <a:prstGeom prst="rect">
-            <a:avLst/>
-          </a:prstGeom>
-          <a:noFill/>
-        </p:spPr>
-        <p:txBody>
-          <a:bodyPr wrap="square">
-            <a:spAutoFit/>
-          </a:bodyPr>
-          <a:lstStyle/>
-          <a:p>
-            <a:pPr>
-              <a:spcAft>
-                <a:spcPts val="1200"/>
-              </a:spcAft>
-              <a:defRPr sz="1800">
-                <a:solidFill>
-                  <a:srgbClr val="FFFFFF"/>
-                </a:solidFill>
-              </a:defRPr>
-            </a:pPr>
-            <a:r>
-              <a:t>  Run in VS Code or JetBrains terminal</a:t>
-            </a:r>
-          </a:p>
-          <a:p>
-            <a:pPr>
-              <a:spcAft>
-                <a:spcPts val="1200"/>
-              </a:spcAft>
-              <a:defRPr sz="1800">
-                <a:solidFill>
-                  <a:srgbClr val="FFFFFF"/>
-                </a:solidFill>
-              </a:defRPr>
-            </a:pPr>
-            <a:r>
-              <a:t>  Changes appear live in your editor</a:t>
-            </a:r>
-          </a:p>
-          <a:p>
-            <a:pPr>
-              <a:spcAft>
-                <a:spcPts val="1200"/>
-              </a:spcAft>
-              <a:defRPr sz="1800">
-                <a:solidFill>
-                  <a:srgbClr val="FFFFFF"/>
-                </a:solidFill>
-              </a:defRPr>
-            </a:pPr>
-            <a:r>
-              <a:t>  Claude sees diagnostic errors automatically</a:t>
-            </a:r>
-          </a:p>
-          <a:p>
-            <a:pPr>
-              <a:spcAft>
-                <a:spcPts val="1200"/>
-              </a:spcAft>
-              <a:defRPr sz="1800">
-                <a:solidFill>
-                  <a:srgbClr val="FFFFFF"/>
-                </a:solidFill>
-              </a:defRPr>
-            </a:pPr>
-            <a:r>
-              <a:t>  Reads your open files and selections</a:t>
-            </a:r>
-          </a:p>
-          <a:p>
-            <a:pPr>
-              <a:spcAft>
-                <a:spcPts val="1200"/>
-              </a:spcAft>
-              <a:defRPr sz="1800">
-                <a:solidFill>
-                  <a:srgbClr val="FFFFFF"/>
-                </a:solidFill>
-              </a:defRPr>
-            </a:pPr>
-            <a:r>
-              <a:t>  Best for: editing while you code</a:t>
-            </a:r>
-          </a:p>
-        </p:txBody>
-      </p:sp>
+            <a:r>
+              <a:rPr lang="en-US" sz="1600" dirty="0">
+                <a:solidFill>
+                  <a:schemeClr val="bg1"/>
+                </a:solidFill>
+              </a:rPr>
+              <a:t>GUI for Claude Code — no terminal required</a:t>
+            </a:r>
+          </a:p>
+          <a:p>
+            <a:endParaRPr lang="en-US" sz="1600" dirty="0">
+              <a:solidFill>
+                <a:schemeClr val="bg1"/>
+              </a:solidFill>
+            </a:endParaRPr>
+          </a:p>
+          <a:p>
+            <a:r>
+              <a:rPr lang="en-US" sz="1600" dirty="0">
+                <a:solidFill>
+                  <a:schemeClr val="bg1"/>
+                </a:solidFill>
+              </a:rPr>
+              <a:t>Parallel sessions with git </a:t>
+            </a:r>
+            <a:r>
+              <a:rPr lang="en-US" sz="1600" dirty="0" err="1">
+                <a:solidFill>
+                  <a:schemeClr val="bg1"/>
+                </a:solidFill>
+              </a:rPr>
+              <a:t>worktree</a:t>
+            </a:r>
+            <a:r>
+              <a:rPr lang="en-US" sz="1600" dirty="0">
+                <a:solidFill>
+                  <a:schemeClr val="bg1"/>
+                </a:solidFill>
+              </a:rPr>
+              <a:t> isolation</a:t>
+            </a:r>
+          </a:p>
+          <a:p>
+            <a:endParaRPr lang="en-US" sz="1600" dirty="0">
+              <a:solidFill>
+                <a:schemeClr val="bg1"/>
+              </a:solidFill>
+            </a:endParaRPr>
+          </a:p>
+          <a:p>
+            <a:r>
+              <a:rPr lang="en-US" sz="1600" dirty="0">
+                <a:solidFill>
+                  <a:schemeClr val="bg1"/>
+                </a:solidFill>
+              </a:rPr>
+              <a:t>Visual diff review and server previews</a:t>
+            </a:r>
+          </a:p>
+          <a:p>
+            <a:endParaRPr lang="en-US" sz="1600" dirty="0">
+              <a:solidFill>
+                <a:schemeClr val="bg1"/>
+              </a:solidFill>
+            </a:endParaRPr>
+          </a:p>
+          <a:p>
+            <a:r>
+              <a:rPr lang="en-US" sz="1600" dirty="0">
+                <a:solidFill>
+                  <a:schemeClr val="bg1"/>
+                </a:solidFill>
+              </a:rPr>
+              <a:t>Local or remote (cloud) sessions from</a:t>
+            </a:r>
+            <a:br>
+              <a:rPr lang="en-US" sz="1600" dirty="0">
+                <a:solidFill>
+                  <a:schemeClr val="bg1"/>
+                </a:solidFill>
+              </a:rPr>
+            </a:br>
+            <a:r>
+              <a:rPr lang="en-US" sz="1600" dirty="0">
+                <a:solidFill>
+                  <a:schemeClr val="bg1"/>
+                </a:solidFill>
+              </a:rPr>
+              <a:t> same interface</a:t>
+            </a:r>
+          </a:p>
+          <a:p>
+            <a:endParaRPr lang="en-US" sz="1600" dirty="0">
+              <a:solidFill>
+                <a:schemeClr val="bg1"/>
+              </a:solidFill>
+            </a:endParaRPr>
+          </a:p>
+          <a:p>
+            <a:r>
+              <a:rPr lang="en-US" sz="1600" dirty="0">
+                <a:solidFill>
+                  <a:schemeClr val="bg1"/>
+                </a:solidFill>
+              </a:rPr>
+              <a:t>PR monitoring and status tracking</a:t>
+            </a:r>
+          </a:p>
+          <a:p>
+            <a:endParaRPr lang="en-US" sz="1600" dirty="0">
+              <a:solidFill>
+                <a:schemeClr val="bg1"/>
+              </a:solidFill>
+            </a:endParaRPr>
+          </a:p>
+          <a:p>
+            <a:r>
+              <a:rPr lang="en-US" sz="1600" dirty="0">
+                <a:solidFill>
+                  <a:schemeClr val="bg1"/>
+                </a:solidFill>
+              </a:rPr>
+              <a:t>/desktop </a:t>
+            </a:r>
+            <a:r>
+              <a:rPr lang="en-US" sz="1600" dirty="0" err="1">
+                <a:solidFill>
+                  <a:schemeClr val="bg1"/>
+                </a:solidFill>
+              </a:rPr>
+              <a:t>cmd</a:t>
+            </a:r>
+            <a:r>
+              <a:rPr lang="en-US" sz="1600" dirty="0">
+                <a:solidFill>
+                  <a:schemeClr val="bg1"/>
+                </a:solidFill>
+              </a:rPr>
+              <a:t> moves a CLI session to the app</a:t>
+            </a:r>
+          </a:p>
+          <a:p>
+            <a:endParaRPr lang="en-US" sz="1600" dirty="0">
+              <a:solidFill>
+                <a:schemeClr val="bg1"/>
+              </a:solidFill>
+            </a:endParaRPr>
+          </a:p>
+          <a:p>
+            <a:r>
+              <a:rPr lang="en-US" sz="1600" dirty="0">
+                <a:solidFill>
+                  <a:schemeClr val="bg1"/>
+                </a:solidFill>
+              </a:rPr>
+              <a:t>Best for: non-terminal users, multi-session </a:t>
+            </a:r>
+            <a:br>
+              <a:rPr lang="en-US" sz="1600" dirty="0">
+                <a:solidFill>
+                  <a:schemeClr val="bg1"/>
+                </a:solidFill>
+              </a:rPr>
+            </a:br>
+            <a:r>
+              <a:rPr lang="en-US" sz="1600" dirty="0">
+                <a:solidFill>
+                  <a:schemeClr val="bg1"/>
+                </a:solidFill>
+              </a:rPr>
+              <a:t> management, visual workflows</a:t>
+            </a:r>
+          </a:p>
+        </p:txBody>
+      </p:sp>
+      <p:pic>
+        <p:nvPicPr>
+          <p:cNvPr id="7" name="Picture 6">
+            <a:extLst>
+              <a:ext uri="{FF2B5EF4-FFF2-40B4-BE49-F238E27FC236}">
+                <a16:creationId xmlns:a16="http://schemas.microsoft.com/office/drawing/2014/main" id="{1CE2B5A9-A391-ACE3-A562-6E21FAF6C260}"/>
+              </a:ext>
+            </a:extLst>
+          </p:cNvPr>
+          <p:cNvPicPr>
+            <a:picLocks noChangeAspect="1"/>
+          </p:cNvPicPr>
+          <p:nvPr/>
+        </p:nvPicPr>
+        <p:blipFill>
+          <a:blip r:embed="rId3"/>
+          <a:stretch>
+            <a:fillRect/>
+          </a:stretch>
+        </p:blipFill>
+        <p:spPr>
+          <a:xfrm>
+            <a:off x="1203631" y="1828800"/>
+            <a:ext cx="5912508" cy="3657600"/>
+          </a:xfrm>
+          <a:prstGeom prst="roundRect">
+            <a:avLst>
+              <a:gd name="adj" fmla="val 8594"/>
+            </a:avLst>
+          </a:prstGeom>
+          <a:solidFill>
+            <a:srgbClr val="FFFFFF">
+              <a:shade val="85000"/>
+            </a:srgbClr>
+          </a:solidFill>
+          <a:ln>
+            <a:noFill/>
+          </a:ln>
+          <a:effectLst>
+            <a:reflection blurRad="12700" stA="38000" endPos="28000" dist="5000" dir="5400000" sy="-100000" algn="bl" rotWithShape="0"/>
+          </a:effectLst>
+        </p:spPr>
+      </p:pic>
     </p:spTree>
   </p:cSld>
   <p:clrMapOvr>
@@ -29104,8 +28854,8 @@
         </p:nvSpPr>
         <p:spPr>
           <a:xfrm>
-            <a:off x="457200" y="365760"/>
-            <a:ext cx="11277295" cy="640080"/>
+            <a:off x="457200" y="457200"/>
+            <a:ext cx="11277295" cy="731520"/>
           </a:xfrm>
           <a:prstGeom prst="rect">
             <a:avLst/>
@@ -29118,15 +28868,15 @@
           </a:bodyPr>
           <a:lstStyle/>
           <a:p>
-            <a:pPr>
-              <a:defRPr sz="3200" b="1">
-                <a:solidFill>
-                  <a:srgbClr val="FFFFFF"/>
-                </a:solidFill>
-              </a:defRPr>
-            </a:pPr>
-            <a:r>
-              <a:t>Claude Code Desktop Interface</a:t>
+            <a:pPr algn="ctr">
+              <a:defRPr sz="3600" b="1">
+                <a:solidFill>
+                  <a:srgbClr val="FFFFFF"/>
+                </a:solidFill>
+              </a:defRPr>
+            </a:pPr>
+            <a:r>
+              <a:t>Authentication &amp; Configuration</a:t>
             </a:r>
           </a:p>
         </p:txBody>
@@ -29139,20 +28889,17 @@
         </p:nvSpPr>
         <p:spPr>
           <a:xfrm>
-            <a:off x="914400" y="1280160"/>
-            <a:ext cx="10362895" cy="4754880"/>
+            <a:off x="914400" y="1645920"/>
+            <a:ext cx="10362895" cy="4114800"/>
           </a:xfrm>
           <a:prstGeom prst="roundRect">
             <a:avLst/>
           </a:prstGeom>
           <a:solidFill>
-            <a:srgbClr val="141A26"/>
+            <a:srgbClr val="1E1E2E"/>
           </a:solidFill>
-          <a:ln w="25400">
-            <a:solidFill>
-              <a:srgbClr val="00D4AA"/>
-            </a:solidFill>
-            <a:prstDash val="sysDash"/>
+          <a:ln>
+            <a:noFill/>
           </a:ln>
         </p:spPr>
         <p:style>
@@ -29186,8 +28933,8 @@
         </p:nvSpPr>
         <p:spPr>
           <a:xfrm>
-            <a:off x="914400" y="3200400"/>
-            <a:ext cx="10362895" cy="914400"/>
+            <a:off x="1097280" y="1783080"/>
+            <a:ext cx="1828800" cy="365760"/>
           </a:xfrm>
           <a:prstGeom prst="rect">
             <a:avLst/>
@@ -29200,35 +28947,29 @@
           </a:bodyPr>
           <a:lstStyle/>
           <a:p>
-            <a:pPr algn="ctr">
-              <a:defRPr sz="2400" b="1">
-                <a:solidFill>
-                  <a:srgbClr val="8B95A5"/>
-                </a:solidFill>
-              </a:defRPr>
-            </a:pPr>
-            <a:r>
-              <a:t>[Screenshot]</a:t>
-            </a:r>
-          </a:p>
-        </p:txBody>
-      </p:sp>
-      <p:sp>
-        <p:nvSpPr>
-          <p:cNvPr id="6" name="TextBox 5">
-            <a:extLst>
-              <a:ext uri="{FF2B5EF4-FFF2-40B4-BE49-F238E27FC236}">
-                <a16:creationId xmlns:a16="http://schemas.microsoft.com/office/drawing/2014/main" id="{20DA46C1-A09C-CC85-41D0-591C5CEE27C2}"/>
-              </a:ext>
-            </a:extLst>
-          </p:cNvPr>
+            <a:pPr>
+              <a:defRPr sz="1200" b="1">
+                <a:solidFill>
+                  <a:srgbClr val="00D4AA"/>
+                </a:solidFill>
+              </a:defRPr>
+            </a:pPr>
+            <a:r>
+              <a:t>BASH</a:t>
+            </a:r>
+          </a:p>
+        </p:txBody>
+      </p:sp>
+      <p:sp>
+        <p:nvSpPr>
+          <p:cNvPr id="5" name="TextBox 4"/>
           <p:cNvSpPr txBox="1"/>
           <p:nvPr/>
         </p:nvSpPr>
         <p:spPr>
           <a:xfrm>
-            <a:off x="7300452" y="1778568"/>
-            <a:ext cx="3976843" cy="3785652"/>
+            <a:off x="1097280" y="2194560"/>
+            <a:ext cx="9997135" cy="3291840"/>
           </a:xfrm>
           <a:prstGeom prst="rect">
             <a:avLst/>
@@ -29241,224 +28982,170 @@
           </a:bodyPr>
           <a:lstStyle/>
           <a:p>
-            <a:r>
-              <a:rPr lang="en-US" sz="1600" dirty="0">
-                <a:solidFill>
-                  <a:schemeClr val="bg1"/>
-                </a:solidFill>
-              </a:rPr>
-              <a:t>GUI for Claude Code — no terminal required</a:t>
-            </a:r>
-          </a:p>
-          <a:p>
-            <a:endParaRPr lang="en-US" sz="1600" dirty="0">
-              <a:solidFill>
-                <a:schemeClr val="bg1"/>
-              </a:solidFill>
-            </a:endParaRPr>
-          </a:p>
-          <a:p>
-            <a:r>
-              <a:rPr lang="en-US" sz="1600" dirty="0">
-                <a:solidFill>
-                  <a:schemeClr val="bg1"/>
-                </a:solidFill>
-              </a:rPr>
-              <a:t>Parallel sessions with git </a:t>
-            </a:r>
-            <a:r>
-              <a:rPr lang="en-US" sz="1600" dirty="0" err="1">
-                <a:solidFill>
-                  <a:schemeClr val="bg1"/>
-                </a:solidFill>
-              </a:rPr>
-              <a:t>worktree</a:t>
-            </a:r>
-            <a:r>
-              <a:rPr lang="en-US" sz="1600" dirty="0">
-                <a:solidFill>
-                  <a:schemeClr val="bg1"/>
-                </a:solidFill>
-              </a:rPr>
-              <a:t> isolation</a:t>
-            </a:r>
-          </a:p>
-          <a:p>
-            <a:endParaRPr lang="en-US" sz="1600" dirty="0">
-              <a:solidFill>
-                <a:schemeClr val="bg1"/>
-              </a:solidFill>
-            </a:endParaRPr>
-          </a:p>
-          <a:p>
-            <a:r>
-              <a:rPr lang="en-US" sz="1600" dirty="0">
-                <a:solidFill>
-                  <a:schemeClr val="bg1"/>
-                </a:solidFill>
-              </a:rPr>
-              <a:t>Visual diff review and server previews</a:t>
-            </a:r>
-          </a:p>
-          <a:p>
-            <a:endParaRPr lang="en-US" sz="1600" dirty="0">
-              <a:solidFill>
-                <a:schemeClr val="bg1"/>
-              </a:solidFill>
-            </a:endParaRPr>
-          </a:p>
-          <a:p>
-            <a:r>
-              <a:rPr lang="en-US" sz="1600" dirty="0">
-                <a:solidFill>
-                  <a:schemeClr val="bg1"/>
-                </a:solidFill>
-              </a:rPr>
-              <a:t>Local or remote (cloud) sessions from</a:t>
-            </a:r>
-            <a:br>
-              <a:rPr lang="en-US" sz="1600" dirty="0">
-                <a:solidFill>
-                  <a:schemeClr val="bg1"/>
-                </a:solidFill>
-              </a:rPr>
-            </a:br>
-            <a:r>
-              <a:rPr lang="en-US" sz="1600" dirty="0">
-                <a:solidFill>
-                  <a:schemeClr val="bg1"/>
-                </a:solidFill>
-              </a:rPr>
-              <a:t> same interface</a:t>
-            </a:r>
-          </a:p>
-          <a:p>
-            <a:endParaRPr lang="en-US" sz="1600" dirty="0">
-              <a:solidFill>
-                <a:schemeClr val="bg1"/>
-              </a:solidFill>
-            </a:endParaRPr>
-          </a:p>
-          <a:p>
-            <a:r>
-              <a:rPr lang="en-US" sz="1600" dirty="0">
-                <a:solidFill>
-                  <a:schemeClr val="bg1"/>
-                </a:solidFill>
-              </a:rPr>
-              <a:t>PR monitoring and status tracking</a:t>
-            </a:r>
-          </a:p>
-          <a:p>
-            <a:endParaRPr lang="en-US" sz="1600" dirty="0">
-              <a:solidFill>
-                <a:schemeClr val="bg1"/>
-              </a:solidFill>
-            </a:endParaRPr>
-          </a:p>
-          <a:p>
-            <a:r>
-              <a:rPr lang="en-US" sz="1600" dirty="0">
-                <a:solidFill>
-                  <a:schemeClr val="bg1"/>
-                </a:solidFill>
-              </a:rPr>
-              <a:t>/desktop </a:t>
-            </a:r>
-            <a:r>
-              <a:rPr lang="en-US" sz="1600" dirty="0" err="1">
-                <a:solidFill>
-                  <a:schemeClr val="bg1"/>
-                </a:solidFill>
-              </a:rPr>
-              <a:t>cmd</a:t>
-            </a:r>
-            <a:r>
-              <a:rPr lang="en-US" sz="1600" dirty="0">
-                <a:solidFill>
-                  <a:schemeClr val="bg1"/>
-                </a:solidFill>
-              </a:rPr>
-              <a:t> moves a CLI session to the app</a:t>
-            </a:r>
-          </a:p>
-          <a:p>
-            <a:endParaRPr lang="en-US" sz="1600" dirty="0">
-              <a:solidFill>
-                <a:schemeClr val="bg1"/>
-              </a:solidFill>
-            </a:endParaRPr>
-          </a:p>
-          <a:p>
-            <a:r>
-              <a:rPr lang="en-US" sz="1600" dirty="0">
-                <a:solidFill>
-                  <a:schemeClr val="bg1"/>
-                </a:solidFill>
-              </a:rPr>
-              <a:t>Best for: non-terminal users, multi-session </a:t>
-            </a:r>
-            <a:br>
-              <a:rPr lang="en-US" sz="1600" dirty="0">
-                <a:solidFill>
-                  <a:schemeClr val="bg1"/>
-                </a:solidFill>
-              </a:rPr>
-            </a:br>
-            <a:r>
-              <a:rPr lang="en-US" sz="1600" dirty="0">
-                <a:solidFill>
-                  <a:schemeClr val="bg1"/>
-                </a:solidFill>
-              </a:rPr>
-              <a:t> management, visual workflows</a:t>
-            </a:r>
-          </a:p>
-        </p:txBody>
-      </p:sp>
-      <p:pic>
-        <p:nvPicPr>
-          <p:cNvPr id="7" name="Picture 6">
-            <a:extLst>
-              <a:ext uri="{FF2B5EF4-FFF2-40B4-BE49-F238E27FC236}">
-                <a16:creationId xmlns:a16="http://schemas.microsoft.com/office/drawing/2014/main" id="{1CE2B5A9-A391-ACE3-A562-6E21FAF6C260}"/>
-              </a:ext>
-            </a:extLst>
-          </p:cNvPr>
-          <p:cNvPicPr>
-            <a:picLocks noChangeAspect="1"/>
-          </p:cNvPicPr>
-          <p:nvPr/>
-        </p:nvPicPr>
-        <p:blipFill>
-          <a:blip r:embed="rId3"/>
-          <a:stretch>
-            <a:fillRect/>
-          </a:stretch>
-        </p:blipFill>
-        <p:spPr>
-          <a:xfrm>
-            <a:off x="1203631" y="1828800"/>
-            <a:ext cx="5912508" cy="3657600"/>
-          </a:xfrm>
-          <a:prstGeom prst="roundRect">
-            <a:avLst>
-              <a:gd name="adj" fmla="val 8594"/>
-            </a:avLst>
-          </a:prstGeom>
-          <a:solidFill>
-            <a:srgbClr val="FFFFFF">
-              <a:shade val="85000"/>
-            </a:srgbClr>
-          </a:solidFill>
-          <a:ln>
-            <a:noFill/>
-          </a:ln>
-          <a:effectLst>
-            <a:reflection blurRad="12700" stA="38000" endPos="28000" dist="5000" dir="5400000" sy="-100000" algn="bl" rotWithShape="0"/>
-          </a:effectLst>
-        </p:spPr>
-      </p:pic>
+            <a:pPr>
+              <a:defRPr sz="1400">
+                <a:solidFill>
+                  <a:srgbClr val="FFFFFF"/>
+                </a:solidFill>
+                <a:latin typeface="Consolas"/>
+              </a:defRPr>
+            </a:pPr>
+            <a:r>
+              <a:t># Step 1: Authenticate with Anthropic</a:t>
+            </a:r>
+          </a:p>
+          <a:p>
+            <a:pPr>
+              <a:defRPr sz="1400">
+                <a:solidFill>
+                  <a:srgbClr val="FFFFFF"/>
+                </a:solidFill>
+                <a:latin typeface="Consolas"/>
+              </a:defRPr>
+            </a:pPr>
+            <a:r>
+              <a:t>claude login</a:t>
+            </a:r>
+          </a:p>
+          <a:p>
+            <a:pPr>
+              <a:defRPr sz="1400">
+                <a:solidFill>
+                  <a:srgbClr val="FFFFFF"/>
+                </a:solidFill>
+                <a:latin typeface="Consolas"/>
+              </a:defRPr>
+            </a:pPr>
+            <a:r>
+              <a:t># Opens browser, you authorize, token is saved locally</a:t>
+            </a:r>
+          </a:p>
+          <a:p>
+            <a:pPr>
+              <a:defRPr sz="1400">
+                <a:solidFill>
+                  <a:srgbClr val="FFFFFF"/>
+                </a:solidFill>
+                <a:latin typeface="Consolas"/>
+              </a:defRPr>
+            </a:pPr>
+            <a:endParaRPr/>
+          </a:p>
+          <a:p>
+            <a:pPr>
+              <a:defRPr sz="1400">
+                <a:solidFill>
+                  <a:srgbClr val="FFFFFF"/>
+                </a:solidFill>
+                <a:latin typeface="Consolas"/>
+              </a:defRPr>
+            </a:pPr>
+            <a:r>
+              <a:t># Step 2: Verify authentication</a:t>
+            </a:r>
+          </a:p>
+          <a:p>
+            <a:pPr>
+              <a:defRPr sz="1400">
+                <a:solidFill>
+                  <a:srgbClr val="FFFFFF"/>
+                </a:solidFill>
+                <a:latin typeface="Consolas"/>
+              </a:defRPr>
+            </a:pPr>
+            <a:r>
+              <a:t>claude whoami</a:t>
+            </a:r>
+          </a:p>
+          <a:p>
+            <a:pPr>
+              <a:defRPr sz="1400">
+                <a:solidFill>
+                  <a:srgbClr val="FFFFFF"/>
+                </a:solidFill>
+                <a:latin typeface="Consolas"/>
+              </a:defRPr>
+            </a:pPr>
+            <a:r>
+              <a:t># Shows your account email and plan tier</a:t>
+            </a:r>
+          </a:p>
+          <a:p>
+            <a:pPr>
+              <a:defRPr sz="1400">
+                <a:solidFill>
+                  <a:srgbClr val="FFFFFF"/>
+                </a:solidFill>
+                <a:latin typeface="Consolas"/>
+              </a:defRPr>
+            </a:pPr>
+            <a:endParaRPr/>
+          </a:p>
+          <a:p>
+            <a:pPr>
+              <a:defRPr sz="1400">
+                <a:solidFill>
+                  <a:srgbClr val="FFFFFF"/>
+                </a:solidFill>
+                <a:latin typeface="Consolas"/>
+              </a:defRPr>
+            </a:pPr>
+            <a:r>
+              <a:t># Step 3: Set default model (optional)</a:t>
+            </a:r>
+          </a:p>
+          <a:p>
+            <a:pPr>
+              <a:defRPr sz="1400">
+                <a:solidFill>
+                  <a:srgbClr val="FFFFFF"/>
+                </a:solidFill>
+                <a:latin typeface="Consolas"/>
+              </a:defRPr>
+            </a:pPr>
+            <a:r>
+              <a:t>claude config set model claude-sonnet-4</a:t>
+            </a:r>
+          </a:p>
+          <a:p>
+            <a:pPr>
+              <a:defRPr sz="1400">
+                <a:solidFill>
+                  <a:srgbClr val="FFFFFF"/>
+                </a:solidFill>
+                <a:latin typeface="Consolas"/>
+              </a:defRPr>
+            </a:pPr>
+            <a:endParaRPr/>
+          </a:p>
+          <a:p>
+            <a:pPr>
+              <a:defRPr sz="1400">
+                <a:solidFill>
+                  <a:srgbClr val="FFFFFF"/>
+                </a:solidFill>
+                <a:latin typeface="Consolas"/>
+              </a:defRPr>
+            </a:pPr>
+            <a:r>
+              <a:t># Step 4: Check all settings</a:t>
+            </a:r>
+          </a:p>
+          <a:p>
+            <a:pPr>
+              <a:defRPr sz="1400">
+                <a:solidFill>
+                  <a:srgbClr val="FFFFFF"/>
+                </a:solidFill>
+                <a:latin typeface="Consolas"/>
+              </a:defRPr>
+            </a:pPr>
+            <a:r>
+              <a:t>claude config list</a:t>
+            </a:r>
+          </a:p>
+        </p:txBody>
+      </p:sp>
     </p:spTree>
   </p:cSld>
   <p:clrMapOvr>
@@ -29522,27 +29209,27 @@
               </a:defRPr>
             </a:pPr>
             <a:r>
-              <a:t>Authentication &amp; Configuration</a:t>
-            </a:r>
-          </a:p>
-        </p:txBody>
-      </p:sp>
-      <p:sp>
-        <p:nvSpPr>
-          <p:cNvPr id="3" name="Rounded Rectangle 2"/>
+              <a:t>Model Selection</a:t>
+            </a:r>
+          </a:p>
+        </p:txBody>
+      </p:sp>
+      <p:sp>
+        <p:nvSpPr>
+          <p:cNvPr id="3" name="Rectangle 2"/>
           <p:cNvSpPr/>
           <p:nvPr/>
         </p:nvSpPr>
         <p:spPr>
           <a:xfrm>
-            <a:off x="914400" y="1645920"/>
-            <a:ext cx="10362895" cy="4114800"/>
-          </a:xfrm>
-          <a:prstGeom prst="roundRect">
+            <a:off x="6077559" y="1371600"/>
+            <a:ext cx="36576" cy="4572000"/>
+          </a:xfrm>
+          <a:prstGeom prst="rect">
             <a:avLst/>
           </a:prstGeom>
           <a:solidFill>
-            <a:srgbClr val="1E1E2E"/>
+            <a:srgbClr val="00D4AA"/>
           </a:solidFill>
           <a:ln>
             <a:noFill/>
@@ -29579,8 +29266,8 @@
         </p:nvSpPr>
         <p:spPr>
           <a:xfrm>
-            <a:off x="1097280" y="1783080"/>
-            <a:ext cx="1828800" cy="365760"/>
+            <a:off x="457200" y="1463040"/>
+            <a:ext cx="5364327" cy="731520"/>
           </a:xfrm>
           <a:prstGeom prst="rect">
             <a:avLst/>
@@ -29593,15 +29280,15 @@
           </a:bodyPr>
           <a:lstStyle/>
           <a:p>
-            <a:pPr>
-              <a:defRPr sz="1200" b="1">
+            <a:pPr algn="ctr">
+              <a:defRPr sz="2800" b="1">
                 <a:solidFill>
                   <a:srgbClr val="00D4AA"/>
                 </a:solidFill>
               </a:defRPr>
             </a:pPr>
             <a:r>
-              <a:t>BASH</a:t>
+              <a:t>Sonnet (Default)</a:t>
             </a:r>
           </a:p>
         </p:txBody>
@@ -29614,8 +29301,8 @@
         </p:nvSpPr>
         <p:spPr>
           <a:xfrm>
-            <a:off x="1097280" y="2194560"/>
-            <a:ext cx="9997135" cy="3291840"/>
+            <a:off x="457200" y="2286000"/>
+            <a:ext cx="5364327" cy="3657600"/>
           </a:xfrm>
           <a:prstGeom prst="rect">
             <a:avLst/>
@@ -29629,165 +29316,195 @@
           <a:lstStyle/>
           <a:p>
             <a:pPr>
-              <a:defRPr sz="1400">
-                <a:solidFill>
-                  <a:srgbClr val="FFFFFF"/>
-                </a:solidFill>
-                <a:latin typeface="Consolas"/>
-              </a:defRPr>
-            </a:pPr>
-            <a:r>
-              <a:t># Step 1: Authenticate with Anthropic</a:t>
-            </a:r>
-          </a:p>
-          <a:p>
-            <a:pPr>
-              <a:defRPr sz="1400">
-                <a:solidFill>
-                  <a:srgbClr val="FFFFFF"/>
-                </a:solidFill>
-                <a:latin typeface="Consolas"/>
-              </a:defRPr>
-            </a:pPr>
-            <a:r>
-              <a:t>claude login</a:t>
-            </a:r>
-          </a:p>
-          <a:p>
-            <a:pPr>
-              <a:defRPr sz="1400">
-                <a:solidFill>
-                  <a:srgbClr val="FFFFFF"/>
-                </a:solidFill>
-                <a:latin typeface="Consolas"/>
-              </a:defRPr>
-            </a:pPr>
-            <a:r>
-              <a:t># Opens browser, you authorize, token is saved locally</a:t>
-            </a:r>
-          </a:p>
-          <a:p>
-            <a:pPr>
-              <a:defRPr sz="1400">
-                <a:solidFill>
-                  <a:srgbClr val="FFFFFF"/>
-                </a:solidFill>
-                <a:latin typeface="Consolas"/>
-              </a:defRPr>
-            </a:pPr>
-            <a:endParaRPr/>
-          </a:p>
-          <a:p>
-            <a:pPr>
-              <a:defRPr sz="1400">
-                <a:solidFill>
-                  <a:srgbClr val="FFFFFF"/>
-                </a:solidFill>
-                <a:latin typeface="Consolas"/>
-              </a:defRPr>
-            </a:pPr>
-            <a:r>
-              <a:t># Step 2: Verify authentication</a:t>
-            </a:r>
-          </a:p>
-          <a:p>
-            <a:pPr>
-              <a:defRPr sz="1400">
-                <a:solidFill>
-                  <a:srgbClr val="FFFFFF"/>
-                </a:solidFill>
-                <a:latin typeface="Consolas"/>
-              </a:defRPr>
-            </a:pPr>
-            <a:r>
-              <a:t>claude whoami</a:t>
-            </a:r>
-          </a:p>
-          <a:p>
-            <a:pPr>
-              <a:defRPr sz="1400">
-                <a:solidFill>
-                  <a:srgbClr val="FFFFFF"/>
-                </a:solidFill>
-                <a:latin typeface="Consolas"/>
-              </a:defRPr>
-            </a:pPr>
-            <a:r>
-              <a:t># Shows your account email and plan tier</a:t>
-            </a:r>
-          </a:p>
-          <a:p>
-            <a:pPr>
-              <a:defRPr sz="1400">
-                <a:solidFill>
-                  <a:srgbClr val="FFFFFF"/>
-                </a:solidFill>
-                <a:latin typeface="Consolas"/>
-              </a:defRPr>
-            </a:pPr>
-            <a:endParaRPr/>
-          </a:p>
-          <a:p>
-            <a:pPr>
-              <a:defRPr sz="1400">
-                <a:solidFill>
-                  <a:srgbClr val="FFFFFF"/>
-                </a:solidFill>
-                <a:latin typeface="Consolas"/>
-              </a:defRPr>
-            </a:pPr>
-            <a:r>
-              <a:t># Step 3: Set default model (optional)</a:t>
-            </a:r>
-          </a:p>
-          <a:p>
-            <a:pPr>
-              <a:defRPr sz="1400">
-                <a:solidFill>
-                  <a:srgbClr val="FFFFFF"/>
-                </a:solidFill>
-                <a:latin typeface="Consolas"/>
-              </a:defRPr>
-            </a:pPr>
-            <a:r>
-              <a:t>claude config set model claude-sonnet-4</a:t>
-            </a:r>
-          </a:p>
-          <a:p>
-            <a:pPr>
-              <a:defRPr sz="1400">
-                <a:solidFill>
-                  <a:srgbClr val="FFFFFF"/>
-                </a:solidFill>
-                <a:latin typeface="Consolas"/>
-              </a:defRPr>
-            </a:pPr>
-            <a:endParaRPr/>
-          </a:p>
-          <a:p>
-            <a:pPr>
-              <a:defRPr sz="1400">
-                <a:solidFill>
-                  <a:srgbClr val="FFFFFF"/>
-                </a:solidFill>
-                <a:latin typeface="Consolas"/>
-              </a:defRPr>
-            </a:pPr>
-            <a:r>
-              <a:t># Step 4: Check all settings</a:t>
-            </a:r>
-          </a:p>
-          <a:p>
-            <a:pPr>
-              <a:defRPr sz="1400">
-                <a:solidFill>
-                  <a:srgbClr val="FFFFFF"/>
-                </a:solidFill>
-                <a:latin typeface="Consolas"/>
-              </a:defRPr>
-            </a:pPr>
-            <a:r>
-              <a:t>claude config list</a:t>
+              <a:spcAft>
+                <a:spcPts val="1200"/>
+              </a:spcAft>
+              <a:defRPr sz="1800">
+                <a:solidFill>
+                  <a:srgbClr val="FFFFFF"/>
+                </a:solidFill>
+              </a:defRPr>
+            </a:pPr>
+            <a:r>
+              <a:t>  Fast, efficient, great for most tasks</a:t>
+            </a:r>
+          </a:p>
+          <a:p>
+            <a:pPr>
+              <a:spcAft>
+                <a:spcPts val="1200"/>
+              </a:spcAft>
+              <a:defRPr sz="1800">
+                <a:solidFill>
+                  <a:srgbClr val="FFFFFF"/>
+                </a:solidFill>
+              </a:defRPr>
+            </a:pPr>
+            <a:r>
+              <a:t>  Code generation, editing, debugging</a:t>
+            </a:r>
+          </a:p>
+          <a:p>
+            <a:pPr>
+              <a:spcAft>
+                <a:spcPts val="1200"/>
+              </a:spcAft>
+              <a:defRPr sz="1800">
+                <a:solidFill>
+                  <a:srgbClr val="FFFFFF"/>
+                </a:solidFill>
+              </a:defRPr>
+            </a:pPr>
+            <a:r>
+              <a:t>  Lower token cost per request</a:t>
+            </a:r>
+          </a:p>
+          <a:p>
+            <a:pPr>
+              <a:spcAft>
+                <a:spcPts val="1200"/>
+              </a:spcAft>
+              <a:defRPr sz="1800">
+                <a:solidFill>
+                  <a:srgbClr val="FFFFFF"/>
+                </a:solidFill>
+              </a:defRPr>
+            </a:pPr>
+            <a:r>
+              <a:t>  Best for: everyday development work</a:t>
+            </a:r>
+          </a:p>
+        </p:txBody>
+      </p:sp>
+      <p:sp>
+        <p:nvSpPr>
+          <p:cNvPr id="6" name="TextBox 5"/>
+          <p:cNvSpPr txBox="1"/>
+          <p:nvPr/>
+        </p:nvSpPr>
+        <p:spPr>
+          <a:xfrm>
+            <a:off x="6370167" y="1463040"/>
+            <a:ext cx="5364327" cy="731520"/>
+          </a:xfrm>
+          <a:prstGeom prst="rect">
+            <a:avLst/>
+          </a:prstGeom>
+          <a:noFill/>
+        </p:spPr>
+        <p:txBody>
+          <a:bodyPr wrap="none">
+            <a:spAutoFit/>
+          </a:bodyPr>
+          <a:lstStyle/>
+          <a:p>
+            <a:pPr algn="ctr">
+              <a:defRPr sz="2800" b="1">
+                <a:solidFill>
+                  <a:srgbClr val="E86B4A"/>
+                </a:solidFill>
+              </a:defRPr>
+            </a:pPr>
+            <a:r>
+              <a:t>Opus (Premium)</a:t>
+            </a:r>
+          </a:p>
+        </p:txBody>
+      </p:sp>
+      <p:sp>
+        <p:nvSpPr>
+          <p:cNvPr id="7" name="TextBox 6"/>
+          <p:cNvSpPr txBox="1"/>
+          <p:nvPr/>
+        </p:nvSpPr>
+        <p:spPr>
+          <a:xfrm>
+            <a:off x="6370167" y="2286000"/>
+            <a:ext cx="5364327" cy="3657600"/>
+          </a:xfrm>
+          <a:prstGeom prst="rect">
+            <a:avLst/>
+          </a:prstGeom>
+          <a:noFill/>
+        </p:spPr>
+        <p:txBody>
+          <a:bodyPr wrap="square">
+            <a:spAutoFit/>
+          </a:bodyPr>
+          <a:lstStyle/>
+          <a:p>
+            <a:pPr>
+              <a:spcAft>
+                <a:spcPts val="1200"/>
+              </a:spcAft>
+              <a:defRPr sz="1800">
+                <a:solidFill>
+                  <a:srgbClr val="FFFFFF"/>
+                </a:solidFill>
+              </a:defRPr>
+            </a:pPr>
+            <a:r>
+              <a:t>  Deeper reasoning, complex architecture</a:t>
+            </a:r>
+          </a:p>
+          <a:p>
+            <a:pPr>
+              <a:spcAft>
+                <a:spcPts val="1200"/>
+              </a:spcAft>
+              <a:defRPr sz="1800">
+                <a:solidFill>
+                  <a:srgbClr val="FFFFFF"/>
+                </a:solidFill>
+              </a:defRPr>
+            </a:pPr>
+            <a:r>
+              <a:t>  Better at multi-file refactoring</a:t>
+            </a:r>
+          </a:p>
+          <a:p>
+            <a:pPr>
+              <a:spcAft>
+                <a:spcPts val="1200"/>
+              </a:spcAft>
+              <a:defRPr sz="1800">
+                <a:solidFill>
+                  <a:srgbClr val="FFFFFF"/>
+                </a:solidFill>
+              </a:defRPr>
+            </a:pPr>
+            <a:r>
+              <a:t>  Higher token cost but fewer iterations</a:t>
+            </a:r>
+          </a:p>
+          <a:p>
+            <a:pPr>
+              <a:spcAft>
+                <a:spcPts val="1200"/>
+              </a:spcAft>
+              <a:defRPr sz="1800">
+                <a:solidFill>
+                  <a:srgbClr val="FFFFFF"/>
+                </a:solidFill>
+              </a:defRPr>
+            </a:pPr>
+            <a:r>
+              <a:t>  Best for: hard problems, security reviews</a:t>
+            </a:r>
+          </a:p>
+          <a:p>
+            <a:pPr>
+              <a:spcAft>
+                <a:spcPts val="1200"/>
+              </a:spcAft>
+              <a:defRPr sz="1800">
+                <a:solidFill>
+                  <a:srgbClr val="FFFFFF"/>
+                </a:solidFill>
+              </a:defRPr>
+            </a:pPr>
+            <a:r>
+              <a:t>  Switch with: /model opus</a:t>
             </a:r>
           </a:p>
         </p:txBody>
@@ -29833,8 +29550,8 @@
         </p:nvSpPr>
         <p:spPr>
           <a:xfrm>
-            <a:off x="457200" y="457200"/>
-            <a:ext cx="11277295" cy="731520"/>
+            <a:off x="457200" y="1828800"/>
+            <a:ext cx="11277295" cy="1371600"/>
           </a:xfrm>
           <a:prstGeom prst="rect">
             <a:avLst/>
@@ -29848,14 +29565,14 @@
           <a:lstStyle/>
           <a:p>
             <a:pPr algn="ctr">
-              <a:defRPr sz="3600" b="1">
-                <a:solidFill>
-                  <a:srgbClr val="FFFFFF"/>
-                </a:solidFill>
-              </a:defRPr>
-            </a:pPr>
-            <a:r>
-              <a:t>Model Selection</a:t>
+              <a:defRPr sz="9600" b="1">
+                <a:solidFill>
+                  <a:srgbClr val="00D4AA"/>
+                </a:solidFill>
+              </a:defRPr>
+            </a:pPr>
+            <a:r>
+              <a:t>DEMO</a:t>
             </a:r>
           </a:p>
         </p:txBody>
@@ -29868,8 +29585,8 @@
         </p:nvSpPr>
         <p:spPr>
           <a:xfrm>
-            <a:off x="6077559" y="1371600"/>
-            <a:ext cx="36576" cy="4572000"/>
+            <a:off x="4724247" y="3474720"/>
+            <a:ext cx="2743200" cy="54864"/>
           </a:xfrm>
           <a:prstGeom prst="rect">
             <a:avLst/>
@@ -29912,43 +29629,8 @@
         </p:nvSpPr>
         <p:spPr>
           <a:xfrm>
-            <a:off x="457200" y="1463040"/>
-            <a:ext cx="5364327" cy="731520"/>
-          </a:xfrm>
-          <a:prstGeom prst="rect">
-            <a:avLst/>
-          </a:prstGeom>
-          <a:noFill/>
-        </p:spPr>
-        <p:txBody>
-          <a:bodyPr wrap="none">
-            <a:spAutoFit/>
-          </a:bodyPr>
-          <a:lstStyle/>
-          <a:p>
-            <a:pPr algn="ctr">
-              <a:defRPr sz="2800" b="1">
-                <a:solidFill>
-                  <a:srgbClr val="00D4AA"/>
-                </a:solidFill>
-              </a:defRPr>
-            </a:pPr>
-            <a:r>
-              <a:t>Sonnet (Default)</a:t>
-            </a:r>
-          </a:p>
-        </p:txBody>
-      </p:sp>
-      <p:sp>
-        <p:nvSpPr>
-          <p:cNvPr id="5" name="TextBox 4"/>
-          <p:cNvSpPr txBox="1"/>
-          <p:nvPr/>
-        </p:nvSpPr>
-        <p:spPr>
-          <a:xfrm>
-            <a:off x="457200" y="2286000"/>
-            <a:ext cx="5364327" cy="3657600"/>
+            <a:off x="457200" y="3840480"/>
+            <a:ext cx="11277295" cy="914400"/>
           </a:xfrm>
           <a:prstGeom prst="rect">
             <a:avLst/>
@@ -29961,196 +29643,15 @@
           </a:bodyPr>
           <a:lstStyle/>
           <a:p>
-            <a:pPr>
-              <a:spcAft>
-                <a:spcPts val="1200"/>
-              </a:spcAft>
-              <a:defRPr sz="1800">
-                <a:solidFill>
-                  <a:srgbClr val="FFFFFF"/>
-                </a:solidFill>
-              </a:defRPr>
-            </a:pPr>
-            <a:r>
-              <a:t>  Fast, efficient, great for most tasks</a:t>
-            </a:r>
-          </a:p>
-          <a:p>
-            <a:pPr>
-              <a:spcAft>
-                <a:spcPts val="1200"/>
-              </a:spcAft>
-              <a:defRPr sz="1800">
-                <a:solidFill>
-                  <a:srgbClr val="FFFFFF"/>
-                </a:solidFill>
-              </a:defRPr>
-            </a:pPr>
-            <a:r>
-              <a:t>  Code generation, editing, debugging</a:t>
-            </a:r>
-          </a:p>
-          <a:p>
-            <a:pPr>
-              <a:spcAft>
-                <a:spcPts val="1200"/>
-              </a:spcAft>
-              <a:defRPr sz="1800">
-                <a:solidFill>
-                  <a:srgbClr val="FFFFFF"/>
-                </a:solidFill>
-              </a:defRPr>
-            </a:pPr>
-            <a:r>
-              <a:t>  Lower token cost per request</a:t>
-            </a:r>
-          </a:p>
-          <a:p>
-            <a:pPr>
-              <a:spcAft>
-                <a:spcPts val="1200"/>
-              </a:spcAft>
-              <a:defRPr sz="1800">
-                <a:solidFill>
-                  <a:srgbClr val="FFFFFF"/>
-                </a:solidFill>
-              </a:defRPr>
-            </a:pPr>
-            <a:r>
-              <a:t>  Best for: everyday development work</a:t>
-            </a:r>
-          </a:p>
-        </p:txBody>
-      </p:sp>
-      <p:sp>
-        <p:nvSpPr>
-          <p:cNvPr id="6" name="TextBox 5"/>
-          <p:cNvSpPr txBox="1"/>
-          <p:nvPr/>
-        </p:nvSpPr>
-        <p:spPr>
-          <a:xfrm>
-            <a:off x="6370167" y="1463040"/>
-            <a:ext cx="5364327" cy="731520"/>
-          </a:xfrm>
-          <a:prstGeom prst="rect">
-            <a:avLst/>
-          </a:prstGeom>
-          <a:noFill/>
-        </p:spPr>
-        <p:txBody>
-          <a:bodyPr wrap="none">
-            <a:spAutoFit/>
-          </a:bodyPr>
-          <a:lstStyle/>
-          <a:p>
             <a:pPr algn="ctr">
-              <a:defRPr sz="2800" b="1">
-                <a:solidFill>
-                  <a:srgbClr val="E86B4A"/>
-                </a:solidFill>
-              </a:defRPr>
-            </a:pPr>
-            <a:r>
-              <a:t>Opus (Premium)</a:t>
-            </a:r>
-          </a:p>
-        </p:txBody>
-      </p:sp>
-      <p:sp>
-        <p:nvSpPr>
-          <p:cNvPr id="7" name="TextBox 6"/>
-          <p:cNvSpPr txBox="1"/>
-          <p:nvPr/>
-        </p:nvSpPr>
-        <p:spPr>
-          <a:xfrm>
-            <a:off x="6370167" y="2286000"/>
-            <a:ext cx="5364327" cy="3657600"/>
-          </a:xfrm>
-          <a:prstGeom prst="rect">
-            <a:avLst/>
-          </a:prstGeom>
-          <a:noFill/>
-        </p:spPr>
-        <p:txBody>
-          <a:bodyPr wrap="square">
-            <a:spAutoFit/>
-          </a:bodyPr>
-          <a:lstStyle/>
-          <a:p>
-            <a:pPr>
-              <a:spcAft>
-                <a:spcPts val="1200"/>
-              </a:spcAft>
-              <a:defRPr sz="1800">
-                <a:solidFill>
-                  <a:srgbClr val="FFFFFF"/>
-                </a:solidFill>
-              </a:defRPr>
-            </a:pPr>
-            <a:r>
-              <a:t>  Deeper reasoning, complex architecture</a:t>
-            </a:r>
-          </a:p>
-          <a:p>
-            <a:pPr>
-              <a:spcAft>
-                <a:spcPts val="1200"/>
-              </a:spcAft>
-              <a:defRPr sz="1800">
-                <a:solidFill>
-                  <a:srgbClr val="FFFFFF"/>
-                </a:solidFill>
-              </a:defRPr>
-            </a:pPr>
-            <a:r>
-              <a:t>  Better at multi-file refactoring</a:t>
-            </a:r>
-          </a:p>
-          <a:p>
-            <a:pPr>
-              <a:spcAft>
-                <a:spcPts val="1200"/>
-              </a:spcAft>
-              <a:defRPr sz="1800">
-                <a:solidFill>
-                  <a:srgbClr val="FFFFFF"/>
-                </a:solidFill>
-              </a:defRPr>
-            </a:pPr>
-            <a:r>
-              <a:t>  Higher token cost but fewer iterations</a:t>
-            </a:r>
-          </a:p>
-          <a:p>
-            <a:pPr>
-              <a:spcAft>
-                <a:spcPts val="1200"/>
-              </a:spcAft>
-              <a:defRPr sz="1800">
-                <a:solidFill>
-                  <a:srgbClr val="FFFFFF"/>
-                </a:solidFill>
-              </a:defRPr>
-            </a:pPr>
-            <a:r>
-              <a:t>  Best for: hard problems, security reviews</a:t>
-            </a:r>
-          </a:p>
-          <a:p>
-            <a:pPr>
-              <a:spcAft>
-                <a:spcPts val="1200"/>
-              </a:spcAft>
-              <a:defRPr sz="1800">
-                <a:solidFill>
-                  <a:srgbClr val="FFFFFF"/>
-                </a:solidFill>
-              </a:defRPr>
-            </a:pPr>
-            <a:r>
-              <a:t>  Switch with: /model opus</a:t>
+              <a:defRPr sz="3200" b="1">
+                <a:solidFill>
+                  <a:srgbClr val="FFFFFF"/>
+                </a:solidFill>
+              </a:defRPr>
+            </a:pPr>
+            <a:r>
+              <a:t>First Command Walkthrough</a:t>
             </a:r>
           </a:p>
         </p:txBody>
@@ -30190,49 +29691,14 @@
       </p:grpSpPr>
       <p:sp>
         <p:nvSpPr>
-          <p:cNvPr id="2" name="TextBox 1"/>
-          <p:cNvSpPr txBox="1"/>
-          <p:nvPr/>
-        </p:nvSpPr>
-        <p:spPr>
-          <a:xfrm>
-            <a:off x="457200" y="1828800"/>
-            <a:ext cx="11277295" cy="1371600"/>
-          </a:xfrm>
-          <a:prstGeom prst="rect">
-            <a:avLst/>
-          </a:prstGeom>
-          <a:noFill/>
-        </p:spPr>
-        <p:txBody>
-          <a:bodyPr wrap="none">
-            <a:spAutoFit/>
-          </a:bodyPr>
-          <a:lstStyle/>
-          <a:p>
-            <a:pPr algn="ctr">
-              <a:defRPr sz="9600" b="1">
-                <a:solidFill>
-                  <a:srgbClr val="00D4AA"/>
-                </a:solidFill>
-              </a:defRPr>
-            </a:pPr>
-            <a:r>
-              <a:t>DEMO</a:t>
-            </a:r>
-          </a:p>
-        </p:txBody>
-      </p:sp>
-      <p:sp>
-        <p:nvSpPr>
-          <p:cNvPr id="3" name="Rectangle 2"/>
+          <p:cNvPr id="2" name="Rectangle 1"/>
           <p:cNvSpPr/>
           <p:nvPr/>
         </p:nvSpPr>
         <p:spPr>
           <a:xfrm>
-            <a:off x="4724247" y="3474720"/>
-            <a:ext cx="2743200" cy="54864"/>
+            <a:off x="0" y="1828800"/>
+            <a:ext cx="137160" cy="3200400"/>
           </a:xfrm>
           <a:prstGeom prst="rect">
             <a:avLst/>
@@ -30269,14 +29735,14 @@
       </p:sp>
       <p:sp>
         <p:nvSpPr>
-          <p:cNvPr id="4" name="TextBox 3"/>
+          <p:cNvPr id="3" name="TextBox 2"/>
           <p:cNvSpPr txBox="1"/>
           <p:nvPr/>
         </p:nvSpPr>
         <p:spPr>
           <a:xfrm>
-            <a:off x="457200" y="3840480"/>
-            <a:ext cx="11277295" cy="914400"/>
+            <a:off x="457200" y="2286000"/>
+            <a:ext cx="11277295" cy="1371600"/>
           </a:xfrm>
           <a:prstGeom prst="rect">
             <a:avLst/>
@@ -30289,15 +29755,50 @@
           </a:bodyPr>
           <a:lstStyle/>
           <a:p>
-            <a:pPr algn="ctr">
-              <a:defRPr sz="3200" b="1">
-                <a:solidFill>
-                  <a:srgbClr val="FFFFFF"/>
-                </a:solidFill>
-              </a:defRPr>
-            </a:pPr>
-            <a:r>
-              <a:t>First Command Walkthrough</a:t>
+            <a:pPr>
+              <a:defRPr sz="5600" b="1">
+                <a:solidFill>
+                  <a:srgbClr val="FFFFFF"/>
+                </a:solidFill>
+              </a:defRPr>
+            </a:pPr>
+            <a:r>
+              <a:t>The Agentic Loop</a:t>
+            </a:r>
+          </a:p>
+        </p:txBody>
+      </p:sp>
+      <p:sp>
+        <p:nvSpPr>
+          <p:cNvPr id="4" name="TextBox 3"/>
+          <p:cNvSpPr txBox="1"/>
+          <p:nvPr/>
+        </p:nvSpPr>
+        <p:spPr>
+          <a:xfrm>
+            <a:off x="457200" y="3840480"/>
+            <a:ext cx="11277295" cy="914400"/>
+          </a:xfrm>
+          <a:prstGeom prst="rect">
+            <a:avLst/>
+          </a:prstGeom>
+          <a:noFill/>
+        </p:spPr>
+        <p:txBody>
+          <a:bodyPr wrap="square">
+            <a:spAutoFit/>
+          </a:bodyPr>
+          <a:lstStyle/>
+          <a:p>
+            <a:pPr>
+              <a:defRPr sz="2400">
+                <a:solidFill>
+                  <a:srgbClr val="8B95A5"/>
+                </a:solidFill>
+              </a:defRPr>
+            </a:pPr>
+            <a:r>
+              <a:t>How Claude Code Actually Works</a:t>
             </a:r>
           </a:p>
         </p:txBody>
@@ -30337,58 +29838,14 @@
       </p:grpSpPr>
       <p:sp>
         <p:nvSpPr>
-          <p:cNvPr id="2" name="Rectangle 1"/>
-          <p:cNvSpPr/>
-          <p:nvPr/>
-        </p:nvSpPr>
-        <p:spPr>
-          <a:xfrm>
-            <a:off x="0" y="1828800"/>
-            <a:ext cx="137160" cy="3200400"/>
-          </a:xfrm>
-          <a:prstGeom prst="rect">
-            <a:avLst/>
-          </a:prstGeom>
-          <a:solidFill>
-            <a:srgbClr val="00D4AA"/>
-          </a:solidFill>
-          <a:ln>
-            <a:noFill/>
-          </a:ln>
-        </p:spPr>
-        <p:style>
-          <a:lnRef idx="1">
-            <a:schemeClr val="accent1"/>
-          </a:lnRef>
-          <a:fillRef idx="3">
-            <a:schemeClr val="accent1"/>
-          </a:fillRef>
-          <a:effectRef idx="2">
-            <a:schemeClr val="accent1"/>
-          </a:effectRef>
-          <a:fontRef idx="minor">
-            <a:schemeClr val="lt1"/>
-          </a:fontRef>
-        </p:style>
-        <p:txBody>
-          <a:bodyPr rtlCol="0" anchor="ctr"/>
-          <a:lstStyle/>
-          <a:p>
-            <a:pPr algn="ctr"/>
-            <a:endParaRPr/>
-          </a:p>
-        </p:txBody>
-      </p:sp>
-      <p:sp>
-        <p:nvSpPr>
-          <p:cNvPr id="3" name="TextBox 2"/>
+          <p:cNvPr id="2" name="TextBox 1"/>
           <p:cNvSpPr txBox="1"/>
           <p:nvPr/>
         </p:nvSpPr>
         <p:spPr>
           <a:xfrm>
-            <a:off x="457200" y="2286000"/>
-            <a:ext cx="11277295" cy="1371600"/>
+            <a:off x="731520" y="2286000"/>
+            <a:ext cx="10728655" cy="1371600"/>
           </a:xfrm>
           <a:prstGeom prst="rect">
             <a:avLst/>
@@ -30401,8 +29858,8 @@
           </a:bodyPr>
           <a:lstStyle/>
           <a:p>
-            <a:pPr>
-              <a:defRPr sz="5600" b="1">
+            <a:pPr algn="ctr">
+              <a:defRPr sz="5200" b="1">
                 <a:solidFill>
                   <a:srgbClr val="FFFFFF"/>
                 </a:solidFill>
@@ -30416,14 +29873,14 @@
       </p:sp>
       <p:sp>
         <p:nvSpPr>
-          <p:cNvPr id="4" name="TextBox 3"/>
+          <p:cNvPr id="3" name="TextBox 2"/>
           <p:cNvSpPr txBox="1"/>
           <p:nvPr/>
         </p:nvSpPr>
         <p:spPr>
           <a:xfrm>
-            <a:off x="457200" y="3840480"/>
-            <a:ext cx="11277295" cy="914400"/>
+            <a:off x="914400" y="3840480"/>
+            <a:ext cx="10362895" cy="914400"/>
           </a:xfrm>
           <a:prstGeom prst="rect">
             <a:avLst/>
@@ -30436,7 +29893,7 @@
           </a:bodyPr>
           <a:lstStyle/>
           <a:p>
-            <a:pPr>
+            <a:pPr algn="ctr">
               <a:defRPr sz="2400">
                 <a:solidFill>
                   <a:srgbClr val="8B95A5"/>
@@ -30444,7 +29901,7 @@
               </a:defRPr>
             </a:pPr>
             <a:r>
-              <a:t>How Claude Code Actually Works</a:t>
+              <a:t>Read → Analyze → Plan → Execute → Verify</a:t>
             </a:r>
           </a:p>
         </p:txBody>
@@ -30490,8 +29947,122 @@
         </p:nvSpPr>
         <p:spPr>
           <a:xfrm>
-            <a:off x="731520" y="2286000"/>
-            <a:ext cx="10728655" cy="1371600"/>
+            <a:off x="457200" y="457200"/>
+            <a:ext cx="11277295" cy="731520"/>
+          </a:xfrm>
+          <a:prstGeom prst="rect">
+            <a:avLst/>
+          </a:prstGeom>
+          <a:noFill/>
+        </p:spPr>
+        <p:txBody>
+          <a:bodyPr wrap="none">
+            <a:spAutoFit/>
+          </a:bodyPr>
+          <a:lstStyle/>
+          <a:p>
+            <a:pPr algn="ctr">
+              <a:defRPr sz="3600" b="1">
+                <a:solidFill>
+                  <a:srgbClr val="FFFFFF"/>
+                </a:solidFill>
+              </a:defRPr>
+            </a:pPr>
+            <a:r>
+              <a:t>Stage 1: Read</a:t>
+            </a:r>
+          </a:p>
+        </p:txBody>
+      </p:sp>
+      <p:sp>
+        <p:nvSpPr>
+          <p:cNvPr id="3" name="Rectangle 2"/>
+          <p:cNvSpPr/>
+          <p:nvPr/>
+        </p:nvSpPr>
+        <p:spPr>
+          <a:xfrm>
+            <a:off x="6077559" y="1371600"/>
+            <a:ext cx="36576" cy="4572000"/>
+          </a:xfrm>
+          <a:prstGeom prst="rect">
+            <a:avLst/>
+          </a:prstGeom>
+          <a:solidFill>
+            <a:srgbClr val="00D4AA"/>
+          </a:solidFill>
+          <a:ln>
+            <a:noFill/>
+          </a:ln>
+        </p:spPr>
+        <p:style>
+          <a:lnRef idx="1">
+            <a:schemeClr val="accent1"/>
+          </a:lnRef>
+          <a:fillRef idx="3">
+            <a:schemeClr val="accent1"/>
+          </a:fillRef>
+          <a:effectRef idx="2">
+            <a:schemeClr val="accent1"/>
+          </a:effectRef>
+          <a:fontRef idx="minor">
+            <a:schemeClr val="lt1"/>
+          </a:fontRef>
+        </p:style>
+        <p:txBody>
+          <a:bodyPr rtlCol="0" anchor="ctr"/>
+          <a:lstStyle/>
+          <a:p>
+            <a:pPr algn="ctr"/>
+            <a:endParaRPr/>
+          </a:p>
+        </p:txBody>
+      </p:sp>
+      <p:sp>
+        <p:nvSpPr>
+          <p:cNvPr id="4" name="TextBox 3"/>
+          <p:cNvSpPr txBox="1"/>
+          <p:nvPr/>
+        </p:nvSpPr>
+        <p:spPr>
+          <a:xfrm>
+            <a:off x="457200" y="1463040"/>
+            <a:ext cx="5364327" cy="731520"/>
+          </a:xfrm>
+          <a:prstGeom prst="rect">
+            <a:avLst/>
+          </a:prstGeom>
+          <a:noFill/>
+        </p:spPr>
+        <p:txBody>
+          <a:bodyPr wrap="none">
+            <a:spAutoFit/>
+          </a:bodyPr>
+          <a:lstStyle/>
+          <a:p>
+            <a:pPr algn="ctr">
+              <a:defRPr sz="2800" b="1">
+                <a:solidFill>
+                  <a:srgbClr val="00D4AA"/>
+                </a:solidFill>
+              </a:defRPr>
+            </a:pPr>
+            <a:r>
+              <a:t>What Claude Reads</a:t>
+            </a:r>
+          </a:p>
+        </p:txBody>
+      </p:sp>
+      <p:sp>
+        <p:nvSpPr>
+          <p:cNvPr id="5" name="TextBox 4"/>
+          <p:cNvSpPr txBox="1"/>
+          <p:nvPr/>
+        </p:nvSpPr>
+        <p:spPr>
+          <a:xfrm>
+            <a:off x="457200" y="2286000"/>
+            <a:ext cx="5364327" cy="3657600"/>
           </a:xfrm>
           <a:prstGeom prst="rect">
             <a:avLst/>
@@ -30504,29 +30075,127 @@
           </a:bodyPr>
           <a:lstStyle/>
           <a:p>
+            <a:pPr>
+              <a:spcAft>
+                <a:spcPts val="1200"/>
+              </a:spcAft>
+              <a:defRPr sz="1800">
+                <a:solidFill>
+                  <a:srgbClr val="FFFFFF"/>
+                </a:solidFill>
+              </a:defRPr>
+            </a:pPr>
+            <a:r>
+              <a:t>  CLAUDE.md and project configuration</a:t>
+            </a:r>
+          </a:p>
+          <a:p>
+            <a:pPr>
+              <a:spcAft>
+                <a:spcPts val="1200"/>
+              </a:spcAft>
+              <a:defRPr sz="1800">
+                <a:solidFill>
+                  <a:srgbClr val="FFFFFF"/>
+                </a:solidFill>
+              </a:defRPr>
+            </a:pPr>
+            <a:r>
+              <a:t>  Files you @ mention explicitly</a:t>
+            </a:r>
+          </a:p>
+          <a:p>
+            <a:pPr>
+              <a:spcAft>
+                <a:spcPts val="1200"/>
+              </a:spcAft>
+              <a:defRPr sz="1800">
+                <a:solidFill>
+                  <a:srgbClr val="FFFFFF"/>
+                </a:solidFill>
+              </a:defRPr>
+            </a:pPr>
+            <a:r>
+              <a:t>  Files discovered via search and grep</a:t>
+            </a:r>
+          </a:p>
+          <a:p>
+            <a:pPr>
+              <a:spcAft>
+                <a:spcPts val="1200"/>
+              </a:spcAft>
+              <a:defRPr sz="1800">
+                <a:solidFill>
+                  <a:srgbClr val="FFFFFF"/>
+                </a:solidFill>
+              </a:defRPr>
+            </a:pPr>
+            <a:r>
+              <a:t>  Directory structure and file relationships</a:t>
+            </a:r>
+          </a:p>
+          <a:p>
+            <a:pPr>
+              <a:spcAft>
+                <a:spcPts val="1200"/>
+              </a:spcAft>
+              <a:defRPr sz="1800">
+                <a:solidFill>
+                  <a:srgbClr val="FFFFFF"/>
+                </a:solidFill>
+              </a:defRPr>
+            </a:pPr>
+            <a:r>
+              <a:t>  Git history and recent changes</a:t>
+            </a:r>
+          </a:p>
+        </p:txBody>
+      </p:sp>
+      <p:sp>
+        <p:nvSpPr>
+          <p:cNvPr id="6" name="TextBox 5"/>
+          <p:cNvSpPr txBox="1"/>
+          <p:nvPr/>
+        </p:nvSpPr>
+        <p:spPr>
+          <a:xfrm>
+            <a:off x="6370167" y="1463040"/>
+            <a:ext cx="5364327" cy="731520"/>
+          </a:xfrm>
+          <a:prstGeom prst="rect">
+            <a:avLst/>
+          </a:prstGeom>
+          <a:noFill/>
+        </p:spPr>
+        <p:txBody>
+          <a:bodyPr wrap="none">
+            <a:spAutoFit/>
+          </a:bodyPr>
+          <a:lstStyle/>
+          <a:p>
             <a:pPr algn="ctr">
-              <a:defRPr sz="5200" b="1">
-                <a:solidFill>
-                  <a:srgbClr val="FFFFFF"/>
-                </a:solidFill>
-              </a:defRPr>
-            </a:pPr>
-            <a:r>
-              <a:t>The Agentic Loop</a:t>
-            </a:r>
-          </a:p>
-        </p:txBody>
-      </p:sp>
-      <p:sp>
-        <p:nvSpPr>
-          <p:cNvPr id="3" name="TextBox 2"/>
+              <a:defRPr sz="2800" b="1">
+                <a:solidFill>
+                  <a:srgbClr val="E86B4A"/>
+                </a:solidFill>
+              </a:defRPr>
+            </a:pPr>
+            <a:r>
+              <a:t>Why It Matters</a:t>
+            </a:r>
+          </a:p>
+        </p:txBody>
+      </p:sp>
+      <p:sp>
+        <p:nvSpPr>
+          <p:cNvPr id="7" name="TextBox 6"/>
           <p:cNvSpPr txBox="1"/>
           <p:nvPr/>
         </p:nvSpPr>
         <p:spPr>
           <a:xfrm>
-            <a:off x="914400" y="3840480"/>
-            <a:ext cx="10362895" cy="914400"/>
+            <a:off x="6370167" y="2286000"/>
+            <a:ext cx="5364327" cy="3657600"/>
           </a:xfrm>
           <a:prstGeom prst="rect">
             <a:avLst/>
@@ -30539,15 +30208,78 @@
           </a:bodyPr>
           <a:lstStyle/>
           <a:p>
-            <a:pPr algn="ctr">
-              <a:defRPr sz="2400">
-                <a:solidFill>
-                  <a:srgbClr val="8B95A5"/>
-                </a:solidFill>
-              </a:defRPr>
-            </a:pPr>
-            <a:r>
-              <a:t>Read → Analyze → Plan → Execute → Verify</a:t>
+            <a:pPr>
+              <a:spcAft>
+                <a:spcPts val="1200"/>
+              </a:spcAft>
+              <a:defRPr sz="1800">
+                <a:solidFill>
+                  <a:srgbClr val="FFFFFF"/>
+                </a:solidFill>
+              </a:defRPr>
+            </a:pPr>
+            <a:r>
+              <a:t>  Context quality determines output quality</a:t>
+            </a:r>
+          </a:p>
+          <a:p>
+            <a:pPr>
+              <a:spcAft>
+                <a:spcPts val="1200"/>
+              </a:spcAft>
+              <a:defRPr sz="1800">
+                <a:solidFill>
+                  <a:srgbClr val="FFFFFF"/>
+                </a:solidFill>
+              </a:defRPr>
+            </a:pPr>
+            <a:r>
+              <a:t>  More relevant context = fewer iterations</a:t>
+            </a:r>
+          </a:p>
+          <a:p>
+            <a:pPr>
+              <a:spcAft>
+                <a:spcPts val="1200"/>
+              </a:spcAft>
+              <a:defRPr sz="1800">
+                <a:solidFill>
+                  <a:srgbClr val="FFFFFF"/>
+                </a:solidFill>
+              </a:defRPr>
+            </a:pPr>
+            <a:r>
+              <a:t>  Claude reads strategically — not every file</a:t>
+            </a:r>
+          </a:p>
+          <a:p>
+            <a:pPr>
+              <a:spcAft>
+                <a:spcPts val="1200"/>
+              </a:spcAft>
+              <a:defRPr sz="1800">
+                <a:solidFill>
+                  <a:srgbClr val="FFFFFF"/>
+                </a:solidFill>
+              </a:defRPr>
+            </a:pPr>
+            <a:r>
+              <a:t>  You control what loads via @ mentions</a:t>
+            </a:r>
+          </a:p>
+          <a:p>
+            <a:pPr>
+              <a:spcAft>
+                <a:spcPts val="1200"/>
+              </a:spcAft>
+              <a:defRPr sz="1800">
+                <a:solidFill>
+                  <a:srgbClr val="FFFFFF"/>
+                </a:solidFill>
+              </a:defRPr>
+            </a:pPr>
+            <a:r>
+              <a:t>  Large repos: .claudeignore prevents overload</a:t>
             </a:r>
           </a:p>
         </p:txBody>
@@ -30615,7 +30347,7 @@
               </a:defRPr>
             </a:pPr>
             <a:r>
-              <a:t>Stage 1: Read</a:t>
+              <a:t>Stage 2: Analyze</a:t>
             </a:r>
           </a:p>
         </p:txBody>
@@ -30694,7 +30426,7 @@
               </a:defRPr>
             </a:pPr>
             <a:r>
-              <a:t>What Claude Reads</a:t>
+              <a:t>Analysis Phase</a:t>
             </a:r>
           </a:p>
         </p:txBody>
@@ -30732,7 +30464,7 @@
               </a:defRPr>
             </a:pPr>
             <a:r>
-              <a:t>  CLAUDE.md and project configuration</a:t>
+              <a:t>  Maps dependencies between files</a:t>
             </a:r>
           </a:p>
           <a:p>
@@ -30747,7 +30479,7 @@
               </a:defRPr>
             </a:pPr>
             <a:r>
-              <a:t>  Files you @ mention explicitly</a:t>
+              <a:t>  Identifies patterns and conventions</a:t>
             </a:r>
           </a:p>
           <a:p>
@@ -30762,7 +30494,7 @@
               </a:defRPr>
             </a:pPr>
             <a:r>
-              <a:t>  Files discovered via search and grep</a:t>
+              <a:t>  Understands your coding style from examples</a:t>
             </a:r>
           </a:p>
           <a:p>
@@ -30777,7 +30509,7 @@
               </a:defRPr>
             </a:pPr>
             <a:r>
-              <a:t>  Directory structure and file relationships</a:t>
+              <a:t>  Detects potential issues before acting</a:t>
             </a:r>
           </a:p>
           <a:p>
@@ -30792,7 +30524,7 @@
               </a:defRPr>
             </a:pPr>
             <a:r>
-              <a:t>  Git history and recent changes</a:t>
+              <a:t>  Builds mental model of the codebase</a:t>
             </a:r>
           </a:p>
         </p:txBody>
@@ -30827,7 +30559,7 @@
               </a:defRPr>
             </a:pPr>
             <a:r>
-              <a:t>Why It Matters</a:t>
+              <a:t>What This Enables</a:t>
             </a:r>
           </a:p>
         </p:txBody>
@@ -30865,7 +30597,7 @@
               </a:defRPr>
             </a:pPr>
             <a:r>
-              <a:t>  Context quality determines output quality</a:t>
+              <a:t>  Changes that respect existing patterns</a:t>
             </a:r>
           </a:p>
           <a:p>
@@ -30880,7 +30612,7 @@
               </a:defRPr>
             </a:pPr>
             <a:r>
-              <a:t>  More relevant context = fewer iterations</a:t>
+              <a:t>  Edits that don't break dependencies</a:t>
             </a:r>
           </a:p>
           <a:p>
@@ -30895,7 +30627,7 @@
               </a:defRPr>
             </a:pPr>
             <a:r>
-              <a:t>  Claude reads strategically — not every file</a:t>
+              <a:t>  Suggestions that match your team's style</a:t>
             </a:r>
           </a:p>
           <a:p>
@@ -30910,7 +30642,7 @@
               </a:defRPr>
             </a:pPr>
             <a:r>
-              <a:t>  You control what loads via @ mentions</a:t>
+              <a:t>  Proactive error prevention</a:t>
             </a:r>
           </a:p>
           <a:p>
@@ -30925,7 +30657,7 @@
               </a:defRPr>
             </a:pPr>
             <a:r>
-              <a:t>  Large repos: .claudeignore prevents overload</a:t>
+              <a:t>  Context-aware code generation</a:t>
             </a:r>
           </a:p>
         </p:txBody>
@@ -33239,7 +32971,7 @@
               </a:defRPr>
             </a:pPr>
             <a:r>
-              <a:t>Stage 2: Analyze</a:t>
+              <a:t>Stage 3: Plan</a:t>
             </a:r>
           </a:p>
         </p:txBody>
@@ -33318,7 +33050,7 @@
               </a:defRPr>
             </a:pPr>
             <a:r>
-              <a:t>Analysis Phase</a:t>
+              <a:t>Planning Phase</a:t>
             </a:r>
           </a:p>
         </p:txBody>
@@ -33356,7 +33088,7 @@
               </a:defRPr>
             </a:pPr>
             <a:r>
-              <a:t>  Maps dependencies between files</a:t>
+              <a:t>  Breaks complex tasks into steps</a:t>
             </a:r>
           </a:p>
           <a:p>
@@ -33371,7 +33103,7 @@
               </a:defRPr>
             </a:pPr>
             <a:r>
-              <a:t>  Identifies patterns and conventions</a:t>
+              <a:t>  Identifies which files need changes</a:t>
             </a:r>
           </a:p>
           <a:p>
@@ -33386,7 +33118,7 @@
               </a:defRPr>
             </a:pPr>
             <a:r>
-              <a:t>  Understands your coding style from examples</a:t>
+              <a:t>  Determines order of operations</a:t>
             </a:r>
           </a:p>
           <a:p>
@@ -33401,7 +33133,7 @@
               </a:defRPr>
             </a:pPr>
             <a:r>
-              <a:t>  Detects potential issues before acting</a:t>
+              <a:t>  Considers edge cases and impacts</a:t>
             </a:r>
           </a:p>
           <a:p>
@@ -33416,7 +33148,7 @@
               </a:defRPr>
             </a:pPr>
             <a:r>
-              <a:t>  Builds mental model of the codebase</a:t>
+              <a:t>  Creates execution strategy</a:t>
             </a:r>
           </a:p>
         </p:txBody>
@@ -33451,7 +33183,7 @@
               </a:defRPr>
             </a:pPr>
             <a:r>
-              <a:t>What This Enables</a:t>
+              <a:t>You Can See This</a:t>
             </a:r>
           </a:p>
         </p:txBody>
@@ -33489,7 +33221,7 @@
               </a:defRPr>
             </a:pPr>
             <a:r>
-              <a:t>  Changes that respect existing patterns</a:t>
+              <a:t>  Extended Thinking shows reasoning (Tab key)</a:t>
             </a:r>
           </a:p>
           <a:p>
@@ -33504,7 +33236,7 @@
               </a:defRPr>
             </a:pPr>
             <a:r>
-              <a:t>  Edits that don't break dependencies</a:t>
+              <a:t>  Plan Mode pauses for approval (Shift+Tab)</a:t>
             </a:r>
           </a:p>
           <a:p>
@@ -33519,7 +33251,7 @@
               </a:defRPr>
             </a:pPr>
             <a:r>
-              <a:t>  Suggestions that match your team's style</a:t>
+              <a:t>  Review the plan before any code changes</a:t>
             </a:r>
           </a:p>
           <a:p>
@@ -33534,7 +33266,7 @@
               </a:defRPr>
             </a:pPr>
             <a:r>
-              <a:t>  Proactive error prevention</a:t>
+              <a:t>  Edit the plan to redirect approach</a:t>
             </a:r>
           </a:p>
           <a:p>
@@ -33549,7 +33281,7 @@
               </a:defRPr>
             </a:pPr>
             <a:r>
-              <a:t>  Context-aware code generation</a:t>
+              <a:t>  Best for complex multi-file changes</a:t>
             </a:r>
           </a:p>
         </p:txBody>
@@ -33617,7 +33349,7 @@
               </a:defRPr>
             </a:pPr>
             <a:r>
-              <a:t>Stage 3: Plan</a:t>
+              <a:t>Stage 4: Execute</a:t>
             </a:r>
           </a:p>
         </p:txBody>
@@ -33696,7 +33428,7 @@
               </a:defRPr>
             </a:pPr>
             <a:r>
-              <a:t>Planning Phase</a:t>
+              <a:t>Execution Phase</a:t>
             </a:r>
           </a:p>
         </p:txBody>
@@ -33734,7 +33466,7 @@
               </a:defRPr>
             </a:pPr>
             <a:r>
-              <a:t>  Breaks complex tasks into steps</a:t>
+              <a:t>  Creates and edits files directly</a:t>
             </a:r>
           </a:p>
           <a:p>
@@ -33749,7 +33481,7 @@
               </a:defRPr>
             </a:pPr>
             <a:r>
-              <a:t>  Identifies which files need changes</a:t>
+              <a:t>  Runs shell commands (npm, git, tests)</a:t>
             </a:r>
           </a:p>
           <a:p>
@@ -33764,7 +33496,7 @@
               </a:defRPr>
             </a:pPr>
             <a:r>
-              <a:t>  Determines order of operations</a:t>
+              <a:t>  Installs dependencies as needed</a:t>
             </a:r>
           </a:p>
           <a:p>
@@ -33779,7 +33511,7 @@
               </a:defRPr>
             </a:pPr>
             <a:r>
-              <a:t>  Considers edge cases and impacts</a:t>
+              <a:t>  Makes changes across multiple files</a:t>
             </a:r>
           </a:p>
           <a:p>
@@ -33794,7 +33526,7 @@
               </a:defRPr>
             </a:pPr>
             <a:r>
-              <a:t>  Creates execution strategy</a:t>
+              <a:t>  Follows the plan from Stage 3</a:t>
             </a:r>
           </a:p>
         </p:txBody>
@@ -33829,7 +33561,7 @@
               </a:defRPr>
             </a:pPr>
             <a:r>
-              <a:t>You Can See This</a:t>
+              <a:t>Permission Model</a:t>
             </a:r>
           </a:p>
         </p:txBody>
@@ -33867,7 +33599,7 @@
               </a:defRPr>
             </a:pPr>
             <a:r>
-              <a:t>  Extended Thinking shows reasoning (Tab key)</a:t>
+              <a:t>  Asks before running destructive commands</a:t>
             </a:r>
           </a:p>
           <a:p>
@@ -33882,7 +33614,7 @@
               </a:defRPr>
             </a:pPr>
             <a:r>
-              <a:t>  Plan Mode pauses for approval (Shift+Tab)</a:t>
+              <a:t>  Allowlist for trusted operations</a:t>
             </a:r>
           </a:p>
           <a:p>
@@ -33897,7 +33629,7 @@
               </a:defRPr>
             </a:pPr>
             <a:r>
-              <a:t>  Review the plan before any code changes</a:t>
+              <a:t>  You approve each tool use (or auto-accept)</a:t>
             </a:r>
           </a:p>
           <a:p>
@@ -33912,7 +33644,7 @@
               </a:defRPr>
             </a:pPr>
             <a:r>
-              <a:t>  Edit the plan to redirect approach</a:t>
+              <a:t>  Shift+Tab toggles auto-accept mode</a:t>
             </a:r>
           </a:p>
           <a:p>
@@ -33927,7 +33659,7 @@
               </a:defRPr>
             </a:pPr>
             <a:r>
-              <a:t>  Best for complex multi-file changes</a:t>
+              <a:t>  Never modifies files outside your project</a:t>
             </a:r>
           </a:p>
         </p:txBody>
@@ -33995,7 +33727,7 @@
               </a:defRPr>
             </a:pPr>
             <a:r>
-              <a:t>Stage 4: Execute</a:t>
+              <a:t>Stage 5: Verify</a:t>
             </a:r>
           </a:p>
         </p:txBody>
@@ -34074,7 +33806,7 @@
               </a:defRPr>
             </a:pPr>
             <a:r>
-              <a:t>Execution Phase</a:t>
+              <a:t>Verification Phase</a:t>
             </a:r>
           </a:p>
         </p:txBody>
@@ -34112,7 +33844,7 @@
               </a:defRPr>
             </a:pPr>
             <a:r>
-              <a:t>  Creates and edits files directly</a:t>
+              <a:t>  Runs tests to confirm changes work</a:t>
             </a:r>
           </a:p>
           <a:p>
@@ -34127,7 +33859,7 @@
               </a:defRPr>
             </a:pPr>
             <a:r>
-              <a:t>  Runs shell commands (npm, git, tests)</a:t>
+              <a:t>  Checks for syntax and type errors</a:t>
             </a:r>
           </a:p>
           <a:p>
@@ -34142,7 +33874,7 @@
               </a:defRPr>
             </a:pPr>
             <a:r>
-              <a:t>  Installs dependencies as needed</a:t>
+              <a:t>  Validates against your CLAUDE.md rules</a:t>
             </a:r>
           </a:p>
           <a:p>
@@ -34157,7 +33889,7 @@
               </a:defRPr>
             </a:pPr>
             <a:r>
-              <a:t>  Makes changes across multiple files</a:t>
+              <a:t>  Reports what changed and why</a:t>
             </a:r>
           </a:p>
           <a:p>
@@ -34172,7 +33904,7 @@
               </a:defRPr>
             </a:pPr>
             <a:r>
-              <a:t>  Follows the plan from Stage 3</a:t>
+              <a:t>  Suggests follow-up improvements</a:t>
             </a:r>
           </a:p>
         </p:txBody>
@@ -34207,7 +33939,7 @@
               </a:defRPr>
             </a:pPr>
             <a:r>
-              <a:t>Permission Model</a:t>
+              <a:t>Your Role</a:t>
             </a:r>
           </a:p>
         </p:txBody>
@@ -34245,7 +33977,7 @@
               </a:defRPr>
             </a:pPr>
             <a:r>
-              <a:t>  Asks before running destructive commands</a:t>
+              <a:t>  Review the output — don't blindly accept</a:t>
             </a:r>
           </a:p>
           <a:p>
@@ -34260,7 +33992,7 @@
               </a:defRPr>
             </a:pPr>
             <a:r>
-              <a:t>  Allowlist for trusted operations</a:t>
+              <a:t>  Run /review for code quality check</a:t>
             </a:r>
           </a:p>
           <a:p>
@@ -34275,7 +34007,7 @@
               </a:defRPr>
             </a:pPr>
             <a:r>
-              <a:t>  You approve each tool use (or auto-accept)</a:t>
+              <a:t>  Run /test for test coverage</a:t>
             </a:r>
           </a:p>
           <a:p>
@@ -34290,7 +34022,7 @@
               </a:defRPr>
             </a:pPr>
             <a:r>
-              <a:t>  Shift+Tab toggles auto-accept mode</a:t>
+              <a:t>  Check git diff before committing</a:t>
             </a:r>
           </a:p>
           <a:p>
@@ -34305,7 +34037,7 @@
               </a:defRPr>
             </a:pPr>
             <a:r>
-              <a:t>  Never modifies files outside your project</a:t>
+              <a:t>  Iterate: 'make it better' is a valid prompt</a:t>
             </a:r>
           </a:p>
         </p:txBody>
@@ -34351,8 +34083,8 @@
         </p:nvSpPr>
         <p:spPr>
           <a:xfrm>
-            <a:off x="457200" y="457200"/>
-            <a:ext cx="11277295" cy="731520"/>
+            <a:off x="457200" y="731520"/>
+            <a:ext cx="11277295" cy="914400"/>
           </a:xfrm>
           <a:prstGeom prst="rect">
             <a:avLst/>
@@ -34360,36 +34092,82 @@
           <a:noFill/>
         </p:spPr>
         <p:txBody>
-          <a:bodyPr wrap="none">
+          <a:bodyPr wrap="square">
             <a:spAutoFit/>
           </a:bodyPr>
           <a:lstStyle/>
           <a:p>
             <a:pPr algn="ctr">
-              <a:defRPr sz="3600" b="1">
-                <a:solidFill>
-                  <a:srgbClr val="FFFFFF"/>
-                </a:solidFill>
-              </a:defRPr>
-            </a:pPr>
-            <a:r>
-              <a:t>Stage 5: Verify</a:t>
-            </a:r>
-          </a:p>
-        </p:txBody>
-      </p:sp>
-      <p:sp>
-        <p:nvSpPr>
-          <p:cNvPr id="3" name="Rectangle 2"/>
+              <a:defRPr sz="4000" b="1">
+                <a:solidFill>
+                  <a:srgbClr val="FFFFFF"/>
+                </a:solidFill>
+              </a:defRPr>
+            </a:pPr>
+            <a:r>
+              <a:t>Engineering Principle: Small, Frequent, Actionable Output</a:t>
+            </a:r>
+          </a:p>
+        </p:txBody>
+      </p:sp>
+      <p:sp>
+        <p:nvSpPr>
+          <p:cNvPr id="3" name="Rounded Rectangle 2"/>
           <p:cNvSpPr/>
           <p:nvPr/>
         </p:nvSpPr>
         <p:spPr>
           <a:xfrm>
-            <a:off x="6077559" y="1371600"/>
-            <a:ext cx="36576" cy="4572000"/>
-          </a:xfrm>
-          <a:prstGeom prst="rect">
+            <a:off x="2301087" y="2011680"/>
+            <a:ext cx="2286000" cy="3200400"/>
+          </a:xfrm>
+          <a:prstGeom prst="roundRect">
+            <a:avLst/>
+          </a:prstGeom>
+          <a:solidFill>
+            <a:srgbClr val="141A26"/>
+          </a:solidFill>
+          <a:ln w="25400">
+            <a:solidFill>
+              <a:srgbClr val="00D4AA"/>
+            </a:solidFill>
+          </a:ln>
+        </p:spPr>
+        <p:style>
+          <a:lnRef idx="1">
+            <a:schemeClr val="accent1"/>
+          </a:lnRef>
+          <a:fillRef idx="3">
+            <a:schemeClr val="accent1"/>
+          </a:fillRef>
+          <a:effectRef idx="2">
+            <a:schemeClr val="accent1"/>
+          </a:effectRef>
+          <a:fontRef idx="minor">
+            <a:schemeClr val="lt1"/>
+          </a:fontRef>
+        </p:style>
+        <p:txBody>
+          <a:bodyPr rtlCol="0" anchor="ctr"/>
+          <a:lstStyle/>
+          <a:p>
+            <a:pPr algn="ctr"/>
+            <a:endParaRPr/>
+          </a:p>
+        </p:txBody>
+      </p:sp>
+      <p:sp>
+        <p:nvSpPr>
+          <p:cNvPr id="4" name="Oval 3"/>
+          <p:cNvSpPr/>
+          <p:nvPr/>
+        </p:nvSpPr>
+        <p:spPr>
+          <a:xfrm>
+            <a:off x="2986887" y="2468880"/>
+            <a:ext cx="914400" cy="914400"/>
+          </a:xfrm>
+          <a:prstGeom prst="ellipse">
             <a:avLst/>
           </a:prstGeom>
           <a:solidFill>
@@ -34424,14 +34202,14 @@
       </p:sp>
       <p:sp>
         <p:nvSpPr>
-          <p:cNvPr id="4" name="TextBox 3"/>
+          <p:cNvPr id="5" name="TextBox 4"/>
           <p:cNvSpPr txBox="1"/>
           <p:nvPr/>
         </p:nvSpPr>
         <p:spPr>
           <a:xfrm>
-            <a:off x="457200" y="1463040"/>
-            <a:ext cx="5364327" cy="731520"/>
+            <a:off x="2986887" y="2468880"/>
+            <a:ext cx="914400" cy="914400"/>
           </a:xfrm>
           <a:prstGeom prst="rect">
             <a:avLst/>
@@ -34439,34 +34217,34 @@
           <a:noFill/>
         </p:spPr>
         <p:txBody>
-          <a:bodyPr wrap="none">
+          <a:bodyPr wrap="none" anchor="ctr">
             <a:spAutoFit/>
           </a:bodyPr>
           <a:lstStyle/>
           <a:p>
             <a:pPr algn="ctr">
-              <a:defRPr sz="2800" b="1">
-                <a:solidFill>
-                  <a:srgbClr val="00D4AA"/>
-                </a:solidFill>
-              </a:defRPr>
-            </a:pPr>
-            <a:r>
-              <a:t>Verification Phase</a:t>
-            </a:r>
-          </a:p>
-        </p:txBody>
-      </p:sp>
-      <p:sp>
-        <p:nvSpPr>
-          <p:cNvPr id="5" name="TextBox 4"/>
+              <a:defRPr sz="3600" b="1">
+                <a:solidFill>
+                  <a:srgbClr val="0B0F1A"/>
+                </a:solidFill>
+              </a:defRPr>
+            </a:pPr>
+            <a:r>
+              <a:t>1</a:t>
+            </a:r>
+          </a:p>
+        </p:txBody>
+      </p:sp>
+      <p:sp>
+        <p:nvSpPr>
+          <p:cNvPr id="6" name="TextBox 5"/>
           <p:cNvSpPr txBox="1"/>
           <p:nvPr/>
         </p:nvSpPr>
         <p:spPr>
           <a:xfrm>
-            <a:off x="457200" y="2286000"/>
-            <a:ext cx="5364327" cy="3657600"/>
+            <a:off x="2392527" y="3657600"/>
+            <a:ext cx="2103120" cy="1371600"/>
           </a:xfrm>
           <a:prstGeom prst="rect">
             <a:avLst/>
@@ -34475,96 +34253,181 @@
         </p:spPr>
         <p:txBody>
           <a:bodyPr wrap="square">
+            <a:normAutofit lnSpcReduction="10000"/>
+          </a:bodyPr>
+          <a:lstStyle/>
+          <a:p>
+            <a:pPr algn="ctr">
+              <a:defRPr sz="1800" b="1">
+                <a:solidFill>
+                  <a:srgbClr val="FFFFFF"/>
+                </a:solidFill>
+              </a:defRPr>
+            </a:pPr>
+            <a:r>
+              <a:t>Small</a:t>
+            </a:r>
+          </a:p>
+          <a:p>
+            <a:pPr algn="ctr">
+              <a:spcBef>
+                <a:spcPts val="800"/>
+              </a:spcBef>
+              <a:defRPr sz="1300">
+                <a:solidFill>
+                  <a:srgbClr val="8B95A5"/>
+                </a:solidFill>
+              </a:defRPr>
+            </a:pPr>
+            <a:r>
+              <a:t>One task per session.</a:t>
+            </a:r>
+            <a:br/>
+            <a:r>
+              <a:t>Don't ask Claude to 'refactor the whole app.'</a:t>
+            </a:r>
+            <a:br/>
+            <a:r>
+              <a:t>Ask it to 'refactor the auth middleware to use JWT v3.'</a:t>
+            </a:r>
+          </a:p>
+        </p:txBody>
+      </p:sp>
+      <p:sp>
+        <p:nvSpPr>
+          <p:cNvPr id="7" name="Rounded Rectangle 6"/>
+          <p:cNvSpPr/>
+          <p:nvPr/>
+        </p:nvSpPr>
+        <p:spPr>
+          <a:xfrm>
+            <a:off x="4952847" y="2011680"/>
+            <a:ext cx="2286000" cy="3200400"/>
+          </a:xfrm>
+          <a:prstGeom prst="roundRect">
+            <a:avLst/>
+          </a:prstGeom>
+          <a:solidFill>
+            <a:srgbClr val="141A26"/>
+          </a:solidFill>
+          <a:ln w="25400">
+            <a:solidFill>
+              <a:srgbClr val="00D4AA"/>
+            </a:solidFill>
+          </a:ln>
+        </p:spPr>
+        <p:style>
+          <a:lnRef idx="1">
+            <a:schemeClr val="accent1"/>
+          </a:lnRef>
+          <a:fillRef idx="3">
+            <a:schemeClr val="accent1"/>
+          </a:fillRef>
+          <a:effectRef idx="2">
+            <a:schemeClr val="accent1"/>
+          </a:effectRef>
+          <a:fontRef idx="minor">
+            <a:schemeClr val="lt1"/>
+          </a:fontRef>
+        </p:style>
+        <p:txBody>
+          <a:bodyPr rtlCol="0" anchor="ctr"/>
+          <a:lstStyle/>
+          <a:p>
+            <a:pPr algn="ctr"/>
+            <a:endParaRPr/>
+          </a:p>
+        </p:txBody>
+      </p:sp>
+      <p:sp>
+        <p:nvSpPr>
+          <p:cNvPr id="8" name="Oval 7"/>
+          <p:cNvSpPr/>
+          <p:nvPr/>
+        </p:nvSpPr>
+        <p:spPr>
+          <a:xfrm>
+            <a:off x="5638647" y="2468880"/>
+            <a:ext cx="914400" cy="914400"/>
+          </a:xfrm>
+          <a:prstGeom prst="ellipse">
+            <a:avLst/>
+          </a:prstGeom>
+          <a:solidFill>
+            <a:srgbClr val="00D4AA"/>
+          </a:solidFill>
+          <a:ln>
+            <a:noFill/>
+          </a:ln>
+        </p:spPr>
+        <p:style>
+          <a:lnRef idx="1">
+            <a:schemeClr val="accent1"/>
+          </a:lnRef>
+          <a:fillRef idx="3">
+            <a:schemeClr val="accent1"/>
+          </a:fillRef>
+          <a:effectRef idx="2">
+            <a:schemeClr val="accent1"/>
+          </a:effectRef>
+          <a:fontRef idx="minor">
+            <a:schemeClr val="lt1"/>
+          </a:fontRef>
+        </p:style>
+        <p:txBody>
+          <a:bodyPr rtlCol="0" anchor="ctr"/>
+          <a:lstStyle/>
+          <a:p>
+            <a:pPr algn="ctr"/>
+            <a:endParaRPr/>
+          </a:p>
+        </p:txBody>
+      </p:sp>
+      <p:sp>
+        <p:nvSpPr>
+          <p:cNvPr id="9" name="TextBox 8"/>
+          <p:cNvSpPr txBox="1"/>
+          <p:nvPr/>
+        </p:nvSpPr>
+        <p:spPr>
+          <a:xfrm>
+            <a:off x="5638647" y="2468880"/>
+            <a:ext cx="914400" cy="914400"/>
+          </a:xfrm>
+          <a:prstGeom prst="rect">
+            <a:avLst/>
+          </a:prstGeom>
+          <a:noFill/>
+        </p:spPr>
+        <p:txBody>
+          <a:bodyPr wrap="none" anchor="ctr">
             <a:spAutoFit/>
           </a:bodyPr>
           <a:lstStyle/>
           <a:p>
-            <a:pPr>
-              <a:spcAft>
-                <a:spcPts val="1200"/>
-              </a:spcAft>
-              <a:defRPr sz="1800">
-                <a:solidFill>
-                  <a:srgbClr val="FFFFFF"/>
-                </a:solidFill>
-              </a:defRPr>
-            </a:pPr>
-            <a:r>
-              <a:t>  Runs tests to confirm changes work</a:t>
-            </a:r>
-          </a:p>
-          <a:p>
-            <a:pPr>
-              <a:spcAft>
-                <a:spcPts val="1200"/>
-              </a:spcAft>
-              <a:defRPr sz="1800">
-                <a:solidFill>
-                  <a:srgbClr val="FFFFFF"/>
-                </a:solidFill>
-              </a:defRPr>
-            </a:pPr>
-            <a:r>
-              <a:t>  Checks for syntax and type errors</a:t>
-            </a:r>
-          </a:p>
-          <a:p>
-            <a:pPr>
-              <a:spcAft>
-                <a:spcPts val="1200"/>
-              </a:spcAft>
-              <a:defRPr sz="1800">
-                <a:solidFill>
-                  <a:srgbClr val="FFFFFF"/>
-                </a:solidFill>
-              </a:defRPr>
-            </a:pPr>
-            <a:r>
-              <a:t>  Validates against your CLAUDE.md rules</a:t>
-            </a:r>
-          </a:p>
-          <a:p>
-            <a:pPr>
-              <a:spcAft>
-                <a:spcPts val="1200"/>
-              </a:spcAft>
-              <a:defRPr sz="1800">
-                <a:solidFill>
-                  <a:srgbClr val="FFFFFF"/>
-                </a:solidFill>
-              </a:defRPr>
-            </a:pPr>
-            <a:r>
-              <a:t>  Reports what changed and why</a:t>
-            </a:r>
-          </a:p>
-          <a:p>
-            <a:pPr>
-              <a:spcAft>
-                <a:spcPts val="1200"/>
-              </a:spcAft>
-              <a:defRPr sz="1800">
-                <a:solidFill>
-                  <a:srgbClr val="FFFFFF"/>
-                </a:solidFill>
-              </a:defRPr>
-            </a:pPr>
-            <a:r>
-              <a:t>  Suggests follow-up improvements</a:t>
-            </a:r>
-          </a:p>
-        </p:txBody>
-      </p:sp>
-      <p:sp>
-        <p:nvSpPr>
-          <p:cNvPr id="6" name="TextBox 5"/>
+            <a:pPr algn="ctr">
+              <a:defRPr sz="3600" b="1">
+                <a:solidFill>
+                  <a:srgbClr val="0B0F1A"/>
+                </a:solidFill>
+              </a:defRPr>
+            </a:pPr>
+            <a:r>
+              <a:t>2</a:t>
+            </a:r>
+          </a:p>
+        </p:txBody>
+      </p:sp>
+      <p:sp>
+        <p:nvSpPr>
+          <p:cNvPr id="10" name="TextBox 9"/>
           <p:cNvSpPr txBox="1"/>
           <p:nvPr/>
         </p:nvSpPr>
         <p:spPr>
           <a:xfrm>
-            <a:off x="6370167" y="1463040"/>
-            <a:ext cx="5364327" cy="731520"/>
+            <a:off x="5044287" y="3657600"/>
+            <a:ext cx="2103120" cy="1371600"/>
           </a:xfrm>
           <a:prstGeom prst="rect">
             <a:avLst/>
@@ -34572,34 +34435,182 @@
           <a:noFill/>
         </p:spPr>
         <p:txBody>
-          <a:bodyPr wrap="none">
+          <a:bodyPr wrap="square">
+            <a:normAutofit/>
+          </a:bodyPr>
+          <a:lstStyle/>
+          <a:p>
+            <a:pPr algn="ctr">
+              <a:defRPr sz="1800" b="1">
+                <a:solidFill>
+                  <a:srgbClr val="FFFFFF"/>
+                </a:solidFill>
+              </a:defRPr>
+            </a:pPr>
+            <a:r>
+              <a:t>Frequent</a:t>
+            </a:r>
+          </a:p>
+          <a:p>
+            <a:pPr algn="ctr">
+              <a:spcBef>
+                <a:spcPts val="800"/>
+              </a:spcBef>
+              <a:defRPr sz="1300">
+                <a:solidFill>
+                  <a:srgbClr val="8B95A5"/>
+                </a:solidFill>
+              </a:defRPr>
+            </a:pPr>
+            <a:r>
+              <a:t>Commit after each change.</a:t>
+            </a:r>
+            <a:br/>
+            <a:r>
+              <a:t>Use /clear between tasks.</a:t>
+            </a:r>
+            <a:br/>
+            <a:r>
+              <a:t>Keep context fresh and focused.</a:t>
+            </a:r>
+          </a:p>
+        </p:txBody>
+      </p:sp>
+      <p:sp>
+        <p:nvSpPr>
+          <p:cNvPr id="11" name="Rounded Rectangle 10"/>
+          <p:cNvSpPr/>
+          <p:nvPr/>
+        </p:nvSpPr>
+        <p:spPr>
+          <a:xfrm>
+            <a:off x="7604607" y="2011680"/>
+            <a:ext cx="2286000" cy="3200400"/>
+          </a:xfrm>
+          <a:prstGeom prst="roundRect">
+            <a:avLst/>
+          </a:prstGeom>
+          <a:solidFill>
+            <a:srgbClr val="141A26"/>
+          </a:solidFill>
+          <a:ln w="25400">
+            <a:solidFill>
+              <a:srgbClr val="00D4AA"/>
+            </a:solidFill>
+          </a:ln>
+        </p:spPr>
+        <p:style>
+          <a:lnRef idx="1">
+            <a:schemeClr val="accent1"/>
+          </a:lnRef>
+          <a:fillRef idx="3">
+            <a:schemeClr val="accent1"/>
+          </a:fillRef>
+          <a:effectRef idx="2">
+            <a:schemeClr val="accent1"/>
+          </a:effectRef>
+          <a:fontRef idx="minor">
+            <a:schemeClr val="lt1"/>
+          </a:fontRef>
+        </p:style>
+        <p:txBody>
+          <a:bodyPr rtlCol="0" anchor="ctr"/>
+          <a:lstStyle/>
+          <a:p>
+            <a:pPr algn="ctr"/>
+            <a:endParaRPr/>
+          </a:p>
+        </p:txBody>
+      </p:sp>
+      <p:sp>
+        <p:nvSpPr>
+          <p:cNvPr id="12" name="Oval 11"/>
+          <p:cNvSpPr/>
+          <p:nvPr/>
+        </p:nvSpPr>
+        <p:spPr>
+          <a:xfrm>
+            <a:off x="8290407" y="2468880"/>
+            <a:ext cx="914400" cy="914400"/>
+          </a:xfrm>
+          <a:prstGeom prst="ellipse">
+            <a:avLst/>
+          </a:prstGeom>
+          <a:solidFill>
+            <a:srgbClr val="00D4AA"/>
+          </a:solidFill>
+          <a:ln>
+            <a:noFill/>
+          </a:ln>
+        </p:spPr>
+        <p:style>
+          <a:lnRef idx="1">
+            <a:schemeClr val="accent1"/>
+          </a:lnRef>
+          <a:fillRef idx="3">
+            <a:schemeClr val="accent1"/>
+          </a:fillRef>
+          <a:effectRef idx="2">
+            <a:schemeClr val="accent1"/>
+          </a:effectRef>
+          <a:fontRef idx="minor">
+            <a:schemeClr val="lt1"/>
+          </a:fontRef>
+        </p:style>
+        <p:txBody>
+          <a:bodyPr rtlCol="0" anchor="ctr"/>
+          <a:lstStyle/>
+          <a:p>
+            <a:pPr algn="ctr"/>
+            <a:endParaRPr/>
+          </a:p>
+        </p:txBody>
+      </p:sp>
+      <p:sp>
+        <p:nvSpPr>
+          <p:cNvPr id="13" name="TextBox 12"/>
+          <p:cNvSpPr txBox="1"/>
+          <p:nvPr/>
+        </p:nvSpPr>
+        <p:spPr>
+          <a:xfrm>
+            <a:off x="8290407" y="2468880"/>
+            <a:ext cx="914400" cy="914400"/>
+          </a:xfrm>
+          <a:prstGeom prst="rect">
+            <a:avLst/>
+          </a:prstGeom>
+          <a:noFill/>
+        </p:spPr>
+        <p:txBody>
+          <a:bodyPr wrap="none" anchor="ctr">
             <a:spAutoFit/>
           </a:bodyPr>
           <a:lstStyle/>
           <a:p>
             <a:pPr algn="ctr">
-              <a:defRPr sz="2800" b="1">
-                <a:solidFill>
-                  <a:srgbClr val="E86B4A"/>
-                </a:solidFill>
-              </a:defRPr>
-            </a:pPr>
-            <a:r>
-              <a:t>Your Role</a:t>
-            </a:r>
-          </a:p>
-        </p:txBody>
-      </p:sp>
-      <p:sp>
-        <p:nvSpPr>
-          <p:cNvPr id="7" name="TextBox 6"/>
+              <a:defRPr sz="3600" b="1">
+                <a:solidFill>
+                  <a:srgbClr val="0B0F1A"/>
+                </a:solidFill>
+              </a:defRPr>
+            </a:pPr>
+            <a:r>
+              <a:t>3</a:t>
+            </a:r>
+          </a:p>
+        </p:txBody>
+      </p:sp>
+      <p:sp>
+        <p:nvSpPr>
+          <p:cNvPr id="14" name="TextBox 13"/>
           <p:cNvSpPr txBox="1"/>
           <p:nvPr/>
         </p:nvSpPr>
         <p:spPr>
           <a:xfrm>
-            <a:off x="6370167" y="2286000"/>
-            <a:ext cx="5364327" cy="3657600"/>
+            <a:off x="7696047" y="3657600"/>
+            <a:ext cx="2103120" cy="1371600"/>
           </a:xfrm>
           <a:prstGeom prst="rect">
             <a:avLst/>
@@ -34608,82 +34619,38 @@
         </p:spPr>
         <p:txBody>
           <a:bodyPr wrap="square">
-            <a:spAutoFit/>
+            <a:normAutofit fontScale="92500"/>
           </a:bodyPr>
           <a:lstStyle/>
           <a:p>
-            <a:pPr>
-              <a:spcAft>
-                <a:spcPts val="1200"/>
-              </a:spcAft>
-              <a:defRPr sz="1800">
-                <a:solidFill>
-                  <a:srgbClr val="FFFFFF"/>
-                </a:solidFill>
-              </a:defRPr>
-            </a:pPr>
-            <a:r>
-              <a:t>  Review the output — don't blindly accept</a:t>
-            </a:r>
-          </a:p>
-          <a:p>
-            <a:pPr>
-              <a:spcAft>
-                <a:spcPts val="1200"/>
-              </a:spcAft>
-              <a:defRPr sz="1800">
-                <a:solidFill>
-                  <a:srgbClr val="FFFFFF"/>
-                </a:solidFill>
-              </a:defRPr>
-            </a:pPr>
-            <a:r>
-              <a:t>  Run /review for code quality check</a:t>
-            </a:r>
-          </a:p>
-          <a:p>
-            <a:pPr>
-              <a:spcAft>
-                <a:spcPts val="1200"/>
-              </a:spcAft>
-              <a:defRPr sz="1800">
-                <a:solidFill>
-                  <a:srgbClr val="FFFFFF"/>
-                </a:solidFill>
-              </a:defRPr>
-            </a:pPr>
-            <a:r>
-              <a:t>  Run /test for test coverage</a:t>
-            </a:r>
-          </a:p>
-          <a:p>
-            <a:pPr>
-              <a:spcAft>
-                <a:spcPts val="1200"/>
-              </a:spcAft>
-              <a:defRPr sz="1800">
-                <a:solidFill>
-                  <a:srgbClr val="FFFFFF"/>
-                </a:solidFill>
-              </a:defRPr>
-            </a:pPr>
-            <a:r>
-              <a:t>  Check git diff before committing</a:t>
-            </a:r>
-          </a:p>
-          <a:p>
-            <a:pPr>
-              <a:spcAft>
-                <a:spcPts val="1200"/>
-              </a:spcAft>
-              <a:defRPr sz="1800">
-                <a:solidFill>
-                  <a:srgbClr val="FFFFFF"/>
-                </a:solidFill>
-              </a:defRPr>
-            </a:pPr>
-            <a:r>
-              <a:t>  Iterate: 'make it better' is a valid prompt</a:t>
+            <a:pPr algn="ctr">
+              <a:defRPr sz="1800" b="1">
+                <a:solidFill>
+                  <a:srgbClr val="FFFFFF"/>
+                </a:solidFill>
+              </a:defRPr>
+            </a:pPr>
+            <a:r>
+              <a:t>Actionable</a:t>
+            </a:r>
+          </a:p>
+          <a:p>
+            <a:pPr algn="ctr">
+              <a:spcBef>
+                <a:spcPts val="800"/>
+              </a:spcBef>
+              <a:defRPr sz="1300">
+                <a:solidFill>
+                  <a:srgbClr val="8B95A5"/>
+                </a:solidFill>
+              </a:defRPr>
+            </a:pPr>
+            <a:r>
+              <a:t>Every prompt should produce a testable result.</a:t>
+            </a:r>
+            <a:br/>
+            <a:r>
+              <a:t>Not 'explain microservices' but 'extract the user service into its own module with tests.'</a:t>
             </a:r>
           </a:p>
         </p:txBody>
@@ -34729,8 +34696,8 @@
         </p:nvSpPr>
         <p:spPr>
           <a:xfrm>
-            <a:off x="457200" y="731520"/>
-            <a:ext cx="11277295" cy="914400"/>
+            <a:off x="457200" y="1828800"/>
+            <a:ext cx="11277295" cy="1371600"/>
           </a:xfrm>
           <a:prstGeom prst="rect">
             <a:avLst/>
@@ -34738,82 +34705,36 @@
           <a:noFill/>
         </p:spPr>
         <p:txBody>
-          <a:bodyPr wrap="square">
+          <a:bodyPr wrap="none">
             <a:spAutoFit/>
           </a:bodyPr>
           <a:lstStyle/>
           <a:p>
             <a:pPr algn="ctr">
-              <a:defRPr sz="4000" b="1">
-                <a:solidFill>
-                  <a:srgbClr val="FFFFFF"/>
-                </a:solidFill>
-              </a:defRPr>
-            </a:pPr>
-            <a:r>
-              <a:t>Engineering Principle: Small, Frequent, Actionable Output</a:t>
-            </a:r>
-          </a:p>
-        </p:txBody>
-      </p:sp>
-      <p:sp>
-        <p:nvSpPr>
-          <p:cNvPr id="3" name="Rounded Rectangle 2"/>
+              <a:defRPr sz="9600" b="1">
+                <a:solidFill>
+                  <a:srgbClr val="00D4AA"/>
+                </a:solidFill>
+              </a:defRPr>
+            </a:pPr>
+            <a:r>
+              <a:t>DEMO</a:t>
+            </a:r>
+          </a:p>
+        </p:txBody>
+      </p:sp>
+      <p:sp>
+        <p:nvSpPr>
+          <p:cNvPr id="3" name="Rectangle 2"/>
           <p:cNvSpPr/>
           <p:nvPr/>
         </p:nvSpPr>
         <p:spPr>
           <a:xfrm>
-            <a:off x="2301087" y="2011680"/>
-            <a:ext cx="2286000" cy="3200400"/>
-          </a:xfrm>
-          <a:prstGeom prst="roundRect">
-            <a:avLst/>
-          </a:prstGeom>
-          <a:solidFill>
-            <a:srgbClr val="141A26"/>
-          </a:solidFill>
-          <a:ln w="25400">
-            <a:solidFill>
-              <a:srgbClr val="00D4AA"/>
-            </a:solidFill>
-          </a:ln>
-        </p:spPr>
-        <p:style>
-          <a:lnRef idx="1">
-            <a:schemeClr val="accent1"/>
-          </a:lnRef>
-          <a:fillRef idx="3">
-            <a:schemeClr val="accent1"/>
-          </a:fillRef>
-          <a:effectRef idx="2">
-            <a:schemeClr val="accent1"/>
-          </a:effectRef>
-          <a:fontRef idx="minor">
-            <a:schemeClr val="lt1"/>
-          </a:fontRef>
-        </p:style>
-        <p:txBody>
-          <a:bodyPr rtlCol="0" anchor="ctr"/>
-          <a:lstStyle/>
-          <a:p>
-            <a:pPr algn="ctr"/>
-            <a:endParaRPr/>
-          </a:p>
-        </p:txBody>
-      </p:sp>
-      <p:sp>
-        <p:nvSpPr>
-          <p:cNvPr id="4" name="Oval 3"/>
-          <p:cNvSpPr/>
-          <p:nvPr/>
-        </p:nvSpPr>
-        <p:spPr>
-          <a:xfrm>
-            <a:off x="2986887" y="2468880"/>
-            <a:ext cx="914400" cy="914400"/>
-          </a:xfrm>
-          <a:prstGeom prst="ellipse">
+            <a:off x="4724247" y="3474720"/>
+            <a:ext cx="2743200" cy="54864"/>
+          </a:xfrm>
+          <a:prstGeom prst="rect">
             <a:avLst/>
           </a:prstGeom>
           <a:solidFill>
@@ -34848,14 +34769,14 @@
       </p:sp>
       <p:sp>
         <p:nvSpPr>
-          <p:cNvPr id="5" name="TextBox 4"/>
+          <p:cNvPr id="4" name="TextBox 3"/>
           <p:cNvSpPr txBox="1"/>
           <p:nvPr/>
         </p:nvSpPr>
         <p:spPr>
           <a:xfrm>
-            <a:off x="2986887" y="2468880"/>
-            <a:ext cx="914400" cy="914400"/>
+            <a:off x="457200" y="3840480"/>
+            <a:ext cx="11277295" cy="914400"/>
           </a:xfrm>
           <a:prstGeom prst="rect">
             <a:avLst/>
@@ -34863,440 +34784,20 @@
           <a:noFill/>
         </p:spPr>
         <p:txBody>
-          <a:bodyPr wrap="none" anchor="ctr">
+          <a:bodyPr wrap="square">
             <a:spAutoFit/>
           </a:bodyPr>
           <a:lstStyle/>
           <a:p>
             <a:pPr algn="ctr">
-              <a:defRPr sz="3600" b="1">
-                <a:solidFill>
-                  <a:srgbClr val="0B0F1A"/>
-                </a:solidFill>
-              </a:defRPr>
-            </a:pPr>
-            <a:r>
-              <a:t>1</a:t>
-            </a:r>
-          </a:p>
-        </p:txBody>
-      </p:sp>
-      <p:sp>
-        <p:nvSpPr>
-          <p:cNvPr id="6" name="TextBox 5"/>
-          <p:cNvSpPr txBox="1"/>
-          <p:nvPr/>
-        </p:nvSpPr>
-        <p:spPr>
-          <a:xfrm>
-            <a:off x="2392527" y="3657600"/>
-            <a:ext cx="2103120" cy="1371600"/>
-          </a:xfrm>
-          <a:prstGeom prst="rect">
-            <a:avLst/>
-          </a:prstGeom>
-          <a:noFill/>
-        </p:spPr>
-        <p:txBody>
-          <a:bodyPr wrap="square">
-            <a:normAutofit lnSpcReduction="10000"/>
-          </a:bodyPr>
-          <a:lstStyle/>
-          <a:p>
-            <a:pPr algn="ctr">
-              <a:defRPr sz="1800" b="1">
-                <a:solidFill>
-                  <a:srgbClr val="FFFFFF"/>
-                </a:solidFill>
-              </a:defRPr>
-            </a:pPr>
-            <a:r>
-              <a:t>Small</a:t>
-            </a:r>
-          </a:p>
-          <a:p>
-            <a:pPr algn="ctr">
-              <a:spcBef>
-                <a:spcPts val="800"/>
-              </a:spcBef>
-              <a:defRPr sz="1300">
-                <a:solidFill>
-                  <a:srgbClr val="8B95A5"/>
-                </a:solidFill>
-              </a:defRPr>
-            </a:pPr>
-            <a:r>
-              <a:t>One task per session.</a:t>
-            </a:r>
-            <a:br/>
-            <a:r>
-              <a:t>Don't ask Claude to 'refactor the whole app.'</a:t>
-            </a:r>
-            <a:br/>
-            <a:r>
-              <a:t>Ask it to 'refactor the auth middleware to use JWT v3.'</a:t>
-            </a:r>
-          </a:p>
-        </p:txBody>
-      </p:sp>
-      <p:sp>
-        <p:nvSpPr>
-          <p:cNvPr id="7" name="Rounded Rectangle 6"/>
-          <p:cNvSpPr/>
-          <p:nvPr/>
-        </p:nvSpPr>
-        <p:spPr>
-          <a:xfrm>
-            <a:off x="4952847" y="2011680"/>
-            <a:ext cx="2286000" cy="3200400"/>
-          </a:xfrm>
-          <a:prstGeom prst="roundRect">
-            <a:avLst/>
-          </a:prstGeom>
-          <a:solidFill>
-            <a:srgbClr val="141A26"/>
-          </a:solidFill>
-          <a:ln w="25400">
-            <a:solidFill>
-              <a:srgbClr val="00D4AA"/>
-            </a:solidFill>
-          </a:ln>
-        </p:spPr>
-        <p:style>
-          <a:lnRef idx="1">
-            <a:schemeClr val="accent1"/>
-          </a:lnRef>
-          <a:fillRef idx="3">
-            <a:schemeClr val="accent1"/>
-          </a:fillRef>
-          <a:effectRef idx="2">
-            <a:schemeClr val="accent1"/>
-          </a:effectRef>
-          <a:fontRef idx="minor">
-            <a:schemeClr val="lt1"/>
-          </a:fontRef>
-        </p:style>
-        <p:txBody>
-          <a:bodyPr rtlCol="0" anchor="ctr"/>
-          <a:lstStyle/>
-          <a:p>
-            <a:pPr algn="ctr"/>
-            <a:endParaRPr/>
-          </a:p>
-        </p:txBody>
-      </p:sp>
-      <p:sp>
-        <p:nvSpPr>
-          <p:cNvPr id="8" name="Oval 7"/>
-          <p:cNvSpPr/>
-          <p:nvPr/>
-        </p:nvSpPr>
-        <p:spPr>
-          <a:xfrm>
-            <a:off x="5638647" y="2468880"/>
-            <a:ext cx="914400" cy="914400"/>
-          </a:xfrm>
-          <a:prstGeom prst="ellipse">
-            <a:avLst/>
-          </a:prstGeom>
-          <a:solidFill>
-            <a:srgbClr val="00D4AA"/>
-          </a:solidFill>
-          <a:ln>
-            <a:noFill/>
-          </a:ln>
-        </p:spPr>
-        <p:style>
-          <a:lnRef idx="1">
-            <a:schemeClr val="accent1"/>
-          </a:lnRef>
-          <a:fillRef idx="3">
-            <a:schemeClr val="accent1"/>
-          </a:fillRef>
-          <a:effectRef idx="2">
-            <a:schemeClr val="accent1"/>
-          </a:effectRef>
-          <a:fontRef idx="minor">
-            <a:schemeClr val="lt1"/>
-          </a:fontRef>
-        </p:style>
-        <p:txBody>
-          <a:bodyPr rtlCol="0" anchor="ctr"/>
-          <a:lstStyle/>
-          <a:p>
-            <a:pPr algn="ctr"/>
-            <a:endParaRPr/>
-          </a:p>
-        </p:txBody>
-      </p:sp>
-      <p:sp>
-        <p:nvSpPr>
-          <p:cNvPr id="9" name="TextBox 8"/>
-          <p:cNvSpPr txBox="1"/>
-          <p:nvPr/>
-        </p:nvSpPr>
-        <p:spPr>
-          <a:xfrm>
-            <a:off x="5638647" y="2468880"/>
-            <a:ext cx="914400" cy="914400"/>
-          </a:xfrm>
-          <a:prstGeom prst="rect">
-            <a:avLst/>
-          </a:prstGeom>
-          <a:noFill/>
-        </p:spPr>
-        <p:txBody>
-          <a:bodyPr wrap="none" anchor="ctr">
-            <a:spAutoFit/>
-          </a:bodyPr>
-          <a:lstStyle/>
-          <a:p>
-            <a:pPr algn="ctr">
-              <a:defRPr sz="3600" b="1">
-                <a:solidFill>
-                  <a:srgbClr val="0B0F1A"/>
-                </a:solidFill>
-              </a:defRPr>
-            </a:pPr>
-            <a:r>
-              <a:t>2</a:t>
-            </a:r>
-          </a:p>
-        </p:txBody>
-      </p:sp>
-      <p:sp>
-        <p:nvSpPr>
-          <p:cNvPr id="10" name="TextBox 9"/>
-          <p:cNvSpPr txBox="1"/>
-          <p:nvPr/>
-        </p:nvSpPr>
-        <p:spPr>
-          <a:xfrm>
-            <a:off x="5044287" y="3657600"/>
-            <a:ext cx="2103120" cy="1371600"/>
-          </a:xfrm>
-          <a:prstGeom prst="rect">
-            <a:avLst/>
-          </a:prstGeom>
-          <a:noFill/>
-        </p:spPr>
-        <p:txBody>
-          <a:bodyPr wrap="square">
-            <a:normAutofit/>
-          </a:bodyPr>
-          <a:lstStyle/>
-          <a:p>
-            <a:pPr algn="ctr">
-              <a:defRPr sz="1800" b="1">
-                <a:solidFill>
-                  <a:srgbClr val="FFFFFF"/>
-                </a:solidFill>
-              </a:defRPr>
-            </a:pPr>
-            <a:r>
-              <a:t>Frequent</a:t>
-            </a:r>
-          </a:p>
-          <a:p>
-            <a:pPr algn="ctr">
-              <a:spcBef>
-                <a:spcPts val="800"/>
-              </a:spcBef>
-              <a:defRPr sz="1300">
-                <a:solidFill>
-                  <a:srgbClr val="8B95A5"/>
-                </a:solidFill>
-              </a:defRPr>
-            </a:pPr>
-            <a:r>
-              <a:t>Commit after each change.</a:t>
-            </a:r>
-            <a:br/>
-            <a:r>
-              <a:t>Use /clear between tasks.</a:t>
-            </a:r>
-            <a:br/>
-            <a:r>
-              <a:t>Keep context fresh and focused.</a:t>
-            </a:r>
-          </a:p>
-        </p:txBody>
-      </p:sp>
-      <p:sp>
-        <p:nvSpPr>
-          <p:cNvPr id="11" name="Rounded Rectangle 10"/>
-          <p:cNvSpPr/>
-          <p:nvPr/>
-        </p:nvSpPr>
-        <p:spPr>
-          <a:xfrm>
-            <a:off x="7604607" y="2011680"/>
-            <a:ext cx="2286000" cy="3200400"/>
-          </a:xfrm>
-          <a:prstGeom prst="roundRect">
-            <a:avLst/>
-          </a:prstGeom>
-          <a:solidFill>
-            <a:srgbClr val="141A26"/>
-          </a:solidFill>
-          <a:ln w="25400">
-            <a:solidFill>
-              <a:srgbClr val="00D4AA"/>
-            </a:solidFill>
-          </a:ln>
-        </p:spPr>
-        <p:style>
-          <a:lnRef idx="1">
-            <a:schemeClr val="accent1"/>
-          </a:lnRef>
-          <a:fillRef idx="3">
-            <a:schemeClr val="accent1"/>
-          </a:fillRef>
-          <a:effectRef idx="2">
-            <a:schemeClr val="accent1"/>
-          </a:effectRef>
-          <a:fontRef idx="minor">
-            <a:schemeClr val="lt1"/>
-          </a:fontRef>
-        </p:style>
-        <p:txBody>
-          <a:bodyPr rtlCol="0" anchor="ctr"/>
-          <a:lstStyle/>
-          <a:p>
-            <a:pPr algn="ctr"/>
-            <a:endParaRPr/>
-          </a:p>
-        </p:txBody>
-      </p:sp>
-      <p:sp>
-        <p:nvSpPr>
-          <p:cNvPr id="12" name="Oval 11"/>
-          <p:cNvSpPr/>
-          <p:nvPr/>
-        </p:nvSpPr>
-        <p:spPr>
-          <a:xfrm>
-            <a:off x="8290407" y="2468880"/>
-            <a:ext cx="914400" cy="914400"/>
-          </a:xfrm>
-          <a:prstGeom prst="ellipse">
-            <a:avLst/>
-          </a:prstGeom>
-          <a:solidFill>
-            <a:srgbClr val="00D4AA"/>
-          </a:solidFill>
-          <a:ln>
-            <a:noFill/>
-          </a:ln>
-        </p:spPr>
-        <p:style>
-          <a:lnRef idx="1">
-            <a:schemeClr val="accent1"/>
-          </a:lnRef>
-          <a:fillRef idx="3">
-            <a:schemeClr val="accent1"/>
-          </a:fillRef>
-          <a:effectRef idx="2">
-            <a:schemeClr val="accent1"/>
-          </a:effectRef>
-          <a:fontRef idx="minor">
-            <a:schemeClr val="lt1"/>
-          </a:fontRef>
-        </p:style>
-        <p:txBody>
-          <a:bodyPr rtlCol="0" anchor="ctr"/>
-          <a:lstStyle/>
-          <a:p>
-            <a:pPr algn="ctr"/>
-            <a:endParaRPr/>
-          </a:p>
-        </p:txBody>
-      </p:sp>
-      <p:sp>
-        <p:nvSpPr>
-          <p:cNvPr id="13" name="TextBox 12"/>
-          <p:cNvSpPr txBox="1"/>
-          <p:nvPr/>
-        </p:nvSpPr>
-        <p:spPr>
-          <a:xfrm>
-            <a:off x="8290407" y="2468880"/>
-            <a:ext cx="914400" cy="914400"/>
-          </a:xfrm>
-          <a:prstGeom prst="rect">
-            <a:avLst/>
-          </a:prstGeom>
-          <a:noFill/>
-        </p:spPr>
-        <p:txBody>
-          <a:bodyPr wrap="none" anchor="ctr">
-            <a:spAutoFit/>
-          </a:bodyPr>
-          <a:lstStyle/>
-          <a:p>
-            <a:pPr algn="ctr">
-              <a:defRPr sz="3600" b="1">
-                <a:solidFill>
-                  <a:srgbClr val="0B0F1A"/>
-                </a:solidFill>
-              </a:defRPr>
-            </a:pPr>
-            <a:r>
-              <a:t>3</a:t>
-            </a:r>
-          </a:p>
-        </p:txBody>
-      </p:sp>
-      <p:sp>
-        <p:nvSpPr>
-          <p:cNvPr id="14" name="TextBox 13"/>
-          <p:cNvSpPr txBox="1"/>
-          <p:nvPr/>
-        </p:nvSpPr>
-        <p:spPr>
-          <a:xfrm>
-            <a:off x="7696047" y="3657600"/>
-            <a:ext cx="2103120" cy="1371600"/>
-          </a:xfrm>
-          <a:prstGeom prst="rect">
-            <a:avLst/>
-          </a:prstGeom>
-          <a:noFill/>
-        </p:spPr>
-        <p:txBody>
-          <a:bodyPr wrap="square">
-            <a:normAutofit fontScale="92500"/>
-          </a:bodyPr>
-          <a:lstStyle/>
-          <a:p>
-            <a:pPr algn="ctr">
-              <a:defRPr sz="1800" b="1">
-                <a:solidFill>
-                  <a:srgbClr val="FFFFFF"/>
-                </a:solidFill>
-              </a:defRPr>
-            </a:pPr>
-            <a:r>
-              <a:t>Actionable</a:t>
-            </a:r>
-          </a:p>
-          <a:p>
-            <a:pPr algn="ctr">
-              <a:spcBef>
-                <a:spcPts val="800"/>
-              </a:spcBef>
-              <a:defRPr sz="1300">
-                <a:solidFill>
-                  <a:srgbClr val="8B95A5"/>
-                </a:solidFill>
-              </a:defRPr>
-            </a:pPr>
-            <a:r>
-              <a:t>Every prompt should produce a testable result.</a:t>
-            </a:r>
-            <a:br/>
-            <a:r>
-              <a:t>Not 'explain microservices' but 'extract the user service into its own module with tests.'</a:t>
+              <a:defRPr sz="3200" b="1">
+                <a:solidFill>
+                  <a:srgbClr val="FFFFFF"/>
+                </a:solidFill>
+              </a:defRPr>
+            </a:pPr>
+            <a:r>
+              <a:t>The Complete Agentic Loop</a:t>
             </a:r>
           </a:p>
         </p:txBody>
@@ -35342,8 +34843,8 @@
         </p:nvSpPr>
         <p:spPr>
           <a:xfrm>
-            <a:off x="457200" y="1828800"/>
-            <a:ext cx="11277295" cy="1371600"/>
+            <a:off x="457200" y="457200"/>
+            <a:ext cx="11277295" cy="731520"/>
           </a:xfrm>
           <a:prstGeom prst="rect">
             <a:avLst/>
@@ -35357,14 +34858,14 @@
           <a:lstStyle/>
           <a:p>
             <a:pPr algn="ctr">
-              <a:defRPr sz="9600" b="1">
-                <a:solidFill>
-                  <a:srgbClr val="00D4AA"/>
-                </a:solidFill>
-              </a:defRPr>
-            </a:pPr>
-            <a:r>
-              <a:t>DEMO</a:t>
+              <a:defRPr sz="3600" b="1">
+                <a:solidFill>
+                  <a:srgbClr val="FFFFFF"/>
+                </a:solidFill>
+              </a:defRPr>
+            </a:pPr>
+            <a:r>
+              <a:t>When the Loop Breaks</a:t>
             </a:r>
           </a:p>
         </p:txBody>
@@ -35377,8 +34878,8 @@
         </p:nvSpPr>
         <p:spPr>
           <a:xfrm>
-            <a:off x="4724247" y="3474720"/>
-            <a:ext cx="2743200" cy="54864"/>
+            <a:off x="6077559" y="1371600"/>
+            <a:ext cx="36576" cy="4572000"/>
           </a:xfrm>
           <a:prstGeom prst="rect">
             <a:avLst/>
@@ -35421,8 +34922,43 @@
         </p:nvSpPr>
         <p:spPr>
           <a:xfrm>
-            <a:off x="457200" y="3840480"/>
-            <a:ext cx="11277295" cy="914400"/>
+            <a:off x="457200" y="1463040"/>
+            <a:ext cx="5364327" cy="731520"/>
+          </a:xfrm>
+          <a:prstGeom prst="rect">
+            <a:avLst/>
+          </a:prstGeom>
+          <a:noFill/>
+        </p:spPr>
+        <p:txBody>
+          <a:bodyPr wrap="none">
+            <a:spAutoFit/>
+          </a:bodyPr>
+          <a:lstStyle/>
+          <a:p>
+            <a:pPr algn="ctr">
+              <a:defRPr sz="2800" b="1">
+                <a:solidFill>
+                  <a:srgbClr val="E86B4A"/>
+                </a:solidFill>
+              </a:defRPr>
+            </a:pPr>
+            <a:r>
+              <a:t>Symptoms</a:t>
+            </a:r>
+          </a:p>
+        </p:txBody>
+      </p:sp>
+      <p:sp>
+        <p:nvSpPr>
+          <p:cNvPr id="5" name="TextBox 4"/>
+          <p:cNvSpPr txBox="1"/>
+          <p:nvPr/>
+        </p:nvSpPr>
+        <p:spPr>
+          <a:xfrm>
+            <a:off x="457200" y="2286000"/>
+            <a:ext cx="5364327" cy="3657600"/>
           </a:xfrm>
           <a:prstGeom prst="rect">
             <a:avLst/>
@@ -35435,15 +34971,211 @@
           </a:bodyPr>
           <a:lstStyle/>
           <a:p>
+            <a:pPr>
+              <a:spcAft>
+                <a:spcPts val="1200"/>
+              </a:spcAft>
+              <a:defRPr sz="1800">
+                <a:solidFill>
+                  <a:srgbClr val="FFFFFF"/>
+                </a:solidFill>
+              </a:defRPr>
+            </a:pPr>
+            <a:r>
+              <a:t>  Claude makes the same mistake repeatedly</a:t>
+            </a:r>
+          </a:p>
+          <a:p>
+            <a:pPr>
+              <a:spcAft>
+                <a:spcPts val="1200"/>
+              </a:spcAft>
+              <a:defRPr sz="1800">
+                <a:solidFill>
+                  <a:srgbClr val="FFFFFF"/>
+                </a:solidFill>
+              </a:defRPr>
+            </a:pPr>
+            <a:r>
+              <a:t>  Output quality drops mid-conversation</a:t>
+            </a:r>
+          </a:p>
+          <a:p>
+            <a:pPr>
+              <a:spcAft>
+                <a:spcPts val="1200"/>
+              </a:spcAft>
+              <a:defRPr sz="1800">
+                <a:solidFill>
+                  <a:srgbClr val="FFFFFF"/>
+                </a:solidFill>
+              </a:defRPr>
+            </a:pPr>
+            <a:r>
+              <a:t>  Claude 'forgets' earlier instructions</a:t>
+            </a:r>
+          </a:p>
+          <a:p>
+            <a:pPr>
+              <a:spcAft>
+                <a:spcPts val="1200"/>
+              </a:spcAft>
+              <a:defRPr sz="1800">
+                <a:solidFill>
+                  <a:srgbClr val="FFFFFF"/>
+                </a:solidFill>
+              </a:defRPr>
+            </a:pPr>
+            <a:r>
+              <a:t>  Responses become generic or vague</a:t>
+            </a:r>
+          </a:p>
+          <a:p>
+            <a:pPr>
+              <a:spcAft>
+                <a:spcPts val="1200"/>
+              </a:spcAft>
+              <a:defRPr sz="1800">
+                <a:solidFill>
+                  <a:srgbClr val="FFFFFF"/>
+                </a:solidFill>
+              </a:defRPr>
+            </a:pPr>
+            <a:r>
+              <a:t>  Edits start conflicting with each other</a:t>
+            </a:r>
+          </a:p>
+        </p:txBody>
+      </p:sp>
+      <p:sp>
+        <p:nvSpPr>
+          <p:cNvPr id="6" name="TextBox 5"/>
+          <p:cNvSpPr txBox="1"/>
+          <p:nvPr/>
+        </p:nvSpPr>
+        <p:spPr>
+          <a:xfrm>
+            <a:off x="6370167" y="1463040"/>
+            <a:ext cx="5364327" cy="731520"/>
+          </a:xfrm>
+          <a:prstGeom prst="rect">
+            <a:avLst/>
+          </a:prstGeom>
+          <a:noFill/>
+        </p:spPr>
+        <p:txBody>
+          <a:bodyPr wrap="none">
+            <a:spAutoFit/>
+          </a:bodyPr>
+          <a:lstStyle/>
+          <a:p>
             <a:pPr algn="ctr">
-              <a:defRPr sz="3200" b="1">
-                <a:solidFill>
-                  <a:srgbClr val="FFFFFF"/>
-                </a:solidFill>
-              </a:defRPr>
-            </a:pPr>
-            <a:r>
-              <a:t>The Complete Agentic Loop</a:t>
+              <a:defRPr sz="2800" b="1">
+                <a:solidFill>
+                  <a:srgbClr val="00D4AA"/>
+                </a:solidFill>
+              </a:defRPr>
+            </a:pPr>
+            <a:r>
+              <a:t>Fixes</a:t>
+            </a:r>
+          </a:p>
+        </p:txBody>
+      </p:sp>
+      <p:sp>
+        <p:nvSpPr>
+          <p:cNvPr id="7" name="TextBox 6"/>
+          <p:cNvSpPr txBox="1"/>
+          <p:nvPr/>
+        </p:nvSpPr>
+        <p:spPr>
+          <a:xfrm>
+            <a:off x="6370167" y="2286000"/>
+            <a:ext cx="5364327" cy="3657600"/>
+          </a:xfrm>
+          <a:prstGeom prst="rect">
+            <a:avLst/>
+          </a:prstGeom>
+          <a:noFill/>
+        </p:spPr>
+        <p:txBody>
+          <a:bodyPr wrap="square">
+            <a:spAutoFit/>
+          </a:bodyPr>
+          <a:lstStyle/>
+          <a:p>
+            <a:pPr>
+              <a:spcAft>
+                <a:spcPts val="1200"/>
+              </a:spcAft>
+              <a:defRPr sz="1800">
+                <a:solidFill>
+                  <a:srgbClr val="FFFFFF"/>
+                </a:solidFill>
+              </a:defRPr>
+            </a:pPr>
+            <a:r>
+              <a:t>  Run /clear and restart the task</a:t>
+            </a:r>
+          </a:p>
+          <a:p>
+            <a:pPr>
+              <a:spcAft>
+                <a:spcPts val="1200"/>
+              </a:spcAft>
+              <a:defRPr sz="1800">
+                <a:solidFill>
+                  <a:srgbClr val="FFFFFF"/>
+                </a:solidFill>
+              </a:defRPr>
+            </a:pPr>
+            <a:r>
+              <a:t>  Break the task into smaller pieces</a:t>
+            </a:r>
+          </a:p>
+          <a:p>
+            <a:pPr>
+              <a:spcAft>
+                <a:spcPts val="1200"/>
+              </a:spcAft>
+              <a:defRPr sz="1800">
+                <a:solidFill>
+                  <a:srgbClr val="FFFFFF"/>
+                </a:solidFill>
+              </a:defRPr>
+            </a:pPr>
+            <a:r>
+              <a:t>  Add the mistake to CLAUDE.md as a rule</a:t>
+            </a:r>
+          </a:p>
+          <a:p>
+            <a:pPr>
+              <a:spcAft>
+                <a:spcPts val="1200"/>
+              </a:spcAft>
+              <a:defRPr sz="1800">
+                <a:solidFill>
+                  <a:srgbClr val="FFFFFF"/>
+                </a:solidFill>
+              </a:defRPr>
+            </a:pPr>
+            <a:r>
+              <a:t>  Use /compact to summarize and continue</a:t>
+            </a:r>
+          </a:p>
+          <a:p>
+            <a:pPr>
+              <a:spcAft>
+                <a:spcPts val="1200"/>
+              </a:spcAft>
+              <a:defRPr sz="1800">
+                <a:solidFill>
+                  <a:srgbClr val="FFFFFF"/>
+                </a:solidFill>
+              </a:defRPr>
+            </a:pPr>
+            <a:r>
+              <a:t>  Switch to Plan Mode for complex changes</a:t>
             </a:r>
           </a:p>
         </p:txBody>
@@ -35489,8 +35221,8 @@
         </p:nvSpPr>
         <p:spPr>
           <a:xfrm>
-            <a:off x="457200" y="457200"/>
-            <a:ext cx="11277295" cy="731520"/>
+            <a:off x="457200" y="365760"/>
+            <a:ext cx="11277295" cy="822960"/>
           </a:xfrm>
           <a:prstGeom prst="rect">
             <a:avLst/>
@@ -35503,15 +35235,15 @@
           </a:bodyPr>
           <a:lstStyle/>
           <a:p>
-            <a:pPr algn="ctr">
-              <a:defRPr sz="3600" b="1">
-                <a:solidFill>
-                  <a:srgbClr val="FFFFFF"/>
-                </a:solidFill>
-              </a:defRPr>
-            </a:pPr>
-            <a:r>
-              <a:t>When the Loop Breaks</a:t>
+            <a:pPr>
+              <a:defRPr sz="4000" b="1">
+                <a:solidFill>
+                  <a:srgbClr val="FFFFFF"/>
+                </a:solidFill>
+              </a:defRPr>
+            </a:pPr>
+            <a:r>
+              <a:t>The Memory Architecture of AI</a:t>
             </a:r>
           </a:p>
         </p:txBody>
@@ -35524,8 +35256,8 @@
         </p:nvSpPr>
         <p:spPr>
           <a:xfrm>
-            <a:off x="6077559" y="1371600"/>
-            <a:ext cx="36576" cy="4572000"/>
+            <a:off x="457200" y="1234440"/>
+            <a:ext cx="1828800" cy="36576"/>
           </a:xfrm>
           <a:prstGeom prst="rect">
             <a:avLst/>
@@ -35568,8 +35300,43 @@
         </p:nvSpPr>
         <p:spPr>
           <a:xfrm>
-            <a:off x="457200" y="1463040"/>
-            <a:ext cx="5364327" cy="731520"/>
+            <a:off x="914400" y="1828800"/>
+            <a:ext cx="3200400" cy="822960"/>
+          </a:xfrm>
+          <a:prstGeom prst="rect">
+            <a:avLst/>
+          </a:prstGeom>
+          <a:noFill/>
+        </p:spPr>
+        <p:txBody>
+          <a:bodyPr wrap="square">
+            <a:spAutoFit/>
+          </a:bodyPr>
+          <a:lstStyle/>
+          <a:p>
+            <a:pPr algn="r">
+              <a:defRPr sz="2200" b="1">
+                <a:solidFill>
+                  <a:srgbClr val="FF6B6B"/>
+                </a:solidFill>
+              </a:defRPr>
+            </a:pPr>
+            <a:r>
+              <a:t>Working memory</a:t>
+            </a:r>
+          </a:p>
+        </p:txBody>
+      </p:sp>
+      <p:sp>
+        <p:nvSpPr>
+          <p:cNvPr id="5" name="TextBox 4"/>
+          <p:cNvSpPr txBox="1"/>
+          <p:nvPr/>
+        </p:nvSpPr>
+        <p:spPr>
+          <a:xfrm>
+            <a:off x="4297680" y="1828800"/>
+            <a:ext cx="731520" cy="822960"/>
           </a:xfrm>
           <a:prstGeom prst="rect">
             <a:avLst/>
@@ -35583,28 +35350,28 @@
           <a:lstStyle/>
           <a:p>
             <a:pPr algn="ctr">
-              <a:defRPr sz="2800" b="1">
-                <a:solidFill>
-                  <a:srgbClr val="E86B4A"/>
-                </a:solidFill>
-              </a:defRPr>
-            </a:pPr>
-            <a:r>
-              <a:t>Symptoms</a:t>
-            </a:r>
-          </a:p>
-        </p:txBody>
-      </p:sp>
-      <p:sp>
-        <p:nvSpPr>
-          <p:cNvPr id="5" name="TextBox 4"/>
+              <a:defRPr sz="2800">
+                <a:solidFill>
+                  <a:srgbClr val="8A8F98"/>
+                </a:solidFill>
+              </a:defRPr>
+            </a:pPr>
+            <a:r>
+              <a:t>→</a:t>
+            </a:r>
+          </a:p>
+        </p:txBody>
+      </p:sp>
+      <p:sp>
+        <p:nvSpPr>
+          <p:cNvPr id="6" name="TextBox 5"/>
           <p:cNvSpPr txBox="1"/>
           <p:nvPr/>
         </p:nvSpPr>
         <p:spPr>
           <a:xfrm>
-            <a:off x="457200" y="2286000"/>
-            <a:ext cx="5364327" cy="3657600"/>
+            <a:off x="5212080" y="1828800"/>
+            <a:ext cx="3657600" cy="822960"/>
           </a:xfrm>
           <a:prstGeom prst="rect">
             <a:avLst/>
@@ -35617,92 +35384,64 @@
           </a:bodyPr>
           <a:lstStyle/>
           <a:p>
-            <a:pPr>
-              <a:spcAft>
-                <a:spcPts val="1200"/>
-              </a:spcAft>
-              <a:defRPr sz="1800">
-                <a:solidFill>
-                  <a:srgbClr val="FFFFFF"/>
-                </a:solidFill>
-              </a:defRPr>
-            </a:pPr>
-            <a:r>
-              <a:t>  Claude makes the same mistake repeatedly</a:t>
-            </a:r>
-          </a:p>
-          <a:p>
-            <a:pPr>
-              <a:spcAft>
-                <a:spcPts val="1200"/>
-              </a:spcAft>
-              <a:defRPr sz="1800">
-                <a:solidFill>
-                  <a:srgbClr val="FFFFFF"/>
-                </a:solidFill>
-              </a:defRPr>
-            </a:pPr>
-            <a:r>
-              <a:t>  Output quality drops mid-conversation</a:t>
-            </a:r>
-          </a:p>
-          <a:p>
-            <a:pPr>
-              <a:spcAft>
-                <a:spcPts val="1200"/>
-              </a:spcAft>
-              <a:defRPr sz="1800">
-                <a:solidFill>
-                  <a:srgbClr val="FFFFFF"/>
-                </a:solidFill>
-              </a:defRPr>
-            </a:pPr>
-            <a:r>
-              <a:t>  Claude 'forgets' earlier instructions</a:t>
-            </a:r>
-          </a:p>
-          <a:p>
-            <a:pPr>
-              <a:spcAft>
-                <a:spcPts val="1200"/>
-              </a:spcAft>
-              <a:defRPr sz="1800">
-                <a:solidFill>
-                  <a:srgbClr val="FFFFFF"/>
-                </a:solidFill>
-              </a:defRPr>
-            </a:pPr>
-            <a:r>
-              <a:t>  Responses become generic or vague</a:t>
-            </a:r>
-          </a:p>
-          <a:p>
-            <a:pPr>
-              <a:spcAft>
-                <a:spcPts val="1200"/>
-              </a:spcAft>
-              <a:defRPr sz="1800">
-                <a:solidFill>
-                  <a:srgbClr val="FFFFFF"/>
-                </a:solidFill>
-              </a:defRPr>
-            </a:pPr>
-            <a:r>
-              <a:t>  Edits start conflicting with each other</a:t>
-            </a:r>
-          </a:p>
-        </p:txBody>
-      </p:sp>
-      <p:sp>
-        <p:nvSpPr>
-          <p:cNvPr id="6" name="TextBox 5"/>
+            <a:pPr algn="l">
+              <a:defRPr sz="2200" b="1">
+                <a:solidFill>
+                  <a:srgbClr val="00D4AA"/>
+                </a:solidFill>
+              </a:defRPr>
+            </a:pPr>
+            <a:r>
+              <a:t>Context window</a:t>
+            </a:r>
+          </a:p>
+        </p:txBody>
+      </p:sp>
+      <p:sp>
+        <p:nvSpPr>
+          <p:cNvPr id="7" name="TextBox 6"/>
           <p:cNvSpPr txBox="1"/>
           <p:nvPr/>
         </p:nvSpPr>
         <p:spPr>
           <a:xfrm>
-            <a:off x="6370167" y="1463040"/>
-            <a:ext cx="5364327" cy="731520"/>
+            <a:off x="914400" y="2651760"/>
+            <a:ext cx="3200400" cy="822960"/>
+          </a:xfrm>
+          <a:prstGeom prst="rect">
+            <a:avLst/>
+          </a:prstGeom>
+          <a:noFill/>
+        </p:spPr>
+        <p:txBody>
+          <a:bodyPr wrap="square">
+            <a:spAutoFit/>
+          </a:bodyPr>
+          <a:lstStyle/>
+          <a:p>
+            <a:pPr algn="r">
+              <a:defRPr sz="2200" b="1">
+                <a:solidFill>
+                  <a:srgbClr val="FF6B6B"/>
+                </a:solidFill>
+              </a:defRPr>
+            </a:pPr>
+            <a:r>
+              <a:t>Short-term memory</a:t>
+            </a:r>
+          </a:p>
+        </p:txBody>
+      </p:sp>
+      <p:sp>
+        <p:nvSpPr>
+          <p:cNvPr id="8" name="TextBox 7"/>
+          <p:cNvSpPr txBox="1"/>
+          <p:nvPr/>
+        </p:nvSpPr>
+        <p:spPr>
+          <a:xfrm>
+            <a:off x="4297680" y="2651760"/>
+            <a:ext cx="731520" cy="822960"/>
           </a:xfrm>
           <a:prstGeom prst="rect">
             <a:avLst/>
@@ -35716,28 +35455,28 @@
           <a:lstStyle/>
           <a:p>
             <a:pPr algn="ctr">
-              <a:defRPr sz="2800" b="1">
-                <a:solidFill>
-                  <a:srgbClr val="00D4AA"/>
-                </a:solidFill>
-              </a:defRPr>
-            </a:pPr>
-            <a:r>
-              <a:t>Fixes</a:t>
-            </a:r>
-          </a:p>
-        </p:txBody>
-      </p:sp>
-      <p:sp>
-        <p:nvSpPr>
-          <p:cNvPr id="7" name="TextBox 6"/>
+              <a:defRPr sz="2800">
+                <a:solidFill>
+                  <a:srgbClr val="8A8F98"/>
+                </a:solidFill>
+              </a:defRPr>
+            </a:pPr>
+            <a:r>
+              <a:t>→</a:t>
+            </a:r>
+          </a:p>
+        </p:txBody>
+      </p:sp>
+      <p:sp>
+        <p:nvSpPr>
+          <p:cNvPr id="9" name="TextBox 8"/>
           <p:cNvSpPr txBox="1"/>
           <p:nvPr/>
         </p:nvSpPr>
         <p:spPr>
           <a:xfrm>
-            <a:off x="6370167" y="2286000"/>
-            <a:ext cx="5364327" cy="3657600"/>
+            <a:off x="5212080" y="2651760"/>
+            <a:ext cx="3657600" cy="822960"/>
           </a:xfrm>
           <a:prstGeom prst="rect">
             <a:avLst/>
@@ -35750,78 +35489,680 @@
           </a:bodyPr>
           <a:lstStyle/>
           <a:p>
-            <a:pPr>
-              <a:spcAft>
-                <a:spcPts val="1200"/>
-              </a:spcAft>
-              <a:defRPr sz="1800">
-                <a:solidFill>
-                  <a:srgbClr val="FFFFFF"/>
-                </a:solidFill>
-              </a:defRPr>
-            </a:pPr>
-            <a:r>
-              <a:t>  Run /clear and restart the task</a:t>
-            </a:r>
-          </a:p>
-          <a:p>
-            <a:pPr>
-              <a:spcAft>
-                <a:spcPts val="1200"/>
-              </a:spcAft>
-              <a:defRPr sz="1800">
-                <a:solidFill>
-                  <a:srgbClr val="FFFFFF"/>
-                </a:solidFill>
-              </a:defRPr>
-            </a:pPr>
-            <a:r>
-              <a:t>  Break the task into smaller pieces</a:t>
-            </a:r>
-          </a:p>
-          <a:p>
-            <a:pPr>
-              <a:spcAft>
-                <a:spcPts val="1200"/>
-              </a:spcAft>
-              <a:defRPr sz="1800">
-                <a:solidFill>
-                  <a:srgbClr val="FFFFFF"/>
-                </a:solidFill>
-              </a:defRPr>
-            </a:pPr>
-            <a:r>
-              <a:t>  Add the mistake to CLAUDE.md as a rule</a:t>
-            </a:r>
-          </a:p>
-          <a:p>
-            <a:pPr>
-              <a:spcAft>
-                <a:spcPts val="1200"/>
-              </a:spcAft>
-              <a:defRPr sz="1800">
-                <a:solidFill>
-                  <a:srgbClr val="FFFFFF"/>
-                </a:solidFill>
-              </a:defRPr>
-            </a:pPr>
-            <a:r>
-              <a:t>  Use /compact to summarize and continue</a:t>
-            </a:r>
-          </a:p>
-          <a:p>
-            <a:pPr>
-              <a:spcAft>
-                <a:spcPts val="1200"/>
-              </a:spcAft>
-              <a:defRPr sz="1800">
-                <a:solidFill>
-                  <a:srgbClr val="FFFFFF"/>
-                </a:solidFill>
-              </a:defRPr>
-            </a:pPr>
-            <a:r>
-              <a:t>  Switch to Plan Mode for complex changes</a:t>
+            <a:pPr algn="l">
+              <a:defRPr sz="2200" b="1">
+                <a:solidFill>
+                  <a:srgbClr val="00D4AA"/>
+                </a:solidFill>
+              </a:defRPr>
+            </a:pPr>
+            <a:r>
+              <a:t>Session history</a:t>
+            </a:r>
+          </a:p>
+        </p:txBody>
+      </p:sp>
+      <p:sp>
+        <p:nvSpPr>
+          <p:cNvPr id="10" name="TextBox 9"/>
+          <p:cNvSpPr txBox="1"/>
+          <p:nvPr/>
+        </p:nvSpPr>
+        <p:spPr>
+          <a:xfrm>
+            <a:off x="914400" y="3474720"/>
+            <a:ext cx="3200400" cy="822960"/>
+          </a:xfrm>
+          <a:prstGeom prst="rect">
+            <a:avLst/>
+          </a:prstGeom>
+          <a:noFill/>
+        </p:spPr>
+        <p:txBody>
+          <a:bodyPr wrap="square">
+            <a:spAutoFit/>
+          </a:bodyPr>
+          <a:lstStyle/>
+          <a:p>
+            <a:pPr algn="r">
+              <a:defRPr sz="2200" b="1">
+                <a:solidFill>
+                  <a:srgbClr val="FF6B6B"/>
+                </a:solidFill>
+              </a:defRPr>
+            </a:pPr>
+            <a:r>
+              <a:t>Long-term memory</a:t>
+            </a:r>
+          </a:p>
+        </p:txBody>
+      </p:sp>
+      <p:sp>
+        <p:nvSpPr>
+          <p:cNvPr id="11" name="TextBox 10"/>
+          <p:cNvSpPr txBox="1"/>
+          <p:nvPr/>
+        </p:nvSpPr>
+        <p:spPr>
+          <a:xfrm>
+            <a:off x="4297680" y="3474720"/>
+            <a:ext cx="731520" cy="822960"/>
+          </a:xfrm>
+          <a:prstGeom prst="rect">
+            <a:avLst/>
+          </a:prstGeom>
+          <a:noFill/>
+        </p:spPr>
+        <p:txBody>
+          <a:bodyPr wrap="none">
+            <a:spAutoFit/>
+          </a:bodyPr>
+          <a:lstStyle/>
+          <a:p>
+            <a:pPr algn="ctr">
+              <a:defRPr sz="2800">
+                <a:solidFill>
+                  <a:srgbClr val="8A8F98"/>
+                </a:solidFill>
+              </a:defRPr>
+            </a:pPr>
+            <a:r>
+              <a:t>→</a:t>
+            </a:r>
+          </a:p>
+        </p:txBody>
+      </p:sp>
+      <p:sp>
+        <p:nvSpPr>
+          <p:cNvPr id="12" name="TextBox 11"/>
+          <p:cNvSpPr txBox="1"/>
+          <p:nvPr/>
+        </p:nvSpPr>
+        <p:spPr>
+          <a:xfrm>
+            <a:off x="5212080" y="3474720"/>
+            <a:ext cx="3657600" cy="822960"/>
+          </a:xfrm>
+          <a:prstGeom prst="rect">
+            <a:avLst/>
+          </a:prstGeom>
+          <a:noFill/>
+        </p:spPr>
+        <p:txBody>
+          <a:bodyPr wrap="square">
+            <a:spAutoFit/>
+          </a:bodyPr>
+          <a:lstStyle/>
+          <a:p>
+            <a:pPr algn="l">
+              <a:defRPr sz="2200" b="1">
+                <a:solidFill>
+                  <a:srgbClr val="00D4AA"/>
+                </a:solidFill>
+              </a:defRPr>
+            </a:pPr>
+            <a:r>
+              <a:t>CLAUDE.md</a:t>
+            </a:r>
+          </a:p>
+        </p:txBody>
+      </p:sp>
+      <p:sp>
+        <p:nvSpPr>
+          <p:cNvPr id="13" name="TextBox 12"/>
+          <p:cNvSpPr txBox="1"/>
+          <p:nvPr/>
+        </p:nvSpPr>
+        <p:spPr>
+          <a:xfrm>
+            <a:off x="914400" y="4297680"/>
+            <a:ext cx="3200400" cy="822960"/>
+          </a:xfrm>
+          <a:prstGeom prst="rect">
+            <a:avLst/>
+          </a:prstGeom>
+          <a:noFill/>
+        </p:spPr>
+        <p:txBody>
+          <a:bodyPr wrap="square">
+            <a:spAutoFit/>
+          </a:bodyPr>
+          <a:lstStyle/>
+          <a:p>
+            <a:pPr algn="r">
+              <a:defRPr sz="2200" b="1">
+                <a:solidFill>
+                  <a:srgbClr val="FF6B6B"/>
+                </a:solidFill>
+              </a:defRPr>
+            </a:pPr>
+            <a:r>
+              <a:t>Muscle memory</a:t>
+            </a:r>
+          </a:p>
+        </p:txBody>
+      </p:sp>
+      <p:sp>
+        <p:nvSpPr>
+          <p:cNvPr id="14" name="TextBox 13"/>
+          <p:cNvSpPr txBox="1"/>
+          <p:nvPr/>
+        </p:nvSpPr>
+        <p:spPr>
+          <a:xfrm>
+            <a:off x="4297680" y="4297680"/>
+            <a:ext cx="731520" cy="822960"/>
+          </a:xfrm>
+          <a:prstGeom prst="rect">
+            <a:avLst/>
+          </a:prstGeom>
+          <a:noFill/>
+        </p:spPr>
+        <p:txBody>
+          <a:bodyPr wrap="none">
+            <a:spAutoFit/>
+          </a:bodyPr>
+          <a:lstStyle/>
+          <a:p>
+            <a:pPr algn="ctr">
+              <a:defRPr sz="2800">
+                <a:solidFill>
+                  <a:srgbClr val="8A8F98"/>
+                </a:solidFill>
+              </a:defRPr>
+            </a:pPr>
+            <a:r>
+              <a:t>→</a:t>
+            </a:r>
+          </a:p>
+        </p:txBody>
+      </p:sp>
+      <p:sp>
+        <p:nvSpPr>
+          <p:cNvPr id="15" name="TextBox 14"/>
+          <p:cNvSpPr txBox="1"/>
+          <p:nvPr/>
+        </p:nvSpPr>
+        <p:spPr>
+          <a:xfrm>
+            <a:off x="5212080" y="4297680"/>
+            <a:ext cx="3657600" cy="822960"/>
+          </a:xfrm>
+          <a:prstGeom prst="rect">
+            <a:avLst/>
+          </a:prstGeom>
+          <a:noFill/>
+        </p:spPr>
+        <p:txBody>
+          <a:bodyPr wrap="square">
+            <a:spAutoFit/>
+          </a:bodyPr>
+          <a:lstStyle/>
+          <a:p>
+            <a:pPr algn="l">
+              <a:defRPr sz="2200" b="1">
+                <a:solidFill>
+                  <a:srgbClr val="00D4AA"/>
+                </a:solidFill>
+              </a:defRPr>
+            </a:pPr>
+            <a:r>
+              <a:t>Skills &amp; commands</a:t>
+            </a:r>
+          </a:p>
+        </p:txBody>
+      </p:sp>
+      <p:sp>
+        <p:nvSpPr>
+          <p:cNvPr id="16" name="TextBox 15"/>
+          <p:cNvSpPr txBox="1"/>
+          <p:nvPr/>
+        </p:nvSpPr>
+        <p:spPr>
+          <a:xfrm>
+            <a:off x="1371600" y="5303520"/>
+            <a:ext cx="8229600" cy="548640"/>
+          </a:xfrm>
+          <a:prstGeom prst="rect">
+            <a:avLst/>
+          </a:prstGeom>
+          <a:noFill/>
+        </p:spPr>
+        <p:txBody>
+          <a:bodyPr wrap="square">
+            <a:spAutoFit/>
+          </a:bodyPr>
+          <a:lstStyle/>
+          <a:p>
+            <a:pPr algn="ctr">
+              <a:defRPr sz="1600">
+                <a:solidFill>
+                  <a:srgbClr val="8A8F98"/>
+                </a:solidFill>
+              </a:defRPr>
+            </a:pPr>
+            <a:r>
+              <a:t>Everything today teaches you how to manage these four memory layers.</a:t>
+            </a:r>
+          </a:p>
+        </p:txBody>
+      </p:sp>
+      <p:sp>
+        <p:nvSpPr>
+          <p:cNvPr id="17" name="TextBox 16"/>
+          <p:cNvSpPr txBox="1"/>
+          <p:nvPr/>
+        </p:nvSpPr>
+        <p:spPr>
+          <a:xfrm>
+            <a:off x="4297680" y="1828800"/>
+            <a:ext cx="731520" cy="822960"/>
+          </a:xfrm>
+          <a:prstGeom prst="rect">
+            <a:avLst/>
+          </a:prstGeom>
+          <a:noFill/>
+        </p:spPr>
+        <p:txBody>
+          <a:bodyPr wrap="none">
+            <a:spAutoFit/>
+          </a:bodyPr>
+          <a:lstStyle/>
+          <a:p>
+            <a:pPr algn="ctr">
+              <a:defRPr sz="2800">
+                <a:solidFill>
+                  <a:srgbClr val="8A8F98"/>
+                </a:solidFill>
+              </a:defRPr>
+            </a:pPr>
+            <a:r>
+              <a:t>→</a:t>
+            </a:r>
+          </a:p>
+        </p:txBody>
+      </p:sp>
+      <p:sp>
+        <p:nvSpPr>
+          <p:cNvPr id="18" name="TextBox 17"/>
+          <p:cNvSpPr txBox="1"/>
+          <p:nvPr/>
+        </p:nvSpPr>
+        <p:spPr>
+          <a:xfrm>
+            <a:off x="5212080" y="1828800"/>
+            <a:ext cx="3657600" cy="822960"/>
+          </a:xfrm>
+          <a:prstGeom prst="rect">
+            <a:avLst/>
+          </a:prstGeom>
+          <a:noFill/>
+        </p:spPr>
+        <p:txBody>
+          <a:bodyPr wrap="square">
+            <a:spAutoFit/>
+          </a:bodyPr>
+          <a:lstStyle/>
+          <a:p>
+            <a:pPr algn="l">
+              <a:defRPr sz="2200" b="1">
+                <a:solidFill>
+                  <a:srgbClr val="00D4AA"/>
+                </a:solidFill>
+              </a:defRPr>
+            </a:pPr>
+            <a:r>
+              <a:t>Context window</a:t>
+            </a:r>
+          </a:p>
+        </p:txBody>
+      </p:sp>
+      <p:sp>
+        <p:nvSpPr>
+          <p:cNvPr id="19" name="TextBox 18"/>
+          <p:cNvSpPr txBox="1"/>
+          <p:nvPr/>
+        </p:nvSpPr>
+        <p:spPr>
+          <a:xfrm>
+            <a:off x="914400" y="2651760"/>
+            <a:ext cx="3200400" cy="822960"/>
+          </a:xfrm>
+          <a:prstGeom prst="rect">
+            <a:avLst/>
+          </a:prstGeom>
+          <a:noFill/>
+        </p:spPr>
+        <p:txBody>
+          <a:bodyPr wrap="square">
+            <a:spAutoFit/>
+          </a:bodyPr>
+          <a:lstStyle/>
+          <a:p>
+            <a:pPr algn="r">
+              <a:defRPr sz="2200" b="1">
+                <a:solidFill>
+                  <a:srgbClr val="FF6B6B"/>
+                </a:solidFill>
+              </a:defRPr>
+            </a:pPr>
+            <a:r>
+              <a:t>Short-term memory</a:t>
+            </a:r>
+          </a:p>
+        </p:txBody>
+      </p:sp>
+      <p:sp>
+        <p:nvSpPr>
+          <p:cNvPr id="20" name="TextBox 19"/>
+          <p:cNvSpPr txBox="1"/>
+          <p:nvPr/>
+        </p:nvSpPr>
+        <p:spPr>
+          <a:xfrm>
+            <a:off x="4297680" y="2651760"/>
+            <a:ext cx="731520" cy="822960"/>
+          </a:xfrm>
+          <a:prstGeom prst="rect">
+            <a:avLst/>
+          </a:prstGeom>
+          <a:noFill/>
+        </p:spPr>
+        <p:txBody>
+          <a:bodyPr wrap="none">
+            <a:spAutoFit/>
+          </a:bodyPr>
+          <a:lstStyle/>
+          <a:p>
+            <a:pPr algn="ctr">
+              <a:defRPr sz="2800">
+                <a:solidFill>
+                  <a:srgbClr val="8A8F98"/>
+                </a:solidFill>
+              </a:defRPr>
+            </a:pPr>
+            <a:r>
+              <a:t>→</a:t>
+            </a:r>
+          </a:p>
+        </p:txBody>
+      </p:sp>
+      <p:sp>
+        <p:nvSpPr>
+          <p:cNvPr id="21" name="TextBox 20"/>
+          <p:cNvSpPr txBox="1"/>
+          <p:nvPr/>
+        </p:nvSpPr>
+        <p:spPr>
+          <a:xfrm>
+            <a:off x="5212080" y="2651760"/>
+            <a:ext cx="3657600" cy="822960"/>
+          </a:xfrm>
+          <a:prstGeom prst="rect">
+            <a:avLst/>
+          </a:prstGeom>
+          <a:noFill/>
+        </p:spPr>
+        <p:txBody>
+          <a:bodyPr wrap="square">
+            <a:spAutoFit/>
+          </a:bodyPr>
+          <a:lstStyle/>
+          <a:p>
+            <a:pPr algn="l">
+              <a:defRPr sz="2200" b="1">
+                <a:solidFill>
+                  <a:srgbClr val="00D4AA"/>
+                </a:solidFill>
+              </a:defRPr>
+            </a:pPr>
+            <a:r>
+              <a:t>Session history</a:t>
+            </a:r>
+          </a:p>
+        </p:txBody>
+      </p:sp>
+      <p:sp>
+        <p:nvSpPr>
+          <p:cNvPr id="22" name="TextBox 21"/>
+          <p:cNvSpPr txBox="1"/>
+          <p:nvPr/>
+        </p:nvSpPr>
+        <p:spPr>
+          <a:xfrm>
+            <a:off x="914400" y="3474720"/>
+            <a:ext cx="3200400" cy="822960"/>
+          </a:xfrm>
+          <a:prstGeom prst="rect">
+            <a:avLst/>
+          </a:prstGeom>
+          <a:noFill/>
+        </p:spPr>
+        <p:txBody>
+          <a:bodyPr wrap="square">
+            <a:spAutoFit/>
+          </a:bodyPr>
+          <a:lstStyle/>
+          <a:p>
+            <a:pPr algn="r">
+              <a:defRPr sz="2200" b="1">
+                <a:solidFill>
+                  <a:srgbClr val="FF6B6B"/>
+                </a:solidFill>
+              </a:defRPr>
+            </a:pPr>
+            <a:r>
+              <a:t>Long-term memory</a:t>
+            </a:r>
+          </a:p>
+        </p:txBody>
+      </p:sp>
+      <p:sp>
+        <p:nvSpPr>
+          <p:cNvPr id="23" name="TextBox 22"/>
+          <p:cNvSpPr txBox="1"/>
+          <p:nvPr/>
+        </p:nvSpPr>
+        <p:spPr>
+          <a:xfrm>
+            <a:off x="4297680" y="3474720"/>
+            <a:ext cx="731520" cy="822960"/>
+          </a:xfrm>
+          <a:prstGeom prst="rect">
+            <a:avLst/>
+          </a:prstGeom>
+          <a:noFill/>
+        </p:spPr>
+        <p:txBody>
+          <a:bodyPr wrap="none">
+            <a:spAutoFit/>
+          </a:bodyPr>
+          <a:lstStyle/>
+          <a:p>
+            <a:pPr algn="ctr">
+              <a:defRPr sz="2800">
+                <a:solidFill>
+                  <a:srgbClr val="8A8F98"/>
+                </a:solidFill>
+              </a:defRPr>
+            </a:pPr>
+            <a:r>
+              <a:t>→</a:t>
+            </a:r>
+          </a:p>
+        </p:txBody>
+      </p:sp>
+      <p:sp>
+        <p:nvSpPr>
+          <p:cNvPr id="24" name="TextBox 23"/>
+          <p:cNvSpPr txBox="1"/>
+          <p:nvPr/>
+        </p:nvSpPr>
+        <p:spPr>
+          <a:xfrm>
+            <a:off x="5212080" y="3474720"/>
+            <a:ext cx="3657600" cy="822960"/>
+          </a:xfrm>
+          <a:prstGeom prst="rect">
+            <a:avLst/>
+          </a:prstGeom>
+          <a:noFill/>
+        </p:spPr>
+        <p:txBody>
+          <a:bodyPr wrap="square">
+            <a:spAutoFit/>
+          </a:bodyPr>
+          <a:lstStyle/>
+          <a:p>
+            <a:pPr algn="l">
+              <a:defRPr sz="2200" b="1">
+                <a:solidFill>
+                  <a:srgbClr val="00D4AA"/>
+                </a:solidFill>
+              </a:defRPr>
+            </a:pPr>
+            <a:r>
+              <a:t>CLAUDE.md</a:t>
+            </a:r>
+          </a:p>
+        </p:txBody>
+      </p:sp>
+      <p:sp>
+        <p:nvSpPr>
+          <p:cNvPr id="25" name="TextBox 24"/>
+          <p:cNvSpPr txBox="1"/>
+          <p:nvPr/>
+        </p:nvSpPr>
+        <p:spPr>
+          <a:xfrm>
+            <a:off x="914400" y="4297680"/>
+            <a:ext cx="3200400" cy="822960"/>
+          </a:xfrm>
+          <a:prstGeom prst="rect">
+            <a:avLst/>
+          </a:prstGeom>
+          <a:noFill/>
+        </p:spPr>
+        <p:txBody>
+          <a:bodyPr wrap="square">
+            <a:spAutoFit/>
+          </a:bodyPr>
+          <a:lstStyle/>
+          <a:p>
+            <a:pPr algn="r">
+              <a:defRPr sz="2200" b="1">
+                <a:solidFill>
+                  <a:srgbClr val="FF6B6B"/>
+                </a:solidFill>
+              </a:defRPr>
+            </a:pPr>
+            <a:r>
+              <a:t>Muscle memory</a:t>
+            </a:r>
+          </a:p>
+        </p:txBody>
+      </p:sp>
+      <p:sp>
+        <p:nvSpPr>
+          <p:cNvPr id="26" name="TextBox 25"/>
+          <p:cNvSpPr txBox="1"/>
+          <p:nvPr/>
+        </p:nvSpPr>
+        <p:spPr>
+          <a:xfrm>
+            <a:off x="4297680" y="4297680"/>
+            <a:ext cx="731520" cy="822960"/>
+          </a:xfrm>
+          <a:prstGeom prst="rect">
+            <a:avLst/>
+          </a:prstGeom>
+          <a:noFill/>
+        </p:spPr>
+        <p:txBody>
+          <a:bodyPr wrap="none">
+            <a:spAutoFit/>
+          </a:bodyPr>
+          <a:lstStyle/>
+          <a:p>
+            <a:pPr algn="ctr">
+              <a:defRPr sz="2800">
+                <a:solidFill>
+                  <a:srgbClr val="8A8F98"/>
+                </a:solidFill>
+              </a:defRPr>
+            </a:pPr>
+            <a:r>
+              <a:t>→</a:t>
+            </a:r>
+          </a:p>
+        </p:txBody>
+      </p:sp>
+      <p:sp>
+        <p:nvSpPr>
+          <p:cNvPr id="27" name="TextBox 26"/>
+          <p:cNvSpPr txBox="1"/>
+          <p:nvPr/>
+        </p:nvSpPr>
+        <p:spPr>
+          <a:xfrm>
+            <a:off x="5212080" y="4297680"/>
+            <a:ext cx="3657600" cy="822960"/>
+          </a:xfrm>
+          <a:prstGeom prst="rect">
+            <a:avLst/>
+          </a:prstGeom>
+          <a:noFill/>
+        </p:spPr>
+        <p:txBody>
+          <a:bodyPr wrap="square">
+            <a:spAutoFit/>
+          </a:bodyPr>
+          <a:lstStyle/>
+          <a:p>
+            <a:pPr algn="l">
+              <a:defRPr sz="2200" b="1">
+                <a:solidFill>
+                  <a:srgbClr val="00D4AA"/>
+                </a:solidFill>
+              </a:defRPr>
+            </a:pPr>
+            <a:r>
+              <a:t>Skills &amp; commands</a:t>
+            </a:r>
+          </a:p>
+        </p:txBody>
+      </p:sp>
+      <p:sp>
+        <p:nvSpPr>
+          <p:cNvPr id="28" name="TextBox 27"/>
+          <p:cNvSpPr txBox="1"/>
+          <p:nvPr/>
+        </p:nvSpPr>
+        <p:spPr>
+          <a:xfrm>
+            <a:off x="1371600" y="5303520"/>
+            <a:ext cx="8229600" cy="548640"/>
+          </a:xfrm>
+          <a:prstGeom prst="rect">
+            <a:avLst/>
+          </a:prstGeom>
+          <a:noFill/>
+        </p:spPr>
+        <p:txBody>
+          <a:bodyPr wrap="square">
+            <a:spAutoFit/>
+          </a:bodyPr>
+          <a:lstStyle/>
+          <a:p>
+            <a:pPr algn="ctr">
+              <a:defRPr sz="1600">
+                <a:solidFill>
+                  <a:srgbClr val="8A8F98"/>
+                </a:solidFill>
+              </a:defRPr>
+            </a:pPr>
+            <a:r>
+              <a:t>Everything today teaches you how to manage these four memory layers.</a:t>
             </a:r>
           </a:p>
         </p:txBody>
@@ -41681,58 +42022,14 @@
       </p:sp>
       <p:sp>
         <p:nvSpPr>
-          <p:cNvPr id="4" name="Oval 3"/>
-          <p:cNvSpPr/>
-          <p:nvPr/>
-        </p:nvSpPr>
-        <p:spPr>
-          <a:xfrm>
-            <a:off x="457200" y="1371600"/>
-            <a:ext cx="411480" cy="411480"/>
-          </a:xfrm>
-          <a:prstGeom prst="ellipse">
-            <a:avLst/>
-          </a:prstGeom>
-          <a:solidFill>
-            <a:srgbClr val="00D4AA"/>
-          </a:solidFill>
-          <a:ln>
-            <a:noFill/>
-          </a:ln>
-        </p:spPr>
-        <p:style>
-          <a:lnRef idx="1">
-            <a:schemeClr val="accent1"/>
-          </a:lnRef>
-          <a:fillRef idx="3">
-            <a:schemeClr val="accent1"/>
-          </a:fillRef>
-          <a:effectRef idx="2">
-            <a:schemeClr val="accent1"/>
-          </a:effectRef>
-          <a:fontRef idx="minor">
-            <a:schemeClr val="lt1"/>
-          </a:fontRef>
-        </p:style>
-        <p:txBody>
-          <a:bodyPr rtlCol="0" anchor="ctr"/>
-          <a:lstStyle/>
-          <a:p>
-            <a:pPr algn="ctr"/>
-            <a:endParaRPr/>
-          </a:p>
-        </p:txBody>
-      </p:sp>
-      <p:sp>
-        <p:nvSpPr>
-          <p:cNvPr id="5" name="TextBox 4"/>
+          <p:cNvPr id="4" name="TextBox 3"/>
           <p:cNvSpPr txBox="1"/>
           <p:nvPr/>
         </p:nvSpPr>
         <p:spPr>
           <a:xfrm>
             <a:off x="731520" y="1828800"/>
-            <a:ext cx="1645920" cy="365760"/>
+            <a:ext cx="1371600" cy="365760"/>
           </a:xfrm>
           <a:prstGeom prst="rect">
             <a:avLst/>
@@ -41753,21 +42050,21 @@
               </a:defRPr>
             </a:pPr>
             <a:r>
-              <a:t>Exercise 1:</a:t>
-            </a:r>
-          </a:p>
-        </p:txBody>
-      </p:sp>
-      <p:sp>
-        <p:nvSpPr>
-          <p:cNvPr id="6" name="TextBox 5"/>
+              <a:t>Lab 2A:</a:t>
+            </a:r>
+          </a:p>
+        </p:txBody>
+      </p:sp>
+      <p:sp>
+        <p:nvSpPr>
+          <p:cNvPr id="5" name="TextBox 4"/>
           <p:cNvSpPr txBox="1"/>
           <p:nvPr/>
         </p:nvSpPr>
         <p:spPr>
           <a:xfrm>
-            <a:off x="2468880" y="1828800"/>
-            <a:ext cx="7772400" cy="640080"/>
+            <a:off x="2194560" y="1828800"/>
+            <a:ext cx="8229600" cy="640080"/>
           </a:xfrm>
           <a:prstGeom prst="rect">
             <a:avLst/>
@@ -41788,21 +42085,21 @@
               </a:defRPr>
             </a:pPr>
             <a:r>
-              <a:t>Build a complete Business Dashboard from a single prompt — API, database, and UI</a:t>
-            </a:r>
-          </a:p>
-        </p:txBody>
-      </p:sp>
-      <p:sp>
-        <p:nvSpPr>
-          <p:cNvPr id="7" name="TextBox 6"/>
+              <a:t>The Magic Moment — build a complete app from a single prompt</a:t>
+            </a:r>
+          </a:p>
+        </p:txBody>
+      </p:sp>
+      <p:sp>
+        <p:nvSpPr>
+          <p:cNvPr id="6" name="TextBox 5"/>
           <p:cNvSpPr txBox="1"/>
           <p:nvPr/>
         </p:nvSpPr>
         <p:spPr>
           <a:xfrm>
-            <a:off x="731520" y="2606040"/>
-            <a:ext cx="1645920" cy="365760"/>
+            <a:off x="731520" y="2697480"/>
+            <a:ext cx="1371600" cy="365760"/>
           </a:xfrm>
           <a:prstGeom prst="rect">
             <a:avLst/>
@@ -41823,21 +42120,21 @@
               </a:defRPr>
             </a:pPr>
             <a:r>
-              <a:t>Exercise 2:</a:t>
-            </a:r>
-          </a:p>
-        </p:txBody>
-      </p:sp>
-      <p:sp>
-        <p:nvSpPr>
-          <p:cNvPr id="8" name="TextBox 7"/>
+              <a:t>Lab 2B:</a:t>
+            </a:r>
+          </a:p>
+        </p:txBody>
+      </p:sp>
+      <p:sp>
+        <p:nvSpPr>
+          <p:cNvPr id="7" name="TextBox 6"/>
           <p:cNvSpPr txBox="1"/>
           <p:nvPr/>
         </p:nvSpPr>
         <p:spPr>
           <a:xfrm>
-            <a:off x="2468880" y="2606040"/>
-            <a:ext cx="7772400" cy="640080"/>
+            <a:off x="2194560" y="2697480"/>
+            <a:ext cx="8229600" cy="640080"/>
           </a:xfrm>
           <a:prstGeom prst="rect">
             <a:avLst/>
@@ -41858,21 +42155,21 @@
               </a:defRPr>
             </a:pPr>
             <a:r>
-              <a:t>Add a project brain with CLAUDE.md — conventions that enforce themselves</a:t>
-            </a:r>
-          </a:p>
-        </p:txBody>
-      </p:sp>
-      <p:sp>
-        <p:nvSpPr>
-          <p:cNvPr id="9" name="TextBox 8"/>
+              <a:t>Your Project Brain — CLAUDE.md conventions that enforce themselves</a:t>
+            </a:r>
+          </a:p>
+        </p:txBody>
+      </p:sp>
+      <p:sp>
+        <p:nvSpPr>
+          <p:cNvPr id="8" name="TextBox 7"/>
           <p:cNvSpPr txBox="1"/>
           <p:nvPr/>
         </p:nvSpPr>
         <p:spPr>
           <a:xfrm>
-            <a:off x="731520" y="3383280"/>
-            <a:ext cx="1645920" cy="365760"/>
+            <a:off x="731520" y="3566160"/>
+            <a:ext cx="1371600" cy="365760"/>
           </a:xfrm>
           <a:prstGeom prst="rect">
             <a:avLst/>
@@ -41893,21 +42190,21 @@
               </a:defRPr>
             </a:pPr>
             <a:r>
-              <a:t>Exercise 3:</a:t>
-            </a:r>
-          </a:p>
-        </p:txBody>
-      </p:sp>
-      <p:sp>
-        <p:nvSpPr>
-          <p:cNvPr id="10" name="TextBox 9"/>
+              <a:t>Lab 2C:</a:t>
+            </a:r>
+          </a:p>
+        </p:txBody>
+      </p:sp>
+      <p:sp>
+        <p:nvSpPr>
+          <p:cNvPr id="9" name="TextBox 8"/>
           <p:cNvSpPr txBox="1"/>
           <p:nvPr/>
         </p:nvSpPr>
         <p:spPr>
           <a:xfrm>
-            <a:off x="2468880" y="3383280"/>
-            <a:ext cx="7772400" cy="640080"/>
+            <a:off x="2194560" y="3566160"/>
+            <a:ext cx="8229600" cy="640080"/>
           </a:xfrm>
           <a:prstGeom prst="rect">
             <a:avLst/>
@@ -41928,21 +42225,21 @@
               </a:defRPr>
             </a:pPr>
             <a:r>
-              <a:t>Master @ mentions for precision context, plus break-and-recover workflows</a:t>
-            </a:r>
-          </a:p>
-        </p:txBody>
-      </p:sp>
-      <p:sp>
-        <p:nvSpPr>
-          <p:cNvPr id="11" name="TextBox 10"/>
+              <a:t>Precision &amp; Recovery — @ mentions and break-fix workflows</a:t>
+            </a:r>
+          </a:p>
+        </p:txBody>
+      </p:sp>
+      <p:sp>
+        <p:nvSpPr>
+          <p:cNvPr id="10" name="TextBox 9"/>
           <p:cNvSpPr txBox="1"/>
           <p:nvPr/>
         </p:nvSpPr>
         <p:spPr>
           <a:xfrm>
-            <a:off x="731520" y="4160520"/>
-            <a:ext cx="1645920" cy="365760"/>
+            <a:off x="731520" y="4434840"/>
+            <a:ext cx="1371600" cy="365760"/>
           </a:xfrm>
           <a:prstGeom prst="rect">
             <a:avLst/>
@@ -41963,21 +42260,21 @@
               </a:defRPr>
             </a:pPr>
             <a:r>
-              <a:t>Exercise 4:</a:t>
-            </a:r>
-          </a:p>
-        </p:txBody>
-      </p:sp>
-      <p:sp>
-        <p:nvSpPr>
-          <p:cNvPr id="12" name="TextBox 11"/>
+              <a:t>Lab 2D:</a:t>
+            </a:r>
+          </a:p>
+        </p:txBody>
+      </p:sp>
+      <p:sp>
+        <p:nvSpPr>
+          <p:cNvPr id="11" name="TextBox 10"/>
           <p:cNvSpPr txBox="1"/>
           <p:nvPr/>
         </p:nvSpPr>
         <p:spPr>
           <a:xfrm>
-            <a:off x="2468880" y="4160520"/>
-            <a:ext cx="7772400" cy="640080"/>
+            <a:off x="2194560" y="4434840"/>
+            <a:ext cx="8229600" cy="640080"/>
           </a:xfrm>
           <a:prstGeom prst="rect">
             <a:avLst/>
@@ -41998,21 +42295,21 @@
               </a:defRPr>
             </a:pPr>
             <a:r>
-              <a:t>Iterate to great — charts, filters, production hardening</a:t>
-            </a:r>
-          </a:p>
-        </p:txBody>
-      </p:sp>
-      <p:sp>
-        <p:nvSpPr>
-          <p:cNvPr id="13" name="TextBox 12"/>
+              <a:t>Ship It — charts, filters, Git branches, and production hardening</a:t>
+            </a:r>
+          </a:p>
+        </p:txBody>
+      </p:sp>
+      <p:sp>
+        <p:nvSpPr>
+          <p:cNvPr id="12" name="TextBox 11"/>
           <p:cNvSpPr txBox="1"/>
           <p:nvPr/>
         </p:nvSpPr>
         <p:spPr>
           <a:xfrm>
-            <a:off x="731520" y="4937760"/>
-            <a:ext cx="1645920" cy="365760"/>
+            <a:off x="1371600" y="5486400"/>
+            <a:ext cx="8229600" cy="457200"/>
           </a:xfrm>
           <a:prstGeom prst="rect">
             <a:avLst/>
@@ -42025,50 +42322,15 @@
           </a:bodyPr>
           <a:lstStyle/>
           <a:p>
-            <a:pPr>
-              <a:defRPr sz="1800" b="1">
-                <a:solidFill>
-                  <a:srgbClr val="00D4AA"/>
-                </a:solidFill>
-              </a:defRPr>
-            </a:pPr>
-            <a:r>
-              <a:t>Exercise 5:</a:t>
-            </a:r>
-          </a:p>
-        </p:txBody>
-      </p:sp>
-      <p:sp>
-        <p:nvSpPr>
-          <p:cNvPr id="14" name="TextBox 13"/>
-          <p:cNvSpPr txBox="1"/>
-          <p:nvPr/>
-        </p:nvSpPr>
-        <p:spPr>
-          <a:xfrm>
-            <a:off x="2468880" y="4937760"/>
-            <a:ext cx="7772400" cy="640080"/>
-          </a:xfrm>
-          <a:prstGeom prst="rect">
-            <a:avLst/>
-          </a:prstGeom>
-          <a:noFill/>
-        </p:spPr>
-        <p:txBody>
-          <a:bodyPr wrap="square">
-            <a:spAutoFit/>
-          </a:bodyPr>
-          <a:lstStyle/>
-          <a:p>
-            <a:pPr>
-              <a:defRPr sz="1600">
-                <a:solidFill>
-                  <a:srgbClr val="FFFFFF"/>
-                </a:solidFill>
-              </a:defRPr>
-            </a:pPr>
-            <a:r>
-              <a:t>Git workflow in natural language — branches, commits, and merges</a:t>
+            <a:pPr algn="ctr">
+              <a:defRPr sz="1400">
+                <a:solidFill>
+                  <a:srgbClr val="8A8F98"/>
+                </a:solidFill>
+              </a:defRPr>
+            </a:pPr>
+            <a:r>
+              <a:t>One continuous project — each lab builds on the last</a:t>
             </a:r>
           </a:p>
         </p:txBody>
@@ -56574,49 +56836,14 @@
       </p:grpSpPr>
       <p:sp>
         <p:nvSpPr>
-          <p:cNvPr id="2" name="TextBox 1"/>
-          <p:cNvSpPr txBox="1"/>
-          <p:nvPr/>
-        </p:nvSpPr>
-        <p:spPr>
-          <a:xfrm>
-            <a:off x="457200" y="365760"/>
-            <a:ext cx="11277295" cy="822960"/>
-          </a:xfrm>
-          <a:prstGeom prst="rect">
-            <a:avLst/>
-          </a:prstGeom>
-          <a:noFill/>
-        </p:spPr>
-        <p:txBody>
-          <a:bodyPr wrap="none">
-            <a:spAutoFit/>
-          </a:bodyPr>
-          <a:lstStyle/>
-          <a:p>
-            <a:pPr>
-              <a:defRPr sz="4000" b="1">
-                <a:solidFill>
-                  <a:srgbClr val="FFFFFF"/>
-                </a:solidFill>
-              </a:defRPr>
-            </a:pPr>
-            <a:r>
-              <a:t>The Memory Architecture of AI</a:t>
-            </a:r>
-          </a:p>
-        </p:txBody>
-      </p:sp>
-      <p:sp>
-        <p:nvSpPr>
-          <p:cNvPr id="3" name="Rectangle 2"/>
+          <p:cNvPr id="2" name="Rectangle 1"/>
           <p:cNvSpPr/>
           <p:nvPr/>
         </p:nvSpPr>
         <p:spPr>
           <a:xfrm>
-            <a:off x="457200" y="1234440"/>
-            <a:ext cx="1828800" cy="36576"/>
+            <a:off x="0" y="1828800"/>
+            <a:ext cx="137160" cy="3200400"/>
           </a:xfrm>
           <a:prstGeom prst="rect">
             <a:avLst/>
@@ -56653,14 +56880,14 @@
       </p:sp>
       <p:sp>
         <p:nvSpPr>
-          <p:cNvPr id="4" name="TextBox 3"/>
+          <p:cNvPr id="3" name="TextBox 2"/>
           <p:cNvSpPr txBox="1"/>
           <p:nvPr/>
         </p:nvSpPr>
         <p:spPr>
           <a:xfrm>
-            <a:off x="914400" y="1828800"/>
-            <a:ext cx="3200400" cy="822960"/>
+            <a:off x="457200" y="2286000"/>
+            <a:ext cx="11277295" cy="1371600"/>
           </a:xfrm>
           <a:prstGeom prst="rect">
             <a:avLst/>
@@ -56673,64 +56900,29 @@
           </a:bodyPr>
           <a:lstStyle/>
           <a:p>
-            <a:pPr algn="r">
-              <a:defRPr sz="2200" b="1">
-                <a:solidFill>
-                  <a:srgbClr val="FF6B6B"/>
-                </a:solidFill>
-              </a:defRPr>
-            </a:pPr>
-            <a:r>
-              <a:t>Working memory</a:t>
-            </a:r>
-          </a:p>
-        </p:txBody>
-      </p:sp>
-      <p:sp>
-        <p:nvSpPr>
-          <p:cNvPr id="5" name="TextBox 4"/>
+            <a:pPr>
+              <a:defRPr sz="5600" b="1">
+                <a:solidFill>
+                  <a:srgbClr val="FFFFFF"/>
+                </a:solidFill>
+              </a:defRPr>
+            </a:pPr>
+            <a:r>
+              <a:t>Installation &amp; Setup</a:t>
+            </a:r>
+          </a:p>
+        </p:txBody>
+      </p:sp>
+      <p:sp>
+        <p:nvSpPr>
+          <p:cNvPr id="4" name="TextBox 3"/>
           <p:cNvSpPr txBox="1"/>
           <p:nvPr/>
         </p:nvSpPr>
         <p:spPr>
           <a:xfrm>
-            <a:off x="4297680" y="1828800"/>
-            <a:ext cx="731520" cy="822960"/>
-          </a:xfrm>
-          <a:prstGeom prst="rect">
-            <a:avLst/>
-          </a:prstGeom>
-          <a:noFill/>
-        </p:spPr>
-        <p:txBody>
-          <a:bodyPr wrap="none">
-            <a:spAutoFit/>
-          </a:bodyPr>
-          <a:lstStyle/>
-          <a:p>
-            <a:pPr algn="ctr">
-              <a:defRPr sz="2800">
-                <a:solidFill>
-                  <a:srgbClr val="8A8F98"/>
-                </a:solidFill>
-              </a:defRPr>
-            </a:pPr>
-            <a:r>
-              <a:t>→</a:t>
-            </a:r>
-          </a:p>
-        </p:txBody>
-      </p:sp>
-      <p:sp>
-        <p:nvSpPr>
-          <p:cNvPr id="6" name="TextBox 5"/>
-          <p:cNvSpPr txBox="1"/>
-          <p:nvPr/>
-        </p:nvSpPr>
-        <p:spPr>
-          <a:xfrm>
-            <a:off x="5212080" y="1828800"/>
-            <a:ext cx="3657600" cy="822960"/>
+            <a:off x="457200" y="3840480"/>
+            <a:ext cx="11277295" cy="914400"/>
           </a:xfrm>
           <a:prstGeom prst="rect">
             <a:avLst/>
@@ -56743,785 +56935,15 @@
           </a:bodyPr>
           <a:lstStyle/>
           <a:p>
-            <a:pPr algn="l">
-              <a:defRPr sz="2200" b="1">
-                <a:solidFill>
-                  <a:srgbClr val="00D4AA"/>
-                </a:solidFill>
-              </a:defRPr>
-            </a:pPr>
-            <a:r>
-              <a:t>Context window</a:t>
-            </a:r>
-          </a:p>
-        </p:txBody>
-      </p:sp>
-      <p:sp>
-        <p:nvSpPr>
-          <p:cNvPr id="7" name="TextBox 6"/>
-          <p:cNvSpPr txBox="1"/>
-          <p:nvPr/>
-        </p:nvSpPr>
-        <p:spPr>
-          <a:xfrm>
-            <a:off x="914400" y="2651760"/>
-            <a:ext cx="3200400" cy="822960"/>
-          </a:xfrm>
-          <a:prstGeom prst="rect">
-            <a:avLst/>
-          </a:prstGeom>
-          <a:noFill/>
-        </p:spPr>
-        <p:txBody>
-          <a:bodyPr wrap="square">
-            <a:spAutoFit/>
-          </a:bodyPr>
-          <a:lstStyle/>
-          <a:p>
-            <a:pPr algn="r">
-              <a:defRPr sz="2200" b="1">
-                <a:solidFill>
-                  <a:srgbClr val="FF6B6B"/>
-                </a:solidFill>
-              </a:defRPr>
-            </a:pPr>
-            <a:r>
-              <a:t>Short-term memory</a:t>
-            </a:r>
-          </a:p>
-        </p:txBody>
-      </p:sp>
-      <p:sp>
-        <p:nvSpPr>
-          <p:cNvPr id="8" name="TextBox 7"/>
-          <p:cNvSpPr txBox="1"/>
-          <p:nvPr/>
-        </p:nvSpPr>
-        <p:spPr>
-          <a:xfrm>
-            <a:off x="4297680" y="2651760"/>
-            <a:ext cx="731520" cy="822960"/>
-          </a:xfrm>
-          <a:prstGeom prst="rect">
-            <a:avLst/>
-          </a:prstGeom>
-          <a:noFill/>
-        </p:spPr>
-        <p:txBody>
-          <a:bodyPr wrap="none">
-            <a:spAutoFit/>
-          </a:bodyPr>
-          <a:lstStyle/>
-          <a:p>
-            <a:pPr algn="ctr">
-              <a:defRPr sz="2800">
-                <a:solidFill>
-                  <a:srgbClr val="8A8F98"/>
-                </a:solidFill>
-              </a:defRPr>
-            </a:pPr>
-            <a:r>
-              <a:t>→</a:t>
-            </a:r>
-          </a:p>
-        </p:txBody>
-      </p:sp>
-      <p:sp>
-        <p:nvSpPr>
-          <p:cNvPr id="9" name="TextBox 8"/>
-          <p:cNvSpPr txBox="1"/>
-          <p:nvPr/>
-        </p:nvSpPr>
-        <p:spPr>
-          <a:xfrm>
-            <a:off x="5212080" y="2651760"/>
-            <a:ext cx="3657600" cy="822960"/>
-          </a:xfrm>
-          <a:prstGeom prst="rect">
-            <a:avLst/>
-          </a:prstGeom>
-          <a:noFill/>
-        </p:spPr>
-        <p:txBody>
-          <a:bodyPr wrap="square">
-            <a:spAutoFit/>
-          </a:bodyPr>
-          <a:lstStyle/>
-          <a:p>
-            <a:pPr algn="l">
-              <a:defRPr sz="2200" b="1">
-                <a:solidFill>
-                  <a:srgbClr val="00D4AA"/>
-                </a:solidFill>
-              </a:defRPr>
-            </a:pPr>
-            <a:r>
-              <a:t>Session history</a:t>
-            </a:r>
-          </a:p>
-        </p:txBody>
-      </p:sp>
-      <p:sp>
-        <p:nvSpPr>
-          <p:cNvPr id="10" name="TextBox 9"/>
-          <p:cNvSpPr txBox="1"/>
-          <p:nvPr/>
-        </p:nvSpPr>
-        <p:spPr>
-          <a:xfrm>
-            <a:off x="914400" y="3474720"/>
-            <a:ext cx="3200400" cy="822960"/>
-          </a:xfrm>
-          <a:prstGeom prst="rect">
-            <a:avLst/>
-          </a:prstGeom>
-          <a:noFill/>
-        </p:spPr>
-        <p:txBody>
-          <a:bodyPr wrap="square">
-            <a:spAutoFit/>
-          </a:bodyPr>
-          <a:lstStyle/>
-          <a:p>
-            <a:pPr algn="r">
-              <a:defRPr sz="2200" b="1">
-                <a:solidFill>
-                  <a:srgbClr val="FF6B6B"/>
-                </a:solidFill>
-              </a:defRPr>
-            </a:pPr>
-            <a:r>
-              <a:t>Long-term memory</a:t>
-            </a:r>
-          </a:p>
-        </p:txBody>
-      </p:sp>
-      <p:sp>
-        <p:nvSpPr>
-          <p:cNvPr id="11" name="TextBox 10"/>
-          <p:cNvSpPr txBox="1"/>
-          <p:nvPr/>
-        </p:nvSpPr>
-        <p:spPr>
-          <a:xfrm>
-            <a:off x="4297680" y="3474720"/>
-            <a:ext cx="731520" cy="822960"/>
-          </a:xfrm>
-          <a:prstGeom prst="rect">
-            <a:avLst/>
-          </a:prstGeom>
-          <a:noFill/>
-        </p:spPr>
-        <p:txBody>
-          <a:bodyPr wrap="none">
-            <a:spAutoFit/>
-          </a:bodyPr>
-          <a:lstStyle/>
-          <a:p>
-            <a:pPr algn="ctr">
-              <a:defRPr sz="2800">
-                <a:solidFill>
-                  <a:srgbClr val="8A8F98"/>
-                </a:solidFill>
-              </a:defRPr>
-            </a:pPr>
-            <a:r>
-              <a:t>→</a:t>
-            </a:r>
-          </a:p>
-        </p:txBody>
-      </p:sp>
-      <p:sp>
-        <p:nvSpPr>
-          <p:cNvPr id="12" name="TextBox 11"/>
-          <p:cNvSpPr txBox="1"/>
-          <p:nvPr/>
-        </p:nvSpPr>
-        <p:spPr>
-          <a:xfrm>
-            <a:off x="5212080" y="3474720"/>
-            <a:ext cx="3657600" cy="822960"/>
-          </a:xfrm>
-          <a:prstGeom prst="rect">
-            <a:avLst/>
-          </a:prstGeom>
-          <a:noFill/>
-        </p:spPr>
-        <p:txBody>
-          <a:bodyPr wrap="square">
-            <a:spAutoFit/>
-          </a:bodyPr>
-          <a:lstStyle/>
-          <a:p>
-            <a:pPr algn="l">
-              <a:defRPr sz="2200" b="1">
-                <a:solidFill>
-                  <a:srgbClr val="00D4AA"/>
-                </a:solidFill>
-              </a:defRPr>
-            </a:pPr>
-            <a:r>
-              <a:t>CLAUDE.md</a:t>
-            </a:r>
-          </a:p>
-        </p:txBody>
-      </p:sp>
-      <p:sp>
-        <p:nvSpPr>
-          <p:cNvPr id="13" name="TextBox 12"/>
-          <p:cNvSpPr txBox="1"/>
-          <p:nvPr/>
-        </p:nvSpPr>
-        <p:spPr>
-          <a:xfrm>
-            <a:off x="914400" y="4297680"/>
-            <a:ext cx="3200400" cy="822960"/>
-          </a:xfrm>
-          <a:prstGeom prst="rect">
-            <a:avLst/>
-          </a:prstGeom>
-          <a:noFill/>
-        </p:spPr>
-        <p:txBody>
-          <a:bodyPr wrap="square">
-            <a:spAutoFit/>
-          </a:bodyPr>
-          <a:lstStyle/>
-          <a:p>
-            <a:pPr algn="r">
-              <a:defRPr sz="2200" b="1">
-                <a:solidFill>
-                  <a:srgbClr val="FF6B6B"/>
-                </a:solidFill>
-              </a:defRPr>
-            </a:pPr>
-            <a:r>
-              <a:t>Muscle memory</a:t>
-            </a:r>
-          </a:p>
-        </p:txBody>
-      </p:sp>
-      <p:sp>
-        <p:nvSpPr>
-          <p:cNvPr id="14" name="TextBox 13"/>
-          <p:cNvSpPr txBox="1"/>
-          <p:nvPr/>
-        </p:nvSpPr>
-        <p:spPr>
-          <a:xfrm>
-            <a:off x="4297680" y="4297680"/>
-            <a:ext cx="731520" cy="822960"/>
-          </a:xfrm>
-          <a:prstGeom prst="rect">
-            <a:avLst/>
-          </a:prstGeom>
-          <a:noFill/>
-        </p:spPr>
-        <p:txBody>
-          <a:bodyPr wrap="none">
-            <a:spAutoFit/>
-          </a:bodyPr>
-          <a:lstStyle/>
-          <a:p>
-            <a:pPr algn="ctr">
-              <a:defRPr sz="2800">
-                <a:solidFill>
-                  <a:srgbClr val="8A8F98"/>
-                </a:solidFill>
-              </a:defRPr>
-            </a:pPr>
-            <a:r>
-              <a:t>→</a:t>
-            </a:r>
-          </a:p>
-        </p:txBody>
-      </p:sp>
-      <p:sp>
-        <p:nvSpPr>
-          <p:cNvPr id="15" name="TextBox 14"/>
-          <p:cNvSpPr txBox="1"/>
-          <p:nvPr/>
-        </p:nvSpPr>
-        <p:spPr>
-          <a:xfrm>
-            <a:off x="5212080" y="4297680"/>
-            <a:ext cx="3657600" cy="822960"/>
-          </a:xfrm>
-          <a:prstGeom prst="rect">
-            <a:avLst/>
-          </a:prstGeom>
-          <a:noFill/>
-        </p:spPr>
-        <p:txBody>
-          <a:bodyPr wrap="square">
-            <a:spAutoFit/>
-          </a:bodyPr>
-          <a:lstStyle/>
-          <a:p>
-            <a:pPr algn="l">
-              <a:defRPr sz="2200" b="1">
-                <a:solidFill>
-                  <a:srgbClr val="00D4AA"/>
-                </a:solidFill>
-              </a:defRPr>
-            </a:pPr>
-            <a:r>
-              <a:t>Skills &amp; commands</a:t>
-            </a:r>
-          </a:p>
-        </p:txBody>
-      </p:sp>
-      <p:sp>
-        <p:nvSpPr>
-          <p:cNvPr id="16" name="TextBox 15"/>
-          <p:cNvSpPr txBox="1"/>
-          <p:nvPr/>
-        </p:nvSpPr>
-        <p:spPr>
-          <a:xfrm>
-            <a:off x="1371600" y="5303520"/>
-            <a:ext cx="8229600" cy="548640"/>
-          </a:xfrm>
-          <a:prstGeom prst="rect">
-            <a:avLst/>
-          </a:prstGeom>
-          <a:noFill/>
-        </p:spPr>
-        <p:txBody>
-          <a:bodyPr wrap="square">
-            <a:spAutoFit/>
-          </a:bodyPr>
-          <a:lstStyle/>
-          <a:p>
-            <a:pPr algn="ctr">
-              <a:defRPr sz="1600">
-                <a:solidFill>
-                  <a:srgbClr val="8A8F98"/>
-                </a:solidFill>
-              </a:defRPr>
-            </a:pPr>
-            <a:r>
-              <a:t>Everything today teaches you how to manage these four memory layers.</a:t>
-            </a:r>
-          </a:p>
-        </p:txBody>
-      </p:sp>
-      <p:sp>
-        <p:nvSpPr>
-          <p:cNvPr id="17" name="TextBox 16"/>
-          <p:cNvSpPr txBox="1"/>
-          <p:nvPr/>
-        </p:nvSpPr>
-        <p:spPr>
-          <a:xfrm>
-            <a:off x="4297680" y="1828800"/>
-            <a:ext cx="731520" cy="822960"/>
-          </a:xfrm>
-          <a:prstGeom prst="rect">
-            <a:avLst/>
-          </a:prstGeom>
-          <a:noFill/>
-        </p:spPr>
-        <p:txBody>
-          <a:bodyPr wrap="none">
-            <a:spAutoFit/>
-          </a:bodyPr>
-          <a:lstStyle/>
-          <a:p>
-            <a:pPr algn="ctr">
-              <a:defRPr sz="2800">
-                <a:solidFill>
-                  <a:srgbClr val="8A8F98"/>
-                </a:solidFill>
-              </a:defRPr>
-            </a:pPr>
-            <a:r>
-              <a:t>→</a:t>
-            </a:r>
-          </a:p>
-        </p:txBody>
-      </p:sp>
-      <p:sp>
-        <p:nvSpPr>
-          <p:cNvPr id="18" name="TextBox 17"/>
-          <p:cNvSpPr txBox="1"/>
-          <p:nvPr/>
-        </p:nvSpPr>
-        <p:spPr>
-          <a:xfrm>
-            <a:off x="5212080" y="1828800"/>
-            <a:ext cx="3657600" cy="822960"/>
-          </a:xfrm>
-          <a:prstGeom prst="rect">
-            <a:avLst/>
-          </a:prstGeom>
-          <a:noFill/>
-        </p:spPr>
-        <p:txBody>
-          <a:bodyPr wrap="square">
-            <a:spAutoFit/>
-          </a:bodyPr>
-          <a:lstStyle/>
-          <a:p>
-            <a:pPr algn="l">
-              <a:defRPr sz="2200" b="1">
-                <a:solidFill>
-                  <a:srgbClr val="00D4AA"/>
-                </a:solidFill>
-              </a:defRPr>
-            </a:pPr>
-            <a:r>
-              <a:t>Context window</a:t>
-            </a:r>
-          </a:p>
-        </p:txBody>
-      </p:sp>
-      <p:sp>
-        <p:nvSpPr>
-          <p:cNvPr id="19" name="TextBox 18"/>
-          <p:cNvSpPr txBox="1"/>
-          <p:nvPr/>
-        </p:nvSpPr>
-        <p:spPr>
-          <a:xfrm>
-            <a:off x="914400" y="2651760"/>
-            <a:ext cx="3200400" cy="822960"/>
-          </a:xfrm>
-          <a:prstGeom prst="rect">
-            <a:avLst/>
-          </a:prstGeom>
-          <a:noFill/>
-        </p:spPr>
-        <p:txBody>
-          <a:bodyPr wrap="square">
-            <a:spAutoFit/>
-          </a:bodyPr>
-          <a:lstStyle/>
-          <a:p>
-            <a:pPr algn="r">
-              <a:defRPr sz="2200" b="1">
-                <a:solidFill>
-                  <a:srgbClr val="FF6B6B"/>
-                </a:solidFill>
-              </a:defRPr>
-            </a:pPr>
-            <a:r>
-              <a:t>Short-term memory</a:t>
-            </a:r>
-          </a:p>
-        </p:txBody>
-      </p:sp>
-      <p:sp>
-        <p:nvSpPr>
-          <p:cNvPr id="20" name="TextBox 19"/>
-          <p:cNvSpPr txBox="1"/>
-          <p:nvPr/>
-        </p:nvSpPr>
-        <p:spPr>
-          <a:xfrm>
-            <a:off x="4297680" y="2651760"/>
-            <a:ext cx="731520" cy="822960"/>
-          </a:xfrm>
-          <a:prstGeom prst="rect">
-            <a:avLst/>
-          </a:prstGeom>
-          <a:noFill/>
-        </p:spPr>
-        <p:txBody>
-          <a:bodyPr wrap="none">
-            <a:spAutoFit/>
-          </a:bodyPr>
-          <a:lstStyle/>
-          <a:p>
-            <a:pPr algn="ctr">
-              <a:defRPr sz="2800">
-                <a:solidFill>
-                  <a:srgbClr val="8A8F98"/>
-                </a:solidFill>
-              </a:defRPr>
-            </a:pPr>
-            <a:r>
-              <a:t>→</a:t>
-            </a:r>
-          </a:p>
-        </p:txBody>
-      </p:sp>
-      <p:sp>
-        <p:nvSpPr>
-          <p:cNvPr id="21" name="TextBox 20"/>
-          <p:cNvSpPr txBox="1"/>
-          <p:nvPr/>
-        </p:nvSpPr>
-        <p:spPr>
-          <a:xfrm>
-            <a:off x="5212080" y="2651760"/>
-            <a:ext cx="3657600" cy="822960"/>
-          </a:xfrm>
-          <a:prstGeom prst="rect">
-            <a:avLst/>
-          </a:prstGeom>
-          <a:noFill/>
-        </p:spPr>
-        <p:txBody>
-          <a:bodyPr wrap="square">
-            <a:spAutoFit/>
-          </a:bodyPr>
-          <a:lstStyle/>
-          <a:p>
-            <a:pPr algn="l">
-              <a:defRPr sz="2200" b="1">
-                <a:solidFill>
-                  <a:srgbClr val="00D4AA"/>
-                </a:solidFill>
-              </a:defRPr>
-            </a:pPr>
-            <a:r>
-              <a:t>Session history</a:t>
-            </a:r>
-          </a:p>
-        </p:txBody>
-      </p:sp>
-      <p:sp>
-        <p:nvSpPr>
-          <p:cNvPr id="22" name="TextBox 21"/>
-          <p:cNvSpPr txBox="1"/>
-          <p:nvPr/>
-        </p:nvSpPr>
-        <p:spPr>
-          <a:xfrm>
-            <a:off x="914400" y="3474720"/>
-            <a:ext cx="3200400" cy="822960"/>
-          </a:xfrm>
-          <a:prstGeom prst="rect">
-            <a:avLst/>
-          </a:prstGeom>
-          <a:noFill/>
-        </p:spPr>
-        <p:txBody>
-          <a:bodyPr wrap="square">
-            <a:spAutoFit/>
-          </a:bodyPr>
-          <a:lstStyle/>
-          <a:p>
-            <a:pPr algn="r">
-              <a:defRPr sz="2200" b="1">
-                <a:solidFill>
-                  <a:srgbClr val="FF6B6B"/>
-                </a:solidFill>
-              </a:defRPr>
-            </a:pPr>
-            <a:r>
-              <a:t>Long-term memory</a:t>
-            </a:r>
-          </a:p>
-        </p:txBody>
-      </p:sp>
-      <p:sp>
-        <p:nvSpPr>
-          <p:cNvPr id="23" name="TextBox 22"/>
-          <p:cNvSpPr txBox="1"/>
-          <p:nvPr/>
-        </p:nvSpPr>
-        <p:spPr>
-          <a:xfrm>
-            <a:off x="4297680" y="3474720"/>
-            <a:ext cx="731520" cy="822960"/>
-          </a:xfrm>
-          <a:prstGeom prst="rect">
-            <a:avLst/>
-          </a:prstGeom>
-          <a:noFill/>
-        </p:spPr>
-        <p:txBody>
-          <a:bodyPr wrap="none">
-            <a:spAutoFit/>
-          </a:bodyPr>
-          <a:lstStyle/>
-          <a:p>
-            <a:pPr algn="ctr">
-              <a:defRPr sz="2800">
-                <a:solidFill>
-                  <a:srgbClr val="8A8F98"/>
-                </a:solidFill>
-              </a:defRPr>
-            </a:pPr>
-            <a:r>
-              <a:t>→</a:t>
-            </a:r>
-          </a:p>
-        </p:txBody>
-      </p:sp>
-      <p:sp>
-        <p:nvSpPr>
-          <p:cNvPr id="24" name="TextBox 23"/>
-          <p:cNvSpPr txBox="1"/>
-          <p:nvPr/>
-        </p:nvSpPr>
-        <p:spPr>
-          <a:xfrm>
-            <a:off x="5212080" y="3474720"/>
-            <a:ext cx="3657600" cy="822960"/>
-          </a:xfrm>
-          <a:prstGeom prst="rect">
-            <a:avLst/>
-          </a:prstGeom>
-          <a:noFill/>
-        </p:spPr>
-        <p:txBody>
-          <a:bodyPr wrap="square">
-            <a:spAutoFit/>
-          </a:bodyPr>
-          <a:lstStyle/>
-          <a:p>
-            <a:pPr algn="l">
-              <a:defRPr sz="2200" b="1">
-                <a:solidFill>
-                  <a:srgbClr val="00D4AA"/>
-                </a:solidFill>
-              </a:defRPr>
-            </a:pPr>
-            <a:r>
-              <a:t>CLAUDE.md</a:t>
-            </a:r>
-          </a:p>
-        </p:txBody>
-      </p:sp>
-      <p:sp>
-        <p:nvSpPr>
-          <p:cNvPr id="25" name="TextBox 24"/>
-          <p:cNvSpPr txBox="1"/>
-          <p:nvPr/>
-        </p:nvSpPr>
-        <p:spPr>
-          <a:xfrm>
-            <a:off x="914400" y="4297680"/>
-            <a:ext cx="3200400" cy="822960"/>
-          </a:xfrm>
-          <a:prstGeom prst="rect">
-            <a:avLst/>
-          </a:prstGeom>
-          <a:noFill/>
-        </p:spPr>
-        <p:txBody>
-          <a:bodyPr wrap="square">
-            <a:spAutoFit/>
-          </a:bodyPr>
-          <a:lstStyle/>
-          <a:p>
-            <a:pPr algn="r">
-              <a:defRPr sz="2200" b="1">
-                <a:solidFill>
-                  <a:srgbClr val="FF6B6B"/>
-                </a:solidFill>
-              </a:defRPr>
-            </a:pPr>
-            <a:r>
-              <a:t>Muscle memory</a:t>
-            </a:r>
-          </a:p>
-        </p:txBody>
-      </p:sp>
-      <p:sp>
-        <p:nvSpPr>
-          <p:cNvPr id="26" name="TextBox 25"/>
-          <p:cNvSpPr txBox="1"/>
-          <p:nvPr/>
-        </p:nvSpPr>
-        <p:spPr>
-          <a:xfrm>
-            <a:off x="4297680" y="4297680"/>
-            <a:ext cx="731520" cy="822960"/>
-          </a:xfrm>
-          <a:prstGeom prst="rect">
-            <a:avLst/>
-          </a:prstGeom>
-          <a:noFill/>
-        </p:spPr>
-        <p:txBody>
-          <a:bodyPr wrap="none">
-            <a:spAutoFit/>
-          </a:bodyPr>
-          <a:lstStyle/>
-          <a:p>
-            <a:pPr algn="ctr">
-              <a:defRPr sz="2800">
-                <a:solidFill>
-                  <a:srgbClr val="8A8F98"/>
-                </a:solidFill>
-              </a:defRPr>
-            </a:pPr>
-            <a:r>
-              <a:t>→</a:t>
-            </a:r>
-          </a:p>
-        </p:txBody>
-      </p:sp>
-      <p:sp>
-        <p:nvSpPr>
-          <p:cNvPr id="27" name="TextBox 26"/>
-          <p:cNvSpPr txBox="1"/>
-          <p:nvPr/>
-        </p:nvSpPr>
-        <p:spPr>
-          <a:xfrm>
-            <a:off x="5212080" y="4297680"/>
-            <a:ext cx="3657600" cy="822960"/>
-          </a:xfrm>
-          <a:prstGeom prst="rect">
-            <a:avLst/>
-          </a:prstGeom>
-          <a:noFill/>
-        </p:spPr>
-        <p:txBody>
-          <a:bodyPr wrap="square">
-            <a:spAutoFit/>
-          </a:bodyPr>
-          <a:lstStyle/>
-          <a:p>
-            <a:pPr algn="l">
-              <a:defRPr sz="2200" b="1">
-                <a:solidFill>
-                  <a:srgbClr val="00D4AA"/>
-                </a:solidFill>
-              </a:defRPr>
-            </a:pPr>
-            <a:r>
-              <a:t>Skills &amp; commands</a:t>
-            </a:r>
-          </a:p>
-        </p:txBody>
-      </p:sp>
-      <p:sp>
-        <p:nvSpPr>
-          <p:cNvPr id="28" name="TextBox 27"/>
-          <p:cNvSpPr txBox="1"/>
-          <p:nvPr/>
-        </p:nvSpPr>
-        <p:spPr>
-          <a:xfrm>
-            <a:off x="1371600" y="5303520"/>
-            <a:ext cx="8229600" cy="548640"/>
-          </a:xfrm>
-          <a:prstGeom prst="rect">
-            <a:avLst/>
-          </a:prstGeom>
-          <a:noFill/>
-        </p:spPr>
-        <p:txBody>
-          <a:bodyPr wrap="square">
-            <a:spAutoFit/>
-          </a:bodyPr>
-          <a:lstStyle/>
-          <a:p>
-            <a:pPr algn="ctr">
-              <a:defRPr sz="1600">
-                <a:solidFill>
-                  <a:srgbClr val="8A8F98"/>
-                </a:solidFill>
-              </a:defRPr>
-            </a:pPr>
-            <a:r>
-              <a:t>Everything today teaches you how to manage these four memory layers.</a:t>
+            <a:pPr>
+              <a:defRPr sz="2400">
+                <a:solidFill>
+                  <a:srgbClr val="8B95A5"/>
+                </a:solidFill>
+              </a:defRPr>
+            </a:pPr>
+            <a:r>
+              <a:t>30 minutes</a:t>
             </a:r>
           </a:p>
         </p:txBody>
@@ -60490,16 +59912,97 @@
       </p:grpSpPr>
       <p:sp>
         <p:nvSpPr>
-          <p:cNvPr id="2" name="Rectangle 1"/>
+          <p:cNvPr id="2" name="TextBox 1"/>
+          <p:cNvSpPr txBox="1"/>
+          <p:nvPr/>
+        </p:nvSpPr>
+        <p:spPr>
+          <a:xfrm>
+            <a:off x="457200" y="731520"/>
+            <a:ext cx="11277295" cy="914400"/>
+          </a:xfrm>
+          <a:prstGeom prst="rect">
+            <a:avLst/>
+          </a:prstGeom>
+          <a:noFill/>
+        </p:spPr>
+        <p:txBody>
+          <a:bodyPr wrap="none">
+            <a:spAutoFit/>
+          </a:bodyPr>
+          <a:lstStyle/>
+          <a:p>
+            <a:pPr algn="ctr">
+              <a:defRPr sz="4000" b="1">
+                <a:solidFill>
+                  <a:srgbClr val="FFFFFF"/>
+                </a:solidFill>
+              </a:defRPr>
+            </a:pPr>
+            <a:r>
+              <a:t>System Requirements</a:t>
+            </a:r>
+          </a:p>
+        </p:txBody>
+      </p:sp>
+      <p:sp>
+        <p:nvSpPr>
+          <p:cNvPr id="3" name="Rounded Rectangle 2"/>
           <p:cNvSpPr/>
           <p:nvPr/>
         </p:nvSpPr>
         <p:spPr>
           <a:xfrm>
-            <a:off x="0" y="1828800"/>
-            <a:ext cx="137160" cy="3200400"/>
-          </a:xfrm>
-          <a:prstGeom prst="rect">
+            <a:off x="2301087" y="2011680"/>
+            <a:ext cx="2286000" cy="3200400"/>
+          </a:xfrm>
+          <a:prstGeom prst="roundRect">
+            <a:avLst/>
+          </a:prstGeom>
+          <a:solidFill>
+            <a:srgbClr val="141A26"/>
+          </a:solidFill>
+          <a:ln w="25400">
+            <a:solidFill>
+              <a:srgbClr val="00D4AA"/>
+            </a:solidFill>
+          </a:ln>
+        </p:spPr>
+        <p:style>
+          <a:lnRef idx="1">
+            <a:schemeClr val="accent1"/>
+          </a:lnRef>
+          <a:fillRef idx="3">
+            <a:schemeClr val="accent1"/>
+          </a:fillRef>
+          <a:effectRef idx="2">
+            <a:schemeClr val="accent1"/>
+          </a:effectRef>
+          <a:fontRef idx="minor">
+            <a:schemeClr val="lt1"/>
+          </a:fontRef>
+        </p:style>
+        <p:txBody>
+          <a:bodyPr rtlCol="0" anchor="ctr"/>
+          <a:lstStyle/>
+          <a:p>
+            <a:pPr algn="ctr"/>
+            <a:endParaRPr/>
+          </a:p>
+        </p:txBody>
+      </p:sp>
+      <p:sp>
+        <p:nvSpPr>
+          <p:cNvPr id="4" name="Oval 3"/>
+          <p:cNvSpPr/>
+          <p:nvPr/>
+        </p:nvSpPr>
+        <p:spPr>
+          <a:xfrm>
+            <a:off x="2986887" y="2468880"/>
+            <a:ext cx="914400" cy="914400"/>
+          </a:xfrm>
+          <a:prstGeom prst="ellipse">
             <a:avLst/>
           </a:prstGeom>
           <a:solidFill>
@@ -60534,14 +60037,14 @@
       </p:sp>
       <p:sp>
         <p:nvSpPr>
-          <p:cNvPr id="3" name="TextBox 2"/>
+          <p:cNvPr id="5" name="TextBox 4"/>
           <p:cNvSpPr txBox="1"/>
           <p:nvPr/>
         </p:nvSpPr>
         <p:spPr>
           <a:xfrm>
-            <a:off x="457200" y="2286000"/>
-            <a:ext cx="11277295" cy="1371600"/>
+            <a:off x="2986887" y="2468880"/>
+            <a:ext cx="914400" cy="914400"/>
           </a:xfrm>
           <a:prstGeom prst="rect">
             <a:avLst/>
@@ -60549,34 +60052,34 @@
           <a:noFill/>
         </p:spPr>
         <p:txBody>
-          <a:bodyPr wrap="square">
+          <a:bodyPr wrap="none" anchor="ctr">
             <a:spAutoFit/>
           </a:bodyPr>
           <a:lstStyle/>
           <a:p>
-            <a:pPr>
-              <a:defRPr sz="5600" b="1">
-                <a:solidFill>
-                  <a:srgbClr val="FFFFFF"/>
-                </a:solidFill>
-              </a:defRPr>
-            </a:pPr>
-            <a:r>
-              <a:t>Installation &amp; Setup</a:t>
-            </a:r>
-          </a:p>
-        </p:txBody>
-      </p:sp>
-      <p:sp>
-        <p:nvSpPr>
-          <p:cNvPr id="4" name="TextBox 3"/>
+            <a:pPr algn="ctr">
+              <a:defRPr sz="3600" b="1">
+                <a:solidFill>
+                  <a:srgbClr val="0B0F1A"/>
+                </a:solidFill>
+              </a:defRPr>
+            </a:pPr>
+            <a:r>
+              <a:t>1</a:t>
+            </a:r>
+          </a:p>
+        </p:txBody>
+      </p:sp>
+      <p:sp>
+        <p:nvSpPr>
+          <p:cNvPr id="6" name="TextBox 5"/>
           <p:cNvSpPr txBox="1"/>
           <p:nvPr/>
         </p:nvSpPr>
         <p:spPr>
           <a:xfrm>
-            <a:off x="457200" y="3840480"/>
-            <a:ext cx="11277295" cy="914400"/>
+            <a:off x="2392527" y="3657600"/>
+            <a:ext cx="2103120" cy="1371600"/>
           </a:xfrm>
           <a:prstGeom prst="rect">
             <a:avLst/>
@@ -60585,19 +60088,451 @@
         </p:spPr>
         <p:txBody>
           <a:bodyPr wrap="square">
+            <a:normAutofit/>
+          </a:bodyPr>
+          <a:lstStyle/>
+          <a:p>
+            <a:pPr algn="ctr">
+              <a:defRPr sz="1800" b="1">
+                <a:solidFill>
+                  <a:srgbClr val="FFFFFF"/>
+                </a:solidFill>
+              </a:defRPr>
+            </a:pPr>
+            <a:r>
+              <a:t>Machine</a:t>
+            </a:r>
+          </a:p>
+          <a:p>
+            <a:pPr algn="ctr">
+              <a:spcBef>
+                <a:spcPts val="800"/>
+              </a:spcBef>
+              <a:defRPr sz="1300">
+                <a:solidFill>
+                  <a:srgbClr val="8B95A5"/>
+                </a:solidFill>
+              </a:defRPr>
+            </a:pPr>
+            <a:r>
+              <a:t>macOS, Linux, or Windows (via WSL)</a:t>
+            </a:r>
+            <a:br/>
+            <a:r>
+              <a:t>8GB+ RAM recommended</a:t>
+            </a:r>
+            <a:br/>
+            <a:r>
+              <a:t>Node.js 18+ required</a:t>
+            </a:r>
+          </a:p>
+        </p:txBody>
+      </p:sp>
+      <p:sp>
+        <p:nvSpPr>
+          <p:cNvPr id="7" name="Rounded Rectangle 6"/>
+          <p:cNvSpPr/>
+          <p:nvPr/>
+        </p:nvSpPr>
+        <p:spPr>
+          <a:xfrm>
+            <a:off x="4952847" y="2011680"/>
+            <a:ext cx="2286000" cy="3200400"/>
+          </a:xfrm>
+          <a:prstGeom prst="roundRect">
+            <a:avLst/>
+          </a:prstGeom>
+          <a:solidFill>
+            <a:srgbClr val="141A26"/>
+          </a:solidFill>
+          <a:ln w="25400">
+            <a:solidFill>
+              <a:srgbClr val="00D4AA"/>
+            </a:solidFill>
+          </a:ln>
+        </p:spPr>
+        <p:style>
+          <a:lnRef idx="1">
+            <a:schemeClr val="accent1"/>
+          </a:lnRef>
+          <a:fillRef idx="3">
+            <a:schemeClr val="accent1"/>
+          </a:fillRef>
+          <a:effectRef idx="2">
+            <a:schemeClr val="accent1"/>
+          </a:effectRef>
+          <a:fontRef idx="minor">
+            <a:schemeClr val="lt1"/>
+          </a:fontRef>
+        </p:style>
+        <p:txBody>
+          <a:bodyPr rtlCol="0" anchor="ctr"/>
+          <a:lstStyle/>
+          <a:p>
+            <a:pPr algn="ctr"/>
+            <a:endParaRPr/>
+          </a:p>
+        </p:txBody>
+      </p:sp>
+      <p:sp>
+        <p:nvSpPr>
+          <p:cNvPr id="8" name="Oval 7"/>
+          <p:cNvSpPr/>
+          <p:nvPr/>
+        </p:nvSpPr>
+        <p:spPr>
+          <a:xfrm>
+            <a:off x="5638647" y="2468880"/>
+            <a:ext cx="914400" cy="914400"/>
+          </a:xfrm>
+          <a:prstGeom prst="ellipse">
+            <a:avLst/>
+          </a:prstGeom>
+          <a:solidFill>
+            <a:srgbClr val="00D4AA"/>
+          </a:solidFill>
+          <a:ln>
+            <a:noFill/>
+          </a:ln>
+        </p:spPr>
+        <p:style>
+          <a:lnRef idx="1">
+            <a:schemeClr val="accent1"/>
+          </a:lnRef>
+          <a:fillRef idx="3">
+            <a:schemeClr val="accent1"/>
+          </a:fillRef>
+          <a:effectRef idx="2">
+            <a:schemeClr val="accent1"/>
+          </a:effectRef>
+          <a:fontRef idx="minor">
+            <a:schemeClr val="lt1"/>
+          </a:fontRef>
+        </p:style>
+        <p:txBody>
+          <a:bodyPr rtlCol="0" anchor="ctr"/>
+          <a:lstStyle/>
+          <a:p>
+            <a:pPr algn="ctr"/>
+            <a:endParaRPr/>
+          </a:p>
+        </p:txBody>
+      </p:sp>
+      <p:sp>
+        <p:nvSpPr>
+          <p:cNvPr id="9" name="TextBox 8"/>
+          <p:cNvSpPr txBox="1"/>
+          <p:nvPr/>
+        </p:nvSpPr>
+        <p:spPr>
+          <a:xfrm>
+            <a:off x="5638647" y="2468880"/>
+            <a:ext cx="914400" cy="914400"/>
+          </a:xfrm>
+          <a:prstGeom prst="rect">
+            <a:avLst/>
+          </a:prstGeom>
+          <a:noFill/>
+        </p:spPr>
+        <p:txBody>
+          <a:bodyPr wrap="none" anchor="ctr">
             <a:spAutoFit/>
           </a:bodyPr>
           <a:lstStyle/>
           <a:p>
-            <a:pPr>
-              <a:defRPr sz="2400">
+            <a:pPr algn="ctr">
+              <a:defRPr sz="3600" b="1">
+                <a:solidFill>
+                  <a:srgbClr val="0B0F1A"/>
+                </a:solidFill>
+              </a:defRPr>
+            </a:pPr>
+            <a:r>
+              <a:t>2</a:t>
+            </a:r>
+          </a:p>
+        </p:txBody>
+      </p:sp>
+      <p:sp>
+        <p:nvSpPr>
+          <p:cNvPr id="10" name="TextBox 9"/>
+          <p:cNvSpPr txBox="1"/>
+          <p:nvPr/>
+        </p:nvSpPr>
+        <p:spPr>
+          <a:xfrm>
+            <a:off x="5044287" y="3657600"/>
+            <a:ext cx="2103120" cy="1371600"/>
+          </a:xfrm>
+          <a:prstGeom prst="rect">
+            <a:avLst/>
+          </a:prstGeom>
+          <a:noFill/>
+        </p:spPr>
+        <p:txBody>
+          <a:bodyPr wrap="square">
+            <a:normAutofit lnSpcReduction="10000"/>
+          </a:bodyPr>
+          <a:lstStyle/>
+          <a:p>
+            <a:pPr algn="ctr">
+              <a:defRPr sz="1800" b="1">
+                <a:solidFill>
+                  <a:srgbClr val="FFFFFF"/>
+                </a:solidFill>
+              </a:defRPr>
+            </a:pPr>
+            <a:r>
+              <a:rPr dirty="0"/>
+              <a:t>Tools</a:t>
+            </a:r>
+          </a:p>
+          <a:p>
+            <a:pPr algn="ctr">
+              <a:spcBef>
+                <a:spcPts val="800"/>
+              </a:spcBef>
+              <a:defRPr sz="1300">
                 <a:solidFill>
                   <a:srgbClr val="8B95A5"/>
                 </a:solidFill>
               </a:defRPr>
             </a:pPr>
             <a:r>
-              <a:t>30 minutes</a:t>
+              <a:rPr dirty="0"/>
+              <a:t>Terminal (iTerm2, Windows Terminal, etc.)</a:t>
+            </a:r>
+            <a:br>
+              <a:rPr dirty="0"/>
+            </a:br>
+            <a:r>
+              <a:rPr dirty="0"/>
+              <a:t>Git installed and configured</a:t>
+            </a:r>
+            <a:br>
+              <a:rPr dirty="0"/>
+            </a:br>
+            <a:r>
+              <a:rPr dirty="0"/>
+              <a:t>VS Code or JetBrains IDE (optional)</a:t>
+            </a:r>
+          </a:p>
+        </p:txBody>
+      </p:sp>
+      <p:sp>
+        <p:nvSpPr>
+          <p:cNvPr id="11" name="Rounded Rectangle 10"/>
+          <p:cNvSpPr/>
+          <p:nvPr/>
+        </p:nvSpPr>
+        <p:spPr>
+          <a:xfrm>
+            <a:off x="7604607" y="2011680"/>
+            <a:ext cx="2286001" cy="3200400"/>
+          </a:xfrm>
+          <a:prstGeom prst="roundRect">
+            <a:avLst/>
+          </a:prstGeom>
+          <a:solidFill>
+            <a:srgbClr val="141A26"/>
+          </a:solidFill>
+          <a:ln w="25400">
+            <a:solidFill>
+              <a:srgbClr val="00D4AA"/>
+            </a:solidFill>
+          </a:ln>
+        </p:spPr>
+        <p:style>
+          <a:lnRef idx="1">
+            <a:schemeClr val="accent1"/>
+          </a:lnRef>
+          <a:fillRef idx="3">
+            <a:schemeClr val="accent1"/>
+          </a:fillRef>
+          <a:effectRef idx="2">
+            <a:schemeClr val="accent1"/>
+          </a:effectRef>
+          <a:fontRef idx="minor">
+            <a:schemeClr val="lt1"/>
+          </a:fontRef>
+        </p:style>
+        <p:txBody>
+          <a:bodyPr rtlCol="0" anchor="ctr"/>
+          <a:lstStyle/>
+          <a:p>
+            <a:pPr algn="ctr"/>
+            <a:endParaRPr/>
+          </a:p>
+        </p:txBody>
+      </p:sp>
+      <p:sp>
+        <p:nvSpPr>
+          <p:cNvPr id="12" name="Oval 11"/>
+          <p:cNvSpPr/>
+          <p:nvPr/>
+        </p:nvSpPr>
+        <p:spPr>
+          <a:xfrm>
+            <a:off x="8290407" y="2468880"/>
+            <a:ext cx="914400" cy="914400"/>
+          </a:xfrm>
+          <a:prstGeom prst="ellipse">
+            <a:avLst/>
+          </a:prstGeom>
+          <a:solidFill>
+            <a:srgbClr val="00D4AA"/>
+          </a:solidFill>
+          <a:ln>
+            <a:noFill/>
+          </a:ln>
+        </p:spPr>
+        <p:style>
+          <a:lnRef idx="1">
+            <a:schemeClr val="accent1"/>
+          </a:lnRef>
+          <a:fillRef idx="3">
+            <a:schemeClr val="accent1"/>
+          </a:fillRef>
+          <a:effectRef idx="2">
+            <a:schemeClr val="accent1"/>
+          </a:effectRef>
+          <a:fontRef idx="minor">
+            <a:schemeClr val="lt1"/>
+          </a:fontRef>
+        </p:style>
+        <p:txBody>
+          <a:bodyPr rtlCol="0" anchor="ctr"/>
+          <a:lstStyle/>
+          <a:p>
+            <a:pPr algn="ctr"/>
+            <a:endParaRPr/>
+          </a:p>
+        </p:txBody>
+      </p:sp>
+      <p:sp>
+        <p:nvSpPr>
+          <p:cNvPr id="13" name="TextBox 12"/>
+          <p:cNvSpPr txBox="1"/>
+          <p:nvPr/>
+        </p:nvSpPr>
+        <p:spPr>
+          <a:xfrm>
+            <a:off x="8290407" y="2468880"/>
+            <a:ext cx="914400" cy="914400"/>
+          </a:xfrm>
+          <a:prstGeom prst="rect">
+            <a:avLst/>
+          </a:prstGeom>
+          <a:noFill/>
+        </p:spPr>
+        <p:txBody>
+          <a:bodyPr wrap="none" anchor="ctr">
+            <a:spAutoFit/>
+          </a:bodyPr>
+          <a:lstStyle/>
+          <a:p>
+            <a:pPr algn="ctr">
+              <a:defRPr sz="3600" b="1">
+                <a:solidFill>
+                  <a:srgbClr val="0B0F1A"/>
+                </a:solidFill>
+              </a:defRPr>
+            </a:pPr>
+            <a:r>
+              <a:t>3</a:t>
+            </a:r>
+          </a:p>
+        </p:txBody>
+      </p:sp>
+      <p:sp>
+        <p:nvSpPr>
+          <p:cNvPr id="14" name="TextBox 13"/>
+          <p:cNvSpPr txBox="1"/>
+          <p:nvPr/>
+        </p:nvSpPr>
+        <p:spPr>
+          <a:xfrm>
+            <a:off x="7696047" y="3657600"/>
+            <a:ext cx="2194866" cy="1371600"/>
+          </a:xfrm>
+          <a:prstGeom prst="rect">
+            <a:avLst/>
+          </a:prstGeom>
+          <a:noFill/>
+        </p:spPr>
+        <p:txBody>
+          <a:bodyPr wrap="square">
+            <a:noAutofit/>
+          </a:bodyPr>
+          <a:lstStyle/>
+          <a:p>
+            <a:pPr algn="ctr">
+              <a:defRPr sz="1800" b="1">
+                <a:solidFill>
+                  <a:srgbClr val="FFFFFF"/>
+                </a:solidFill>
+                <a:latin typeface="Consolas"/>
+              </a:defRPr>
+            </a:pPr>
+            <a:r>
+              <a:rPr dirty="0"/>
+              <a:t>Account</a:t>
+            </a:r>
+          </a:p>
+          <a:p>
+            <a:pPr algn="ctr">
+              <a:spcBef>
+                <a:spcPts val="400"/>
+              </a:spcBef>
+              <a:defRPr sz="1100">
+                <a:solidFill>
+                  <a:srgbClr val="8A8F98"/>
+                </a:solidFill>
+              </a:defRPr>
+            </a:pPr>
+            <a:r>
+              <a:rPr dirty="0"/>
+              <a:t>Anthropic Pro or Max plan</a:t>
+            </a:r>
+          </a:p>
+          <a:p>
+            <a:pPr algn="ctr">
+              <a:spcBef>
+                <a:spcPts val="400"/>
+              </a:spcBef>
+              <a:defRPr sz="1100">
+                <a:solidFill>
+                  <a:srgbClr val="8A8F98"/>
+                </a:solidFill>
+              </a:defRPr>
+            </a:pPr>
+            <a:r>
+              <a:rPr dirty="0"/>
+              <a:t>Install: claude.ai/install.sh</a:t>
+            </a:r>
+          </a:p>
+          <a:p>
+            <a:pPr algn="ctr">
+              <a:spcBef>
+                <a:spcPts val="400"/>
+              </a:spcBef>
+              <a:defRPr sz="1100">
+                <a:solidFill>
+                  <a:srgbClr val="8A8F98"/>
+                </a:solidFill>
+              </a:defRPr>
+            </a:pPr>
+            <a:r>
+              <a:rPr dirty="0"/>
+              <a:t>Authenticate: </a:t>
+            </a:r>
+            <a:r>
+              <a:rPr dirty="0" err="1"/>
+              <a:t>claude</a:t>
+            </a:r>
+            <a:r>
+              <a:rPr dirty="0"/>
+              <a:t> login</a:t>
             </a:r>
           </a:p>
         </p:txBody>

--- a/slides/Day2_Claude_Code_Fundamentals.pptx
+++ b/slides/Day2_Claude_Code_Fundamentals.pptx
@@ -7564,6 +7564,13 @@
               <a:t>   Next topic...</a:t>
             </a:r>
           </a:p>
+          <a:p>
+            <a:br/>
+            <a:br/>
+            <a:r>
+              <a:t>COMPOUNDING FEEDBACK LOOP: Advanced teams add a tasks/lessons.md file that Claude updates after EVERY correction. When Claude makes a mistake and you fix it, tell Claude to record the pattern in lessons.md. Over time, the mistake rate drops because Claude reads its own error log before starting work. Boris Cherny's team at Anthropic uses this internally. The setup takes 10 minutes — add one line to CLAUDE.md: "After any correction, update tasks/lessons.md with the lesson learned. Read lessons.md before starting any task." Your AI gets better every day you use it.</a:t>
+            </a:r>
+          </a:p>
         </p:txBody>
       </p:sp>
       <p:sp>
@@ -7691,6 +7698,13 @@
           <a:p>
             <a:r>
               <a:t>   Now let's see how @ mentions let you feed specific context beyond CLAUDE.md.</a:t>
+            </a:r>
+          </a:p>
+          <a:p>
+            <a:br/>
+            <a:br/>
+            <a:r>
+              <a:t>VERIFICATION BAR: A powerful CLAUDE.md convention from Anthropic's internal team: "Cannot mark a task complete without proving it works. Check diffs, run tests, check logs. The bar: Would a staff engineer approve this?" Add that standard to your CLAUDE.md and Claude holds itself to senior-level quality checks before reporting done.</a:t>
             </a:r>
           </a:p>
         </p:txBody>

--- a/slides/Day2_Claude_Code_Fundamentals.pptx
+++ b/slides/Day2_Claude_Code_Fundamentals.pptx
@@ -42099,7 +42099,7 @@
               </a:defRPr>
             </a:pPr>
             <a:r>
-              <a:t>The Magic Moment — build a complete app from a single prompt</a:t>
+              <a:t>Build From Spec — go from empty folder to running app from a single spec</a:t>
             </a:r>
           </a:p>
         </p:txBody>

--- a/slides/Day2_Claude_Code_Fundamentals.pptx
+++ b/slides/Day2_Claude_Code_Fundamentals.pptx
@@ -42099,7 +42099,7 @@
               </a:defRPr>
             </a:pPr>
             <a:r>
-              <a:t>Build From Spec — go from empty folder to running app from a single spec</a:t>
+              <a:t>The Agentic Build Loop — build a working web app from a single prompt</a:t>
             </a:r>
           </a:p>
         </p:txBody>

--- a/slides/Day2_Claude_Code_Fundamentals.pptx
+++ b/slides/Day2_Claude_Code_Fundamentals.pptx
@@ -8383,6 +8383,13 @@
               <a:t>   Before we dive into installation, let's make sure we're all on the same page about what Claude Code actually is</a:t>
             </a:r>
           </a:p>
+          <a:p>
+            <a:br/>
+            <a:br/>
+            <a:r>
+              <a:t>OPENING QUESTION (before students start the lab): "Raise your hand if you believe AI can generate code." [most hands]. "Keep your hand up if you believe it can debug production failures." [some drop]. "Keep your hand up if you believe it can refactor a large codebase safely." [more drop]. "Good. Today we test all three." Then let them start.</a:t>
+            </a:r>
+          </a:p>
         </p:txBody>
       </p:sp>
       <p:sp>

--- a/slides/Day2_Claude_Code_Fundamentals.pptx
+++ b/slides/Day2_Claude_Code_Fundamentals.pptx
@@ -3291,7 +3291,7 @@
           </a:p>
           <a:p>
             <a:r>
-              <a:t>   Final lab - complete feature workflow.</a:t>
+              <a:t>OPEN WITH: Last lab of the day — you're going to ship this dashboard with production hardening, feature branches, and a scaling review.</a:t>
             </a:r>
           </a:p>
           <a:p>
@@ -25759,7 +25759,7 @@
               </a:defRPr>
             </a:pPr>
             <a:r>
-              <a:t>Lab 2: Real Development Workflow</a:t>
+              <a:t>Lab 2D: Ship It</a:t>
             </a:r>
           </a:p>
         </p:txBody>
@@ -31776,7 +31776,7 @@
               </a:defRPr>
             </a:pPr>
             <a:r>
-              <a:t>Lab 1: Setup &amp; First Project</a:t>
+              <a:t>Lab 2A: The Agentic Build Loop</a:t>
             </a:r>
           </a:p>
         </p:txBody>
@@ -32683,7 +32683,7 @@
               </a:defRPr>
             </a:pPr>
             <a:r>
-              <a:t>Lab 2: Real Development Workflow</a:t>
+              <a:t>Labs 2B-2D: Policy, Recovery, Ship It</a:t>
             </a:r>
           </a:p>
         </p:txBody>
@@ -42176,7 +42176,7 @@
               </a:defRPr>
             </a:pPr>
             <a:r>
-              <a:t>Your Project Brain — CLAUDE.md conventions that enforce themselves</a:t>
+              <a:t>Teaching Claude Your Codebase — policy enforcement, security audit, draft your own</a:t>
             </a:r>
           </a:p>
         </p:txBody>
@@ -42246,7 +42246,7 @@
               </a:defRPr>
             </a:pPr>
             <a:r>
-              <a:t>Precision &amp; Recovery — @ mentions and break-fix workflows</a:t>
+              <a:t>Precision &amp; Recovery — token efficiency, disaster recovery, AI debugging</a:t>
             </a:r>
           </a:p>
         </p:txBody>
@@ -42316,7 +42316,7 @@
               </a:defRPr>
             </a:pPr>
             <a:r>
-              <a:t>Ship It — charts, filters, Git branches, and production hardening</a:t>
+              <a:t>Ship It — production readiness review, feature branches, scaling analysis</a:t>
             </a:r>
           </a:p>
         </p:txBody>
@@ -47482,7 +47482,7 @@
               </a:defRPr>
             </a:pPr>
             <a:r>
-              <a:t>Lab 1: Setup &amp; First Project</a:t>
+              <a:t>Lab 2A: The Agentic Build Loop</a:t>
             </a:r>
           </a:p>
         </p:txBody>

--- a/slides/Day2_Claude_Code_Fundamentals.pptx
+++ b/slides/Day2_Claude_Code_Fundamentals.pptx
@@ -62,6 +62,8 @@
     <p:sldId id="307" r:id="rId53"/>
     <p:sldId id="308" r:id="rId54"/>
     <p:sldId id="309" r:id="rId55"/>
+    <p:sldId id="373" r:id="rId126"/>
+    <p:sldId id="374" r:id="rId127"/>
     <p:sldId id="310" r:id="rId56"/>
     <p:sldId id="311" r:id="rId57"/>
     <p:sldId id="312" r:id="rId58"/>
@@ -1346,6 +1348,13 @@
               <a:t>   Let's look at what we're covering today</a:t>
             </a:r>
           </a:p>
+          <a:p>
+            <a:br/>
+            <a:br/>
+            <a:r>
+              <a:t>OPENING HOOK: Before anything else, ask the room: "How long would it take you to build a dashboard with an API, a database, a frontend, input validation, logging, CSV export, and clean git history?" Someone will say a day or two. Then say: "By 4pm today, you'll have done it in about 3 hours — and you'll barely touch the keyboard." Let that land, then move to the agenda.</a:t>
+            </a:r>
+          </a:p>
         </p:txBody>
       </p:sp>
       <p:sp>
@@ -3892,6 +3901,98 @@
 </p:notes>
 </file>
 
+<file path=ppt/notesSlides/notesSlide116.xml><?xml version="1.0" encoding="utf-8"?>
+<p:notes xmlns:a="http://schemas.openxmlformats.org/drawingml/2006/main" xmlns:p="http://schemas.openxmlformats.org/presentationml/2006/main" xmlns:r="http://schemas.openxmlformats.org/officeDocument/2006/relationships">
+  <p:cSld>
+    <p:spTree>
+      <p:nvGrpSpPr>
+        <p:cNvPr id="1" name=""/>
+        <p:cNvGrpSpPr/>
+        <p:nvPr/>
+      </p:nvGrpSpPr>
+      <p:grpSpPr>
+        <a:xfrm>
+          <a:off x="0" y="0"/>
+          <a:ext cx="0" cy="0"/>
+          <a:chOff x="0" y="0"/>
+          <a:chExt cx="0" cy="0"/>
+        </a:xfrm>
+      </p:grpSpPr>
+      <p:sp>
+        <p:nvSpPr>
+          <p:cNvPr id="4" name="Notes Placeholder 3"/>
+          <p:cNvSpPr>
+            <a:spLocks noGrp="1"/>
+          </p:cNvSpPr>
+          <p:nvPr>
+            <p:ph type="body" idx="1"/>
+          </p:nvPr>
+        </p:nvSpPr>
+        <p:spPr/>
+        <p:txBody>
+          <a:bodyPr/>
+          <a:lstStyle/>
+          <a:p>
+            <a:r>
+              <a:t>Before the labs, be honest about limitations. Every fix listed here is a skill they practice in the labs. This slide builds enormous credibility with skeptics.</a:t>
+            </a:r>
+          </a:p>
+        </p:txBody>
+      </p:sp>
+    </p:spTree>
+  </p:cSld>
+  <p:clrMapOvr>
+    <a:masterClrMapping/>
+  </p:clrMapOvr>
+</p:notes>
+</file>
+
+<file path=ppt/notesSlides/notesSlide117.xml><?xml version="1.0" encoding="utf-8"?>
+<p:notes xmlns:a="http://schemas.openxmlformats.org/drawingml/2006/main" xmlns:p="http://schemas.openxmlformats.org/presentationml/2006/main" xmlns:r="http://schemas.openxmlformats.org/officeDocument/2006/relationships">
+  <p:cSld>
+    <p:spTree>
+      <p:nvGrpSpPr>
+        <p:cNvPr id="1" name=""/>
+        <p:cNvGrpSpPr/>
+        <p:nvPr/>
+      </p:nvGrpSpPr>
+      <p:grpSpPr>
+        <a:xfrm>
+          <a:off x="0" y="0"/>
+          <a:ext cx="0" cy="0"/>
+          <a:chOff x="0" y="0"/>
+          <a:chExt cx="0" cy="0"/>
+        </a:xfrm>
+      </p:grpSpPr>
+      <p:sp>
+        <p:nvSpPr>
+          <p:cNvPr id="4" name="Notes Placeholder 3"/>
+          <p:cNvSpPr>
+            <a:spLocks noGrp="1"/>
+          </p:cNvSpPr>
+          <p:nvPr>
+            <p:ph type="body" idx="1"/>
+          </p:nvPr>
+        </p:nvSpPr>
+        <p:spPr/>
+        <p:txBody>
+          <a:bodyPr/>
+          <a:lstStyle/>
+          <a:p>
+            <a:r>
+              <a:t>The skill is delegation — clear intent, right context, let Claude do the work. Same skill that makes great engineering managers. Then launch Lab 2A.</a:t>
+            </a:r>
+          </a:p>
+        </p:txBody>
+      </p:sp>
+    </p:spTree>
+  </p:cSld>
+  <p:clrMapOvr>
+    <a:masterClrMapping/>
+  </p:clrMapOvr>
+</p:notes>
+</file>
+
 <file path=ppt/notesSlides/notesSlide12.xml><?xml version="1.0" encoding="utf-8"?>
 <p:notes xmlns:a="http://schemas.openxmlformats.org/drawingml/2006/main" xmlns:r="http://schemas.openxmlformats.org/officeDocument/2006/relationships" xmlns:p="http://schemas.openxmlformats.org/presentationml/2006/main">
   <p:cSld>
@@ -10293,6 +10394,13 @@
               <a:t>   Now let's optimize your context management with a hands-on demo.</a:t>
             </a:r>
           </a:p>
+          <a:p>
+            <a:br/>
+            <a:br/>
+            <a:r>
+              <a:t>SIMPLIFY THIS FOR THE ROOM: "Context is your budget. You have about 200K tokens. Here's what eats it: conversation history, code files Claude reads, MCP tool descriptions, docs and URLs. Here's how you manage it: /clear resets the conversation, /compact compresses history, .claudeignore excludes files, and @ mentions load only what you need. That's it — four tools to manage your budget." </a:t>
+            </a:r>
+          </a:p>
         </p:txBody>
       </p:sp>
       <p:sp>
@@ -14292,6 +14400,37 @@
           <a:p>
             <a:r>
               <a:t>   With this model in mind, let's get Claude Code installed and see these memory systems in action.</a:t>
+            </a:r>
+          </a:p>
+          <a:p>
+            <a:br/>
+            <a:br/>
+            <a:r>
+              <a:t>ANALOGY TABLE (draw on whiteboard or just speak it):</a:t>
+            </a:r>
+            <a:br/>
+            <a:r>
+              <a:t>Human Brain → Claude Code:</a:t>
+            </a:r>
+            <a:br/>
+            <a:r>
+              <a:t>Working memory → Context window (what Claude is thinking about RIGHT NOW)</a:t>
+            </a:r>
+            <a:br/>
+            <a:r>
+              <a:t>Short-term memory → Session history (this conversation)</a:t>
+            </a:r>
+            <a:br/>
+            <a:r>
+              <a:t>Long-term memory → CLAUDE.md (persists across sessions)</a:t>
+            </a:r>
+            <a:br/>
+            <a:r>
+              <a:t>Muscle memory → Skills &amp; slash commands (automatic behaviors)</a:t>
+            </a:r>
+            <a:br/>
+            <a:r>
+              <a:t>Everything you learn today is about managing these four layers. That's the whole game.</a:t>
             </a:r>
           </a:p>
         </p:txBody>
@@ -28434,6 +28573,567 @@
             </a:pPr>
             <a:r>
               <a:t>- © 2026 AIA Copilot</a:t>
+            </a:r>
+          </a:p>
+        </p:txBody>
+      </p:sp>
+    </p:spTree>
+  </p:cSld>
+  <p:clrMapOvr>
+    <a:masterClrMapping/>
+  </p:clrMapOvr>
+</p:sld>
+</file>
+
+<file path=ppt/slides/slide118.xml><?xml version="1.0" encoding="utf-8"?>
+<p:sld xmlns:a="http://schemas.openxmlformats.org/drawingml/2006/main" xmlns:p="http://schemas.openxmlformats.org/presentationml/2006/main" xmlns:r="http://schemas.openxmlformats.org/officeDocument/2006/relationships">
+  <p:cSld>
+    <p:bg>
+      <p:bgPr>
+        <a:solidFill>
+          <a:srgbClr val="0B0F1A"/>
+        </a:solidFill>
+        <a:effectLst/>
+      </p:bgPr>
+    </p:bg>
+    <p:spTree>
+      <p:nvGrpSpPr>
+        <p:cNvPr id="1" name=""/>
+        <p:cNvGrpSpPr/>
+        <p:nvPr/>
+      </p:nvGrpSpPr>
+      <p:grpSpPr/>
+      <p:sp>
+        <p:nvSpPr>
+          <p:cNvPr id="2" name="TextBox 1"/>
+          <p:cNvSpPr txBox="1"/>
+          <p:nvPr/>
+        </p:nvSpPr>
+        <p:spPr>
+          <a:xfrm>
+            <a:off x="731520" y="548640"/>
+            <a:ext cx="10515600" cy="914400"/>
+          </a:xfrm>
+          <a:prstGeom prst="rect">
+            <a:avLst/>
+          </a:prstGeom>
+          <a:noFill/>
+        </p:spPr>
+        <p:txBody>
+          <a:bodyPr wrap="square">
+            <a:spAutoFit/>
+          </a:bodyPr>
+          <a:lstStyle/>
+          <a:p>
+            <a:pPr>
+              <a:defRPr sz="3600" b="1">
+                <a:solidFill>
+                  <a:srgbClr val="FFFFFF"/>
+                </a:solidFill>
+              </a:defRPr>
+            </a:pPr>
+            <a:r>
+              <a:t>When Claude Code Fails</a:t>
+            </a:r>
+          </a:p>
+        </p:txBody>
+      </p:sp>
+      <p:sp>
+        <p:nvSpPr>
+          <p:cNvPr id="3" name="TextBox 2"/>
+          <p:cNvSpPr txBox="1"/>
+          <p:nvPr/>
+        </p:nvSpPr>
+        <p:spPr>
+          <a:xfrm>
+            <a:off x="731520" y="1371600"/>
+            <a:ext cx="10515600" cy="548640"/>
+          </a:xfrm>
+          <a:prstGeom prst="rect">
+            <a:avLst/>
+          </a:prstGeom>
+          <a:noFill/>
+        </p:spPr>
+        <p:txBody>
+          <a:bodyPr wrap="square">
+            <a:spAutoFit/>
+          </a:bodyPr>
+          <a:lstStyle/>
+          <a:p>
+            <a:pPr>
+              <a:defRPr sz="1800">
+                <a:solidFill>
+                  <a:srgbClr val="00D4AA"/>
+                </a:solidFill>
+              </a:defRPr>
+            </a:pPr>
+            <a:r>
+              <a:t>Honesty builds trust. Here's where it struggles — and how to fix it.</a:t>
+            </a:r>
+          </a:p>
+        </p:txBody>
+      </p:sp>
+      <p:sp>
+        <p:nvSpPr>
+          <p:cNvPr id="4" name="TextBox 3"/>
+          <p:cNvSpPr txBox="1"/>
+          <p:nvPr/>
+        </p:nvSpPr>
+        <p:spPr>
+          <a:xfrm>
+            <a:off x="1097280" y="2194560"/>
+            <a:ext cx="9144000" cy="640080"/>
+          </a:xfrm>
+          <a:prstGeom prst="rect">
+            <a:avLst/>
+          </a:prstGeom>
+          <a:noFill/>
+        </p:spPr>
+        <p:txBody>
+          <a:bodyPr wrap="square">
+            <a:spAutoFit/>
+          </a:bodyPr>
+          <a:lstStyle/>
+          <a:p>
+            <a:r>
+              <a:rPr sz="2000" b="1">
+                <a:solidFill>
+                  <a:srgbClr val="00D4AA"/>
+                </a:solidFill>
+              </a:rPr>
+              <a:t>Ambiguous instructions:  </a:t>
+            </a:r>
+            <a:r>
+              <a:rPr sz="1800">
+                <a:solidFill>
+                  <a:srgbClr val="FFFFFF"/>
+                </a:solidFill>
+              </a:rPr>
+              <a:t>Claude guesses wrong. Fix: be specific.</a:t>
+            </a:r>
+          </a:p>
+        </p:txBody>
+      </p:sp>
+      <p:sp>
+        <p:nvSpPr>
+          <p:cNvPr id="5" name="TextBox 4"/>
+          <p:cNvSpPr txBox="1"/>
+          <p:nvPr/>
+        </p:nvSpPr>
+        <p:spPr>
+          <a:xfrm>
+            <a:off x="1097280" y="2880360"/>
+            <a:ext cx="9144000" cy="640080"/>
+          </a:xfrm>
+          <a:prstGeom prst="rect">
+            <a:avLst/>
+          </a:prstGeom>
+          <a:noFill/>
+        </p:spPr>
+        <p:txBody>
+          <a:bodyPr wrap="square">
+            <a:spAutoFit/>
+          </a:bodyPr>
+          <a:lstStyle/>
+          <a:p>
+            <a:r>
+              <a:rPr sz="2000" b="1">
+                <a:solidFill>
+                  <a:srgbClr val="00D4AA"/>
+                </a:solidFill>
+              </a:rPr>
+              <a:t>Huge codebase, no docs:  </a:t>
+            </a:r>
+            <a:r>
+              <a:rPr sz="1800">
+                <a:solidFill>
+                  <a:srgbClr val="FFFFFF"/>
+                </a:solidFill>
+              </a:rPr>
+              <a:t>Claude drowns in context. Fix: CLAUDE.md + .claudeignore</a:t>
+            </a:r>
+          </a:p>
+        </p:txBody>
+      </p:sp>
+      <p:sp>
+        <p:nvSpPr>
+          <p:cNvPr id="6" name="TextBox 5"/>
+          <p:cNvSpPr txBox="1"/>
+          <p:nvPr/>
+        </p:nvSpPr>
+        <p:spPr>
+          <a:xfrm>
+            <a:off x="1097280" y="3566160"/>
+            <a:ext cx="9144000" cy="640080"/>
+          </a:xfrm>
+          <a:prstGeom prst="rect">
+            <a:avLst/>
+          </a:prstGeom>
+          <a:noFill/>
+        </p:spPr>
+        <p:txBody>
+          <a:bodyPr wrap="square">
+            <a:spAutoFit/>
+          </a:bodyPr>
+          <a:lstStyle/>
+          <a:p>
+            <a:r>
+              <a:rPr sz="2000" b="1">
+                <a:solidFill>
+                  <a:srgbClr val="00D4AA"/>
+                </a:solidFill>
+              </a:rPr>
+              <a:t>Complex state across files:  </a:t>
+            </a:r>
+            <a:r>
+              <a:rPr sz="1800">
+                <a:solidFill>
+                  <a:srgbClr val="FFFFFF"/>
+                </a:solidFill>
+              </a:rPr>
+              <a:t>Claude loses track. Fix: @ mentions to focus.</a:t>
+            </a:r>
+          </a:p>
+        </p:txBody>
+      </p:sp>
+      <p:sp>
+        <p:nvSpPr>
+          <p:cNvPr id="7" name="TextBox 6"/>
+          <p:cNvSpPr txBox="1"/>
+          <p:nvPr/>
+        </p:nvSpPr>
+        <p:spPr>
+          <a:xfrm>
+            <a:off x="1097280" y="4251960"/>
+            <a:ext cx="9144000" cy="640080"/>
+          </a:xfrm>
+          <a:prstGeom prst="rect">
+            <a:avLst/>
+          </a:prstGeom>
+          <a:noFill/>
+        </p:spPr>
+        <p:txBody>
+          <a:bodyPr wrap="square">
+            <a:spAutoFit/>
+          </a:bodyPr>
+          <a:lstStyle/>
+          <a:p>
+            <a:r>
+              <a:rPr sz="2000" b="1">
+                <a:solidFill>
+                  <a:srgbClr val="00D4AA"/>
+                </a:solidFill>
+              </a:rPr>
+              <a:t>Missing dependencies:  </a:t>
+            </a:r>
+            <a:r>
+              <a:rPr sz="1800">
+                <a:solidFill>
+                  <a:srgbClr val="FFFFFF"/>
+                </a:solidFill>
+              </a:rPr>
+              <a:t>Build fails silently. Fix: describe your environment.</a:t>
+            </a:r>
+          </a:p>
+        </p:txBody>
+      </p:sp>
+      <p:sp>
+        <p:nvSpPr>
+          <p:cNvPr id="8" name="TextBox 7"/>
+          <p:cNvSpPr txBox="1"/>
+          <p:nvPr/>
+        </p:nvSpPr>
+        <p:spPr>
+          <a:xfrm>
+            <a:off x="1097280" y="4937760"/>
+            <a:ext cx="9144000" cy="640080"/>
+          </a:xfrm>
+          <a:prstGeom prst="rect">
+            <a:avLst/>
+          </a:prstGeom>
+          <a:noFill/>
+        </p:spPr>
+        <p:txBody>
+          <a:bodyPr wrap="square">
+            <a:spAutoFit/>
+          </a:bodyPr>
+          <a:lstStyle/>
+          <a:p>
+            <a:r>
+              <a:rPr sz="2000" b="1">
+                <a:solidFill>
+                  <a:srgbClr val="00D4AA"/>
+                </a:solidFill>
+              </a:rPr>
+              <a:t>One massive prompt:  </a:t>
+            </a:r>
+            <a:r>
+              <a:rPr sz="1800">
+                <a:solidFill>
+                  <a:srgbClr val="FFFFFF"/>
+                </a:solidFill>
+              </a:rPr>
+              <a:t>Claude tries too much. Fix: break into smaller tasks.</a:t>
+            </a:r>
+          </a:p>
+        </p:txBody>
+      </p:sp>
+    </p:spTree>
+  </p:cSld>
+  <p:clrMapOvr>
+    <a:masterClrMapping/>
+  </p:clrMapOvr>
+</p:sld>
+</file>
+
+<file path=ppt/slides/slide119.xml><?xml version="1.0" encoding="utf-8"?>
+<p:sld xmlns:a="http://schemas.openxmlformats.org/drawingml/2006/main" xmlns:p="http://schemas.openxmlformats.org/presentationml/2006/main" xmlns:r="http://schemas.openxmlformats.org/officeDocument/2006/relationships">
+  <p:cSld>
+    <p:bg>
+      <p:bgPr>
+        <a:solidFill>
+          <a:srgbClr val="0B0F1A"/>
+        </a:solidFill>
+        <a:effectLst/>
+      </p:bgPr>
+    </p:bg>
+    <p:spTree>
+      <p:nvGrpSpPr>
+        <p:cNvPr id="1" name=""/>
+        <p:cNvGrpSpPr/>
+        <p:nvPr/>
+      </p:nvGrpSpPr>
+      <p:grpSpPr/>
+      <p:sp>
+        <p:nvSpPr>
+          <p:cNvPr id="2" name="TextBox 1"/>
+          <p:cNvSpPr txBox="1"/>
+          <p:nvPr/>
+        </p:nvSpPr>
+        <p:spPr>
+          <a:xfrm>
+            <a:off x="731520" y="548640"/>
+            <a:ext cx="10515600" cy="914400"/>
+          </a:xfrm>
+          <a:prstGeom prst="rect">
+            <a:avLst/>
+          </a:prstGeom>
+          <a:noFill/>
+        </p:spPr>
+        <p:txBody>
+          <a:bodyPr wrap="square">
+            <a:spAutoFit/>
+          </a:bodyPr>
+          <a:lstStyle/>
+          <a:p>
+            <a:pPr>
+              <a:defRPr sz="3600" b="1">
+                <a:solidFill>
+                  <a:srgbClr val="FFFFFF"/>
+                </a:solidFill>
+              </a:defRPr>
+            </a:pPr>
+            <a:r>
+              <a:t>The Real Skill: Delegation</a:t>
+            </a:r>
+          </a:p>
+        </p:txBody>
+      </p:sp>
+      <p:sp>
+        <p:nvSpPr>
+          <p:cNvPr id="3" name="TextBox 2"/>
+          <p:cNvSpPr txBox="1"/>
+          <p:nvPr/>
+        </p:nvSpPr>
+        <p:spPr>
+          <a:xfrm>
+            <a:off x="731520" y="1371600"/>
+            <a:ext cx="10515600" cy="548640"/>
+          </a:xfrm>
+          <a:prstGeom prst="rect">
+            <a:avLst/>
+          </a:prstGeom>
+          <a:noFill/>
+        </p:spPr>
+        <p:txBody>
+          <a:bodyPr wrap="square">
+            <a:spAutoFit/>
+          </a:bodyPr>
+          <a:lstStyle/>
+          <a:p>
+            <a:pPr>
+              <a:defRPr sz="1800">
+                <a:solidFill>
+                  <a:srgbClr val="00D4AA"/>
+                </a:solidFill>
+              </a:defRPr>
+            </a:pPr>
+            <a:r>
+              <a:t>You're not learning to prompt. You're learning to manage an AI engineer.</a:t>
+            </a:r>
+          </a:p>
+        </p:txBody>
+      </p:sp>
+      <p:sp>
+        <p:nvSpPr>
+          <p:cNvPr id="4" name="TextBox 3"/>
+          <p:cNvSpPr txBox="1"/>
+          <p:nvPr/>
+        </p:nvSpPr>
+        <p:spPr>
+          <a:xfrm>
+            <a:off x="1097280" y="2194560"/>
+            <a:ext cx="9144000" cy="640080"/>
+          </a:xfrm>
+          <a:prstGeom prst="rect">
+            <a:avLst/>
+          </a:prstGeom>
+          <a:noFill/>
+        </p:spPr>
+        <p:txBody>
+          <a:bodyPr wrap="square">
+            <a:spAutoFit/>
+          </a:bodyPr>
+          <a:lstStyle/>
+          <a:p>
+            <a:r>
+              <a:rPr sz="2000" b="1">
+                <a:solidFill>
+                  <a:srgbClr val="00D4AA"/>
+                </a:solidFill>
+              </a:rPr>
+              <a:t>Bad:  </a:t>
+            </a:r>
+            <a:r>
+              <a:rPr sz="1800">
+                <a:solidFill>
+                  <a:srgbClr val="FFFFFF"/>
+                </a:solidFill>
+              </a:rPr>
+              <a:t>"Write authentication."</a:t>
+            </a:r>
+          </a:p>
+        </p:txBody>
+      </p:sp>
+      <p:sp>
+        <p:nvSpPr>
+          <p:cNvPr id="5" name="TextBox 4"/>
+          <p:cNvSpPr txBox="1"/>
+          <p:nvPr/>
+        </p:nvSpPr>
+        <p:spPr>
+          <a:xfrm>
+            <a:off x="1097280" y="2880360"/>
+            <a:ext cx="9144000" cy="640080"/>
+          </a:xfrm>
+          <a:prstGeom prst="rect">
+            <a:avLst/>
+          </a:prstGeom>
+          <a:noFill/>
+        </p:spPr>
+        <p:txBody>
+          <a:bodyPr wrap="square">
+            <a:spAutoFit/>
+          </a:bodyPr>
+          <a:lstStyle/>
+          <a:p>
+            <a:r>
+              <a:rPr sz="2000" b="1">
+                <a:solidFill>
+                  <a:srgbClr val="00D4AA"/>
+                </a:solidFill>
+              </a:rPr>
+              <a:t>Good:  </a:t>
+            </a:r>
+            <a:r>
+              <a:rPr sz="1800">
+                <a:solidFill>
+                  <a:srgbClr val="FFFFFF"/>
+                </a:solidFill>
+              </a:rPr>
+              <a:t>"Add JWT auth to @auth.js using the middleware pattern in @payments.js"</a:t>
+            </a:r>
+          </a:p>
+        </p:txBody>
+      </p:sp>
+      <p:sp>
+        <p:nvSpPr>
+          <p:cNvPr id="6" name="TextBox 5"/>
+          <p:cNvSpPr txBox="1"/>
+          <p:nvPr/>
+        </p:nvSpPr>
+        <p:spPr>
+          <a:xfrm>
+            <a:off x="1097280" y="3566160"/>
+            <a:ext cx="9144000" cy="640080"/>
+          </a:xfrm>
+          <a:prstGeom prst="rect">
+            <a:avLst/>
+          </a:prstGeom>
+          <a:noFill/>
+        </p:spPr>
+        <p:txBody>
+          <a:bodyPr wrap="square">
+            <a:spAutoFit/>
+          </a:bodyPr>
+          <a:lstStyle/>
+          <a:p>
+            <a:r>
+              <a:rPr sz="2000" b="1">
+                <a:solidFill>
+                  <a:srgbClr val="00D4AA"/>
+                </a:solidFill>
+              </a:rPr>
+              <a:t>Bad:  </a:t>
+            </a:r>
+            <a:r>
+              <a:rPr sz="1800">
+                <a:solidFill>
+                  <a:srgbClr val="FFFFFF"/>
+                </a:solidFill>
+              </a:rPr>
+              <a:t>"Fix the bug."</a:t>
+            </a:r>
+          </a:p>
+        </p:txBody>
+      </p:sp>
+      <p:sp>
+        <p:nvSpPr>
+          <p:cNvPr id="7" name="TextBox 6"/>
+          <p:cNvSpPr txBox="1"/>
+          <p:nvPr/>
+        </p:nvSpPr>
+        <p:spPr>
+          <a:xfrm>
+            <a:off x="1097280" y="4251960"/>
+            <a:ext cx="9144000" cy="640080"/>
+          </a:xfrm>
+          <a:prstGeom prst="rect">
+            <a:avLst/>
+          </a:prstGeom>
+          <a:noFill/>
+        </p:spPr>
+        <p:txBody>
+          <a:bodyPr wrap="square">
+            <a:spAutoFit/>
+          </a:bodyPr>
+          <a:lstStyle/>
+          <a:p>
+            <a:r>
+              <a:rPr sz="2000" b="1">
+                <a:solidFill>
+                  <a:srgbClr val="00D4AA"/>
+                </a:solidFill>
+              </a:rPr>
+              <a:t>Good:  </a:t>
+            </a:r>
+            <a:r>
+              <a:rPr sz="1800">
+                <a:solidFill>
+                  <a:srgbClr val="FFFFFF"/>
+                </a:solidFill>
+              </a:rPr>
+              <a:t>"POST /api/tasks returns 500. Check @src/routes/tasks.js for the error."</a:t>
             </a:r>
           </a:p>
         </p:txBody>

--- a/slides/Day2_Claude_Code_Fundamentals.pptx
+++ b/slides/Day2_Claude_Code_Fundamentals.pptx
@@ -32,6 +32,7 @@
     <p:sldId id="278" r:id="rId24"/>
     <p:sldId id="279" r:id="rId25"/>
     <p:sldId id="280" r:id="rId26"/>
+    <p:sldId id="375" r:id="rId128"/>
     <p:sldId id="281" r:id="rId27"/>
     <p:sldId id="263" r:id="rId9"/>
     <p:sldId id="282" r:id="rId28"/>
@@ -3935,6 +3936,52 @@
 </p:notes>
 </file>
 
+<file path=ppt/notesSlides/notesSlide118.xml><?xml version="1.0" encoding="utf-8"?>
+<p:notes xmlns:a="http://schemas.openxmlformats.org/drawingml/2006/main" xmlns:p="http://schemas.openxmlformats.org/presentationml/2006/main" xmlns:r="http://schemas.openxmlformats.org/officeDocument/2006/relationships">
+  <p:cSld>
+    <p:spTree>
+      <p:nvGrpSpPr>
+        <p:cNvPr id="1" name=""/>
+        <p:cNvGrpSpPr/>
+        <p:nvPr/>
+      </p:nvGrpSpPr>
+      <p:grpSpPr>
+        <a:xfrm>
+          <a:off x="0" y="0"/>
+          <a:ext cx="0" cy="0"/>
+          <a:chOff x="0" y="0"/>
+          <a:chExt cx="0" cy="0"/>
+        </a:xfrm>
+      </p:grpSpPr>
+      <p:sp>
+        <p:nvSpPr>
+          <p:cNvPr id="4" name="Notes Placeholder 3"/>
+          <p:cNvSpPr>
+            <a:spLocks noGrp="1"/>
+          </p:cNvSpPr>
+          <p:nvPr>
+            <p:ph type="body" idx="1"/>
+          </p:nvPr>
+        </p:nvSpPr>
+        <p:spPr/>
+        <p:txBody>
+          <a:bodyPr/>
+          <a:lstStyle/>
+          <a:p>
+            <a:r>
+              <a:t>Walk through each step. Emphasize: the developer only does step 1 (intent). Claude does everything else. The self-healing loop at the bottom is why this is an agent, not autocomplete. Flag: graphic version of this diagram is planned.</a:t>
+            </a:r>
+          </a:p>
+        </p:txBody>
+      </p:sp>
+    </p:spTree>
+  </p:cSld>
+  <p:clrMapOvr>
+    <a:masterClrMapping/>
+  </p:clrMapOvr>
+</p:notes>
+</file>
+
 <file path=ppt/notesSlides/notesSlide12.xml><?xml version="1.0" encoding="utf-8"?>
 <p:notes xmlns:a="http://schemas.openxmlformats.org/drawingml/2006/main" xmlns:r="http://schemas.openxmlformats.org/officeDocument/2006/relationships" xmlns:p="http://schemas.openxmlformats.org/presentationml/2006/main">
   <p:cSld>
@@ -29607,6 +29654,697 @@
           </a:effectLst>
         </p:spPr>
       </p:pic>
+    </p:spTree>
+  </p:cSld>
+  <p:clrMapOvr>
+    <a:masterClrMapping/>
+  </p:clrMapOvr>
+</p:sld>
+</file>
+
+<file path=ppt/slides/slide120.xml><?xml version="1.0" encoding="utf-8"?>
+<p:sld xmlns:a="http://schemas.openxmlformats.org/drawingml/2006/main" xmlns:p="http://schemas.openxmlformats.org/presentationml/2006/main" xmlns:r="http://schemas.openxmlformats.org/officeDocument/2006/relationships">
+  <p:cSld>
+    <p:bg>
+      <p:bgPr>
+        <a:solidFill>
+          <a:srgbClr val="0B0F1A"/>
+        </a:solidFill>
+        <a:effectLst/>
+      </p:bgPr>
+    </p:bg>
+    <p:spTree>
+      <p:nvGrpSpPr>
+        <p:cNvPr id="1" name=""/>
+        <p:cNvGrpSpPr/>
+        <p:nvPr/>
+      </p:nvGrpSpPr>
+      <p:grpSpPr/>
+      <p:sp>
+        <p:nvSpPr>
+          <p:cNvPr id="2" name="TextBox 1"/>
+          <p:cNvSpPr txBox="1"/>
+          <p:nvPr/>
+        </p:nvSpPr>
+        <p:spPr>
+          <a:xfrm>
+            <a:off x="731520" y="365760"/>
+            <a:ext cx="10515600" cy="731520"/>
+          </a:xfrm>
+          <a:prstGeom prst="rect">
+            <a:avLst/>
+          </a:prstGeom>
+          <a:noFill/>
+        </p:spPr>
+        <p:txBody>
+          <a:bodyPr wrap="square">
+            <a:spAutoFit/>
+          </a:bodyPr>
+          <a:lstStyle/>
+          <a:p>
+            <a:pPr>
+              <a:defRPr sz="3200" b="1">
+                <a:solidFill>
+                  <a:srgbClr val="FFFFFF"/>
+                </a:solidFill>
+              </a:defRPr>
+            </a:pPr>
+            <a:r>
+              <a:t>What Happens When You Press Enter</a:t>
+            </a:r>
+          </a:p>
+        </p:txBody>
+      </p:sp>
+      <p:sp>
+        <p:nvSpPr>
+          <p:cNvPr id="3" name="TextBox 2"/>
+          <p:cNvSpPr txBox="1"/>
+          <p:nvPr/>
+        </p:nvSpPr>
+        <p:spPr>
+          <a:xfrm>
+            <a:off x="731520" y="1005840"/>
+            <a:ext cx="10515600" cy="457200"/>
+          </a:xfrm>
+          <a:prstGeom prst="rect">
+            <a:avLst/>
+          </a:prstGeom>
+          <a:noFill/>
+        </p:spPr>
+        <p:txBody>
+          <a:bodyPr wrap="none">
+            <a:spAutoFit/>
+          </a:bodyPr>
+          <a:lstStyle/>
+          <a:p>
+            <a:pPr>
+              <a:defRPr sz="1600">
+                <a:solidFill>
+                  <a:srgbClr val="8A8F98"/>
+                </a:solidFill>
+              </a:defRPr>
+            </a:pPr>
+            <a:r>
+              <a:t>The complete flow — from your intent to working code</a:t>
+            </a:r>
+          </a:p>
+        </p:txBody>
+      </p:sp>
+      <p:sp>
+        <p:nvSpPr>
+          <p:cNvPr id="4" name="TextBox 3"/>
+          <p:cNvSpPr txBox="1"/>
+          <p:nvPr/>
+        </p:nvSpPr>
+        <p:spPr>
+          <a:xfrm>
+            <a:off x="2286000" y="1645920"/>
+            <a:ext cx="2743200" cy="365760"/>
+          </a:xfrm>
+          <a:prstGeom prst="rect">
+            <a:avLst/>
+          </a:prstGeom>
+          <a:noFill/>
+        </p:spPr>
+        <p:txBody>
+          <a:bodyPr wrap="none">
+            <a:spAutoFit/>
+          </a:bodyPr>
+          <a:lstStyle/>
+          <a:p>
+            <a:pPr algn="l">
+              <a:defRPr sz="2000" b="1">
+                <a:solidFill>
+                  <a:srgbClr val="00D4AA"/>
+                </a:solidFill>
+              </a:defRPr>
+            </a:pPr>
+            <a:r>
+              <a:t>YOUR INTENT</a:t>
+            </a:r>
+          </a:p>
+        </p:txBody>
+      </p:sp>
+      <p:sp>
+        <p:nvSpPr>
+          <p:cNvPr id="5" name="TextBox 4"/>
+          <p:cNvSpPr txBox="1"/>
+          <p:nvPr/>
+        </p:nvSpPr>
+        <p:spPr>
+          <a:xfrm>
+            <a:off x="5303520" y="1645920"/>
+            <a:ext cx="5029200" cy="365760"/>
+          </a:xfrm>
+          <a:prstGeom prst="rect">
+            <a:avLst/>
+          </a:prstGeom>
+          <a:noFill/>
+        </p:spPr>
+        <p:txBody>
+          <a:bodyPr wrap="none">
+            <a:spAutoFit/>
+          </a:bodyPr>
+          <a:lstStyle/>
+          <a:p>
+            <a:pPr>
+              <a:defRPr sz="1600">
+                <a:solidFill>
+                  <a:srgbClr val="FFFFFF"/>
+                </a:solidFill>
+              </a:defRPr>
+            </a:pPr>
+            <a:r>
+              <a:t>You describe what you want</a:t>
+            </a:r>
+          </a:p>
+        </p:txBody>
+      </p:sp>
+      <p:sp>
+        <p:nvSpPr>
+          <p:cNvPr id="6" name="TextBox 5"/>
+          <p:cNvSpPr txBox="1"/>
+          <p:nvPr/>
+        </p:nvSpPr>
+        <p:spPr>
+          <a:xfrm>
+            <a:off x="4114800" y="2057400"/>
+            <a:ext cx="914400" cy="274320"/>
+          </a:xfrm>
+          <a:prstGeom prst="rect">
+            <a:avLst/>
+          </a:prstGeom>
+          <a:noFill/>
+        </p:spPr>
+        <p:txBody>
+          <a:bodyPr wrap="none">
+            <a:spAutoFit/>
+          </a:bodyPr>
+          <a:lstStyle/>
+          <a:p>
+            <a:pPr algn="l">
+              <a:defRPr sz="2000">
+                <a:solidFill>
+                  <a:srgbClr val="00D4AA"/>
+                </a:solidFill>
+              </a:defRPr>
+            </a:pPr>
+            <a:r>
+              <a:t>↓</a:t>
+            </a:r>
+          </a:p>
+        </p:txBody>
+      </p:sp>
+      <p:sp>
+        <p:nvSpPr>
+          <p:cNvPr id="7" name="TextBox 6"/>
+          <p:cNvSpPr txBox="1"/>
+          <p:nvPr/>
+        </p:nvSpPr>
+        <p:spPr>
+          <a:xfrm>
+            <a:off x="2286000" y="2331720"/>
+            <a:ext cx="2743200" cy="365760"/>
+          </a:xfrm>
+          <a:prstGeom prst="rect">
+            <a:avLst/>
+          </a:prstGeom>
+          <a:noFill/>
+        </p:spPr>
+        <p:txBody>
+          <a:bodyPr wrap="none">
+            <a:spAutoFit/>
+          </a:bodyPr>
+          <a:lstStyle/>
+          <a:p>
+            <a:pPr algn="l">
+              <a:defRPr sz="2000" b="1">
+                <a:solidFill>
+                  <a:srgbClr val="00D4AA"/>
+                </a:solidFill>
+              </a:defRPr>
+            </a:pPr>
+            <a:r>
+              <a:t>READ CODEBASE</a:t>
+            </a:r>
+          </a:p>
+        </p:txBody>
+      </p:sp>
+      <p:sp>
+        <p:nvSpPr>
+          <p:cNvPr id="8" name="TextBox 7"/>
+          <p:cNvSpPr txBox="1"/>
+          <p:nvPr/>
+        </p:nvSpPr>
+        <p:spPr>
+          <a:xfrm>
+            <a:off x="5303520" y="2331720"/>
+            <a:ext cx="5029200" cy="365760"/>
+          </a:xfrm>
+          <a:prstGeom prst="rect">
+            <a:avLst/>
+          </a:prstGeom>
+          <a:noFill/>
+        </p:spPr>
+        <p:txBody>
+          <a:bodyPr wrap="none">
+            <a:spAutoFit/>
+          </a:bodyPr>
+          <a:lstStyle/>
+          <a:p>
+            <a:pPr>
+              <a:defRPr sz="1600">
+                <a:solidFill>
+                  <a:srgbClr val="FFFFFF"/>
+                </a:solidFill>
+              </a:defRPr>
+            </a:pPr>
+            <a:r>
+              <a:t>CLAUDE.md + relevant files + git history</a:t>
+            </a:r>
+          </a:p>
+        </p:txBody>
+      </p:sp>
+      <p:sp>
+        <p:nvSpPr>
+          <p:cNvPr id="9" name="TextBox 8"/>
+          <p:cNvSpPr txBox="1"/>
+          <p:nvPr/>
+        </p:nvSpPr>
+        <p:spPr>
+          <a:xfrm>
+            <a:off x="4114800" y="2743200"/>
+            <a:ext cx="914400" cy="274320"/>
+          </a:xfrm>
+          <a:prstGeom prst="rect">
+            <a:avLst/>
+          </a:prstGeom>
+          <a:noFill/>
+        </p:spPr>
+        <p:txBody>
+          <a:bodyPr wrap="none">
+            <a:spAutoFit/>
+          </a:bodyPr>
+          <a:lstStyle/>
+          <a:p>
+            <a:pPr algn="l">
+              <a:defRPr sz="2000">
+                <a:solidFill>
+                  <a:srgbClr val="00D4AA"/>
+                </a:solidFill>
+              </a:defRPr>
+            </a:pPr>
+            <a:r>
+              <a:t>↓</a:t>
+            </a:r>
+          </a:p>
+        </p:txBody>
+      </p:sp>
+      <p:sp>
+        <p:nvSpPr>
+          <p:cNvPr id="10" name="TextBox 9"/>
+          <p:cNvSpPr txBox="1"/>
+          <p:nvPr/>
+        </p:nvSpPr>
+        <p:spPr>
+          <a:xfrm>
+            <a:off x="2286000" y="3017520"/>
+            <a:ext cx="2743200" cy="365760"/>
+          </a:xfrm>
+          <a:prstGeom prst="rect">
+            <a:avLst/>
+          </a:prstGeom>
+          <a:noFill/>
+        </p:spPr>
+        <p:txBody>
+          <a:bodyPr wrap="none">
+            <a:spAutoFit/>
+          </a:bodyPr>
+          <a:lstStyle/>
+          <a:p>
+            <a:pPr algn="l">
+              <a:defRPr sz="2000" b="1">
+                <a:solidFill>
+                  <a:srgbClr val="00D4AA"/>
+                </a:solidFill>
+              </a:defRPr>
+            </a:pPr>
+            <a:r>
+              <a:t>PLAN CHANGES</a:t>
+            </a:r>
+          </a:p>
+        </p:txBody>
+      </p:sp>
+      <p:sp>
+        <p:nvSpPr>
+          <p:cNvPr id="11" name="TextBox 10"/>
+          <p:cNvSpPr txBox="1"/>
+          <p:nvPr/>
+        </p:nvSpPr>
+        <p:spPr>
+          <a:xfrm>
+            <a:off x="5303520" y="3017520"/>
+            <a:ext cx="5029200" cy="365760"/>
+          </a:xfrm>
+          <a:prstGeom prst="rect">
+            <a:avLst/>
+          </a:prstGeom>
+          <a:noFill/>
+        </p:spPr>
+        <p:txBody>
+          <a:bodyPr wrap="none">
+            <a:spAutoFit/>
+          </a:bodyPr>
+          <a:lstStyle/>
+          <a:p>
+            <a:pPr>
+              <a:defRPr sz="1600">
+                <a:solidFill>
+                  <a:srgbClr val="FFFFFF"/>
+                </a:solidFill>
+              </a:defRPr>
+            </a:pPr>
+            <a:r>
+              <a:t>Design approach, choose files to modify</a:t>
+            </a:r>
+          </a:p>
+        </p:txBody>
+      </p:sp>
+      <p:sp>
+        <p:nvSpPr>
+          <p:cNvPr id="12" name="TextBox 11"/>
+          <p:cNvSpPr txBox="1"/>
+          <p:nvPr/>
+        </p:nvSpPr>
+        <p:spPr>
+          <a:xfrm>
+            <a:off x="4114800" y="3429000"/>
+            <a:ext cx="914400" cy="274320"/>
+          </a:xfrm>
+          <a:prstGeom prst="rect">
+            <a:avLst/>
+          </a:prstGeom>
+          <a:noFill/>
+        </p:spPr>
+        <p:txBody>
+          <a:bodyPr wrap="none">
+            <a:spAutoFit/>
+          </a:bodyPr>
+          <a:lstStyle/>
+          <a:p>
+            <a:pPr algn="l">
+              <a:defRPr sz="2000">
+                <a:solidFill>
+                  <a:srgbClr val="00D4AA"/>
+                </a:solidFill>
+              </a:defRPr>
+            </a:pPr>
+            <a:r>
+              <a:t>↓</a:t>
+            </a:r>
+          </a:p>
+        </p:txBody>
+      </p:sp>
+      <p:sp>
+        <p:nvSpPr>
+          <p:cNvPr id="13" name="TextBox 12"/>
+          <p:cNvSpPr txBox="1"/>
+          <p:nvPr/>
+        </p:nvSpPr>
+        <p:spPr>
+          <a:xfrm>
+            <a:off x="2286000" y="3703320"/>
+            <a:ext cx="2743200" cy="365760"/>
+          </a:xfrm>
+          <a:prstGeom prst="rect">
+            <a:avLst/>
+          </a:prstGeom>
+          <a:noFill/>
+        </p:spPr>
+        <p:txBody>
+          <a:bodyPr wrap="none">
+            <a:spAutoFit/>
+          </a:bodyPr>
+          <a:lstStyle/>
+          <a:p>
+            <a:pPr algn="l">
+              <a:defRPr sz="2000" b="1">
+                <a:solidFill>
+                  <a:srgbClr val="00D4AA"/>
+                </a:solidFill>
+              </a:defRPr>
+            </a:pPr>
+            <a:r>
+              <a:t>EDIT FILES</a:t>
+            </a:r>
+          </a:p>
+        </p:txBody>
+      </p:sp>
+      <p:sp>
+        <p:nvSpPr>
+          <p:cNvPr id="14" name="TextBox 13"/>
+          <p:cNvSpPr txBox="1"/>
+          <p:nvPr/>
+        </p:nvSpPr>
+        <p:spPr>
+          <a:xfrm>
+            <a:off x="5303520" y="3703320"/>
+            <a:ext cx="5029200" cy="365760"/>
+          </a:xfrm>
+          <a:prstGeom prst="rect">
+            <a:avLst/>
+          </a:prstGeom>
+          <a:noFill/>
+        </p:spPr>
+        <p:txBody>
+          <a:bodyPr wrap="none">
+            <a:spAutoFit/>
+          </a:bodyPr>
+          <a:lstStyle/>
+          <a:p>
+            <a:pPr>
+              <a:defRPr sz="1600">
+                <a:solidFill>
+                  <a:srgbClr val="FFFFFF"/>
+                </a:solidFill>
+              </a:defRPr>
+            </a:pPr>
+            <a:r>
+              <a:t>Write code, create files, update imports</a:t>
+            </a:r>
+          </a:p>
+        </p:txBody>
+      </p:sp>
+      <p:sp>
+        <p:nvSpPr>
+          <p:cNvPr id="15" name="TextBox 14"/>
+          <p:cNvSpPr txBox="1"/>
+          <p:nvPr/>
+        </p:nvSpPr>
+        <p:spPr>
+          <a:xfrm>
+            <a:off x="4114800" y="4114800"/>
+            <a:ext cx="914400" cy="274320"/>
+          </a:xfrm>
+          <a:prstGeom prst="rect">
+            <a:avLst/>
+          </a:prstGeom>
+          <a:noFill/>
+        </p:spPr>
+        <p:txBody>
+          <a:bodyPr wrap="none">
+            <a:spAutoFit/>
+          </a:bodyPr>
+          <a:lstStyle/>
+          <a:p>
+            <a:pPr algn="l">
+              <a:defRPr sz="2000">
+                <a:solidFill>
+                  <a:srgbClr val="00D4AA"/>
+                </a:solidFill>
+              </a:defRPr>
+            </a:pPr>
+            <a:r>
+              <a:t>↓</a:t>
+            </a:r>
+          </a:p>
+        </p:txBody>
+      </p:sp>
+      <p:sp>
+        <p:nvSpPr>
+          <p:cNvPr id="16" name="TextBox 15"/>
+          <p:cNvSpPr txBox="1"/>
+          <p:nvPr/>
+        </p:nvSpPr>
+        <p:spPr>
+          <a:xfrm>
+            <a:off x="2286000" y="4389120"/>
+            <a:ext cx="2743200" cy="365760"/>
+          </a:xfrm>
+          <a:prstGeom prst="rect">
+            <a:avLst/>
+          </a:prstGeom>
+          <a:noFill/>
+        </p:spPr>
+        <p:txBody>
+          <a:bodyPr wrap="none">
+            <a:spAutoFit/>
+          </a:bodyPr>
+          <a:lstStyle/>
+          <a:p>
+            <a:pPr algn="l">
+              <a:defRPr sz="2000" b="1">
+                <a:solidFill>
+                  <a:srgbClr val="00D4AA"/>
+                </a:solidFill>
+              </a:defRPr>
+            </a:pPr>
+            <a:r>
+              <a:t>RUN &amp; TEST</a:t>
+            </a:r>
+          </a:p>
+        </p:txBody>
+      </p:sp>
+      <p:sp>
+        <p:nvSpPr>
+          <p:cNvPr id="17" name="TextBox 16"/>
+          <p:cNvSpPr txBox="1"/>
+          <p:nvPr/>
+        </p:nvSpPr>
+        <p:spPr>
+          <a:xfrm>
+            <a:off x="5303520" y="4389120"/>
+            <a:ext cx="5029200" cy="365760"/>
+          </a:xfrm>
+          <a:prstGeom prst="rect">
+            <a:avLst/>
+          </a:prstGeom>
+          <a:noFill/>
+        </p:spPr>
+        <p:txBody>
+          <a:bodyPr wrap="none">
+            <a:spAutoFit/>
+          </a:bodyPr>
+          <a:lstStyle/>
+          <a:p>
+            <a:pPr>
+              <a:defRPr sz="1600">
+                <a:solidFill>
+                  <a:srgbClr val="FFFFFF"/>
+                </a:solidFill>
+              </a:defRPr>
+            </a:pPr>
+            <a:r>
+              <a:t>Execute commands, check output</a:t>
+            </a:r>
+          </a:p>
+        </p:txBody>
+      </p:sp>
+      <p:sp>
+        <p:nvSpPr>
+          <p:cNvPr id="18" name="TextBox 17"/>
+          <p:cNvSpPr txBox="1"/>
+          <p:nvPr/>
+        </p:nvSpPr>
+        <p:spPr>
+          <a:xfrm>
+            <a:off x="4114800" y="4800600"/>
+            <a:ext cx="914400" cy="274320"/>
+          </a:xfrm>
+          <a:prstGeom prst="rect">
+            <a:avLst/>
+          </a:prstGeom>
+          <a:noFill/>
+        </p:spPr>
+        <p:txBody>
+          <a:bodyPr wrap="none">
+            <a:spAutoFit/>
+          </a:bodyPr>
+          <a:lstStyle/>
+          <a:p>
+            <a:pPr algn="l">
+              <a:defRPr sz="2000">
+                <a:solidFill>
+                  <a:srgbClr val="00D4AA"/>
+                </a:solidFill>
+              </a:defRPr>
+            </a:pPr>
+            <a:r>
+              <a:t>↓</a:t>
+            </a:r>
+          </a:p>
+        </p:txBody>
+      </p:sp>
+      <p:sp>
+        <p:nvSpPr>
+          <p:cNvPr id="19" name="TextBox 18"/>
+          <p:cNvSpPr txBox="1"/>
+          <p:nvPr/>
+        </p:nvSpPr>
+        <p:spPr>
+          <a:xfrm>
+            <a:off x="2286000" y="5074920"/>
+            <a:ext cx="2743200" cy="365760"/>
+          </a:xfrm>
+          <a:prstGeom prst="rect">
+            <a:avLst/>
+          </a:prstGeom>
+          <a:noFill/>
+        </p:spPr>
+        <p:txBody>
+          <a:bodyPr wrap="none">
+            <a:spAutoFit/>
+          </a:bodyPr>
+          <a:lstStyle/>
+          <a:p>
+            <a:pPr algn="l">
+              <a:defRPr sz="2000" b="1">
+                <a:solidFill>
+                  <a:srgbClr val="00D4AA"/>
+                </a:solidFill>
+              </a:defRPr>
+            </a:pPr>
+            <a:r>
+              <a:t>FIX FAILURES</a:t>
+            </a:r>
+          </a:p>
+        </p:txBody>
+      </p:sp>
+      <p:sp>
+        <p:nvSpPr>
+          <p:cNvPr id="20" name="TextBox 19"/>
+          <p:cNvSpPr txBox="1"/>
+          <p:nvPr/>
+        </p:nvSpPr>
+        <p:spPr>
+          <a:xfrm>
+            <a:off x="5303520" y="5074920"/>
+            <a:ext cx="5029200" cy="365760"/>
+          </a:xfrm>
+          <a:prstGeom prst="rect">
+            <a:avLst/>
+          </a:prstGeom>
+          <a:noFill/>
+        </p:spPr>
+        <p:txBody>
+          <a:bodyPr wrap="none">
+            <a:spAutoFit/>
+          </a:bodyPr>
+          <a:lstStyle/>
+          <a:p>
+            <a:pPr>
+              <a:defRPr sz="1600">
+                <a:solidFill>
+                  <a:srgbClr val="FFFFFF"/>
+                </a:solidFill>
+              </a:defRPr>
+            </a:pPr>
+            <a:r>
+              <a:t>Read errors, diagnose, retry → self-healing loop</a:t>
+            </a:r>
+          </a:p>
+        </p:txBody>
+      </p:sp>
     </p:spTree>
   </p:cSld>
   <p:clrMapOvr>

--- a/slides/Day2_Claude_Code_Fundamentals.pptx
+++ b/slides/Day2_Claude_Code_Fundamentals.pptx
@@ -6878,92 +6878,97 @@
             <a:r>
               <a:t>TIME: 3 min</a:t>
             </a:r>
-          </a:p>
-          <a:p>
-            <a:endParaRPr/>
-          </a:p>
-          <a:p>
+            <a:br/>
+            <a:br/>
             <a:r>
               <a:t>OPEN WITH:</a:t>
             </a:r>
-          </a:p>
-          <a:p>
-            <a:r>
-              <a:t>   Nine objectives today. This might look intimidating, but they build on each other logically. By lunch you'll have five of these checked off.</a:t>
-            </a:r>
-          </a:p>
-          <a:p>
-            <a:endParaRPr/>
-          </a:p>
-          <a:p>
+            <a:br/>
+            <a:r>
+              <a:t>  Six objectives today. They build on each other logically. By lunch you'll have the first four checked off.</a:t>
+            </a:r>
+            <a:br/>
+            <a:br/>
             <a:r>
               <a:t>KEY POINTS:</a:t>
             </a:r>
-          </a:p>
-          <a:p>
-            <a:r>
-              <a:t>   * Objectives one through four are morning content - installation, the core mental model, configuration, and context control</a:t>
-            </a:r>
-          </a:p>
-          <a:p>
-            <a:r>
-              <a:t>   * Objectives five through seven are power user territory - optimization, commands, and security</a:t>
-            </a:r>
-          </a:p>
-          <a:p>
-            <a:r>
-              <a:t>   * The last two objectives are about real workflows - this is where it clicks and becomes part of your daily toolkit</a:t>
-            </a:r>
-          </a:p>
-          <a:p>
-            <a:r>
-              <a:t>   * Every single one of these objectives will be practiced in the labs, not just lectured about</a:t>
-            </a:r>
-          </a:p>
-          <a:p>
-            <a:endParaRPr/>
-          </a:p>
-          <a:p>
+            <a:br/>
+            <a:r>
+              <a:t>  * Objectives 1-2 are the foundation — install the tool, understand the agentic loop</a:t>
+            </a:r>
+            <a:br/>
+            <a:r>
+              <a:t>  * Objectives 3-4 are about control — CLAUDE.md policy and @ mentions for precision</a:t>
+            </a:r>
+            <a:br/>
+            <a:r>
+              <a:t>  * Objectives 5-6 are power user skills — context optimization and slash commands</a:t>
+            </a:r>
+            <a:br/>
+            <a:r>
+              <a:t>  * Every single one of these objectives will be practiced in the labs, not just lectured about</a:t>
+            </a:r>
+            <a:br/>
+            <a:br/>
             <a:r>
               <a:t>ASK THE CLASS:</a:t>
             </a:r>
-          </a:p>
-          <a:p>
-            <a:r>
-              <a:t>   "Quick show of hands - how many of you have used GitHub Copilot or similar autocomplete tools? Keep those hands up if you think Claude Code will be similar. Okay, let's challenge that assumption today."</a:t>
-            </a:r>
-          </a:p>
-          <a:p>
-            <a:r>
-              <a:t>   [PAUSE for 30-60 seconds]</a:t>
-            </a:r>
-          </a:p>
-          <a:p>
-            <a:endParaRPr/>
-          </a:p>
-          <a:p>
+            <a:br/>
+            <a:r>
+              <a:t>  "Quick show of hands — how many of you have used GitHub Copilot or similar autocomplete tools? Keep those hands up if you think Claude Code will be similar. Okay, let's challenge that assumption today."</a:t>
+            </a:r>
+            <a:br/>
+            <a:r>
+              <a:t>  [PAUSE for 30-60 seconds]</a:t>
+            </a:r>
+            <a:br/>
+            <a:br/>
             <a:r>
               <a:t>REAL-WORLD EXAMPLE:</a:t>
             </a:r>
-          </a:p>
-          <a:p>
-            <a:r>
-              <a:t>   A frontend developer in our last cohort had never touched the backend codebase. After this training, she used Claude Code to add three new API endpoints with full test coverage. The backend team approved her PR with zero change requests.</a:t>
-            </a:r>
-          </a:p>
-          <a:p>
-            <a:endParaRPr/>
-          </a:p>
-          <a:p>
+            <a:br/>
+            <a:r>
+              <a:t>  A frontend developer in our last cohort had never touched the backend codebase. After this training, she used Claude Code to add three new API endpoints with full test coverage. The backend team approved her PR with zero change requests.</a:t>
+            </a:r>
+            <a:br/>
+            <a:br/>
             <a:r>
               <a:t>TRANSITION:</a:t>
             </a:r>
-          </a:p>
-          <a:p>
-            <a:r>
-              <a:t>   Here's what you'll actually build today</a:t>
-            </a:r>
-          </a:p>
+            <a:br/>
+            <a:r>
+              <a:t>  Here's what you'll actually build today</a:t>
+            </a:r>
+          </a:p>
+          <a:p>
+            <a:endParaRPr/>
+          </a:p>
+          <a:p/>
+          <a:p/>
+          <a:p>
+            <a:endParaRPr/>
+          </a:p>
+          <a:p/>
+          <a:p/>
+          <a:p/>
+          <a:p/>
+          <a:p/>
+          <a:p>
+            <a:endParaRPr/>
+          </a:p>
+          <a:p/>
+          <a:p/>
+          <a:p/>
+          <a:p>
+            <a:endParaRPr/>
+          </a:p>
+          <a:p/>
+          <a:p/>
+          <a:p>
+            <a:endParaRPr/>
+          </a:p>
+          <a:p/>
+          <a:p/>
         </p:txBody>
       </p:sp>
       <p:sp>

--- a/slides/Day2_Claude_Code_Fundamentals.pptx
+++ b/slides/Day2_Claude_Code_Fundamentals.pptx
@@ -6885,7 +6885,7 @@
             </a:r>
             <a:br/>
             <a:r>
-              <a:t>  Six objectives today. They build on each other logically. By lunch you'll have the first four checked off.</a:t>
+              <a:t>  Six objectives today. They build on each other — by lunch you'll have the first three down, and you'll have built a working app and written your own AI policy file.</a:t>
             </a:r>
             <a:br/>
             <a:br/>
@@ -6894,41 +6894,23 @@
             </a:r>
             <a:br/>
             <a:r>
-              <a:t>  * Objectives 1-2 are the foundation — install the tool, understand the agentic loop</a:t>
+              <a:t>  * Objectives 1-2 are the foundation — install the tool, understand the agentic loop (morning + Lab 2A)</a:t>
             </a:r>
             <a:br/>
             <a:r>
-              <a:t>  * Objectives 3-4 are about control — CLAUDE.md policy and @ mentions for precision</a:t>
+              <a:t>  * Objective 3 is about control — CLAUDE.md as project policy (morning + Lab 2B)</a:t>
             </a:r>
             <a:br/>
             <a:r>
-              <a:t>  * Objectives 5-6 are power user skills — context optimization and slash commands</a:t>
+              <a:t>  * Objectives 4-5 are precision skills — @ mentions and context optimization (afternoon + Lab 2C)</a:t>
             </a:r>
             <a:br/>
             <a:r>
-              <a:t>  * Every single one of these objectives will be practiced in the labs, not just lectured about</a:t>
+              <a:t>  * Objective 6 ties it together — commands, Git, shipping (afternoon + Lab 2D)</a:t>
             </a:r>
             <a:br/>
-            <a:br/>
-            <a:r>
-              <a:t>ASK THE CLASS:</a:t>
-            </a:r>
-            <a:br/>
-            <a:r>
-              <a:t>  "Quick show of hands — how many of you have used GitHub Copilot or similar autocomplete tools? Keep those hands up if you think Claude Code will be similar. Okay, let's challenge that assumption today."</a:t>
-            </a:r>
-            <a:br/>
-            <a:r>
-              <a:t>  [PAUSE for 30-60 seconds]</a:t>
-            </a:r>
-            <a:br/>
-            <a:br/>
-            <a:r>
-              <a:t>REAL-WORLD EXAMPLE:</a:t>
-            </a:r>
-            <a:br/>
-            <a:r>
-              <a:t>  A frontend developer in our last cohort had never touched the backend codebase. After this training, she used Claude Code to add three new API endpoints with full test coverage. The backend team approved her PR with zero change requests.</a:t>
+            <a:r>
+              <a:t>  * Every objective is practiced hands-on in the labs</a:t>
             </a:r>
             <a:br/>
             <a:br/>
